--- a/20242/Part 1-Regression/1-1-simple linear regression.pptx
+++ b/20242/Part 1-Regression/1-1-simple linear regression.pptx
@@ -6,19 +6,26 @@
   </p:sldMasterIdLst>
   <p:sldIdLst>
     <p:sldId id="455" r:id="rId5"/>
-    <p:sldId id="257" r:id="rId6"/>
-    <p:sldId id="456" r:id="rId7"/>
-    <p:sldId id="457" r:id="rId8"/>
-    <p:sldId id="458" r:id="rId9"/>
-    <p:sldId id="459" r:id="rId10"/>
-    <p:sldId id="460" r:id="rId11"/>
-    <p:sldId id="461" r:id="rId12"/>
-    <p:sldId id="462" r:id="rId13"/>
-    <p:sldId id="463" r:id="rId14"/>
-    <p:sldId id="465" r:id="rId15"/>
-    <p:sldId id="464" r:id="rId16"/>
-    <p:sldId id="466" r:id="rId17"/>
-    <p:sldId id="476" r:id="rId18"/>
+    <p:sldId id="478" r:id="rId6"/>
+    <p:sldId id="257" r:id="rId7"/>
+    <p:sldId id="477" r:id="rId8"/>
+    <p:sldId id="457" r:id="rId9"/>
+    <p:sldId id="458" r:id="rId10"/>
+    <p:sldId id="459" r:id="rId11"/>
+    <p:sldId id="479" r:id="rId12"/>
+    <p:sldId id="480" r:id="rId13"/>
+    <p:sldId id="484" r:id="rId14"/>
+    <p:sldId id="481" r:id="rId15"/>
+    <p:sldId id="461" r:id="rId16"/>
+    <p:sldId id="482" r:id="rId17"/>
+    <p:sldId id="483" r:id="rId18"/>
+    <p:sldId id="462" r:id="rId19"/>
+    <p:sldId id="463" r:id="rId20"/>
+    <p:sldId id="465" r:id="rId21"/>
+    <p:sldId id="464" r:id="rId22"/>
+    <p:sldId id="466" r:id="rId23"/>
+    <p:sldId id="476" r:id="rId24"/>
+    <p:sldId id="456" r:id="rId25"/>
   </p:sldIdLst>
   <p:sldSz cx="12192000" cy="6858000"/>
   <p:notesSz cx="6858000" cy="9144000"/>
@@ -128,7 +135,7 @@
 <file path=ppt/revisionInfo.xml><?xml version="1.0" encoding="utf-8"?>
 <p1510:revInfo xmlns:a="http://schemas.openxmlformats.org/drawingml/2006/main" xmlns:r="http://schemas.openxmlformats.org/officeDocument/2006/relationships" xmlns:p1510="http://schemas.microsoft.com/office/powerpoint/2015/10/main">
   <p1510:revLst>
-    <p1510:client id="{6B515210-E3E2-4B4B-BC10-968DB84AFC83}" v="63" dt="2025-03-12T02:55:21.823"/>
+    <p1510:client id="{161A7FAA-B398-4429-9FC2-656B0895AF0F}" v="51" dt="2025-07-16T08:30:59.062"/>
   </p1510:revLst>
 </p1510:revInfo>
 </file>
@@ -264,46 +271,6 @@
           <pc:docMk/>
           <pc:sldMk cId="1162554463" sldId="257"/>
         </pc:sldMkLst>
-        <pc:spChg chg="mod ord">
-          <ac:chgData name="Mohammed Fasha" userId="cc64f42d-a1a6-4f08-b97b-0c37f877119f" providerId="ADAL" clId="{6B515210-E3E2-4B4B-BC10-968DB84AFC83}" dt="2025-03-12T01:38:45.883" v="144" actId="313"/>
-          <ac:spMkLst>
-            <pc:docMk/>
-            <pc:sldMk cId="1162554463" sldId="257"/>
-            <ac:spMk id="2" creationId="{8BE518FD-B81F-466C-AD85-5DDC967653B4}"/>
-          </ac:spMkLst>
-        </pc:spChg>
-        <pc:spChg chg="mod ord">
-          <ac:chgData name="Mohammed Fasha" userId="cc64f42d-a1a6-4f08-b97b-0c37f877119f" providerId="ADAL" clId="{6B515210-E3E2-4B4B-BC10-968DB84AFC83}" dt="2025-03-12T02:44:15.848" v="816" actId="27636"/>
-          <ac:spMkLst>
-            <pc:docMk/>
-            <pc:sldMk cId="1162554463" sldId="257"/>
-            <ac:spMk id="3" creationId="{1A647627-019E-4599-BFE9-83A7DEA04B6D}"/>
-          </ac:spMkLst>
-        </pc:spChg>
-        <pc:spChg chg="add mod">
-          <ac:chgData name="Mohammed Fasha" userId="cc64f42d-a1a6-4f08-b97b-0c37f877119f" providerId="ADAL" clId="{6B515210-E3E2-4B4B-BC10-968DB84AFC83}" dt="2025-03-12T02:44:49.456" v="830" actId="1076"/>
-          <ac:spMkLst>
-            <pc:docMk/>
-            <pc:sldMk cId="1162554463" sldId="257"/>
-            <ac:spMk id="4" creationId="{929A5FA8-1320-61F3-BC79-488C9BA93D9F}"/>
-          </ac:spMkLst>
-        </pc:spChg>
-        <pc:spChg chg="add del mod">
-          <ac:chgData name="Mohammed Fasha" userId="cc64f42d-a1a6-4f08-b97b-0c37f877119f" providerId="ADAL" clId="{6B515210-E3E2-4B4B-BC10-968DB84AFC83}" dt="2025-03-12T02:44:50.431" v="832"/>
-          <ac:spMkLst>
-            <pc:docMk/>
-            <pc:sldMk cId="1162554463" sldId="257"/>
-            <ac:spMk id="7" creationId="{2F541B70-ACC9-F5BB-D789-C8D6E428E9E7}"/>
-          </ac:spMkLst>
-        </pc:spChg>
-        <pc:picChg chg="add mod">
-          <ac:chgData name="Mohammed Fasha" userId="cc64f42d-a1a6-4f08-b97b-0c37f877119f" providerId="ADAL" clId="{6B515210-E3E2-4B4B-BC10-968DB84AFC83}" dt="2025-03-12T02:42:26.252" v="771" actId="1076"/>
-          <ac:picMkLst>
-            <pc:docMk/>
-            <pc:sldMk cId="1162554463" sldId="257"/>
-            <ac:picMk id="5" creationId="{47A753CC-D081-A128-3391-BC871C607F6E}"/>
-          </ac:picMkLst>
-        </pc:picChg>
       </pc:sldChg>
       <pc:sldChg chg="del">
         <pc:chgData name="Mohammed Fasha" userId="cc64f42d-a1a6-4f08-b97b-0c37f877119f" providerId="ADAL" clId="{6B515210-E3E2-4B4B-BC10-968DB84AFC83}" dt="2025-03-12T01:34:08.372" v="83" actId="2696"/>
@@ -465,38 +432,6 @@
           <pc:docMk/>
           <pc:sldMk cId="1489447582" sldId="455"/>
         </pc:sldMkLst>
-        <pc:spChg chg="del">
-          <ac:chgData name="Mohammed Fasha" userId="cc64f42d-a1a6-4f08-b97b-0c37f877119f" providerId="ADAL" clId="{6B515210-E3E2-4B4B-BC10-968DB84AFC83}" dt="2025-03-12T01:45:07.130" v="229" actId="478"/>
-          <ac:spMkLst>
-            <pc:docMk/>
-            <pc:sldMk cId="1489447582" sldId="455"/>
-            <ac:spMk id="4" creationId="{10433FF8-85E9-4FB4-B2A1-CB5361CA94B2}"/>
-          </ac:spMkLst>
-        </pc:spChg>
-        <pc:spChg chg="mod">
-          <ac:chgData name="Mohammed Fasha" userId="cc64f42d-a1a6-4f08-b97b-0c37f877119f" providerId="ADAL" clId="{6B515210-E3E2-4B4B-BC10-968DB84AFC83}" dt="2025-03-12T01:45:59.834" v="264" actId="1076"/>
-          <ac:spMkLst>
-            <pc:docMk/>
-            <pc:sldMk cId="1489447582" sldId="455"/>
-            <ac:spMk id="8" creationId="{107CF054-390C-DCFC-C9A6-9E95C859A175}"/>
-          </ac:spMkLst>
-        </pc:spChg>
-        <pc:spChg chg="mod">
-          <ac:chgData name="Mohammed Fasha" userId="cc64f42d-a1a6-4f08-b97b-0c37f877119f" providerId="ADAL" clId="{6B515210-E3E2-4B4B-BC10-968DB84AFC83}" dt="2025-03-12T01:46:13.068" v="267" actId="1076"/>
-          <ac:spMkLst>
-            <pc:docMk/>
-            <pc:sldMk cId="1489447582" sldId="455"/>
-            <ac:spMk id="9" creationId="{F599965F-D781-62F6-30A4-33D89AC89080}"/>
-          </ac:spMkLst>
-        </pc:spChg>
-        <pc:picChg chg="mod">
-          <ac:chgData name="Mohammed Fasha" userId="cc64f42d-a1a6-4f08-b97b-0c37f877119f" providerId="ADAL" clId="{6B515210-E3E2-4B4B-BC10-968DB84AFC83}" dt="2025-03-12T01:46:21.043" v="268" actId="1076"/>
-          <ac:picMkLst>
-            <pc:docMk/>
-            <pc:sldMk cId="1489447582" sldId="455"/>
-            <ac:picMk id="6" creationId="{87387D1D-1AA9-EA47-F9E0-B5509D9C1DE4}"/>
-          </ac:picMkLst>
-        </pc:picChg>
       </pc:sldChg>
       <pc:sldChg chg="addSp delSp modSp new mod chgLayout">
         <pc:chgData name="Mohammed Fasha" userId="cc64f42d-a1a6-4f08-b97b-0c37f877119f" providerId="ADAL" clId="{6B515210-E3E2-4B4B-BC10-968DB84AFC83}" dt="2025-03-12T03:08:53.710" v="1713" actId="20577"/>
@@ -504,70 +439,6 @@
           <pc:docMk/>
           <pc:sldMk cId="3910887702" sldId="456"/>
         </pc:sldMkLst>
-        <pc:spChg chg="mod ord">
-          <ac:chgData name="Mohammed Fasha" userId="cc64f42d-a1a6-4f08-b97b-0c37f877119f" providerId="ADAL" clId="{6B515210-E3E2-4B4B-BC10-968DB84AFC83}" dt="2025-03-12T01:38:50.468" v="145" actId="700"/>
-          <ac:spMkLst>
-            <pc:docMk/>
-            <pc:sldMk cId="3910887702" sldId="456"/>
-            <ac:spMk id="2" creationId="{F842C2E3-446E-3595-CA99-8E95BA7F2C23}"/>
-          </ac:spMkLst>
-        </pc:spChg>
-        <pc:spChg chg="mod ord">
-          <ac:chgData name="Mohammed Fasha" userId="cc64f42d-a1a6-4f08-b97b-0c37f877119f" providerId="ADAL" clId="{6B515210-E3E2-4B4B-BC10-968DB84AFC83}" dt="2025-03-12T03:08:53.710" v="1713" actId="20577"/>
-          <ac:spMkLst>
-            <pc:docMk/>
-            <pc:sldMk cId="3910887702" sldId="456"/>
-            <ac:spMk id="3" creationId="{102BC694-8487-C007-C9E9-C4570B4B8FFD}"/>
-          </ac:spMkLst>
-        </pc:spChg>
-        <pc:spChg chg="add del mod">
-          <ac:chgData name="Mohammed Fasha" userId="cc64f42d-a1a6-4f08-b97b-0c37f877119f" providerId="ADAL" clId="{6B515210-E3E2-4B4B-BC10-968DB84AFC83}" dt="2025-03-12T02:55:26.822" v="991" actId="21"/>
-          <ac:spMkLst>
-            <pc:docMk/>
-            <pc:sldMk cId="3910887702" sldId="456"/>
-            <ac:spMk id="4" creationId="{790F80D7-2DAD-F958-CA79-854A955502E9}"/>
-          </ac:spMkLst>
-        </pc:spChg>
-        <pc:spChg chg="add del mod">
-          <ac:chgData name="Mohammed Fasha" userId="cc64f42d-a1a6-4f08-b97b-0c37f877119f" providerId="ADAL" clId="{6B515210-E3E2-4B4B-BC10-968DB84AFC83}" dt="2025-03-12T03:05:51.373" v="1496" actId="21"/>
-          <ac:spMkLst>
-            <pc:docMk/>
-            <pc:sldMk cId="3910887702" sldId="456"/>
-            <ac:spMk id="6" creationId="{E4D6B932-489B-8982-6DA0-AE4A5CC0366F}"/>
-          </ac:spMkLst>
-        </pc:spChg>
-        <pc:picChg chg="add del mod">
-          <ac:chgData name="Mohammed Fasha" userId="cc64f42d-a1a6-4f08-b97b-0c37f877119f" providerId="ADAL" clId="{6B515210-E3E2-4B4B-BC10-968DB84AFC83}" dt="2025-03-12T01:36:12.723" v="124" actId="478"/>
-          <ac:picMkLst>
-            <pc:docMk/>
-            <pc:sldMk cId="3910887702" sldId="456"/>
-            <ac:picMk id="5" creationId="{CD5AEB30-3A33-479F-4316-4004D48CD8A4}"/>
-          </ac:picMkLst>
-        </pc:picChg>
-        <pc:picChg chg="add mod ord">
-          <ac:chgData name="Mohammed Fasha" userId="cc64f42d-a1a6-4f08-b97b-0c37f877119f" providerId="ADAL" clId="{6B515210-E3E2-4B4B-BC10-968DB84AFC83}" dt="2025-03-12T02:45:00.767" v="834" actId="167"/>
-          <ac:picMkLst>
-            <pc:docMk/>
-            <pc:sldMk cId="3910887702" sldId="456"/>
-            <ac:picMk id="7" creationId="{A38D0E97-EAFB-C1A1-50A4-D148BD794323}"/>
-          </ac:picMkLst>
-        </pc:picChg>
-        <pc:picChg chg="add mod">
-          <ac:chgData name="Mohammed Fasha" userId="cc64f42d-a1a6-4f08-b97b-0c37f877119f" providerId="ADAL" clId="{6B515210-E3E2-4B4B-BC10-968DB84AFC83}" dt="2025-03-12T02:55:19.690" v="989" actId="1076"/>
-          <ac:picMkLst>
-            <pc:docMk/>
-            <pc:sldMk cId="3910887702" sldId="456"/>
-            <ac:picMk id="13" creationId="{923AB4FC-8803-B130-E7FF-D6F9B65D8759}"/>
-          </ac:picMkLst>
-        </pc:picChg>
-        <pc:picChg chg="add del mod">
-          <ac:chgData name="Mohammed Fasha" userId="cc64f42d-a1a6-4f08-b97b-0c37f877119f" providerId="ADAL" clId="{6B515210-E3E2-4B4B-BC10-968DB84AFC83}" dt="2025-03-12T01:35:54.419" v="118" actId="478"/>
-          <ac:picMkLst>
-            <pc:docMk/>
-            <pc:sldMk cId="3910887702" sldId="456"/>
-            <ac:picMk id="1026" creationId="{69B09561-D9D8-E70A-D35C-FDB3C9E6FEE0}"/>
-          </ac:picMkLst>
-        </pc:picChg>
       </pc:sldChg>
       <pc:sldChg chg="add del">
         <pc:chgData name="Mohammed Fasha" userId="cc64f42d-a1a6-4f08-b97b-0c37f877119f" providerId="ADAL" clId="{6B515210-E3E2-4B4B-BC10-968DB84AFC83}" dt="2025-03-12T01:38:38.172" v="141" actId="2696"/>
@@ -582,38 +453,6 @@
           <pc:docMk/>
           <pc:sldMk cId="3639736080" sldId="457"/>
         </pc:sldMkLst>
-        <pc:spChg chg="mod">
-          <ac:chgData name="Mohammed Fasha" userId="cc64f42d-a1a6-4f08-b97b-0c37f877119f" providerId="ADAL" clId="{6B515210-E3E2-4B4B-BC10-968DB84AFC83}" dt="2025-03-12T01:50:27.933" v="362" actId="5793"/>
-          <ac:spMkLst>
-            <pc:docMk/>
-            <pc:sldMk cId="3639736080" sldId="457"/>
-            <ac:spMk id="2" creationId="{5A741632-F5AA-89F8-92B0-716C60C6B299}"/>
-          </ac:spMkLst>
-        </pc:spChg>
-        <pc:spChg chg="mod">
-          <ac:chgData name="Mohammed Fasha" userId="cc64f42d-a1a6-4f08-b97b-0c37f877119f" providerId="ADAL" clId="{6B515210-E3E2-4B4B-BC10-968DB84AFC83}" dt="2025-03-12T01:43:41.066" v="210" actId="27636"/>
-          <ac:spMkLst>
-            <pc:docMk/>
-            <pc:sldMk cId="3639736080" sldId="457"/>
-            <ac:spMk id="3" creationId="{100EB5BB-BBC7-B31E-D00E-0CEEBA8A5671}"/>
-          </ac:spMkLst>
-        </pc:spChg>
-        <pc:picChg chg="add del">
-          <ac:chgData name="Mohammed Fasha" userId="cc64f42d-a1a6-4f08-b97b-0c37f877119f" providerId="ADAL" clId="{6B515210-E3E2-4B4B-BC10-968DB84AFC83}" dt="2025-03-12T01:42:54.908" v="201" actId="22"/>
-          <ac:picMkLst>
-            <pc:docMk/>
-            <pc:sldMk cId="3639736080" sldId="457"/>
-            <ac:picMk id="5" creationId="{E603677E-11DF-D753-37BA-C2E505456799}"/>
-          </ac:picMkLst>
-        </pc:picChg>
-        <pc:picChg chg="add mod">
-          <ac:chgData name="Mohammed Fasha" userId="cc64f42d-a1a6-4f08-b97b-0c37f877119f" providerId="ADAL" clId="{6B515210-E3E2-4B4B-BC10-968DB84AFC83}" dt="2025-03-12T02:46:20.092" v="837" actId="14100"/>
-          <ac:picMkLst>
-            <pc:docMk/>
-            <pc:sldMk cId="3639736080" sldId="457"/>
-            <ac:picMk id="7" creationId="{82D86F0E-0628-3880-4CDD-0284B92DC94E}"/>
-          </ac:picMkLst>
-        </pc:picChg>
       </pc:sldChg>
       <pc:sldChg chg="addSp modSp add mod">
         <pc:chgData name="Mohammed Fasha" userId="cc64f42d-a1a6-4f08-b97b-0c37f877119f" providerId="ADAL" clId="{6B515210-E3E2-4B4B-BC10-968DB84AFC83}" dt="2025-03-12T01:50:16.041" v="361" actId="27636"/>
@@ -621,30 +460,6 @@
           <pc:docMk/>
           <pc:sldMk cId="2042404279" sldId="458"/>
         </pc:sldMkLst>
-        <pc:spChg chg="mod">
-          <ac:chgData name="Mohammed Fasha" userId="cc64f42d-a1a6-4f08-b97b-0c37f877119f" providerId="ADAL" clId="{6B515210-E3E2-4B4B-BC10-968DB84AFC83}" dt="2025-03-12T01:50:16.041" v="361" actId="27636"/>
-          <ac:spMkLst>
-            <pc:docMk/>
-            <pc:sldMk cId="2042404279" sldId="458"/>
-            <ac:spMk id="2" creationId="{AFD55279-926D-56F4-16C1-40E544073600}"/>
-          </ac:spMkLst>
-        </pc:spChg>
-        <pc:spChg chg="mod">
-          <ac:chgData name="Mohammed Fasha" userId="cc64f42d-a1a6-4f08-b97b-0c37f877119f" providerId="ADAL" clId="{6B515210-E3E2-4B4B-BC10-968DB84AFC83}" dt="2025-03-12T01:50:09.043" v="355" actId="21"/>
-          <ac:spMkLst>
-            <pc:docMk/>
-            <pc:sldMk cId="2042404279" sldId="458"/>
-            <ac:spMk id="3" creationId="{1B18397A-8235-FC5E-C59A-91BD2E6824E0}"/>
-          </ac:spMkLst>
-        </pc:spChg>
-        <pc:picChg chg="add mod">
-          <ac:chgData name="Mohammed Fasha" userId="cc64f42d-a1a6-4f08-b97b-0c37f877119f" providerId="ADAL" clId="{6B515210-E3E2-4B4B-BC10-968DB84AFC83}" dt="2025-03-12T01:50:13.599" v="359" actId="1076"/>
-          <ac:picMkLst>
-            <pc:docMk/>
-            <pc:sldMk cId="2042404279" sldId="458"/>
-            <ac:picMk id="5" creationId="{D78EEB53-EDB0-9883-EF22-7ECFE0832215}"/>
-          </ac:picMkLst>
-        </pc:picChg>
       </pc:sldChg>
       <pc:sldChg chg="add del">
         <pc:chgData name="Mohammed Fasha" userId="cc64f42d-a1a6-4f08-b97b-0c37f877119f" providerId="ADAL" clId="{6B515210-E3E2-4B4B-BC10-968DB84AFC83}" dt="2025-03-12T01:38:38.172" v="141" actId="2696"/>
@@ -666,62 +481,6 @@
           <pc:docMk/>
           <pc:sldMk cId="2881282849" sldId="459"/>
         </pc:sldMkLst>
-        <pc:spChg chg="mod">
-          <ac:chgData name="Mohammed Fasha" userId="cc64f42d-a1a6-4f08-b97b-0c37f877119f" providerId="ADAL" clId="{6B515210-E3E2-4B4B-BC10-968DB84AFC83}" dt="2025-03-12T03:00:53.810" v="1066" actId="21"/>
-          <ac:spMkLst>
-            <pc:docMk/>
-            <pc:sldMk cId="2881282849" sldId="459"/>
-            <ac:spMk id="2" creationId="{E892612F-1544-2D60-DC38-ECFBC8778E6E}"/>
-          </ac:spMkLst>
-        </pc:spChg>
-        <pc:spChg chg="mod">
-          <ac:chgData name="Mohammed Fasha" userId="cc64f42d-a1a6-4f08-b97b-0c37f877119f" providerId="ADAL" clId="{6B515210-E3E2-4B4B-BC10-968DB84AFC83}" dt="2025-03-12T02:46:52.838" v="849" actId="20577"/>
-          <ac:spMkLst>
-            <pc:docMk/>
-            <pc:sldMk cId="2881282849" sldId="459"/>
-            <ac:spMk id="3" creationId="{725980BE-973B-2E05-6334-7722DF93378D}"/>
-          </ac:spMkLst>
-        </pc:spChg>
-        <pc:spChg chg="add del mod">
-          <ac:chgData name="Mohammed Fasha" userId="cc64f42d-a1a6-4f08-b97b-0c37f877119f" providerId="ADAL" clId="{6B515210-E3E2-4B4B-BC10-968DB84AFC83}" dt="2025-03-12T02:52:39.982" v="928" actId="478"/>
-          <ac:spMkLst>
-            <pc:docMk/>
-            <pc:sldMk cId="2881282849" sldId="459"/>
-            <ac:spMk id="7" creationId="{5D60827E-070E-306C-4151-F38999DD74A2}"/>
-          </ac:spMkLst>
-        </pc:spChg>
-        <pc:spChg chg="add mod">
-          <ac:chgData name="Mohammed Fasha" userId="cc64f42d-a1a6-4f08-b97b-0c37f877119f" providerId="ADAL" clId="{6B515210-E3E2-4B4B-BC10-968DB84AFC83}" dt="2025-03-12T02:53:18.475" v="980" actId="6549"/>
-          <ac:spMkLst>
-            <pc:docMk/>
-            <pc:sldMk cId="2881282849" sldId="459"/>
-            <ac:spMk id="10" creationId="{997C4077-274B-FAF4-67DA-B0DEA55B5FEA}"/>
-          </ac:spMkLst>
-        </pc:spChg>
-        <pc:picChg chg="add del mod">
-          <ac:chgData name="Mohammed Fasha" userId="cc64f42d-a1a6-4f08-b97b-0c37f877119f" providerId="ADAL" clId="{6B515210-E3E2-4B4B-BC10-968DB84AFC83}" dt="2025-03-12T02:47:23.105" v="855" actId="21"/>
-          <ac:picMkLst>
-            <pc:docMk/>
-            <pc:sldMk cId="2881282849" sldId="459"/>
-            <ac:picMk id="5" creationId="{ED72E220-66E3-C895-AA2B-7821BAB0B80F}"/>
-          </ac:picMkLst>
-        </pc:picChg>
-        <pc:picChg chg="add mod">
-          <ac:chgData name="Mohammed Fasha" userId="cc64f42d-a1a6-4f08-b97b-0c37f877119f" providerId="ADAL" clId="{6B515210-E3E2-4B4B-BC10-968DB84AFC83}" dt="2025-03-12T02:50:01.269" v="883" actId="14100"/>
-          <ac:picMkLst>
-            <pc:docMk/>
-            <pc:sldMk cId="2881282849" sldId="459"/>
-            <ac:picMk id="8" creationId="{576B1216-E911-2753-B592-C77DC7E9A789}"/>
-          </ac:picMkLst>
-        </pc:picChg>
-        <pc:picChg chg="add del mod">
-          <ac:chgData name="Mohammed Fasha" userId="cc64f42d-a1a6-4f08-b97b-0c37f877119f" providerId="ADAL" clId="{6B515210-E3E2-4B4B-BC10-968DB84AFC83}" dt="2025-03-12T02:51:10.046" v="908" actId="21"/>
-          <ac:picMkLst>
-            <pc:docMk/>
-            <pc:sldMk cId="2881282849" sldId="459"/>
-            <ac:picMk id="9" creationId="{923AB4FC-8803-B130-E7FF-D6F9B65D8759}"/>
-          </ac:picMkLst>
-        </pc:picChg>
       </pc:sldChg>
       <pc:sldChg chg="del">
         <pc:chgData name="Mohammed Fasha" userId="cc64f42d-a1a6-4f08-b97b-0c37f877119f" providerId="ADAL" clId="{6B515210-E3E2-4B4B-BC10-968DB84AFC83}" dt="2025-03-12T01:34:08.372" v="83" actId="2696"/>
@@ -736,70 +495,6 @@
           <pc:docMk/>
           <pc:sldMk cId="945325653" sldId="460"/>
         </pc:sldMkLst>
-        <pc:spChg chg="mod">
-          <ac:chgData name="Mohammed Fasha" userId="cc64f42d-a1a6-4f08-b97b-0c37f877119f" providerId="ADAL" clId="{6B515210-E3E2-4B4B-BC10-968DB84AFC83}" dt="2025-03-12T02:58:39.819" v="995" actId="27636"/>
-          <ac:spMkLst>
-            <pc:docMk/>
-            <pc:sldMk cId="945325653" sldId="460"/>
-            <ac:spMk id="2" creationId="{060D3937-6EEB-C58E-5079-6319AEE9388B}"/>
-          </ac:spMkLst>
-        </pc:spChg>
-        <pc:spChg chg="mod">
-          <ac:chgData name="Mohammed Fasha" userId="cc64f42d-a1a6-4f08-b97b-0c37f877119f" providerId="ADAL" clId="{6B515210-E3E2-4B4B-BC10-968DB84AFC83}" dt="2025-03-12T01:56:54.750" v="374" actId="6549"/>
-          <ac:spMkLst>
-            <pc:docMk/>
-            <pc:sldMk cId="945325653" sldId="460"/>
-            <ac:spMk id="3" creationId="{8591A6E6-7423-A358-3B1F-7BE149F2FB41}"/>
-          </ac:spMkLst>
-        </pc:spChg>
-        <pc:picChg chg="add del mod">
-          <ac:chgData name="Mohammed Fasha" userId="cc64f42d-a1a6-4f08-b97b-0c37f877119f" providerId="ADAL" clId="{6B515210-E3E2-4B4B-BC10-968DB84AFC83}" dt="2025-03-12T02:47:14.075" v="850" actId="21"/>
-          <ac:picMkLst>
-            <pc:docMk/>
-            <pc:sldMk cId="945325653" sldId="460"/>
-            <ac:picMk id="5" creationId="{576B1216-E911-2753-B592-C77DC7E9A789}"/>
-          </ac:picMkLst>
-        </pc:picChg>
-        <pc:picChg chg="add del mod">
-          <ac:chgData name="Mohammed Fasha" userId="cc64f42d-a1a6-4f08-b97b-0c37f877119f" providerId="ADAL" clId="{6B515210-E3E2-4B4B-BC10-968DB84AFC83}" dt="2025-03-12T02:50:23.741" v="903" actId="21"/>
-          <ac:picMkLst>
-            <pc:docMk/>
-            <pc:sldMk cId="945325653" sldId="460"/>
-            <ac:picMk id="7" creationId="{923AB4FC-8803-B130-E7FF-D6F9B65D8759}"/>
-          </ac:picMkLst>
-        </pc:picChg>
-        <pc:picChg chg="add del mod">
-          <ac:chgData name="Mohammed Fasha" userId="cc64f42d-a1a6-4f08-b97b-0c37f877119f" providerId="ADAL" clId="{6B515210-E3E2-4B4B-BC10-968DB84AFC83}" dt="2025-03-12T02:03:09.610" v="434" actId="478"/>
-          <ac:picMkLst>
-            <pc:docMk/>
-            <pc:sldMk cId="945325653" sldId="460"/>
-            <ac:picMk id="9" creationId="{78273BF9-7D87-BF4D-6F3F-B049B62AAF43}"/>
-          </ac:picMkLst>
-        </pc:picChg>
-        <pc:picChg chg="add mod">
-          <ac:chgData name="Mohammed Fasha" userId="cc64f42d-a1a6-4f08-b97b-0c37f877119f" providerId="ADAL" clId="{6B515210-E3E2-4B4B-BC10-968DB84AFC83}" dt="2025-03-12T02:50:06.230" v="901" actId="1076"/>
-          <ac:picMkLst>
-            <pc:docMk/>
-            <pc:sldMk cId="945325653" sldId="460"/>
-            <ac:picMk id="11" creationId="{F0209368-313D-4CAF-FC38-B592D2490446}"/>
-          </ac:picMkLst>
-        </pc:picChg>
-        <pc:picChg chg="add mod">
-          <ac:chgData name="Mohammed Fasha" userId="cc64f42d-a1a6-4f08-b97b-0c37f877119f" providerId="ADAL" clId="{6B515210-E3E2-4B4B-BC10-968DB84AFC83}" dt="2025-03-12T02:50:39.131" v="906" actId="1076"/>
-          <ac:picMkLst>
-            <pc:docMk/>
-            <pc:sldMk cId="945325653" sldId="460"/>
-            <ac:picMk id="12" creationId="{ED72E220-66E3-C895-AA2B-7821BAB0B80F}"/>
-          </ac:picMkLst>
-        </pc:picChg>
-        <pc:picChg chg="add del mod">
-          <ac:chgData name="Mohammed Fasha" userId="cc64f42d-a1a6-4f08-b97b-0c37f877119f" providerId="ADAL" clId="{6B515210-E3E2-4B4B-BC10-968DB84AFC83}" dt="2025-03-12T02:58:23.186" v="993" actId="21"/>
-          <ac:picMkLst>
-            <pc:docMk/>
-            <pc:sldMk cId="945325653" sldId="460"/>
-            <ac:picMk id="13" creationId="{923AB4FC-8803-B130-E7FF-D6F9B65D8759}"/>
-          </ac:picMkLst>
-        </pc:picChg>
       </pc:sldChg>
       <pc:sldChg chg="add del">
         <pc:chgData name="Mohammed Fasha" userId="cc64f42d-a1a6-4f08-b97b-0c37f877119f" providerId="ADAL" clId="{6B515210-E3E2-4B4B-BC10-968DB84AFC83}" dt="2025-03-12T01:38:38.172" v="141" actId="2696"/>
@@ -821,86 +516,6 @@
           <pc:docMk/>
           <pc:sldMk cId="2248227231" sldId="461"/>
         </pc:sldMkLst>
-        <pc:spChg chg="del">
-          <ac:chgData name="Mohammed Fasha" userId="cc64f42d-a1a6-4f08-b97b-0c37f877119f" providerId="ADAL" clId="{6B515210-E3E2-4B4B-BC10-968DB84AFC83}" dt="2025-03-12T02:05:50.927" v="442" actId="22"/>
-          <ac:spMkLst>
-            <pc:docMk/>
-            <pc:sldMk cId="2248227231" sldId="461"/>
-            <ac:spMk id="2" creationId="{10890944-B610-209B-0E11-A0F93DFD9068}"/>
-          </ac:spMkLst>
-        </pc:spChg>
-        <pc:spChg chg="mod">
-          <ac:chgData name="Mohammed Fasha" userId="cc64f42d-a1a6-4f08-b97b-0c37f877119f" providerId="ADAL" clId="{6B515210-E3E2-4B4B-BC10-968DB84AFC83}" dt="2025-03-12T02:04:59.997" v="441" actId="6549"/>
-          <ac:spMkLst>
-            <pc:docMk/>
-            <pc:sldMk cId="2248227231" sldId="461"/>
-            <ac:spMk id="3" creationId="{7962BA90-F130-E048-0E94-9108E2EC86CE}"/>
-          </ac:spMkLst>
-        </pc:spChg>
-        <pc:spChg chg="add del mod">
-          <ac:chgData name="Mohammed Fasha" userId="cc64f42d-a1a6-4f08-b97b-0c37f877119f" providerId="ADAL" clId="{6B515210-E3E2-4B4B-BC10-968DB84AFC83}" dt="2025-03-12T02:06:08.829" v="446" actId="22"/>
-          <ac:spMkLst>
-            <pc:docMk/>
-            <pc:sldMk cId="2248227231" sldId="461"/>
-            <ac:spMk id="7" creationId="{EA4A04A6-6C72-DE07-060C-95DA857F4332}"/>
-          </ac:spMkLst>
-        </pc:spChg>
-        <pc:spChg chg="add del mod">
-          <ac:chgData name="Mohammed Fasha" userId="cc64f42d-a1a6-4f08-b97b-0c37f877119f" providerId="ADAL" clId="{6B515210-E3E2-4B4B-BC10-968DB84AFC83}" dt="2025-03-12T02:08:54.957" v="499"/>
-          <ac:spMkLst>
-            <pc:docMk/>
-            <pc:sldMk cId="2248227231" sldId="461"/>
-            <ac:spMk id="13" creationId="{9F28970A-8FA5-95D6-AC59-92F3991E4E8C}"/>
-          </ac:spMkLst>
-        </pc:spChg>
-        <pc:spChg chg="add del mod">
-          <ac:chgData name="Mohammed Fasha" userId="cc64f42d-a1a6-4f08-b97b-0c37f877119f" providerId="ADAL" clId="{6B515210-E3E2-4B4B-BC10-968DB84AFC83}" dt="2025-03-12T02:08:54.953" v="497" actId="21"/>
-          <ac:spMkLst>
-            <pc:docMk/>
-            <pc:sldMk cId="2248227231" sldId="461"/>
-            <ac:spMk id="14" creationId="{16489CD5-E694-96CA-6EE8-2DA9D775D58C}"/>
-          </ac:spMkLst>
-        </pc:spChg>
-        <pc:spChg chg="add mod">
-          <ac:chgData name="Mohammed Fasha" userId="cc64f42d-a1a6-4f08-b97b-0c37f877119f" providerId="ADAL" clId="{6B515210-E3E2-4B4B-BC10-968DB84AFC83}" dt="2025-03-12T02:09:02.966" v="502" actId="1076"/>
-          <ac:spMkLst>
-            <pc:docMk/>
-            <pc:sldMk cId="2248227231" sldId="461"/>
-            <ac:spMk id="15" creationId="{16489CD5-E694-96CA-6EE8-2DA9D775D58C}"/>
-          </ac:spMkLst>
-        </pc:spChg>
-        <pc:picChg chg="add del mod ord">
-          <ac:chgData name="Mohammed Fasha" userId="cc64f42d-a1a6-4f08-b97b-0c37f877119f" providerId="ADAL" clId="{6B515210-E3E2-4B4B-BC10-968DB84AFC83}" dt="2025-03-12T02:06:05.644" v="443" actId="478"/>
-          <ac:picMkLst>
-            <pc:docMk/>
-            <pc:sldMk cId="2248227231" sldId="461"/>
-            <ac:picMk id="5" creationId="{9B6B9F7D-DBB4-6983-8CFD-0DDE6E69DA8A}"/>
-          </ac:picMkLst>
-        </pc:picChg>
-        <pc:picChg chg="add del">
-          <ac:chgData name="Mohammed Fasha" userId="cc64f42d-a1a6-4f08-b97b-0c37f877119f" providerId="ADAL" clId="{6B515210-E3E2-4B4B-BC10-968DB84AFC83}" dt="2025-03-12T02:06:07.160" v="445" actId="22"/>
-          <ac:picMkLst>
-            <pc:docMk/>
-            <pc:sldMk cId="2248227231" sldId="461"/>
-            <ac:picMk id="9" creationId="{BDEF978B-0D79-06E2-235B-AF1B134A0821}"/>
-          </ac:picMkLst>
-        </pc:picChg>
-        <pc:picChg chg="add mod ord">
-          <ac:chgData name="Mohammed Fasha" userId="cc64f42d-a1a6-4f08-b97b-0c37f877119f" providerId="ADAL" clId="{6B515210-E3E2-4B4B-BC10-968DB84AFC83}" dt="2025-03-12T02:09:07.133" v="503" actId="14100"/>
-          <ac:picMkLst>
-            <pc:docMk/>
-            <pc:sldMk cId="2248227231" sldId="461"/>
-            <ac:picMk id="11" creationId="{B6FB3ED4-D6F0-A4DD-2E87-333BC4BCB751}"/>
-          </ac:picMkLst>
-        </pc:picChg>
-        <pc:picChg chg="add mod">
-          <ac:chgData name="Mohammed Fasha" userId="cc64f42d-a1a6-4f08-b97b-0c37f877119f" providerId="ADAL" clId="{6B515210-E3E2-4B4B-BC10-968DB84AFC83}" dt="2025-03-12T02:11:44.303" v="509"/>
-          <ac:picMkLst>
-            <pc:docMk/>
-            <pc:sldMk cId="2248227231" sldId="461"/>
-            <ac:picMk id="1026" creationId="{86CE7E24-5203-202C-96DE-DAADDEBAC033}"/>
-          </ac:picMkLst>
-        </pc:picChg>
       </pc:sldChg>
       <pc:sldChg chg="add del">
         <pc:chgData name="Mohammed Fasha" userId="cc64f42d-a1a6-4f08-b97b-0c37f877119f" providerId="ADAL" clId="{6B515210-E3E2-4B4B-BC10-968DB84AFC83}" dt="2025-03-12T01:38:38.172" v="141" actId="2696"/>
@@ -922,30 +537,6 @@
           <pc:docMk/>
           <pc:sldMk cId="1427723282" sldId="462"/>
         </pc:sldMkLst>
-        <pc:spChg chg="mod">
-          <ac:chgData name="Mohammed Fasha" userId="cc64f42d-a1a6-4f08-b97b-0c37f877119f" providerId="ADAL" clId="{6B515210-E3E2-4B4B-BC10-968DB84AFC83}" dt="2025-03-12T02:18:06.809" v="593" actId="27636"/>
-          <ac:spMkLst>
-            <pc:docMk/>
-            <pc:sldMk cId="1427723282" sldId="462"/>
-            <ac:spMk id="2" creationId="{5161A592-C95D-5F4C-D812-FDE1F8B67D98}"/>
-          </ac:spMkLst>
-        </pc:spChg>
-        <pc:spChg chg="mod">
-          <ac:chgData name="Mohammed Fasha" userId="cc64f42d-a1a6-4f08-b97b-0c37f877119f" providerId="ADAL" clId="{6B515210-E3E2-4B4B-BC10-968DB84AFC83}" dt="2025-03-12T02:18:24.439" v="598" actId="6549"/>
-          <ac:spMkLst>
-            <pc:docMk/>
-            <pc:sldMk cId="1427723282" sldId="462"/>
-            <ac:spMk id="3" creationId="{DF98230F-D09E-0053-052C-DBBDA534D6A9}"/>
-          </ac:spMkLst>
-        </pc:spChg>
-        <pc:picChg chg="add mod">
-          <ac:chgData name="Mohammed Fasha" userId="cc64f42d-a1a6-4f08-b97b-0c37f877119f" providerId="ADAL" clId="{6B515210-E3E2-4B4B-BC10-968DB84AFC83}" dt="2025-03-12T02:18:02.406" v="589" actId="1076"/>
-          <ac:picMkLst>
-            <pc:docMk/>
-            <pc:sldMk cId="1427723282" sldId="462"/>
-            <ac:picMk id="5" creationId="{2C0B6C6C-BCCC-176F-E3E9-9C6155B90FC2}"/>
-          </ac:picMkLst>
-        </pc:picChg>
       </pc:sldChg>
       <pc:sldChg chg="del">
         <pc:chgData name="Mohammed Fasha" userId="cc64f42d-a1a6-4f08-b97b-0c37f877119f" providerId="ADAL" clId="{6B515210-E3E2-4B4B-BC10-968DB84AFC83}" dt="2025-03-12T01:34:08.372" v="83" actId="2696"/>
@@ -960,46 +551,6 @@
           <pc:docMk/>
           <pc:sldMk cId="538252582" sldId="463"/>
         </pc:sldMkLst>
-        <pc:spChg chg="del">
-          <ac:chgData name="Mohammed Fasha" userId="cc64f42d-a1a6-4f08-b97b-0c37f877119f" providerId="ADAL" clId="{6B515210-E3E2-4B4B-BC10-968DB84AFC83}" dt="2025-03-12T02:20:23.431" v="599" actId="22"/>
-          <ac:spMkLst>
-            <pc:docMk/>
-            <pc:sldMk cId="538252582" sldId="463"/>
-            <ac:spMk id="2" creationId="{2FC210AF-DFF3-68D5-48E8-0DAADC05D8FA}"/>
-          </ac:spMkLst>
-        </pc:spChg>
-        <pc:spChg chg="mod">
-          <ac:chgData name="Mohammed Fasha" userId="cc64f42d-a1a6-4f08-b97b-0c37f877119f" providerId="ADAL" clId="{6B515210-E3E2-4B4B-BC10-968DB84AFC83}" dt="2025-03-12T02:21:38.182" v="609"/>
-          <ac:spMkLst>
-            <pc:docMk/>
-            <pc:sldMk cId="538252582" sldId="463"/>
-            <ac:spMk id="3" creationId="{6A4F7E4E-1303-88AC-B630-42D669AF1547}"/>
-          </ac:spMkLst>
-        </pc:spChg>
-        <pc:picChg chg="add mod ord">
-          <ac:chgData name="Mohammed Fasha" userId="cc64f42d-a1a6-4f08-b97b-0c37f877119f" providerId="ADAL" clId="{6B515210-E3E2-4B4B-BC10-968DB84AFC83}" dt="2025-03-12T02:34:11.888" v="748" actId="14100"/>
-          <ac:picMkLst>
-            <pc:docMk/>
-            <pc:sldMk cId="538252582" sldId="463"/>
-            <ac:picMk id="5" creationId="{B77B7C33-3931-334D-F5F0-51578F602770}"/>
-          </ac:picMkLst>
-        </pc:picChg>
-        <pc:picChg chg="add mod">
-          <ac:chgData name="Mohammed Fasha" userId="cc64f42d-a1a6-4f08-b97b-0c37f877119f" providerId="ADAL" clId="{6B515210-E3E2-4B4B-BC10-968DB84AFC83}" dt="2025-03-12T02:21:50.234" v="611" actId="1076"/>
-          <ac:picMkLst>
-            <pc:docMk/>
-            <pc:sldMk cId="538252582" sldId="463"/>
-            <ac:picMk id="7" creationId="{D41F736F-AF01-4029-F291-F1741828EA3C}"/>
-          </ac:picMkLst>
-        </pc:picChg>
-        <pc:picChg chg="add mod">
-          <ac:chgData name="Mohammed Fasha" userId="cc64f42d-a1a6-4f08-b97b-0c37f877119f" providerId="ADAL" clId="{6B515210-E3E2-4B4B-BC10-968DB84AFC83}" dt="2025-03-12T02:34:09.171" v="747"/>
-          <ac:picMkLst>
-            <pc:docMk/>
-            <pc:sldMk cId="538252582" sldId="463"/>
-            <ac:picMk id="8" creationId="{D4AE6193-CCD4-99C8-A300-F96A67CCB423}"/>
-          </ac:picMkLst>
-        </pc:picChg>
       </pc:sldChg>
       <pc:sldChg chg="del">
         <pc:chgData name="Mohammed Fasha" userId="cc64f42d-a1a6-4f08-b97b-0c37f877119f" providerId="ADAL" clId="{6B515210-E3E2-4B4B-BC10-968DB84AFC83}" dt="2025-03-12T01:34:08.372" v="83" actId="2696"/>
@@ -1035,38 +586,6 @@
           <pc:docMk/>
           <pc:sldMk cId="1559017199" sldId="464"/>
         </pc:sldMkLst>
-        <pc:spChg chg="mod">
-          <ac:chgData name="Mohammed Fasha" userId="cc64f42d-a1a6-4f08-b97b-0c37f877119f" providerId="ADAL" clId="{6B515210-E3E2-4B4B-BC10-968DB84AFC83}" dt="2025-03-12T02:30:16.073" v="690" actId="27636"/>
-          <ac:spMkLst>
-            <pc:docMk/>
-            <pc:sldMk cId="1559017199" sldId="464"/>
-            <ac:spMk id="2" creationId="{E4639E90-EC50-1142-F307-1730254FA4B7}"/>
-          </ac:spMkLst>
-        </pc:spChg>
-        <pc:spChg chg="mod">
-          <ac:chgData name="Mohammed Fasha" userId="cc64f42d-a1a6-4f08-b97b-0c37f877119f" providerId="ADAL" clId="{6B515210-E3E2-4B4B-BC10-968DB84AFC83}" dt="2025-03-12T02:25:29.726" v="653"/>
-          <ac:spMkLst>
-            <pc:docMk/>
-            <pc:sldMk cId="1559017199" sldId="464"/>
-            <ac:spMk id="3" creationId="{9CE14663-F603-8E9B-380B-9F29A5C89810}"/>
-          </ac:spMkLst>
-        </pc:spChg>
-        <pc:picChg chg="add mod">
-          <ac:chgData name="Mohammed Fasha" userId="cc64f42d-a1a6-4f08-b97b-0c37f877119f" providerId="ADAL" clId="{6B515210-E3E2-4B4B-BC10-968DB84AFC83}" dt="2025-03-12T02:33:10.069" v="723" actId="1076"/>
-          <ac:picMkLst>
-            <pc:docMk/>
-            <pc:sldMk cId="1559017199" sldId="464"/>
-            <ac:picMk id="5" creationId="{A8CF5184-C11D-A684-D4E9-FA1F42D7D64D}"/>
-          </ac:picMkLst>
-        </pc:picChg>
-        <pc:picChg chg="add mod">
-          <ac:chgData name="Mohammed Fasha" userId="cc64f42d-a1a6-4f08-b97b-0c37f877119f" providerId="ADAL" clId="{6B515210-E3E2-4B4B-BC10-968DB84AFC83}" dt="2025-03-12T02:33:11.507" v="724" actId="1076"/>
-          <ac:picMkLst>
-            <pc:docMk/>
-            <pc:sldMk cId="1559017199" sldId="464"/>
-            <ac:picMk id="7" creationId="{11CD6987-E88A-6289-EAA7-4A698B7CE9FF}"/>
-          </ac:picMkLst>
-        </pc:picChg>
       </pc:sldChg>
       <pc:sldChg chg="del">
         <pc:chgData name="Mohammed Fasha" userId="cc64f42d-a1a6-4f08-b97b-0c37f877119f" providerId="ADAL" clId="{6B515210-E3E2-4B4B-BC10-968DB84AFC83}" dt="2025-03-12T01:34:08.372" v="83" actId="2696"/>
@@ -1088,38 +607,6 @@
           <pc:docMk/>
           <pc:sldMk cId="2067025602" sldId="465"/>
         </pc:sldMkLst>
-        <pc:spChg chg="mod">
-          <ac:chgData name="Mohammed Fasha" userId="cc64f42d-a1a6-4f08-b97b-0c37f877119f" providerId="ADAL" clId="{6B515210-E3E2-4B4B-BC10-968DB84AFC83}" dt="2025-03-12T02:28:22.426" v="674" actId="14100"/>
-          <ac:spMkLst>
-            <pc:docMk/>
-            <pc:sldMk cId="2067025602" sldId="465"/>
-            <ac:spMk id="2" creationId="{D6A166C5-B6FB-3038-2293-415E4C7D22E6}"/>
-          </ac:spMkLst>
-        </pc:spChg>
-        <pc:spChg chg="mod">
-          <ac:chgData name="Mohammed Fasha" userId="cc64f42d-a1a6-4f08-b97b-0c37f877119f" providerId="ADAL" clId="{6B515210-E3E2-4B4B-BC10-968DB84AFC83}" dt="2025-03-12T02:23:42.071" v="620" actId="6549"/>
-          <ac:spMkLst>
-            <pc:docMk/>
-            <pc:sldMk cId="2067025602" sldId="465"/>
-            <ac:spMk id="3" creationId="{4699A8A2-3830-72B5-1A7A-82D011352862}"/>
-          </ac:spMkLst>
-        </pc:spChg>
-        <pc:picChg chg="add del mod">
-          <ac:chgData name="Mohammed Fasha" userId="cc64f42d-a1a6-4f08-b97b-0c37f877119f" providerId="ADAL" clId="{6B515210-E3E2-4B4B-BC10-968DB84AFC83}" dt="2025-03-12T02:28:10.469" v="669" actId="21"/>
-          <ac:picMkLst>
-            <pc:docMk/>
-            <pc:sldMk cId="2067025602" sldId="465"/>
-            <ac:picMk id="5" creationId="{5E933D9C-08E4-01F9-57B8-7C46406FA32C}"/>
-          </ac:picMkLst>
-        </pc:picChg>
-        <pc:picChg chg="add mod">
-          <ac:chgData name="Mohammed Fasha" userId="cc64f42d-a1a6-4f08-b97b-0c37f877119f" providerId="ADAL" clId="{6B515210-E3E2-4B4B-BC10-968DB84AFC83}" dt="2025-03-12T02:30:23.572" v="691" actId="1076"/>
-          <ac:picMkLst>
-            <pc:docMk/>
-            <pc:sldMk cId="2067025602" sldId="465"/>
-            <ac:picMk id="6" creationId="{1200D47E-397F-9E31-C30B-EE0822713306}"/>
-          </ac:picMkLst>
-        </pc:picChg>
       </pc:sldChg>
       <pc:sldChg chg="addSp delSp modSp add mod">
         <pc:chgData name="Mohammed Fasha" userId="cc64f42d-a1a6-4f08-b97b-0c37f877119f" providerId="ADAL" clId="{6B515210-E3E2-4B4B-BC10-968DB84AFC83}" dt="2025-03-12T02:31:16.001" v="705" actId="1076"/>
@@ -1127,46 +614,6 @@
           <pc:docMk/>
           <pc:sldMk cId="2575217795" sldId="466"/>
         </pc:sldMkLst>
-        <pc:spChg chg="mod">
-          <ac:chgData name="Mohammed Fasha" userId="cc64f42d-a1a6-4f08-b97b-0c37f877119f" providerId="ADAL" clId="{6B515210-E3E2-4B4B-BC10-968DB84AFC83}" dt="2025-03-12T02:30:06.458" v="684" actId="5793"/>
-          <ac:spMkLst>
-            <pc:docMk/>
-            <pc:sldMk cId="2575217795" sldId="466"/>
-            <ac:spMk id="2" creationId="{AAD33A44-4738-B463-10DB-B09ADF5D976F}"/>
-          </ac:spMkLst>
-        </pc:spChg>
-        <pc:spChg chg="mod">
-          <ac:chgData name="Mohammed Fasha" userId="cc64f42d-a1a6-4f08-b97b-0c37f877119f" providerId="ADAL" clId="{6B515210-E3E2-4B4B-BC10-968DB84AFC83}" dt="2025-03-12T02:26:02.458" v="661"/>
-          <ac:spMkLst>
-            <pc:docMk/>
-            <pc:sldMk cId="2575217795" sldId="466"/>
-            <ac:spMk id="3" creationId="{975AB37D-8C19-77E5-43AF-90557368B563}"/>
-          </ac:spMkLst>
-        </pc:spChg>
-        <pc:picChg chg="add del mod">
-          <ac:chgData name="Mohammed Fasha" userId="cc64f42d-a1a6-4f08-b97b-0c37f877119f" providerId="ADAL" clId="{6B515210-E3E2-4B4B-BC10-968DB84AFC83}" dt="2025-03-12T02:28:15.324" v="672" actId="21"/>
-          <ac:picMkLst>
-            <pc:docMk/>
-            <pc:sldMk cId="2575217795" sldId="466"/>
-            <ac:picMk id="5" creationId="{1200D47E-397F-9E31-C30B-EE0822713306}"/>
-          </ac:picMkLst>
-        </pc:picChg>
-        <pc:picChg chg="add mod">
-          <ac:chgData name="Mohammed Fasha" userId="cc64f42d-a1a6-4f08-b97b-0c37f877119f" providerId="ADAL" clId="{6B515210-E3E2-4B4B-BC10-968DB84AFC83}" dt="2025-03-12T02:31:14.704" v="704" actId="1076"/>
-          <ac:picMkLst>
-            <pc:docMk/>
-            <pc:sldMk cId="2575217795" sldId="466"/>
-            <ac:picMk id="7" creationId="{673162F8-4616-4609-2A8E-E1582A467BE4}"/>
-          </ac:picMkLst>
-        </pc:picChg>
-        <pc:picChg chg="add mod">
-          <ac:chgData name="Mohammed Fasha" userId="cc64f42d-a1a6-4f08-b97b-0c37f877119f" providerId="ADAL" clId="{6B515210-E3E2-4B4B-BC10-968DB84AFC83}" dt="2025-03-12T02:31:16.001" v="705" actId="1076"/>
-          <ac:picMkLst>
-            <pc:docMk/>
-            <pc:sldMk cId="2575217795" sldId="466"/>
-            <ac:picMk id="9" creationId="{B7380879-9916-D124-76D4-6D34DE2471F7}"/>
-          </ac:picMkLst>
-        </pc:picChg>
       </pc:sldChg>
       <pc:sldChg chg="add del">
         <pc:chgData name="Mohammed Fasha" userId="cc64f42d-a1a6-4f08-b97b-0c37f877119f" providerId="ADAL" clId="{6B515210-E3E2-4B4B-BC10-968DB84AFC83}" dt="2025-03-12T01:38:38.172" v="141" actId="2696"/>
@@ -1188,38 +635,6 @@
           <pc:docMk/>
           <pc:sldMk cId="3203545122" sldId="467"/>
         </pc:sldMkLst>
-        <pc:spChg chg="del mod ord">
-          <ac:chgData name="Mohammed Fasha" userId="cc64f42d-a1a6-4f08-b97b-0c37f877119f" providerId="ADAL" clId="{6B515210-E3E2-4B4B-BC10-968DB84AFC83}" dt="2025-03-12T02:33:25.837" v="725" actId="700"/>
-          <ac:spMkLst>
-            <pc:docMk/>
-            <pc:sldMk cId="3203545122" sldId="467"/>
-            <ac:spMk id="2" creationId="{2DC380DD-1E49-0DCD-0EE2-C2FF1257A3DB}"/>
-          </ac:spMkLst>
-        </pc:spChg>
-        <pc:spChg chg="del mod ord">
-          <ac:chgData name="Mohammed Fasha" userId="cc64f42d-a1a6-4f08-b97b-0c37f877119f" providerId="ADAL" clId="{6B515210-E3E2-4B4B-BC10-968DB84AFC83}" dt="2025-03-12T02:33:25.837" v="725" actId="700"/>
-          <ac:spMkLst>
-            <pc:docMk/>
-            <pc:sldMk cId="3203545122" sldId="467"/>
-            <ac:spMk id="3" creationId="{AD2AA0DD-0312-684F-71E2-2A5F7BB7744F}"/>
-          </ac:spMkLst>
-        </pc:spChg>
-        <pc:spChg chg="add mod ord">
-          <ac:chgData name="Mohammed Fasha" userId="cc64f42d-a1a6-4f08-b97b-0c37f877119f" providerId="ADAL" clId="{6B515210-E3E2-4B4B-BC10-968DB84AFC83}" dt="2025-03-12T02:33:36.563" v="746" actId="20577"/>
-          <ac:spMkLst>
-            <pc:docMk/>
-            <pc:sldMk cId="3203545122" sldId="467"/>
-            <ac:spMk id="4" creationId="{9D782610-959C-3988-3865-1CD8FC2712F2}"/>
-          </ac:spMkLst>
-        </pc:spChg>
-        <pc:spChg chg="add mod ord">
-          <ac:chgData name="Mohammed Fasha" userId="cc64f42d-a1a6-4f08-b97b-0c37f877119f" providerId="ADAL" clId="{6B515210-E3E2-4B4B-BC10-968DB84AFC83}" dt="2025-03-12T02:33:25.837" v="725" actId="700"/>
-          <ac:spMkLst>
-            <pc:docMk/>
-            <pc:sldMk cId="3203545122" sldId="467"/>
-            <ac:spMk id="5" creationId="{E198B421-32B0-9585-5D69-A4C9A522EB53}"/>
-          </ac:spMkLst>
-        </pc:spChg>
       </pc:sldChg>
       <pc:sldChg chg="add del">
         <pc:chgData name="Mohammed Fasha" userId="cc64f42d-a1a6-4f08-b97b-0c37f877119f" providerId="ADAL" clId="{6B515210-E3E2-4B4B-BC10-968DB84AFC83}" dt="2025-03-12T01:38:38.172" v="141" actId="2696"/>
@@ -1318,14 +733,6 @@
           <pc:docMk/>
           <pc:sldMk cId="1558611893" sldId="476"/>
         </pc:sldMkLst>
-        <pc:spChg chg="mod">
-          <ac:chgData name="Mohammed Fasha" userId="cc64f42d-a1a6-4f08-b97b-0c37f877119f" providerId="ADAL" clId="{6B515210-E3E2-4B4B-BC10-968DB84AFC83}" dt="2025-03-12T02:32:31.978" v="715" actId="12"/>
-          <ac:spMkLst>
-            <pc:docMk/>
-            <pc:sldMk cId="1558611893" sldId="476"/>
-            <ac:spMk id="2" creationId="{4E795974-C30C-A8F4-FC12-5BE5FE355A52}"/>
-          </ac:spMkLst>
-        </pc:spChg>
       </pc:sldChg>
       <pc:sldChg chg="addSp delSp modSp add del mod">
         <pc:chgData name="Mohammed Fasha" userId="cc64f42d-a1a6-4f08-b97b-0c37f877119f" providerId="ADAL" clId="{6B515210-E3E2-4B4B-BC10-968DB84AFC83}" dt="2025-03-12T02:50:02.536" v="890"/>
@@ -1333,30 +740,6 @@
           <pc:docMk/>
           <pc:sldMk cId="471849074" sldId="477"/>
         </pc:sldMkLst>
-        <pc:spChg chg="add del">
-          <ac:chgData name="Mohammed Fasha" userId="cc64f42d-a1a6-4f08-b97b-0c37f877119f" providerId="ADAL" clId="{6B515210-E3E2-4B4B-BC10-968DB84AFC83}" dt="2025-03-12T02:50:02.363" v="889" actId="478"/>
-          <ac:spMkLst>
-            <pc:docMk/>
-            <pc:sldMk cId="471849074" sldId="477"/>
-            <ac:spMk id="2" creationId="{0A644251-3557-7A4A-5A27-61FC9EBD16A7}"/>
-          </ac:spMkLst>
-        </pc:spChg>
-        <pc:spChg chg="add del mod">
-          <ac:chgData name="Mohammed Fasha" userId="cc64f42d-a1a6-4f08-b97b-0c37f877119f" providerId="ADAL" clId="{6B515210-E3E2-4B4B-BC10-968DB84AFC83}" dt="2025-03-12T02:50:02.363" v="889" actId="478"/>
-          <ac:spMkLst>
-            <pc:docMk/>
-            <pc:sldMk cId="471849074" sldId="477"/>
-            <ac:spMk id="5" creationId="{9A1EA05C-F387-33F7-7999-57C63B5FED8E}"/>
-          </ac:spMkLst>
-        </pc:spChg>
-        <pc:picChg chg="add del">
-          <ac:chgData name="Mohammed Fasha" userId="cc64f42d-a1a6-4f08-b97b-0c37f877119f" providerId="ADAL" clId="{6B515210-E3E2-4B4B-BC10-968DB84AFC83}" dt="2025-03-12T02:50:01.995" v="887" actId="478"/>
-          <ac:picMkLst>
-            <pc:docMk/>
-            <pc:sldMk cId="471849074" sldId="477"/>
-            <ac:picMk id="8" creationId="{31D27B50-5BB2-1115-C0CE-471FD0E0205D}"/>
-          </ac:picMkLst>
-        </pc:picChg>
       </pc:sldChg>
       <pc:sldMasterChg chg="modSldLayout">
         <pc:chgData name="Mohammed Fasha" userId="cc64f42d-a1a6-4f08-b97b-0c37f877119f" providerId="ADAL" clId="{6B515210-E3E2-4B4B-BC10-968DB84AFC83}" dt="2025-03-12T01:38:22.885" v="140" actId="14100"/>
@@ -1371,62 +754,409 @@
             <pc:sldMasterMk cId="2573801746" sldId="2147483648"/>
             <pc:sldLayoutMk cId="3033015503" sldId="2147483650"/>
           </pc:sldLayoutMkLst>
-          <pc:spChg chg="del">
-            <ac:chgData name="Mohammed Fasha" userId="cc64f42d-a1a6-4f08-b97b-0c37f877119f" providerId="ADAL" clId="{6B515210-E3E2-4B4B-BC10-968DB84AFC83}" dt="2025-03-12T01:38:01.757" v="133" actId="478"/>
-            <ac:spMkLst>
-              <pc:docMk/>
-              <pc:sldMasterMk cId="2573801746" sldId="2147483648"/>
-              <pc:sldLayoutMk cId="3033015503" sldId="2147483650"/>
-              <ac:spMk id="2" creationId="{2D5B3F3C-1E16-4389-B985-D8A53EDEC091}"/>
-            </ac:spMkLst>
-          </pc:spChg>
-          <pc:spChg chg="mod">
-            <ac:chgData name="Mohammed Fasha" userId="cc64f42d-a1a6-4f08-b97b-0c37f877119f" providerId="ADAL" clId="{6B515210-E3E2-4B4B-BC10-968DB84AFC83}" dt="2025-03-12T01:38:22.885" v="140" actId="14100"/>
-            <ac:spMkLst>
-              <pc:docMk/>
-              <pc:sldMasterMk cId="2573801746" sldId="2147483648"/>
-              <pc:sldLayoutMk cId="3033015503" sldId="2147483650"/>
-              <ac:spMk id="3" creationId="{4FB3C61F-38E8-4752-B24C-864B3F324ADB}"/>
-            </ac:spMkLst>
-          </pc:spChg>
-          <pc:spChg chg="del">
-            <ac:chgData name="Mohammed Fasha" userId="cc64f42d-a1a6-4f08-b97b-0c37f877119f" providerId="ADAL" clId="{6B515210-E3E2-4B4B-BC10-968DB84AFC83}" dt="2025-03-12T01:38:12.009" v="136" actId="478"/>
-            <ac:spMkLst>
-              <pc:docMk/>
-              <pc:sldMasterMk cId="2573801746" sldId="2147483648"/>
-              <pc:sldLayoutMk cId="3033015503" sldId="2147483650"/>
-              <ac:spMk id="4" creationId="{03CA89EF-7D95-44D8-8854-33451FDC2C9A}"/>
-            </ac:spMkLst>
-          </pc:spChg>
-          <pc:spChg chg="del">
-            <ac:chgData name="Mohammed Fasha" userId="cc64f42d-a1a6-4f08-b97b-0c37f877119f" providerId="ADAL" clId="{6B515210-E3E2-4B4B-BC10-968DB84AFC83}" dt="2025-03-12T01:38:12.742" v="137" actId="478"/>
-            <ac:spMkLst>
-              <pc:docMk/>
-              <pc:sldMasterMk cId="2573801746" sldId="2147483648"/>
-              <pc:sldLayoutMk cId="3033015503" sldId="2147483650"/>
-              <ac:spMk id="5" creationId="{4273ECB5-7E67-4317-BF3D-D3D95D4413E3}"/>
-            </ac:spMkLst>
-          </pc:spChg>
-          <pc:spChg chg="del">
-            <ac:chgData name="Mohammed Fasha" userId="cc64f42d-a1a6-4f08-b97b-0c37f877119f" providerId="ADAL" clId="{6B515210-E3E2-4B4B-BC10-968DB84AFC83}" dt="2025-03-12T01:38:13.711" v="138" actId="478"/>
-            <ac:spMkLst>
-              <pc:docMk/>
-              <pc:sldMasterMk cId="2573801746" sldId="2147483648"/>
-              <pc:sldLayoutMk cId="3033015503" sldId="2147483650"/>
-              <ac:spMk id="6" creationId="{84D91884-6C3F-44FF-BCB2-3CA4FDC7DB36}"/>
-            </ac:spMkLst>
-          </pc:spChg>
-          <pc:spChg chg="add mod">
-            <ac:chgData name="Mohammed Fasha" userId="cc64f42d-a1a6-4f08-b97b-0c37f877119f" providerId="ADAL" clId="{6B515210-E3E2-4B4B-BC10-968DB84AFC83}" dt="2025-03-12T01:38:02.873" v="134"/>
-            <ac:spMkLst>
-              <pc:docMk/>
-              <pc:sldMasterMk cId="2573801746" sldId="2147483648"/>
-              <pc:sldLayoutMk cId="3033015503" sldId="2147483650"/>
-              <ac:spMk id="7" creationId="{3C84F030-E44F-DCD3-80BE-2A466F72EF0F}"/>
-            </ac:spMkLst>
-          </pc:spChg>
         </pc:sldLayoutChg>
       </pc:sldMasterChg>
+    </pc:docChg>
+  </pc:docChgLst>
+  <pc:docChgLst>
+    <pc:chgData name="Mohammed Fasha" userId="cc64f42d-a1a6-4f08-b97b-0c37f877119f" providerId="ADAL" clId="{161A7FAA-B398-4429-9FC2-656B0895AF0F}"/>
+    <pc:docChg chg="undo custSel addSld delSld modSld sldOrd">
+      <pc:chgData name="Mohammed Fasha" userId="cc64f42d-a1a6-4f08-b97b-0c37f877119f" providerId="ADAL" clId="{161A7FAA-B398-4429-9FC2-656B0895AF0F}" dt="2025-07-16T08:31:04.392" v="376" actId="5793"/>
+      <pc:docMkLst>
+        <pc:docMk/>
+      </pc:docMkLst>
+      <pc:sldChg chg="modSp mod ord">
+        <pc:chgData name="Mohammed Fasha" userId="cc64f42d-a1a6-4f08-b97b-0c37f877119f" providerId="ADAL" clId="{161A7FAA-B398-4429-9FC2-656B0895AF0F}" dt="2025-07-16T07:59:43.135" v="11" actId="113"/>
+        <pc:sldMkLst>
+          <pc:docMk/>
+          <pc:sldMk cId="1162554463" sldId="257"/>
+        </pc:sldMkLst>
+        <pc:spChg chg="mod">
+          <ac:chgData name="Mohammed Fasha" userId="cc64f42d-a1a6-4f08-b97b-0c37f877119f" providerId="ADAL" clId="{161A7FAA-B398-4429-9FC2-656B0895AF0F}" dt="2025-07-16T07:59:43.135" v="11" actId="113"/>
+          <ac:spMkLst>
+            <pc:docMk/>
+            <pc:sldMk cId="1162554463" sldId="257"/>
+            <ac:spMk id="2" creationId="{8BE518FD-B81F-466C-AD85-5DDC967653B4}"/>
+          </ac:spMkLst>
+        </pc:spChg>
+      </pc:sldChg>
+      <pc:sldChg chg="ord">
+        <pc:chgData name="Mohammed Fasha" userId="cc64f42d-a1a6-4f08-b97b-0c37f877119f" providerId="ADAL" clId="{161A7FAA-B398-4429-9FC2-656B0895AF0F}" dt="2025-07-16T08:09:08.733" v="119"/>
+        <pc:sldMkLst>
+          <pc:docMk/>
+          <pc:sldMk cId="3910887702" sldId="456"/>
+        </pc:sldMkLst>
+      </pc:sldChg>
+      <pc:sldChg chg="addSp modSp mod">
+        <pc:chgData name="Mohammed Fasha" userId="cc64f42d-a1a6-4f08-b97b-0c37f877119f" providerId="ADAL" clId="{161A7FAA-B398-4429-9FC2-656B0895AF0F}" dt="2025-07-16T08:10:21.461" v="130" actId="113"/>
+        <pc:sldMkLst>
+          <pc:docMk/>
+          <pc:sldMk cId="3639736080" sldId="457"/>
+        </pc:sldMkLst>
+        <pc:spChg chg="mod">
+          <ac:chgData name="Mohammed Fasha" userId="cc64f42d-a1a6-4f08-b97b-0c37f877119f" providerId="ADAL" clId="{161A7FAA-B398-4429-9FC2-656B0895AF0F}" dt="2025-07-16T08:10:21.461" v="130" actId="113"/>
+          <ac:spMkLst>
+            <pc:docMk/>
+            <pc:sldMk cId="3639736080" sldId="457"/>
+            <ac:spMk id="2" creationId="{5A741632-F5AA-89F8-92B0-716C60C6B299}"/>
+          </ac:spMkLst>
+        </pc:spChg>
+        <pc:picChg chg="add mod">
+          <ac:chgData name="Mohammed Fasha" userId="cc64f42d-a1a6-4f08-b97b-0c37f877119f" providerId="ADAL" clId="{161A7FAA-B398-4429-9FC2-656B0895AF0F}" dt="2025-07-16T08:09:37.477" v="125"/>
+          <ac:picMkLst>
+            <pc:docMk/>
+            <pc:sldMk cId="3639736080" sldId="457"/>
+            <ac:picMk id="4" creationId="{DE2B1E32-0CA3-128D-CB32-2F690773BA5C}"/>
+          </ac:picMkLst>
+        </pc:picChg>
+        <pc:picChg chg="mod">
+          <ac:chgData name="Mohammed Fasha" userId="cc64f42d-a1a6-4f08-b97b-0c37f877119f" providerId="ADAL" clId="{161A7FAA-B398-4429-9FC2-656B0895AF0F}" dt="2025-07-16T08:09:54.987" v="129" actId="1076"/>
+          <ac:picMkLst>
+            <pc:docMk/>
+            <pc:sldMk cId="3639736080" sldId="457"/>
+            <ac:picMk id="7" creationId="{82D86F0E-0628-3880-4CDD-0284B92DC94E}"/>
+          </ac:picMkLst>
+        </pc:picChg>
+      </pc:sldChg>
+      <pc:sldChg chg="addSp modSp mod">
+        <pc:chgData name="Mohammed Fasha" userId="cc64f42d-a1a6-4f08-b97b-0c37f877119f" providerId="ADAL" clId="{161A7FAA-B398-4429-9FC2-656B0895AF0F}" dt="2025-07-16T08:11:43.027" v="145" actId="14100"/>
+        <pc:sldMkLst>
+          <pc:docMk/>
+          <pc:sldMk cId="2042404279" sldId="458"/>
+        </pc:sldMkLst>
+        <pc:spChg chg="mod">
+          <ac:chgData name="Mohammed Fasha" userId="cc64f42d-a1a6-4f08-b97b-0c37f877119f" providerId="ADAL" clId="{161A7FAA-B398-4429-9FC2-656B0895AF0F}" dt="2025-07-16T08:10:49.595" v="141" actId="27636"/>
+          <ac:spMkLst>
+            <pc:docMk/>
+            <pc:sldMk cId="2042404279" sldId="458"/>
+            <ac:spMk id="2" creationId="{AFD55279-926D-56F4-16C1-40E544073600}"/>
+          </ac:spMkLst>
+        </pc:spChg>
+        <pc:picChg chg="mod">
+          <ac:chgData name="Mohammed Fasha" userId="cc64f42d-a1a6-4f08-b97b-0c37f877119f" providerId="ADAL" clId="{161A7FAA-B398-4429-9FC2-656B0895AF0F}" dt="2025-07-16T08:10:47.228" v="139" actId="1076"/>
+          <ac:picMkLst>
+            <pc:docMk/>
+            <pc:sldMk cId="2042404279" sldId="458"/>
+            <ac:picMk id="5" creationId="{D78EEB53-EDB0-9883-EF22-7ECFE0832215}"/>
+          </ac:picMkLst>
+        </pc:picChg>
+        <pc:picChg chg="add mod">
+          <ac:chgData name="Mohammed Fasha" userId="cc64f42d-a1a6-4f08-b97b-0c37f877119f" providerId="ADAL" clId="{161A7FAA-B398-4429-9FC2-656B0895AF0F}" dt="2025-07-16T08:11:43.027" v="145" actId="14100"/>
+          <ac:picMkLst>
+            <pc:docMk/>
+            <pc:sldMk cId="2042404279" sldId="458"/>
+            <ac:picMk id="3074" creationId="{4DD72E80-9023-5209-B53A-ADEDF9507F30}"/>
+          </ac:picMkLst>
+        </pc:picChg>
+      </pc:sldChg>
+      <pc:sldChg chg="del">
+        <pc:chgData name="Mohammed Fasha" userId="cc64f42d-a1a6-4f08-b97b-0c37f877119f" providerId="ADAL" clId="{161A7FAA-B398-4429-9FC2-656B0895AF0F}" dt="2025-07-16T08:18:53.045" v="232" actId="2696"/>
+        <pc:sldMkLst>
+          <pc:docMk/>
+          <pc:sldMk cId="945325653" sldId="460"/>
+        </pc:sldMkLst>
+      </pc:sldChg>
+      <pc:sldChg chg="delSp add del mod ord">
+        <pc:chgData name="Mohammed Fasha" userId="cc64f42d-a1a6-4f08-b97b-0c37f877119f" providerId="ADAL" clId="{161A7FAA-B398-4429-9FC2-656B0895AF0F}" dt="2025-07-16T08:26:36.943" v="352" actId="47"/>
+        <pc:sldMkLst>
+          <pc:docMk/>
+          <pc:sldMk cId="1040197143" sldId="460"/>
+        </pc:sldMkLst>
+        <pc:picChg chg="del">
+          <ac:chgData name="Mohammed Fasha" userId="cc64f42d-a1a6-4f08-b97b-0c37f877119f" providerId="ADAL" clId="{161A7FAA-B398-4429-9FC2-656B0895AF0F}" dt="2025-07-16T08:18:58.259" v="234" actId="21"/>
+          <ac:picMkLst>
+            <pc:docMk/>
+            <pc:sldMk cId="1040197143" sldId="460"/>
+            <ac:picMk id="12" creationId="{ED72E220-66E3-C895-AA2B-7821BAB0B80F}"/>
+          </ac:picMkLst>
+        </pc:picChg>
+        <pc:picChg chg="del">
+          <ac:chgData name="Mohammed Fasha" userId="cc64f42d-a1a6-4f08-b97b-0c37f877119f" providerId="ADAL" clId="{161A7FAA-B398-4429-9FC2-656B0895AF0F}" dt="2025-07-16T08:19:12.149" v="237" actId="21"/>
+          <ac:picMkLst>
+            <pc:docMk/>
+            <pc:sldMk cId="1040197143" sldId="460"/>
+            <ac:picMk id="13" creationId="{923AB4FC-8803-B130-E7FF-D6F9B65D8759}"/>
+          </ac:picMkLst>
+        </pc:picChg>
+      </pc:sldChg>
+      <pc:sldChg chg="modSp mod ord">
+        <pc:chgData name="Mohammed Fasha" userId="cc64f42d-a1a6-4f08-b97b-0c37f877119f" providerId="ADAL" clId="{161A7FAA-B398-4429-9FC2-656B0895AF0F}" dt="2025-07-16T08:31:04.392" v="376" actId="5793"/>
+        <pc:sldMkLst>
+          <pc:docMk/>
+          <pc:sldMk cId="2248227231" sldId="461"/>
+        </pc:sldMkLst>
+        <pc:spChg chg="mod">
+          <ac:chgData name="Mohammed Fasha" userId="cc64f42d-a1a6-4f08-b97b-0c37f877119f" providerId="ADAL" clId="{161A7FAA-B398-4429-9FC2-656B0895AF0F}" dt="2025-07-16T08:31:04.392" v="376" actId="5793"/>
+          <ac:spMkLst>
+            <pc:docMk/>
+            <pc:sldMk cId="2248227231" sldId="461"/>
+            <ac:spMk id="15" creationId="{16489CD5-E694-96CA-6EE8-2DA9D775D58C}"/>
+          </ac:spMkLst>
+        </pc:spChg>
+      </pc:sldChg>
+      <pc:sldChg chg="addSp delSp modSp new mod">
+        <pc:chgData name="Mohammed Fasha" userId="cc64f42d-a1a6-4f08-b97b-0c37f877119f" providerId="ADAL" clId="{161A7FAA-B398-4429-9FC2-656B0895AF0F}" dt="2025-07-16T08:08:48.133" v="117" actId="1076"/>
+        <pc:sldMkLst>
+          <pc:docMk/>
+          <pc:sldMk cId="2300765676" sldId="477"/>
+        </pc:sldMkLst>
+        <pc:spChg chg="mod">
+          <ac:chgData name="Mohammed Fasha" userId="cc64f42d-a1a6-4f08-b97b-0c37f877119f" providerId="ADAL" clId="{161A7FAA-B398-4429-9FC2-656B0895AF0F}" dt="2025-07-16T08:08:36.095" v="116" actId="27636"/>
+          <ac:spMkLst>
+            <pc:docMk/>
+            <pc:sldMk cId="2300765676" sldId="477"/>
+            <ac:spMk id="2" creationId="{B23B8AB6-5D16-5C93-D306-CA79D6F7715A}"/>
+          </ac:spMkLst>
+        </pc:spChg>
+        <pc:spChg chg="mod">
+          <ac:chgData name="Mohammed Fasha" userId="cc64f42d-a1a6-4f08-b97b-0c37f877119f" providerId="ADAL" clId="{161A7FAA-B398-4429-9FC2-656B0895AF0F}" dt="2025-07-16T08:06:36.346" v="104"/>
+          <ac:spMkLst>
+            <pc:docMk/>
+            <pc:sldMk cId="2300765676" sldId="477"/>
+            <ac:spMk id="3" creationId="{A955792E-C166-AD40-E023-9C9473F341EE}"/>
+          </ac:spMkLst>
+        </pc:spChg>
+        <pc:picChg chg="add del">
+          <ac:chgData name="Mohammed Fasha" userId="cc64f42d-a1a6-4f08-b97b-0c37f877119f" providerId="ADAL" clId="{161A7FAA-B398-4429-9FC2-656B0895AF0F}" dt="2025-07-16T08:05:48.658" v="91" actId="478"/>
+          <ac:picMkLst>
+            <pc:docMk/>
+            <pc:sldMk cId="2300765676" sldId="477"/>
+            <ac:picMk id="5" creationId="{45D6DA4C-2F0D-260B-8062-714BA9263593}"/>
+          </ac:picMkLst>
+        </pc:picChg>
+        <pc:picChg chg="add del mod">
+          <ac:chgData name="Mohammed Fasha" userId="cc64f42d-a1a6-4f08-b97b-0c37f877119f" providerId="ADAL" clId="{161A7FAA-B398-4429-9FC2-656B0895AF0F}" dt="2025-07-16T08:04:14.371" v="84" actId="478"/>
+          <ac:picMkLst>
+            <pc:docMk/>
+            <pc:sldMk cId="2300765676" sldId="477"/>
+            <ac:picMk id="1026" creationId="{F9570969-F598-6ACB-2DD4-CCA2812970C4}"/>
+          </ac:picMkLst>
+        </pc:picChg>
+        <pc:picChg chg="add del mod">
+          <ac:chgData name="Mohammed Fasha" userId="cc64f42d-a1a6-4f08-b97b-0c37f877119f" providerId="ADAL" clId="{161A7FAA-B398-4429-9FC2-656B0895AF0F}" dt="2025-07-16T08:05:11.635" v="89" actId="478"/>
+          <ac:picMkLst>
+            <pc:docMk/>
+            <pc:sldMk cId="2300765676" sldId="477"/>
+            <ac:picMk id="1028" creationId="{6CD59B2C-D8DA-FE8A-6FE6-FA28D990AF89}"/>
+          </ac:picMkLst>
+        </pc:picChg>
+        <pc:picChg chg="add mod">
+          <ac:chgData name="Mohammed Fasha" userId="cc64f42d-a1a6-4f08-b97b-0c37f877119f" providerId="ADAL" clId="{161A7FAA-B398-4429-9FC2-656B0895AF0F}" dt="2025-07-16T08:08:48.133" v="117" actId="1076"/>
+          <ac:picMkLst>
+            <pc:docMk/>
+            <pc:sldMk cId="2300765676" sldId="477"/>
+            <ac:picMk id="1030" creationId="{105D4075-60E9-9283-7A3C-A2F1DF21BE6F}"/>
+          </ac:picMkLst>
+        </pc:picChg>
+      </pc:sldChg>
+      <pc:sldChg chg="modSp new mod">
+        <pc:chgData name="Mohammed Fasha" userId="cc64f42d-a1a6-4f08-b97b-0c37f877119f" providerId="ADAL" clId="{161A7FAA-B398-4429-9FC2-656B0895AF0F}" dt="2025-07-16T08:00:24.341" v="74" actId="20577"/>
+        <pc:sldMkLst>
+          <pc:docMk/>
+          <pc:sldMk cId="2145969539" sldId="478"/>
+        </pc:sldMkLst>
+        <pc:spChg chg="mod">
+          <ac:chgData name="Mohammed Fasha" userId="cc64f42d-a1a6-4f08-b97b-0c37f877119f" providerId="ADAL" clId="{161A7FAA-B398-4429-9FC2-656B0895AF0F}" dt="2025-07-16T08:00:24.341" v="74" actId="20577"/>
+          <ac:spMkLst>
+            <pc:docMk/>
+            <pc:sldMk cId="2145969539" sldId="478"/>
+            <ac:spMk id="2" creationId="{595313C8-76FF-2F07-3ED5-814AD3EC72DC}"/>
+          </ac:spMkLst>
+        </pc:spChg>
+        <pc:spChg chg="mod">
+          <ac:chgData name="Mohammed Fasha" userId="cc64f42d-a1a6-4f08-b97b-0c37f877119f" providerId="ADAL" clId="{161A7FAA-B398-4429-9FC2-656B0895AF0F}" dt="2025-07-16T07:59:36.176" v="10" actId="113"/>
+          <ac:spMkLst>
+            <pc:docMk/>
+            <pc:sldMk cId="2145969539" sldId="478"/>
+            <ac:spMk id="3" creationId="{071A7914-96DB-51CC-53B0-AF8ED0AF6AEC}"/>
+          </ac:spMkLst>
+        </pc:spChg>
+      </pc:sldChg>
+      <pc:sldChg chg="addSp delSp modSp new del mod">
+        <pc:chgData name="Mohammed Fasha" userId="cc64f42d-a1a6-4f08-b97b-0c37f877119f" providerId="ADAL" clId="{161A7FAA-B398-4429-9FC2-656B0895AF0F}" dt="2025-07-16T08:08:07.529" v="114" actId="47"/>
+        <pc:sldMkLst>
+          <pc:docMk/>
+          <pc:sldMk cId="575657110" sldId="479"/>
+        </pc:sldMkLst>
+        <pc:spChg chg="add del mod">
+          <ac:chgData name="Mohammed Fasha" userId="cc64f42d-a1a6-4f08-b97b-0c37f877119f" providerId="ADAL" clId="{161A7FAA-B398-4429-9FC2-656B0895AF0F}" dt="2025-07-16T08:07:56.853" v="113" actId="404"/>
+          <ac:spMkLst>
+            <pc:docMk/>
+            <pc:sldMk cId="575657110" sldId="479"/>
+            <ac:spMk id="2" creationId="{4ADEBDBE-8C09-D3AD-763D-3410BE9FAF8D}"/>
+          </ac:spMkLst>
+        </pc:spChg>
+        <pc:spChg chg="add mod">
+          <ac:chgData name="Mohammed Fasha" userId="cc64f42d-a1a6-4f08-b97b-0c37f877119f" providerId="ADAL" clId="{161A7FAA-B398-4429-9FC2-656B0895AF0F}" dt="2025-07-16T08:07:02.451" v="107"/>
+          <ac:spMkLst>
+            <pc:docMk/>
+            <pc:sldMk cId="575657110" sldId="479"/>
+            <ac:spMk id="4" creationId="{61048862-B9F5-1154-77E8-4D0F5E449B7F}"/>
+          </ac:spMkLst>
+        </pc:spChg>
+      </pc:sldChg>
+      <pc:sldChg chg="modSp new mod">
+        <pc:chgData name="Mohammed Fasha" userId="cc64f42d-a1a6-4f08-b97b-0c37f877119f" providerId="ADAL" clId="{161A7FAA-B398-4429-9FC2-656B0895AF0F}" dt="2025-07-16T08:12:50.396" v="164" actId="5793"/>
+        <pc:sldMkLst>
+          <pc:docMk/>
+          <pc:sldMk cId="1427132372" sldId="479"/>
+        </pc:sldMkLst>
+        <pc:spChg chg="mod">
+          <ac:chgData name="Mohammed Fasha" userId="cc64f42d-a1a6-4f08-b97b-0c37f877119f" providerId="ADAL" clId="{161A7FAA-B398-4429-9FC2-656B0895AF0F}" dt="2025-07-16T08:12:50.396" v="164" actId="5793"/>
+          <ac:spMkLst>
+            <pc:docMk/>
+            <pc:sldMk cId="1427132372" sldId="479"/>
+            <ac:spMk id="2" creationId="{E56CB444-3023-BA2B-502A-E63C438605D8}"/>
+          </ac:spMkLst>
+        </pc:spChg>
+        <pc:spChg chg="mod">
+          <ac:chgData name="Mohammed Fasha" userId="cc64f42d-a1a6-4f08-b97b-0c37f877119f" providerId="ADAL" clId="{161A7FAA-B398-4429-9FC2-656B0895AF0F}" dt="2025-07-16T08:12:34.428" v="155" actId="113"/>
+          <ac:spMkLst>
+            <pc:docMk/>
+            <pc:sldMk cId="1427132372" sldId="479"/>
+            <ac:spMk id="3" creationId="{55B8EC88-FA32-80C6-9212-225795D1FE9E}"/>
+          </ac:spMkLst>
+        </pc:spChg>
+      </pc:sldChg>
+      <pc:sldChg chg="addSp delSp modSp new mod">
+        <pc:chgData name="Mohammed Fasha" userId="cc64f42d-a1a6-4f08-b97b-0c37f877119f" providerId="ADAL" clId="{161A7FAA-B398-4429-9FC2-656B0895AF0F}" dt="2025-07-16T08:15:31.546" v="209" actId="1076"/>
+        <pc:sldMkLst>
+          <pc:docMk/>
+          <pc:sldMk cId="3075052158" sldId="480"/>
+        </pc:sldMkLst>
+        <pc:spChg chg="add del mod">
+          <ac:chgData name="Mohammed Fasha" userId="cc64f42d-a1a6-4f08-b97b-0c37f877119f" providerId="ADAL" clId="{161A7FAA-B398-4429-9FC2-656B0895AF0F}" dt="2025-07-16T08:15:23.436" v="205" actId="14100"/>
+          <ac:spMkLst>
+            <pc:docMk/>
+            <pc:sldMk cId="3075052158" sldId="480"/>
+            <ac:spMk id="2" creationId="{D7723A21-97D0-9266-6B42-28CBEDC236D9}"/>
+          </ac:spMkLst>
+        </pc:spChg>
+        <pc:spChg chg="mod">
+          <ac:chgData name="Mohammed Fasha" userId="cc64f42d-a1a6-4f08-b97b-0c37f877119f" providerId="ADAL" clId="{161A7FAA-B398-4429-9FC2-656B0895AF0F}" dt="2025-07-16T08:13:33.725" v="185" actId="6549"/>
+          <ac:spMkLst>
+            <pc:docMk/>
+            <pc:sldMk cId="3075052158" sldId="480"/>
+            <ac:spMk id="3" creationId="{E520913F-E7B6-47CD-911A-B7E553D5285A}"/>
+          </ac:spMkLst>
+        </pc:spChg>
+        <pc:spChg chg="add mod">
+          <ac:chgData name="Mohammed Fasha" userId="cc64f42d-a1a6-4f08-b97b-0c37f877119f" providerId="ADAL" clId="{161A7FAA-B398-4429-9FC2-656B0895AF0F}" dt="2025-07-16T08:13:08.318" v="167"/>
+          <ac:spMkLst>
+            <pc:docMk/>
+            <pc:sldMk cId="3075052158" sldId="480"/>
+            <ac:spMk id="4" creationId="{5B28E922-3593-82D7-6A03-F52CCB4BFE39}"/>
+          </ac:spMkLst>
+        </pc:spChg>
+        <pc:picChg chg="add mod">
+          <ac:chgData name="Mohammed Fasha" userId="cc64f42d-a1a6-4f08-b97b-0c37f877119f" providerId="ADAL" clId="{161A7FAA-B398-4429-9FC2-656B0895AF0F}" dt="2025-07-16T08:15:31.546" v="209" actId="1076"/>
+          <ac:picMkLst>
+            <pc:docMk/>
+            <pc:sldMk cId="3075052158" sldId="480"/>
+            <ac:picMk id="5123" creationId="{7227A453-5C80-EF05-DBFF-BB24669D733C}"/>
+          </ac:picMkLst>
+        </pc:picChg>
+      </pc:sldChg>
+      <pc:sldChg chg="addSp modSp new mod">
+        <pc:chgData name="Mohammed Fasha" userId="cc64f42d-a1a6-4f08-b97b-0c37f877119f" providerId="ADAL" clId="{161A7FAA-B398-4429-9FC2-656B0895AF0F}" dt="2025-07-16T08:26:24.604" v="351" actId="1076"/>
+        <pc:sldMkLst>
+          <pc:docMk/>
+          <pc:sldMk cId="3717947773" sldId="481"/>
+        </pc:sldMkLst>
+        <pc:spChg chg="mod">
+          <ac:chgData name="Mohammed Fasha" userId="cc64f42d-a1a6-4f08-b97b-0c37f877119f" providerId="ADAL" clId="{161A7FAA-B398-4429-9FC2-656B0895AF0F}" dt="2025-07-16T08:20:53.969" v="256" actId="404"/>
+          <ac:spMkLst>
+            <pc:docMk/>
+            <pc:sldMk cId="3717947773" sldId="481"/>
+            <ac:spMk id="2" creationId="{ECC626B6-A902-6BF5-9290-D13B2FC57543}"/>
+          </ac:spMkLst>
+        </pc:spChg>
+        <pc:spChg chg="mod">
+          <ac:chgData name="Mohammed Fasha" userId="cc64f42d-a1a6-4f08-b97b-0c37f877119f" providerId="ADAL" clId="{161A7FAA-B398-4429-9FC2-656B0895AF0F}" dt="2025-07-16T08:19:58.582" v="247" actId="113"/>
+          <ac:spMkLst>
+            <pc:docMk/>
+            <pc:sldMk cId="3717947773" sldId="481"/>
+            <ac:spMk id="3" creationId="{E11FBCEE-3920-1390-A5A2-B8102DBEF6F8}"/>
+          </ac:spMkLst>
+        </pc:spChg>
+        <pc:spChg chg="add mod">
+          <ac:chgData name="Mohammed Fasha" userId="cc64f42d-a1a6-4f08-b97b-0c37f877119f" providerId="ADAL" clId="{161A7FAA-B398-4429-9FC2-656B0895AF0F}" dt="2025-07-16T08:23:56.687" v="348" actId="27636"/>
+          <ac:spMkLst>
+            <pc:docMk/>
+            <pc:sldMk cId="3717947773" sldId="481"/>
+            <ac:spMk id="5" creationId="{A8F843FB-6888-4116-3CF1-CFF8977AD640}"/>
+          </ac:spMkLst>
+        </pc:spChg>
+        <pc:picChg chg="add mod ord">
+          <ac:chgData name="Mohammed Fasha" userId="cc64f42d-a1a6-4f08-b97b-0c37f877119f" providerId="ADAL" clId="{161A7FAA-B398-4429-9FC2-656B0895AF0F}" dt="2025-07-16T08:21:27.138" v="339" actId="1076"/>
+          <ac:picMkLst>
+            <pc:docMk/>
+            <pc:sldMk cId="3717947773" sldId="481"/>
+            <ac:picMk id="4" creationId="{159964DC-0CDA-4C8C-1325-DEC0B312A24B}"/>
+          </ac:picMkLst>
+        </pc:picChg>
+        <pc:picChg chg="add mod">
+          <ac:chgData name="Mohammed Fasha" userId="cc64f42d-a1a6-4f08-b97b-0c37f877119f" providerId="ADAL" clId="{161A7FAA-B398-4429-9FC2-656B0895AF0F}" dt="2025-07-16T08:26:24.604" v="351" actId="1076"/>
+          <ac:picMkLst>
+            <pc:docMk/>
+            <pc:sldMk cId="3717947773" sldId="481"/>
+            <ac:picMk id="6146" creationId="{1E7C1A24-99FD-05FD-C2A7-F0B29742FF62}"/>
+          </ac:picMkLst>
+        </pc:picChg>
+      </pc:sldChg>
+      <pc:sldChg chg="new">
+        <pc:chgData name="Mohammed Fasha" userId="cc64f42d-a1a6-4f08-b97b-0c37f877119f" providerId="ADAL" clId="{161A7FAA-B398-4429-9FC2-656B0895AF0F}" dt="2025-07-16T08:15:43.528" v="211" actId="680"/>
+        <pc:sldMkLst>
+          <pc:docMk/>
+          <pc:sldMk cId="3941017664" sldId="482"/>
+        </pc:sldMkLst>
+      </pc:sldChg>
+      <pc:sldChg chg="new">
+        <pc:chgData name="Mohammed Fasha" userId="cc64f42d-a1a6-4f08-b97b-0c37f877119f" providerId="ADAL" clId="{161A7FAA-B398-4429-9FC2-656B0895AF0F}" dt="2025-07-16T08:15:43.712" v="212" actId="680"/>
+        <pc:sldMkLst>
+          <pc:docMk/>
+          <pc:sldMk cId="1291192180" sldId="483"/>
+        </pc:sldMkLst>
+      </pc:sldChg>
+      <pc:sldChg chg="addSp modSp new mod">
+        <pc:chgData name="Mohammed Fasha" userId="cc64f42d-a1a6-4f08-b97b-0c37f877119f" providerId="ADAL" clId="{161A7FAA-B398-4429-9FC2-656B0895AF0F}" dt="2025-07-16T08:19:15.788" v="238"/>
+        <pc:sldMkLst>
+          <pc:docMk/>
+          <pc:sldMk cId="1949621639" sldId="484"/>
+        </pc:sldMkLst>
+        <pc:spChg chg="mod">
+          <ac:chgData name="Mohammed Fasha" userId="cc64f42d-a1a6-4f08-b97b-0c37f877119f" providerId="ADAL" clId="{161A7FAA-B398-4429-9FC2-656B0895AF0F}" dt="2025-07-16T08:17:24.427" v="231" actId="14100"/>
+          <ac:spMkLst>
+            <pc:docMk/>
+            <pc:sldMk cId="1949621639" sldId="484"/>
+            <ac:spMk id="2" creationId="{00E50F6B-D0D0-409C-B437-2D7A32D8857A}"/>
+          </ac:spMkLst>
+        </pc:spChg>
+        <pc:spChg chg="mod">
+          <ac:chgData name="Mohammed Fasha" userId="cc64f42d-a1a6-4f08-b97b-0c37f877119f" providerId="ADAL" clId="{161A7FAA-B398-4429-9FC2-656B0895AF0F}" dt="2025-07-16T08:16:40.937" v="221" actId="113"/>
+          <ac:spMkLst>
+            <pc:docMk/>
+            <pc:sldMk cId="1949621639" sldId="484"/>
+            <ac:spMk id="3" creationId="{8AEB1D58-5352-F4F3-2A11-C6F2225E69D6}"/>
+          </ac:spMkLst>
+        </pc:spChg>
+        <pc:picChg chg="add mod">
+          <ac:chgData name="Mohammed Fasha" userId="cc64f42d-a1a6-4f08-b97b-0c37f877119f" providerId="ADAL" clId="{161A7FAA-B398-4429-9FC2-656B0895AF0F}" dt="2025-07-16T08:19:01.838" v="236" actId="1076"/>
+          <ac:picMkLst>
+            <pc:docMk/>
+            <pc:sldMk cId="1949621639" sldId="484"/>
+            <ac:picMk id="12" creationId="{ED72E220-66E3-C895-AA2B-7821BAB0B80F}"/>
+          </ac:picMkLst>
+        </pc:picChg>
+        <pc:picChg chg="add mod">
+          <ac:chgData name="Mohammed Fasha" userId="cc64f42d-a1a6-4f08-b97b-0c37f877119f" providerId="ADAL" clId="{161A7FAA-B398-4429-9FC2-656B0895AF0F}" dt="2025-07-16T08:19:15.788" v="238"/>
+          <ac:picMkLst>
+            <pc:docMk/>
+            <pc:sldMk cId="1949621639" sldId="484"/>
+            <ac:picMk id="13" creationId="{923AB4FC-8803-B130-E7FF-D6F9B65D8759}"/>
+          </ac:picMkLst>
+        </pc:picChg>
+      </pc:sldChg>
     </pc:docChg>
   </pc:docChgLst>
   <pc:docChgLst>
@@ -1902,7 +1632,7 @@
           <a:p>
             <a:fld id="{D83FB9BE-DA6C-46CF-8E77-0CE63E601AD4}" type="datetimeFigureOut">
               <a:rPr lang="en-US" smtClean="0"/>
-              <a:t>3/12/2025</a:t>
+              <a:t>7/16/2025</a:t>
             </a:fld>
             <a:endParaRPr lang="en-US"/>
           </a:p>
@@ -2100,7 +1830,7 @@
           <a:p>
             <a:fld id="{D83FB9BE-DA6C-46CF-8E77-0CE63E601AD4}" type="datetimeFigureOut">
               <a:rPr lang="en-US" smtClean="0"/>
-              <a:t>3/12/2025</a:t>
+              <a:t>7/16/2025</a:t>
             </a:fld>
             <a:endParaRPr lang="en-US"/>
           </a:p>
@@ -2308,7 +2038,7 @@
           <a:p>
             <a:fld id="{D83FB9BE-DA6C-46CF-8E77-0CE63E601AD4}" type="datetimeFigureOut">
               <a:rPr lang="en-US" smtClean="0"/>
-              <a:t>3/12/2025</a:t>
+              <a:t>7/16/2025</a:t>
             </a:fld>
             <a:endParaRPr lang="en-US"/>
           </a:p>
@@ -2721,7 +2451,7 @@
           <a:p>
             <a:fld id="{D83FB9BE-DA6C-46CF-8E77-0CE63E601AD4}" type="datetimeFigureOut">
               <a:rPr lang="en-US" smtClean="0"/>
-              <a:t>3/12/2025</a:t>
+              <a:t>7/16/2025</a:t>
             </a:fld>
             <a:endParaRPr lang="en-US"/>
           </a:p>
@@ -2986,7 +2716,7 @@
           <a:p>
             <a:fld id="{D83FB9BE-DA6C-46CF-8E77-0CE63E601AD4}" type="datetimeFigureOut">
               <a:rPr lang="en-US" smtClean="0"/>
-              <a:t>3/12/2025</a:t>
+              <a:t>7/16/2025</a:t>
             </a:fld>
             <a:endParaRPr lang="en-US"/>
           </a:p>
@@ -3398,7 +3128,7 @@
           <a:p>
             <a:fld id="{D83FB9BE-DA6C-46CF-8E77-0CE63E601AD4}" type="datetimeFigureOut">
               <a:rPr lang="en-US" smtClean="0"/>
-              <a:t>3/12/2025</a:t>
+              <a:t>7/16/2025</a:t>
             </a:fld>
             <a:endParaRPr lang="en-US"/>
           </a:p>
@@ -3539,7 +3269,7 @@
           <a:p>
             <a:fld id="{D83FB9BE-DA6C-46CF-8E77-0CE63E601AD4}" type="datetimeFigureOut">
               <a:rPr lang="en-US" smtClean="0"/>
-              <a:t>3/12/2025</a:t>
+              <a:t>7/16/2025</a:t>
             </a:fld>
             <a:endParaRPr lang="en-US"/>
           </a:p>
@@ -3652,7 +3382,7 @@
           <a:p>
             <a:fld id="{D83FB9BE-DA6C-46CF-8E77-0CE63E601AD4}" type="datetimeFigureOut">
               <a:rPr lang="en-US" smtClean="0"/>
-              <a:t>3/12/2025</a:t>
+              <a:t>7/16/2025</a:t>
             </a:fld>
             <a:endParaRPr lang="en-US"/>
           </a:p>
@@ -3963,7 +3693,7 @@
           <a:p>
             <a:fld id="{D83FB9BE-DA6C-46CF-8E77-0CE63E601AD4}" type="datetimeFigureOut">
               <a:rPr lang="en-US" smtClean="0"/>
-              <a:t>3/12/2025</a:t>
+              <a:t>7/16/2025</a:t>
             </a:fld>
             <a:endParaRPr lang="en-US"/>
           </a:p>
@@ -4251,7 +3981,7 @@
           <a:p>
             <a:fld id="{D83FB9BE-DA6C-46CF-8E77-0CE63E601AD4}" type="datetimeFigureOut">
               <a:rPr lang="en-US" smtClean="0"/>
-              <a:t>3/12/2025</a:t>
+              <a:t>7/16/2025</a:t>
             </a:fld>
             <a:endParaRPr lang="en-US"/>
           </a:p>
@@ -4492,7 +4222,7 @@
           <a:p>
             <a:fld id="{D83FB9BE-DA6C-46CF-8E77-0CE63E601AD4}" type="datetimeFigureOut">
               <a:rPr lang="en-US" smtClean="0"/>
-              <a:t>3/12/2025</a:t>
+              <a:t>7/16/2025</a:t>
             </a:fld>
             <a:endParaRPr lang="en-US"/>
           </a:p>
@@ -5148,6 +4878,1387 @@
   <p:cSld>
     <p:spTree>
       <p:nvGrpSpPr>
+        <p:cNvPr id="1" name=""/>
+        <p:cNvGrpSpPr/>
+        <p:nvPr/>
+      </p:nvGrpSpPr>
+      <p:grpSpPr>
+        <a:xfrm>
+          <a:off x="0" y="0"/>
+          <a:ext cx="0" cy="0"/>
+          <a:chOff x="0" y="0"/>
+          <a:chExt cx="0" cy="0"/>
+        </a:xfrm>
+      </p:grpSpPr>
+      <p:sp>
+        <p:nvSpPr>
+          <p:cNvPr id="2" name="Content Placeholder 1">
+            <a:extLst>
+              <a:ext uri="{FF2B5EF4-FFF2-40B4-BE49-F238E27FC236}">
+                <a16:creationId xmlns:a16="http://schemas.microsoft.com/office/drawing/2014/main" id="{00E50F6B-D0D0-409C-B437-2D7A32D8857A}"/>
+              </a:ext>
+            </a:extLst>
+          </p:cNvPr>
+          <p:cNvSpPr>
+            <a:spLocks noGrp="1"/>
+          </p:cNvSpPr>
+          <p:nvPr>
+            <p:ph idx="1"/>
+          </p:nvPr>
+        </p:nvSpPr>
+        <p:spPr>
+          <a:xfrm>
+            <a:off x="838200" y="1633491"/>
+            <a:ext cx="6063049" cy="5131294"/>
+          </a:xfrm>
+        </p:spPr>
+        <p:txBody>
+          <a:bodyPr>
+            <a:normAutofit/>
+          </a:bodyPr>
+          <a:lstStyle/>
+          <a:p>
+            <a:pPr marL="0" indent="0">
+              <a:buNone/>
+            </a:pPr>
+            <a:r>
+              <a:rPr lang="en-US" b="1" dirty="0"/>
+              <a:t>The Foundation of Linear Regression</a:t>
+            </a:r>
+          </a:p>
+          <a:p>
+            <a:r>
+              <a:rPr lang="en-US" b="1" dirty="0"/>
+              <a:t>OLS Principle:</a:t>
+            </a:r>
+            <a:r>
+              <a:rPr lang="en-US" dirty="0"/>
+              <a:t> Find the line that minimizes the sum of squared differences between observed and predicted values.</a:t>
+            </a:r>
+          </a:p>
+          <a:p>
+            <a:pPr marL="0" indent="0">
+              <a:buNone/>
+            </a:pPr>
+            <a:r>
+              <a:rPr lang="en-US" b="1" dirty="0"/>
+              <a:t>Why "Least Squares"?</a:t>
+            </a:r>
+            <a:endParaRPr lang="en-US" dirty="0"/>
+          </a:p>
+          <a:p>
+            <a:r>
+              <a:rPr lang="en-US" dirty="0"/>
+              <a:t>Squares prevent positive and negative errors from canceling out</a:t>
+            </a:r>
+          </a:p>
+          <a:p>
+            <a:r>
+              <a:rPr lang="en-US" dirty="0"/>
+              <a:t>Penalizes larger errors more heavily</a:t>
+            </a:r>
+          </a:p>
+          <a:p>
+            <a:r>
+              <a:rPr lang="en-US" dirty="0"/>
+              <a:t>Provides unique, mathematically optimal solution</a:t>
+            </a:r>
+          </a:p>
+          <a:p>
+            <a:endParaRPr lang="en-US" dirty="0"/>
+          </a:p>
+        </p:txBody>
+      </p:sp>
+      <p:sp>
+        <p:nvSpPr>
+          <p:cNvPr id="3" name="Title 2">
+            <a:extLst>
+              <a:ext uri="{FF2B5EF4-FFF2-40B4-BE49-F238E27FC236}">
+                <a16:creationId xmlns:a16="http://schemas.microsoft.com/office/drawing/2014/main" id="{8AEB1D58-5352-F4F3-2A11-C6F2225E69D6}"/>
+              </a:ext>
+            </a:extLst>
+          </p:cNvPr>
+          <p:cNvSpPr>
+            <a:spLocks noGrp="1"/>
+          </p:cNvSpPr>
+          <p:nvPr>
+            <p:ph type="title"/>
+          </p:nvPr>
+        </p:nvSpPr>
+        <p:spPr/>
+        <p:txBody>
+          <a:bodyPr>
+            <a:normAutofit/>
+          </a:bodyPr>
+          <a:lstStyle/>
+          <a:p>
+            <a:r>
+              <a:rPr lang="en-US" dirty="0"/>
+              <a:t>Ordinary Least Squares (OLS) Method</a:t>
+            </a:r>
+          </a:p>
+        </p:txBody>
+      </p:sp>
+      <p:pic>
+        <p:nvPicPr>
+          <p:cNvPr id="12" name="Picture 11">
+            <a:extLst>
+              <a:ext uri="{FF2B5EF4-FFF2-40B4-BE49-F238E27FC236}">
+                <a16:creationId xmlns:a16="http://schemas.microsoft.com/office/drawing/2014/main" id="{ED72E220-66E3-C895-AA2B-7821BAB0B80F}"/>
+              </a:ext>
+            </a:extLst>
+          </p:cNvPr>
+          <p:cNvPicPr>
+            <a:picLocks noChangeAspect="1"/>
+          </p:cNvPicPr>
+          <p:nvPr/>
+        </p:nvPicPr>
+        <p:blipFill>
+          <a:blip r:embed="rId2"/>
+          <a:stretch>
+            <a:fillRect/>
+          </a:stretch>
+        </p:blipFill>
+        <p:spPr>
+          <a:xfrm>
+            <a:off x="6741871" y="1633491"/>
+            <a:ext cx="4972665" cy="3910622"/>
+          </a:xfrm>
+          <a:prstGeom prst="rect">
+            <a:avLst/>
+          </a:prstGeom>
+        </p:spPr>
+      </p:pic>
+      <p:pic>
+        <p:nvPicPr>
+          <p:cNvPr id="13" name="Picture 12">
+            <a:extLst>
+              <a:ext uri="{FF2B5EF4-FFF2-40B4-BE49-F238E27FC236}">
+                <a16:creationId xmlns:a16="http://schemas.microsoft.com/office/drawing/2014/main" id="{923AB4FC-8803-B130-E7FF-D6F9B65D8759}"/>
+              </a:ext>
+            </a:extLst>
+          </p:cNvPr>
+          <p:cNvPicPr>
+            <a:picLocks noChangeAspect="1"/>
+          </p:cNvPicPr>
+          <p:nvPr/>
+        </p:nvPicPr>
+        <p:blipFill>
+          <a:blip r:embed="rId3"/>
+          <a:stretch>
+            <a:fillRect/>
+          </a:stretch>
+        </p:blipFill>
+        <p:spPr>
+          <a:xfrm>
+            <a:off x="8282966" y="5489997"/>
+            <a:ext cx="2349975" cy="1333957"/>
+          </a:xfrm>
+          <a:prstGeom prst="rect">
+            <a:avLst/>
+          </a:prstGeom>
+        </p:spPr>
+      </p:pic>
+    </p:spTree>
+    <p:extLst>
+      <p:ext uri="{BB962C8B-B14F-4D97-AF65-F5344CB8AC3E}">
+        <p14:creationId xmlns:p14="http://schemas.microsoft.com/office/powerpoint/2010/main" val="1949621639"/>
+      </p:ext>
+    </p:extLst>
+  </p:cSld>
+  <p:clrMapOvr>
+    <a:masterClrMapping/>
+  </p:clrMapOvr>
+</p:sld>
+</file>
+
+<file path=ppt/slides/slide11.xml><?xml version="1.0" encoding="utf-8"?>
+<p:sld xmlns:a="http://schemas.openxmlformats.org/drawingml/2006/main" xmlns:r="http://schemas.openxmlformats.org/officeDocument/2006/relationships" xmlns:p="http://schemas.openxmlformats.org/presentationml/2006/main">
+  <p:cSld>
+    <p:spTree>
+      <p:nvGrpSpPr>
+        <p:cNvPr id="1" name=""/>
+        <p:cNvGrpSpPr/>
+        <p:nvPr/>
+      </p:nvGrpSpPr>
+      <p:grpSpPr>
+        <a:xfrm>
+          <a:off x="0" y="0"/>
+          <a:ext cx="0" cy="0"/>
+          <a:chOff x="0" y="0"/>
+          <a:chExt cx="0" cy="0"/>
+        </a:xfrm>
+      </p:grpSpPr>
+      <p:pic>
+        <p:nvPicPr>
+          <p:cNvPr id="4" name="Picture 3">
+            <a:extLst>
+              <a:ext uri="{FF2B5EF4-FFF2-40B4-BE49-F238E27FC236}">
+                <a16:creationId xmlns:a16="http://schemas.microsoft.com/office/drawing/2014/main" id="{159964DC-0CDA-4C8C-1325-DEC0B312A24B}"/>
+              </a:ext>
+            </a:extLst>
+          </p:cNvPr>
+          <p:cNvPicPr>
+            <a:picLocks noChangeAspect="1"/>
+          </p:cNvPicPr>
+          <p:nvPr/>
+        </p:nvPicPr>
+        <p:blipFill>
+          <a:blip r:embed="rId2"/>
+          <a:stretch>
+            <a:fillRect/>
+          </a:stretch>
+        </p:blipFill>
+        <p:spPr>
+          <a:xfrm>
+            <a:off x="2302547" y="3406813"/>
+            <a:ext cx="3181794" cy="943107"/>
+          </a:xfrm>
+          <a:prstGeom prst="rect">
+            <a:avLst/>
+          </a:prstGeom>
+        </p:spPr>
+      </p:pic>
+      <p:sp>
+        <p:nvSpPr>
+          <p:cNvPr id="2" name="Content Placeholder 1">
+            <a:extLst>
+              <a:ext uri="{FF2B5EF4-FFF2-40B4-BE49-F238E27FC236}">
+                <a16:creationId xmlns:a16="http://schemas.microsoft.com/office/drawing/2014/main" id="{ECC626B6-A902-6BF5-9290-D13B2FC57543}"/>
+              </a:ext>
+            </a:extLst>
+          </p:cNvPr>
+          <p:cNvSpPr>
+            <a:spLocks noGrp="1"/>
+          </p:cNvSpPr>
+          <p:nvPr>
+            <p:ph idx="1"/>
+          </p:nvPr>
+        </p:nvSpPr>
+        <p:spPr>
+          <a:xfrm>
+            <a:off x="838200" y="1633491"/>
+            <a:ext cx="4722341" cy="2561628"/>
+          </a:xfrm>
+        </p:spPr>
+        <p:txBody>
+          <a:bodyPr>
+            <a:normAutofit/>
+          </a:bodyPr>
+          <a:lstStyle/>
+          <a:p>
+            <a:pPr marL="0" indent="0">
+              <a:buNone/>
+            </a:pPr>
+            <a:r>
+              <a:rPr lang="en-US" sz="2400" b="1" dirty="0"/>
+              <a:t>Measuring Prediction Quality</a:t>
+            </a:r>
+          </a:p>
+          <a:p>
+            <a:r>
+              <a:rPr lang="en-US" sz="2400" dirty="0"/>
+              <a:t>The </a:t>
+            </a:r>
+            <a:r>
+              <a:rPr lang="en-US" sz="2400" b="1" dirty="0"/>
+              <a:t>Mean Squared Error (MSE)</a:t>
+            </a:r>
+            <a:r>
+              <a:rPr lang="en-US" sz="2400" dirty="0"/>
+              <a:t> quantifies how well our model performs.</a:t>
+            </a:r>
+          </a:p>
+          <a:p>
+            <a:r>
+              <a:rPr lang="en-US" sz="2400" b="1" dirty="0"/>
+              <a:t>Formula:</a:t>
+            </a:r>
+            <a:endParaRPr lang="en-US" sz="2400" dirty="0"/>
+          </a:p>
+          <a:p>
+            <a:endParaRPr lang="en-US" sz="2400" dirty="0"/>
+          </a:p>
+        </p:txBody>
+      </p:sp>
+      <p:sp>
+        <p:nvSpPr>
+          <p:cNvPr id="3" name="Title 2">
+            <a:extLst>
+              <a:ext uri="{FF2B5EF4-FFF2-40B4-BE49-F238E27FC236}">
+                <a16:creationId xmlns:a16="http://schemas.microsoft.com/office/drawing/2014/main" id="{E11FBCEE-3920-1390-A5A2-B8102DBEF6F8}"/>
+              </a:ext>
+            </a:extLst>
+          </p:cNvPr>
+          <p:cNvSpPr>
+            <a:spLocks noGrp="1"/>
+          </p:cNvSpPr>
+          <p:nvPr>
+            <p:ph type="title"/>
+          </p:nvPr>
+        </p:nvSpPr>
+        <p:spPr/>
+        <p:txBody>
+          <a:bodyPr>
+            <a:normAutofit/>
+          </a:bodyPr>
+          <a:lstStyle/>
+          <a:p>
+            <a:r>
+              <a:rPr lang="en-US" dirty="0"/>
+              <a:t>Cost Function - Mean Squared Error</a:t>
+            </a:r>
+          </a:p>
+        </p:txBody>
+      </p:sp>
+      <p:sp>
+        <p:nvSpPr>
+          <p:cNvPr id="5" name="Content Placeholder 1">
+            <a:extLst>
+              <a:ext uri="{FF2B5EF4-FFF2-40B4-BE49-F238E27FC236}">
+                <a16:creationId xmlns:a16="http://schemas.microsoft.com/office/drawing/2014/main" id="{A8F843FB-6888-4116-3CF1-CFF8977AD640}"/>
+              </a:ext>
+            </a:extLst>
+          </p:cNvPr>
+          <p:cNvSpPr txBox="1">
+            <a:spLocks/>
+          </p:cNvSpPr>
+          <p:nvPr/>
+        </p:nvSpPr>
+        <p:spPr>
+          <a:xfrm>
+            <a:off x="990600" y="4349920"/>
+            <a:ext cx="7887730" cy="2561628"/>
+          </a:xfrm>
+          <a:prstGeom prst="rect">
+            <a:avLst/>
+          </a:prstGeom>
+        </p:spPr>
+        <p:txBody>
+          <a:bodyPr vert="horz" lIns="91440" tIns="45720" rIns="91440" bIns="45720" rtlCol="0">
+            <a:normAutofit/>
+          </a:bodyPr>
+          <a:lstStyle>
+            <a:lvl1pPr marL="228600" indent="-228600" algn="l" defTabSz="914400" rtl="0" eaLnBrk="1" latinLnBrk="0" hangingPunct="1">
+              <a:lnSpc>
+                <a:spcPct val="90000"/>
+              </a:lnSpc>
+              <a:spcBef>
+                <a:spcPts val="1000"/>
+              </a:spcBef>
+              <a:buFont typeface="Arial" panose="020B0604020202020204" pitchFamily="34" charset="0"/>
+              <a:buChar char="•"/>
+              <a:defRPr sz="2800" kern="1200">
+                <a:solidFill>
+                  <a:schemeClr val="tx1"/>
+                </a:solidFill>
+                <a:latin typeface="+mn-lt"/>
+                <a:ea typeface="+mn-ea"/>
+                <a:cs typeface="+mn-cs"/>
+              </a:defRPr>
+            </a:lvl1pPr>
+            <a:lvl2pPr marL="685800" indent="-228600" algn="l" defTabSz="914400" rtl="0" eaLnBrk="1" latinLnBrk="0" hangingPunct="1">
+              <a:lnSpc>
+                <a:spcPct val="90000"/>
+              </a:lnSpc>
+              <a:spcBef>
+                <a:spcPts val="500"/>
+              </a:spcBef>
+              <a:buFont typeface="Arial" panose="020B0604020202020204" pitchFamily="34" charset="0"/>
+              <a:buChar char="•"/>
+              <a:defRPr sz="2400" kern="1200">
+                <a:solidFill>
+                  <a:schemeClr val="tx1"/>
+                </a:solidFill>
+                <a:latin typeface="+mn-lt"/>
+                <a:ea typeface="+mn-ea"/>
+                <a:cs typeface="+mn-cs"/>
+              </a:defRPr>
+            </a:lvl2pPr>
+            <a:lvl3pPr marL="1143000" indent="-228600" algn="l" defTabSz="914400" rtl="0" eaLnBrk="1" latinLnBrk="0" hangingPunct="1">
+              <a:lnSpc>
+                <a:spcPct val="90000"/>
+              </a:lnSpc>
+              <a:spcBef>
+                <a:spcPts val="500"/>
+              </a:spcBef>
+              <a:buFont typeface="Arial" panose="020B0604020202020204" pitchFamily="34" charset="0"/>
+              <a:buChar char="•"/>
+              <a:defRPr sz="2000" kern="1200">
+                <a:solidFill>
+                  <a:schemeClr val="tx1"/>
+                </a:solidFill>
+                <a:latin typeface="+mn-lt"/>
+                <a:ea typeface="+mn-ea"/>
+                <a:cs typeface="+mn-cs"/>
+              </a:defRPr>
+            </a:lvl3pPr>
+            <a:lvl4pPr marL="1600200" indent="-228600" algn="l" defTabSz="914400" rtl="0" eaLnBrk="1" latinLnBrk="0" hangingPunct="1">
+              <a:lnSpc>
+                <a:spcPct val="90000"/>
+              </a:lnSpc>
+              <a:spcBef>
+                <a:spcPts val="500"/>
+              </a:spcBef>
+              <a:buFont typeface="Arial" panose="020B0604020202020204" pitchFamily="34" charset="0"/>
+              <a:buChar char="•"/>
+              <a:defRPr sz="1800" kern="1200">
+                <a:solidFill>
+                  <a:schemeClr val="tx1"/>
+                </a:solidFill>
+                <a:latin typeface="+mn-lt"/>
+                <a:ea typeface="+mn-ea"/>
+                <a:cs typeface="+mn-cs"/>
+              </a:defRPr>
+            </a:lvl4pPr>
+            <a:lvl5pPr marL="2057400" indent="-228600" algn="l" defTabSz="914400" rtl="0" eaLnBrk="1" latinLnBrk="0" hangingPunct="1">
+              <a:lnSpc>
+                <a:spcPct val="90000"/>
+              </a:lnSpc>
+              <a:spcBef>
+                <a:spcPts val="500"/>
+              </a:spcBef>
+              <a:buFont typeface="Arial" panose="020B0604020202020204" pitchFamily="34" charset="0"/>
+              <a:buChar char="•"/>
+              <a:defRPr sz="1800" kern="1200">
+                <a:solidFill>
+                  <a:schemeClr val="tx1"/>
+                </a:solidFill>
+                <a:latin typeface="+mn-lt"/>
+                <a:ea typeface="+mn-ea"/>
+                <a:cs typeface="+mn-cs"/>
+              </a:defRPr>
+            </a:lvl5pPr>
+            <a:lvl6pPr marL="2514600" indent="-228600" algn="l" defTabSz="914400" rtl="0" eaLnBrk="1" latinLnBrk="0" hangingPunct="1">
+              <a:lnSpc>
+                <a:spcPct val="90000"/>
+              </a:lnSpc>
+              <a:spcBef>
+                <a:spcPts val="500"/>
+              </a:spcBef>
+              <a:buFont typeface="Arial" panose="020B0604020202020204" pitchFamily="34" charset="0"/>
+              <a:buChar char="•"/>
+              <a:defRPr sz="1800" kern="1200">
+                <a:solidFill>
+                  <a:schemeClr val="tx1"/>
+                </a:solidFill>
+                <a:latin typeface="+mn-lt"/>
+                <a:ea typeface="+mn-ea"/>
+                <a:cs typeface="+mn-cs"/>
+              </a:defRPr>
+            </a:lvl6pPr>
+            <a:lvl7pPr marL="2971800" indent="-228600" algn="l" defTabSz="914400" rtl="0" eaLnBrk="1" latinLnBrk="0" hangingPunct="1">
+              <a:lnSpc>
+                <a:spcPct val="90000"/>
+              </a:lnSpc>
+              <a:spcBef>
+                <a:spcPts val="500"/>
+              </a:spcBef>
+              <a:buFont typeface="Arial" panose="020B0604020202020204" pitchFamily="34" charset="0"/>
+              <a:buChar char="•"/>
+              <a:defRPr sz="1800" kern="1200">
+                <a:solidFill>
+                  <a:schemeClr val="tx1"/>
+                </a:solidFill>
+                <a:latin typeface="+mn-lt"/>
+                <a:ea typeface="+mn-ea"/>
+                <a:cs typeface="+mn-cs"/>
+              </a:defRPr>
+            </a:lvl7pPr>
+            <a:lvl8pPr marL="3429000" indent="-228600" algn="l" defTabSz="914400" rtl="0" eaLnBrk="1" latinLnBrk="0" hangingPunct="1">
+              <a:lnSpc>
+                <a:spcPct val="90000"/>
+              </a:lnSpc>
+              <a:spcBef>
+                <a:spcPts val="500"/>
+              </a:spcBef>
+              <a:buFont typeface="Arial" panose="020B0604020202020204" pitchFamily="34" charset="0"/>
+              <a:buChar char="•"/>
+              <a:defRPr sz="1800" kern="1200">
+                <a:solidFill>
+                  <a:schemeClr val="tx1"/>
+                </a:solidFill>
+                <a:latin typeface="+mn-lt"/>
+                <a:ea typeface="+mn-ea"/>
+                <a:cs typeface="+mn-cs"/>
+              </a:defRPr>
+            </a:lvl8pPr>
+            <a:lvl9pPr marL="3886200" indent="-228600" algn="l" defTabSz="914400" rtl="0" eaLnBrk="1" latinLnBrk="0" hangingPunct="1">
+              <a:lnSpc>
+                <a:spcPct val="90000"/>
+              </a:lnSpc>
+              <a:spcBef>
+                <a:spcPts val="500"/>
+              </a:spcBef>
+              <a:buFont typeface="Arial" panose="020B0604020202020204" pitchFamily="34" charset="0"/>
+              <a:buChar char="•"/>
+              <a:defRPr sz="1800" kern="1200">
+                <a:solidFill>
+                  <a:schemeClr val="tx1"/>
+                </a:solidFill>
+                <a:latin typeface="+mn-lt"/>
+                <a:ea typeface="+mn-ea"/>
+                <a:cs typeface="+mn-cs"/>
+              </a:defRPr>
+            </a:lvl9pPr>
+          </a:lstStyle>
+          <a:p>
+            <a:pPr marL="0" indent="0">
+              <a:buNone/>
+            </a:pPr>
+            <a:r>
+              <a:rPr lang="en-US" sz="2400" b="1" dirty="0"/>
+              <a:t>Key Points:</a:t>
+            </a:r>
+            <a:endParaRPr lang="en-US" sz="2400" dirty="0"/>
+          </a:p>
+          <a:p>
+            <a:r>
+              <a:rPr lang="en-US" sz="2400" dirty="0"/>
+              <a:t>Lower MSE = Better model performance</a:t>
+            </a:r>
+          </a:p>
+          <a:p>
+            <a:r>
+              <a:rPr lang="en-US" sz="2400" dirty="0"/>
+              <a:t>Units are squared (e.g., dollars² for price prediction)</a:t>
+            </a:r>
+          </a:p>
+          <a:p>
+            <a:r>
+              <a:rPr lang="en-US" sz="2400" dirty="0"/>
+              <a:t>Always positive (due to squaring)</a:t>
+            </a:r>
+          </a:p>
+          <a:p>
+            <a:r>
+              <a:rPr lang="en-US" sz="2400" dirty="0"/>
+              <a:t>Heavily penalizes large errors</a:t>
+            </a:r>
+          </a:p>
+        </p:txBody>
+      </p:sp>
+      <p:pic>
+        <p:nvPicPr>
+          <p:cNvPr id="6146" name="Picture 2" descr="Linear Regression and Applications in Business | by Sarrama Kamal | Medium">
+            <a:extLst>
+              <a:ext uri="{FF2B5EF4-FFF2-40B4-BE49-F238E27FC236}">
+                <a16:creationId xmlns:a16="http://schemas.microsoft.com/office/drawing/2014/main" id="{1E7C1A24-99FD-05FD-C2A7-F0B29742FF62}"/>
+              </a:ext>
+            </a:extLst>
+          </p:cNvPr>
+          <p:cNvPicPr>
+            <a:picLocks noChangeAspect="1" noChangeArrowheads="1"/>
+          </p:cNvPicPr>
+          <p:nvPr/>
+        </p:nvPicPr>
+        <p:blipFill>
+          <a:blip r:embed="rId3">
+            <a:extLst>
+              <a:ext uri="{28A0092B-C50C-407E-A947-70E740481C1C}">
+                <a14:useLocalDpi xmlns:a14="http://schemas.microsoft.com/office/drawing/2010/main" val="0"/>
+              </a:ext>
+            </a:extLst>
+          </a:blip>
+          <a:srcRect/>
+          <a:stretch>
+            <a:fillRect/>
+          </a:stretch>
+        </p:blipFill>
+        <p:spPr bwMode="auto">
+          <a:xfrm>
+            <a:off x="6514144" y="1777357"/>
+            <a:ext cx="5127980" cy="2417762"/>
+          </a:xfrm>
+          <a:prstGeom prst="rect">
+            <a:avLst/>
+          </a:prstGeom>
+          <a:noFill/>
+          <a:extLst>
+            <a:ext uri="{909E8E84-426E-40DD-AFC4-6F175D3DCCD1}">
+              <a14:hiddenFill xmlns:a14="http://schemas.microsoft.com/office/drawing/2010/main">
+                <a:solidFill>
+                  <a:srgbClr val="FFFFFF"/>
+                </a:solidFill>
+              </a14:hiddenFill>
+            </a:ext>
+          </a:extLst>
+        </p:spPr>
+      </p:pic>
+    </p:spTree>
+    <p:extLst>
+      <p:ext uri="{BB962C8B-B14F-4D97-AF65-F5344CB8AC3E}">
+        <p14:creationId xmlns:p14="http://schemas.microsoft.com/office/powerpoint/2010/main" val="3717947773"/>
+      </p:ext>
+    </p:extLst>
+  </p:cSld>
+  <p:clrMapOvr>
+    <a:masterClrMapping/>
+  </p:clrMapOvr>
+</p:sld>
+</file>
+
+<file path=ppt/slides/slide12.xml><?xml version="1.0" encoding="utf-8"?>
+<p:sld xmlns:a="http://schemas.openxmlformats.org/drawingml/2006/main" xmlns:r="http://schemas.openxmlformats.org/officeDocument/2006/relationships" xmlns:p="http://schemas.openxmlformats.org/presentationml/2006/main">
+  <p:cSld>
+    <p:spTree>
+      <p:nvGrpSpPr>
+        <p:cNvPr id="1" name="">
+          <a:extLst>
+            <a:ext uri="{FF2B5EF4-FFF2-40B4-BE49-F238E27FC236}">
+              <a16:creationId xmlns:a16="http://schemas.microsoft.com/office/drawing/2014/main" id="{10984685-A82D-7DC6-6817-68AEC3E64A5D}"/>
+            </a:ext>
+          </a:extLst>
+        </p:cNvPr>
+        <p:cNvGrpSpPr/>
+        <p:nvPr/>
+      </p:nvGrpSpPr>
+      <p:grpSpPr>
+        <a:xfrm>
+          <a:off x="0" y="0"/>
+          <a:ext cx="0" cy="0"/>
+          <a:chOff x="0" y="0"/>
+          <a:chExt cx="0" cy="0"/>
+        </a:xfrm>
+      </p:grpSpPr>
+      <p:sp>
+        <p:nvSpPr>
+          <p:cNvPr id="3" name="Title 2">
+            <a:extLst>
+              <a:ext uri="{FF2B5EF4-FFF2-40B4-BE49-F238E27FC236}">
+                <a16:creationId xmlns:a16="http://schemas.microsoft.com/office/drawing/2014/main" id="{7962BA90-F130-E048-0E94-9108E2EC86CE}"/>
+              </a:ext>
+            </a:extLst>
+          </p:cNvPr>
+          <p:cNvSpPr>
+            <a:spLocks noGrp="1"/>
+          </p:cNvSpPr>
+          <p:nvPr>
+            <p:ph type="title"/>
+          </p:nvPr>
+        </p:nvSpPr>
+        <p:spPr/>
+        <p:txBody>
+          <a:bodyPr/>
+          <a:lstStyle/>
+          <a:p>
+            <a:r>
+              <a:rPr lang="en-US" dirty="0"/>
+              <a:t>Solving Linear Regression with the Closed-Form Solution</a:t>
+            </a:r>
+          </a:p>
+        </p:txBody>
+      </p:sp>
+      <p:pic>
+        <p:nvPicPr>
+          <p:cNvPr id="11" name="Content Placeholder 10">
+            <a:extLst>
+              <a:ext uri="{FF2B5EF4-FFF2-40B4-BE49-F238E27FC236}">
+                <a16:creationId xmlns:a16="http://schemas.microsoft.com/office/drawing/2014/main" id="{B6FB3ED4-D6F0-A4DD-2E87-333BC4BCB751}"/>
+              </a:ext>
+            </a:extLst>
+          </p:cNvPr>
+          <p:cNvPicPr>
+            <a:picLocks noGrp="1" noChangeAspect="1"/>
+          </p:cNvPicPr>
+          <p:nvPr>
+            <p:ph idx="1"/>
+          </p:nvPr>
+        </p:nvPicPr>
+        <p:blipFill>
+          <a:blip r:embed="rId2"/>
+          <a:stretch>
+            <a:fillRect/>
+          </a:stretch>
+        </p:blipFill>
+        <p:spPr>
+          <a:xfrm>
+            <a:off x="6936549" y="1789357"/>
+            <a:ext cx="4417251" cy="4247356"/>
+          </a:xfrm>
+        </p:spPr>
+      </p:pic>
+      <p:sp>
+        <p:nvSpPr>
+          <p:cNvPr id="15" name="Content Placeholder 1">
+            <a:extLst>
+              <a:ext uri="{FF2B5EF4-FFF2-40B4-BE49-F238E27FC236}">
+                <a16:creationId xmlns:a16="http://schemas.microsoft.com/office/drawing/2014/main" id="{16489CD5-E694-96CA-6EE8-2DA9D775D58C}"/>
+              </a:ext>
+            </a:extLst>
+          </p:cNvPr>
+          <p:cNvSpPr txBox="1">
+            <a:spLocks/>
+          </p:cNvSpPr>
+          <p:nvPr/>
+        </p:nvSpPr>
+        <p:spPr>
+          <a:xfrm>
+            <a:off x="838200" y="1789357"/>
+            <a:ext cx="5902411" cy="4247356"/>
+          </a:xfrm>
+          <a:prstGeom prst="rect">
+            <a:avLst/>
+          </a:prstGeom>
+        </p:spPr>
+        <p:txBody>
+          <a:bodyPr vert="horz" lIns="91440" tIns="45720" rIns="91440" bIns="45720" rtlCol="0">
+            <a:normAutofit fontScale="85000" lnSpcReduction="10000"/>
+          </a:bodyPr>
+          <a:lstStyle>
+            <a:lvl1pPr marL="228600" indent="-228600" algn="l" defTabSz="914400" rtl="0" eaLnBrk="1" latinLnBrk="0" hangingPunct="1">
+              <a:lnSpc>
+                <a:spcPct val="90000"/>
+              </a:lnSpc>
+              <a:spcBef>
+                <a:spcPts val="1000"/>
+              </a:spcBef>
+              <a:buFont typeface="Arial" panose="020B0604020202020204" pitchFamily="34" charset="0"/>
+              <a:buChar char="•"/>
+              <a:defRPr sz="2800" kern="1200">
+                <a:solidFill>
+                  <a:schemeClr val="tx1"/>
+                </a:solidFill>
+                <a:latin typeface="+mn-lt"/>
+                <a:ea typeface="+mn-ea"/>
+                <a:cs typeface="+mn-cs"/>
+              </a:defRPr>
+            </a:lvl1pPr>
+            <a:lvl2pPr marL="685800" indent="-228600" algn="l" defTabSz="914400" rtl="0" eaLnBrk="1" latinLnBrk="0" hangingPunct="1">
+              <a:lnSpc>
+                <a:spcPct val="90000"/>
+              </a:lnSpc>
+              <a:spcBef>
+                <a:spcPts val="500"/>
+              </a:spcBef>
+              <a:buFont typeface="Arial" panose="020B0604020202020204" pitchFamily="34" charset="0"/>
+              <a:buChar char="•"/>
+              <a:defRPr sz="2400" kern="1200">
+                <a:solidFill>
+                  <a:schemeClr val="tx1"/>
+                </a:solidFill>
+                <a:latin typeface="+mn-lt"/>
+                <a:ea typeface="+mn-ea"/>
+                <a:cs typeface="+mn-cs"/>
+              </a:defRPr>
+            </a:lvl2pPr>
+            <a:lvl3pPr marL="1143000" indent="-228600" algn="l" defTabSz="914400" rtl="0" eaLnBrk="1" latinLnBrk="0" hangingPunct="1">
+              <a:lnSpc>
+                <a:spcPct val="90000"/>
+              </a:lnSpc>
+              <a:spcBef>
+                <a:spcPts val="500"/>
+              </a:spcBef>
+              <a:buFont typeface="Arial" panose="020B0604020202020204" pitchFamily="34" charset="0"/>
+              <a:buChar char="•"/>
+              <a:defRPr sz="2000" kern="1200">
+                <a:solidFill>
+                  <a:schemeClr val="tx1"/>
+                </a:solidFill>
+                <a:latin typeface="+mn-lt"/>
+                <a:ea typeface="+mn-ea"/>
+                <a:cs typeface="+mn-cs"/>
+              </a:defRPr>
+            </a:lvl3pPr>
+            <a:lvl4pPr marL="1600200" indent="-228600" algn="l" defTabSz="914400" rtl="0" eaLnBrk="1" latinLnBrk="0" hangingPunct="1">
+              <a:lnSpc>
+                <a:spcPct val="90000"/>
+              </a:lnSpc>
+              <a:spcBef>
+                <a:spcPts val="500"/>
+              </a:spcBef>
+              <a:buFont typeface="Arial" panose="020B0604020202020204" pitchFamily="34" charset="0"/>
+              <a:buChar char="•"/>
+              <a:defRPr sz="1800" kern="1200">
+                <a:solidFill>
+                  <a:schemeClr val="tx1"/>
+                </a:solidFill>
+                <a:latin typeface="+mn-lt"/>
+                <a:ea typeface="+mn-ea"/>
+                <a:cs typeface="+mn-cs"/>
+              </a:defRPr>
+            </a:lvl4pPr>
+            <a:lvl5pPr marL="2057400" indent="-228600" algn="l" defTabSz="914400" rtl="0" eaLnBrk="1" latinLnBrk="0" hangingPunct="1">
+              <a:lnSpc>
+                <a:spcPct val="90000"/>
+              </a:lnSpc>
+              <a:spcBef>
+                <a:spcPts val="500"/>
+              </a:spcBef>
+              <a:buFont typeface="Arial" panose="020B0604020202020204" pitchFamily="34" charset="0"/>
+              <a:buChar char="•"/>
+              <a:defRPr sz="1800" kern="1200">
+                <a:solidFill>
+                  <a:schemeClr val="tx1"/>
+                </a:solidFill>
+                <a:latin typeface="+mn-lt"/>
+                <a:ea typeface="+mn-ea"/>
+                <a:cs typeface="+mn-cs"/>
+              </a:defRPr>
+            </a:lvl5pPr>
+            <a:lvl6pPr marL="2514600" indent="-228600" algn="l" defTabSz="914400" rtl="0" eaLnBrk="1" latinLnBrk="0" hangingPunct="1">
+              <a:lnSpc>
+                <a:spcPct val="90000"/>
+              </a:lnSpc>
+              <a:spcBef>
+                <a:spcPts val="500"/>
+              </a:spcBef>
+              <a:buFont typeface="Arial" panose="020B0604020202020204" pitchFamily="34" charset="0"/>
+              <a:buChar char="•"/>
+              <a:defRPr sz="1800" kern="1200">
+                <a:solidFill>
+                  <a:schemeClr val="tx1"/>
+                </a:solidFill>
+                <a:latin typeface="+mn-lt"/>
+                <a:ea typeface="+mn-ea"/>
+                <a:cs typeface="+mn-cs"/>
+              </a:defRPr>
+            </a:lvl6pPr>
+            <a:lvl7pPr marL="2971800" indent="-228600" algn="l" defTabSz="914400" rtl="0" eaLnBrk="1" latinLnBrk="0" hangingPunct="1">
+              <a:lnSpc>
+                <a:spcPct val="90000"/>
+              </a:lnSpc>
+              <a:spcBef>
+                <a:spcPts val="500"/>
+              </a:spcBef>
+              <a:buFont typeface="Arial" panose="020B0604020202020204" pitchFamily="34" charset="0"/>
+              <a:buChar char="•"/>
+              <a:defRPr sz="1800" kern="1200">
+                <a:solidFill>
+                  <a:schemeClr val="tx1"/>
+                </a:solidFill>
+                <a:latin typeface="+mn-lt"/>
+                <a:ea typeface="+mn-ea"/>
+                <a:cs typeface="+mn-cs"/>
+              </a:defRPr>
+            </a:lvl7pPr>
+            <a:lvl8pPr marL="3429000" indent="-228600" algn="l" defTabSz="914400" rtl="0" eaLnBrk="1" latinLnBrk="0" hangingPunct="1">
+              <a:lnSpc>
+                <a:spcPct val="90000"/>
+              </a:lnSpc>
+              <a:spcBef>
+                <a:spcPts val="500"/>
+              </a:spcBef>
+              <a:buFont typeface="Arial" panose="020B0604020202020204" pitchFamily="34" charset="0"/>
+              <a:buChar char="•"/>
+              <a:defRPr sz="1800" kern="1200">
+                <a:solidFill>
+                  <a:schemeClr val="tx1"/>
+                </a:solidFill>
+                <a:latin typeface="+mn-lt"/>
+                <a:ea typeface="+mn-ea"/>
+                <a:cs typeface="+mn-cs"/>
+              </a:defRPr>
+            </a:lvl8pPr>
+            <a:lvl9pPr marL="3886200" indent="-228600" algn="l" defTabSz="914400" rtl="0" eaLnBrk="1" latinLnBrk="0" hangingPunct="1">
+              <a:lnSpc>
+                <a:spcPct val="90000"/>
+              </a:lnSpc>
+              <a:spcBef>
+                <a:spcPts val="500"/>
+              </a:spcBef>
+              <a:buFont typeface="Arial" panose="020B0604020202020204" pitchFamily="34" charset="0"/>
+              <a:buChar char="•"/>
+              <a:defRPr sz="1800" kern="1200">
+                <a:solidFill>
+                  <a:schemeClr val="tx1"/>
+                </a:solidFill>
+                <a:latin typeface="+mn-lt"/>
+                <a:ea typeface="+mn-ea"/>
+                <a:cs typeface="+mn-cs"/>
+              </a:defRPr>
+            </a:lvl9pPr>
+          </a:lstStyle>
+          <a:p>
+            <a:r>
+              <a:rPr lang="en-US" sz="2000" dirty="0"/>
+              <a:t>The closed-form solution is efficient for small to medium-sized datasets, especially in </a:t>
+            </a:r>
+            <a:r>
+              <a:rPr lang="en-US" sz="2000" b="1" dirty="0"/>
+              <a:t>simple linear regression</a:t>
+            </a:r>
+            <a:r>
+              <a:rPr lang="en-US" sz="2000" dirty="0"/>
+              <a:t>, where slope and intercept can be computed directly without matrix operations.</a:t>
+            </a:r>
+          </a:p>
+          <a:p>
+            <a:r>
+              <a:rPr lang="en-US" sz="2000" dirty="0"/>
+              <a:t>However, for </a:t>
+            </a:r>
+            <a:r>
+              <a:rPr lang="en-US" sz="2000" b="1" dirty="0"/>
+              <a:t>multiple linear regression</a:t>
+            </a:r>
+            <a:r>
+              <a:rPr lang="en-US" sz="2000" dirty="0"/>
+              <a:t>, the closed-form solution involves computing the inverse of X^T.X, which becomes computationally expensive as dataset size and dimensionality grow.</a:t>
+            </a:r>
+          </a:p>
+          <a:p>
+            <a:pPr marL="0" indent="0">
+              <a:buNone/>
+            </a:pPr>
+            <a:r>
+              <a:rPr lang="en-US" sz="2000" dirty="0"/>
+              <a:t>It works well when:</a:t>
+            </a:r>
+          </a:p>
+          <a:p>
+            <a:r>
+              <a:rPr lang="en-US" sz="2000" dirty="0"/>
+              <a:t>The dataset is small (typically up to a few thousand rows).</a:t>
+            </a:r>
+          </a:p>
+          <a:p>
+            <a:r>
+              <a:rPr lang="en-US" sz="2000" dirty="0"/>
+              <a:t>The number of features is low.</a:t>
+            </a:r>
+          </a:p>
+          <a:p>
+            <a:r>
+              <a:rPr lang="en-US" sz="2000" dirty="0"/>
+              <a:t>There is no multicollinearity (i.e., features are not highly correlated).</a:t>
+            </a:r>
+          </a:p>
+          <a:p>
+            <a:pPr marL="0" indent="0">
+              <a:buNone/>
+            </a:pPr>
+            <a:r>
+              <a:rPr lang="en-US" sz="2000" dirty="0"/>
+              <a:t>For larger or more complex problems, </a:t>
+            </a:r>
+            <a:r>
+              <a:rPr lang="en-US" sz="2000" b="1" dirty="0"/>
+              <a:t>iterative methods</a:t>
+            </a:r>
+            <a:r>
+              <a:rPr lang="en-US" sz="2000" dirty="0"/>
+              <a:t> like </a:t>
+            </a:r>
+            <a:r>
+              <a:rPr lang="en-US" sz="2000" b="1" dirty="0"/>
+              <a:t>Gradient Descent</a:t>
+            </a:r>
+            <a:r>
+              <a:rPr lang="en-US" sz="2000" dirty="0"/>
+              <a:t> are preferred due to their scalability and efficiency.</a:t>
+            </a:r>
+          </a:p>
+          <a:p>
+            <a:endParaRPr lang="en-US" sz="2000" dirty="0"/>
+          </a:p>
+        </p:txBody>
+      </p:sp>
+      <p:pic>
+        <p:nvPicPr>
+          <p:cNvPr id="1026" name="Picture 2" descr="Why Use Python? - Full Stack Python">
+            <a:hlinkClick r:id="rId3"/>
+            <a:extLst>
+              <a:ext uri="{FF2B5EF4-FFF2-40B4-BE49-F238E27FC236}">
+                <a16:creationId xmlns:a16="http://schemas.microsoft.com/office/drawing/2014/main" id="{86CE7E24-5203-202C-96DE-DAADDEBAC033}"/>
+              </a:ext>
+            </a:extLst>
+          </p:cNvPr>
+          <p:cNvPicPr>
+            <a:picLocks noChangeAspect="1" noChangeArrowheads="1"/>
+          </p:cNvPicPr>
+          <p:nvPr/>
+        </p:nvPicPr>
+        <p:blipFill>
+          <a:blip r:embed="rId4">
+            <a:extLst>
+              <a:ext uri="{28A0092B-C50C-407E-A947-70E740481C1C}">
+                <a14:useLocalDpi xmlns:a14="http://schemas.microsoft.com/office/drawing/2010/main" val="0"/>
+              </a:ext>
+            </a:extLst>
+          </a:blip>
+          <a:srcRect/>
+          <a:stretch>
+            <a:fillRect/>
+          </a:stretch>
+        </p:blipFill>
+        <p:spPr bwMode="auto">
+          <a:xfrm>
+            <a:off x="838200" y="6280339"/>
+            <a:ext cx="1492624" cy="486147"/>
+          </a:xfrm>
+          <a:prstGeom prst="rect">
+            <a:avLst/>
+          </a:prstGeom>
+          <a:noFill/>
+          <a:extLst>
+            <a:ext uri="{909E8E84-426E-40DD-AFC4-6F175D3DCCD1}">
+              <a14:hiddenFill xmlns:a14="http://schemas.microsoft.com/office/drawing/2010/main">
+                <a:solidFill>
+                  <a:srgbClr val="FFFFFF"/>
+                </a:solidFill>
+              </a14:hiddenFill>
+            </a:ext>
+          </a:extLst>
+        </p:spPr>
+      </p:pic>
+    </p:spTree>
+    <p:extLst>
+      <p:ext uri="{BB962C8B-B14F-4D97-AF65-F5344CB8AC3E}">
+        <p14:creationId xmlns:p14="http://schemas.microsoft.com/office/powerpoint/2010/main" val="2248227231"/>
+      </p:ext>
+    </p:extLst>
+  </p:cSld>
+  <p:clrMapOvr>
+    <a:masterClrMapping/>
+  </p:clrMapOvr>
+</p:sld>
+</file>
+
+<file path=ppt/slides/slide13.xml><?xml version="1.0" encoding="utf-8"?>
+<p:sld xmlns:a="http://schemas.openxmlformats.org/drawingml/2006/main" xmlns:r="http://schemas.openxmlformats.org/officeDocument/2006/relationships" xmlns:p="http://schemas.openxmlformats.org/presentationml/2006/main">
+  <p:cSld>
+    <p:spTree>
+      <p:nvGrpSpPr>
+        <p:cNvPr id="1" name=""/>
+        <p:cNvGrpSpPr/>
+        <p:nvPr/>
+      </p:nvGrpSpPr>
+      <p:grpSpPr>
+        <a:xfrm>
+          <a:off x="0" y="0"/>
+          <a:ext cx="0" cy="0"/>
+          <a:chOff x="0" y="0"/>
+          <a:chExt cx="0" cy="0"/>
+        </a:xfrm>
+      </p:grpSpPr>
+      <p:sp>
+        <p:nvSpPr>
+          <p:cNvPr id="2" name="Content Placeholder 1">
+            <a:extLst>
+              <a:ext uri="{FF2B5EF4-FFF2-40B4-BE49-F238E27FC236}">
+                <a16:creationId xmlns:a16="http://schemas.microsoft.com/office/drawing/2014/main" id="{4AB508A7-8888-D77B-B430-86487FE1DB28}"/>
+              </a:ext>
+            </a:extLst>
+          </p:cNvPr>
+          <p:cNvSpPr>
+            <a:spLocks noGrp="1"/>
+          </p:cNvSpPr>
+          <p:nvPr>
+            <p:ph idx="1"/>
+          </p:nvPr>
+        </p:nvSpPr>
+        <p:spPr/>
+        <p:txBody>
+          <a:bodyPr/>
+          <a:lstStyle/>
+          <a:p>
+            <a:endParaRPr lang="en-US"/>
+          </a:p>
+        </p:txBody>
+      </p:sp>
+      <p:sp>
+        <p:nvSpPr>
+          <p:cNvPr id="3" name="Title 2">
+            <a:extLst>
+              <a:ext uri="{FF2B5EF4-FFF2-40B4-BE49-F238E27FC236}">
+                <a16:creationId xmlns:a16="http://schemas.microsoft.com/office/drawing/2014/main" id="{28A4CF1C-C04B-6B0E-66D9-A9DDA7F6AA70}"/>
+              </a:ext>
+            </a:extLst>
+          </p:cNvPr>
+          <p:cNvSpPr>
+            <a:spLocks noGrp="1"/>
+          </p:cNvSpPr>
+          <p:nvPr>
+            <p:ph type="title"/>
+          </p:nvPr>
+        </p:nvSpPr>
+        <p:spPr/>
+        <p:txBody>
+          <a:bodyPr/>
+          <a:lstStyle/>
+          <a:p>
+            <a:endParaRPr lang="en-US"/>
+          </a:p>
+        </p:txBody>
+      </p:sp>
+    </p:spTree>
+    <p:extLst>
+      <p:ext uri="{BB962C8B-B14F-4D97-AF65-F5344CB8AC3E}">
+        <p14:creationId xmlns:p14="http://schemas.microsoft.com/office/powerpoint/2010/main" val="3941017664"/>
+      </p:ext>
+    </p:extLst>
+  </p:cSld>
+  <p:clrMapOvr>
+    <a:masterClrMapping/>
+  </p:clrMapOvr>
+</p:sld>
+</file>
+
+<file path=ppt/slides/slide14.xml><?xml version="1.0" encoding="utf-8"?>
+<p:sld xmlns:a="http://schemas.openxmlformats.org/drawingml/2006/main" xmlns:r="http://schemas.openxmlformats.org/officeDocument/2006/relationships" xmlns:p="http://schemas.openxmlformats.org/presentationml/2006/main">
+  <p:cSld>
+    <p:spTree>
+      <p:nvGrpSpPr>
+        <p:cNvPr id="1" name=""/>
+        <p:cNvGrpSpPr/>
+        <p:nvPr/>
+      </p:nvGrpSpPr>
+      <p:grpSpPr>
+        <a:xfrm>
+          <a:off x="0" y="0"/>
+          <a:ext cx="0" cy="0"/>
+          <a:chOff x="0" y="0"/>
+          <a:chExt cx="0" cy="0"/>
+        </a:xfrm>
+      </p:grpSpPr>
+      <p:sp>
+        <p:nvSpPr>
+          <p:cNvPr id="2" name="Content Placeholder 1">
+            <a:extLst>
+              <a:ext uri="{FF2B5EF4-FFF2-40B4-BE49-F238E27FC236}">
+                <a16:creationId xmlns:a16="http://schemas.microsoft.com/office/drawing/2014/main" id="{269DA4D1-C52F-51DE-82E4-4CE2A0A5B4F9}"/>
+              </a:ext>
+            </a:extLst>
+          </p:cNvPr>
+          <p:cNvSpPr>
+            <a:spLocks noGrp="1"/>
+          </p:cNvSpPr>
+          <p:nvPr>
+            <p:ph idx="1"/>
+          </p:nvPr>
+        </p:nvSpPr>
+        <p:spPr/>
+        <p:txBody>
+          <a:bodyPr/>
+          <a:lstStyle/>
+          <a:p>
+            <a:endParaRPr lang="en-US"/>
+          </a:p>
+        </p:txBody>
+      </p:sp>
+      <p:sp>
+        <p:nvSpPr>
+          <p:cNvPr id="3" name="Title 2">
+            <a:extLst>
+              <a:ext uri="{FF2B5EF4-FFF2-40B4-BE49-F238E27FC236}">
+                <a16:creationId xmlns:a16="http://schemas.microsoft.com/office/drawing/2014/main" id="{313D3DFB-4B7B-5020-971F-AF2B7A0A35FA}"/>
+              </a:ext>
+            </a:extLst>
+          </p:cNvPr>
+          <p:cNvSpPr>
+            <a:spLocks noGrp="1"/>
+          </p:cNvSpPr>
+          <p:nvPr>
+            <p:ph type="title"/>
+          </p:nvPr>
+        </p:nvSpPr>
+        <p:spPr/>
+        <p:txBody>
+          <a:bodyPr/>
+          <a:lstStyle/>
+          <a:p>
+            <a:endParaRPr lang="en-US"/>
+          </a:p>
+        </p:txBody>
+      </p:sp>
+    </p:spTree>
+    <p:extLst>
+      <p:ext uri="{BB962C8B-B14F-4D97-AF65-F5344CB8AC3E}">
+        <p14:creationId xmlns:p14="http://schemas.microsoft.com/office/powerpoint/2010/main" val="1291192180"/>
+      </p:ext>
+    </p:extLst>
+  </p:cSld>
+  <p:clrMapOvr>
+    <a:masterClrMapping/>
+  </p:clrMapOvr>
+</p:sld>
+</file>
+
+<file path=ppt/slides/slide15.xml><?xml version="1.0" encoding="utf-8"?>
+<p:sld xmlns:a="http://schemas.openxmlformats.org/drawingml/2006/main" xmlns:r="http://schemas.openxmlformats.org/officeDocument/2006/relationships" xmlns:p="http://schemas.openxmlformats.org/presentationml/2006/main">
+  <p:cSld>
+    <p:spTree>
+      <p:nvGrpSpPr>
+        <p:cNvPr id="1" name="">
+          <a:extLst>
+            <a:ext uri="{FF2B5EF4-FFF2-40B4-BE49-F238E27FC236}">
+              <a16:creationId xmlns:a16="http://schemas.microsoft.com/office/drawing/2014/main" id="{A13DFCA9-DB68-4926-D36D-44E2CB4365C6}"/>
+            </a:ext>
+          </a:extLst>
+        </p:cNvPr>
+        <p:cNvGrpSpPr/>
+        <p:nvPr/>
+      </p:nvGrpSpPr>
+      <p:grpSpPr>
+        <a:xfrm>
+          <a:off x="0" y="0"/>
+          <a:ext cx="0" cy="0"/>
+          <a:chOff x="0" y="0"/>
+          <a:chExt cx="0" cy="0"/>
+        </a:xfrm>
+      </p:grpSpPr>
+      <p:sp>
+        <p:nvSpPr>
+          <p:cNvPr id="2" name="Content Placeholder 1">
+            <a:extLst>
+              <a:ext uri="{FF2B5EF4-FFF2-40B4-BE49-F238E27FC236}">
+                <a16:creationId xmlns:a16="http://schemas.microsoft.com/office/drawing/2014/main" id="{5161A592-C95D-5F4C-D812-FDE1F8B67D98}"/>
+              </a:ext>
+            </a:extLst>
+          </p:cNvPr>
+          <p:cNvSpPr>
+            <a:spLocks noGrp="1"/>
+          </p:cNvSpPr>
+          <p:nvPr>
+            <p:ph idx="1"/>
+          </p:nvPr>
+        </p:nvSpPr>
+        <p:spPr>
+          <a:xfrm>
+            <a:off x="838199" y="1633491"/>
+            <a:ext cx="6123039" cy="5131294"/>
+          </a:xfrm>
+        </p:spPr>
+        <p:txBody>
+          <a:bodyPr>
+            <a:normAutofit fontScale="85000" lnSpcReduction="10000"/>
+          </a:bodyPr>
+          <a:lstStyle/>
+          <a:p>
+            <a:r>
+              <a:rPr lang="en-US" dirty="0"/>
+              <a:t>A linear regression model can be trained using Gradient Descent, which adjusts the model's parameters to minimize the mean squared error (MSE).</a:t>
+            </a:r>
+          </a:p>
+          <a:p>
+            <a:r>
+              <a:rPr lang="en-US" dirty="0"/>
+              <a:t>To update (</a:t>
+            </a:r>
+            <a:r>
+              <a:rPr lang="en-US" i="1" dirty="0"/>
+              <a:t>Beta 0) </a:t>
+            </a:r>
+            <a:r>
+              <a:rPr lang="en-US" dirty="0"/>
+              <a:t>and (</a:t>
+            </a:r>
+            <a:r>
+              <a:rPr lang="en-US" i="1" dirty="0"/>
+              <a:t>Beta 1)</a:t>
+            </a:r>
+            <a:r>
+              <a:rPr lang="en-US" dirty="0"/>
+              <a:t> and reduce the cost function (minimizing the RMSE), gradient descent starts with random values for (</a:t>
+            </a:r>
+            <a:r>
+              <a:rPr lang="en-US" i="1" dirty="0"/>
+              <a:t>Beta 0) </a:t>
+            </a:r>
+            <a:r>
+              <a:rPr lang="en-US" dirty="0"/>
+              <a:t>and (</a:t>
+            </a:r>
+            <a:r>
+              <a:rPr lang="en-US" i="1" dirty="0"/>
+              <a:t>Beta 1) </a:t>
+            </a:r>
+            <a:r>
+              <a:rPr lang="en-US" dirty="0"/>
+              <a:t>and iteratively improves them to find the best-fit line.</a:t>
+            </a:r>
+          </a:p>
+          <a:p>
+            <a:r>
+              <a:rPr lang="en-US" dirty="0"/>
+              <a:t>A gradient is simply the derivative, showing how small changes in inputs affect the output. </a:t>
+            </a:r>
+          </a:p>
+          <a:p>
+            <a:r>
+              <a:rPr lang="en-US" dirty="0"/>
+              <a:t>By moving in the direction of the Mean Squared Error negative gradient with respect to the coefficients, the coefficients can be changed.</a:t>
+            </a:r>
+          </a:p>
+        </p:txBody>
+      </p:sp>
+      <p:sp>
+        <p:nvSpPr>
+          <p:cNvPr id="3" name="Title 2">
+            <a:extLst>
+              <a:ext uri="{FF2B5EF4-FFF2-40B4-BE49-F238E27FC236}">
+                <a16:creationId xmlns:a16="http://schemas.microsoft.com/office/drawing/2014/main" id="{DF98230F-D09E-0053-052C-DBBDA534D6A9}"/>
+              </a:ext>
+            </a:extLst>
+          </p:cNvPr>
+          <p:cNvSpPr>
+            <a:spLocks noGrp="1"/>
+          </p:cNvSpPr>
+          <p:nvPr>
+            <p:ph type="title"/>
+          </p:nvPr>
+        </p:nvSpPr>
+        <p:spPr/>
+        <p:txBody>
+          <a:bodyPr/>
+          <a:lstStyle/>
+          <a:p>
+            <a:r>
+              <a:rPr lang="en-US" dirty="0"/>
+              <a:t>Solving Linear Regression Using The Gradient Descent Method</a:t>
+            </a:r>
+          </a:p>
+        </p:txBody>
+      </p:sp>
+      <p:pic>
+        <p:nvPicPr>
+          <p:cNvPr id="5" name="Picture 4">
+            <a:extLst>
+              <a:ext uri="{FF2B5EF4-FFF2-40B4-BE49-F238E27FC236}">
+                <a16:creationId xmlns:a16="http://schemas.microsoft.com/office/drawing/2014/main" id="{2C0B6C6C-BCCC-176F-E3E9-9C6155B90FC2}"/>
+              </a:ext>
+            </a:extLst>
+          </p:cNvPr>
+          <p:cNvPicPr>
+            <a:picLocks noChangeAspect="1"/>
+          </p:cNvPicPr>
+          <p:nvPr/>
+        </p:nvPicPr>
+        <p:blipFill>
+          <a:blip r:embed="rId2"/>
+          <a:stretch>
+            <a:fillRect/>
+          </a:stretch>
+        </p:blipFill>
+        <p:spPr>
+          <a:xfrm>
+            <a:off x="7231423" y="1746681"/>
+            <a:ext cx="4122377" cy="2996518"/>
+          </a:xfrm>
+          <a:prstGeom prst="rect">
+            <a:avLst/>
+          </a:prstGeom>
+        </p:spPr>
+      </p:pic>
+    </p:spTree>
+    <p:extLst>
+      <p:ext uri="{BB962C8B-B14F-4D97-AF65-F5344CB8AC3E}">
+        <p14:creationId xmlns:p14="http://schemas.microsoft.com/office/powerpoint/2010/main" val="1427723282"/>
+      </p:ext>
+    </p:extLst>
+  </p:cSld>
+  <p:clrMapOvr>
+    <a:masterClrMapping/>
+  </p:clrMapOvr>
+</p:sld>
+</file>
+
+<file path=ppt/slides/slide16.xml><?xml version="1.0" encoding="utf-8"?>
+<p:sld xmlns:a="http://schemas.openxmlformats.org/drawingml/2006/main" xmlns:r="http://schemas.openxmlformats.org/officeDocument/2006/relationships" xmlns:p="http://schemas.openxmlformats.org/presentationml/2006/main">
+  <p:cSld>
+    <p:spTree>
+      <p:nvGrpSpPr>
         <p:cNvPr id="1" name="">
           <a:extLst>
             <a:ext uri="{FF2B5EF4-FFF2-40B4-BE49-F238E27FC236}">
@@ -5320,7 +6431,7 @@
 </p:sld>
 </file>
 
-<file path=ppt/slides/slide11.xml><?xml version="1.0" encoding="utf-8"?>
+<file path=ppt/slides/slide17.xml><?xml version="1.0" encoding="utf-8"?>
 <p:sld xmlns:a="http://schemas.openxmlformats.org/drawingml/2006/main" xmlns:r="http://schemas.openxmlformats.org/officeDocument/2006/relationships" xmlns:p="http://schemas.openxmlformats.org/presentationml/2006/main">
   <p:cSld>
     <p:spTree>
@@ -5463,7 +6574,7 @@
 </p:sld>
 </file>
 
-<file path=ppt/slides/slide12.xml><?xml version="1.0" encoding="utf-8"?>
+<file path=ppt/slides/slide18.xml><?xml version="1.0" encoding="utf-8"?>
 <p:sld xmlns:a="http://schemas.openxmlformats.org/drawingml/2006/main" xmlns:r="http://schemas.openxmlformats.org/officeDocument/2006/relationships" xmlns:p="http://schemas.openxmlformats.org/presentationml/2006/main">
   <p:cSld>
     <p:spTree>
@@ -5637,7 +6748,7 @@
 </p:sld>
 </file>
 
-<file path=ppt/slides/slide13.xml><?xml version="1.0" encoding="utf-8"?>
+<file path=ppt/slides/slide19.xml><?xml version="1.0" encoding="utf-8"?>
 <p:sld xmlns:a="http://schemas.openxmlformats.org/drawingml/2006/main" xmlns:r="http://schemas.openxmlformats.org/officeDocument/2006/relationships" xmlns:p="http://schemas.openxmlformats.org/presentationml/2006/main">
   <p:cSld>
     <p:spTree>
@@ -5799,7 +6910,155 @@
 </p:sld>
 </file>
 
-<file path=ppt/slides/slide14.xml><?xml version="1.0" encoding="utf-8"?>
+<file path=ppt/slides/slide2.xml><?xml version="1.0" encoding="utf-8"?>
+<p:sld xmlns:a="http://schemas.openxmlformats.org/drawingml/2006/main" xmlns:r="http://schemas.openxmlformats.org/officeDocument/2006/relationships" xmlns:p="http://schemas.openxmlformats.org/presentationml/2006/main">
+  <p:cSld>
+    <p:spTree>
+      <p:nvGrpSpPr>
+        <p:cNvPr id="1" name=""/>
+        <p:cNvGrpSpPr/>
+        <p:nvPr/>
+      </p:nvGrpSpPr>
+      <p:grpSpPr>
+        <a:xfrm>
+          <a:off x="0" y="0"/>
+          <a:ext cx="0" cy="0"/>
+          <a:chOff x="0" y="0"/>
+          <a:chExt cx="0" cy="0"/>
+        </a:xfrm>
+      </p:grpSpPr>
+      <p:sp>
+        <p:nvSpPr>
+          <p:cNvPr id="2" name="Content Placeholder 1">
+            <a:extLst>
+              <a:ext uri="{FF2B5EF4-FFF2-40B4-BE49-F238E27FC236}">
+                <a16:creationId xmlns:a16="http://schemas.microsoft.com/office/drawing/2014/main" id="{595313C8-76FF-2F07-3ED5-814AD3EC72DC}"/>
+              </a:ext>
+            </a:extLst>
+          </p:cNvPr>
+          <p:cNvSpPr>
+            <a:spLocks noGrp="1"/>
+          </p:cNvSpPr>
+          <p:nvPr>
+            <p:ph idx="1"/>
+          </p:nvPr>
+        </p:nvSpPr>
+        <p:spPr/>
+        <p:txBody>
+          <a:bodyPr/>
+          <a:lstStyle/>
+          <a:p>
+            <a:pPr marL="0" indent="0">
+              <a:buNone/>
+            </a:pPr>
+            <a:r>
+              <a:rPr lang="en-US" dirty="0"/>
+              <a:t>What You'll Learn:</a:t>
+            </a:r>
+          </a:p>
+          <a:p>
+            <a:r>
+              <a:rPr lang="en-US" dirty="0"/>
+              <a:t>Introduce the concept of supervised learning</a:t>
+            </a:r>
+          </a:p>
+          <a:p>
+            <a:r>
+              <a:rPr lang="en-US" dirty="0"/>
+              <a:t>Understanding regression analysis fundamentals</a:t>
+            </a:r>
+          </a:p>
+          <a:p>
+            <a:r>
+              <a:rPr lang="en-US" dirty="0"/>
+              <a:t>Types of linear regression models</a:t>
+            </a:r>
+          </a:p>
+          <a:p>
+            <a:r>
+              <a:rPr lang="en-US" dirty="0"/>
+              <a:t>Best-fit line, hypothesis function, and OLS method</a:t>
+            </a:r>
+          </a:p>
+          <a:p>
+            <a:r>
+              <a:rPr lang="en-US" dirty="0"/>
+              <a:t>Closed-form solution implementation</a:t>
+            </a:r>
+          </a:p>
+          <a:p>
+            <a:r>
+              <a:rPr lang="en-US" dirty="0"/>
+              <a:t>Gradient descent algorithm</a:t>
+            </a:r>
+          </a:p>
+          <a:p>
+            <a:r>
+              <a:rPr lang="en-US" dirty="0"/>
+              <a:t>Linear regression assumptions</a:t>
+            </a:r>
+          </a:p>
+          <a:p>
+            <a:r>
+              <a:rPr lang="en-US" dirty="0"/>
+              <a:t>Evaluation metrics and performance assessment</a:t>
+            </a:r>
+          </a:p>
+          <a:p>
+            <a:r>
+              <a:rPr lang="en-US" dirty="0"/>
+              <a:t>Practical implementation with scikit-learn</a:t>
+            </a:r>
+          </a:p>
+          <a:p>
+            <a:endParaRPr lang="en-US" dirty="0"/>
+          </a:p>
+        </p:txBody>
+      </p:sp>
+      <p:sp>
+        <p:nvSpPr>
+          <p:cNvPr id="3" name="Title 2">
+            <a:extLst>
+              <a:ext uri="{FF2B5EF4-FFF2-40B4-BE49-F238E27FC236}">
+                <a16:creationId xmlns:a16="http://schemas.microsoft.com/office/drawing/2014/main" id="{071A7914-96DB-51CC-53B0-AF8ED0AF6AEC}"/>
+              </a:ext>
+            </a:extLst>
+          </p:cNvPr>
+          <p:cNvSpPr>
+            <a:spLocks noGrp="1"/>
+          </p:cNvSpPr>
+          <p:nvPr>
+            <p:ph type="title"/>
+          </p:nvPr>
+        </p:nvSpPr>
+        <p:spPr/>
+        <p:txBody>
+          <a:bodyPr>
+            <a:normAutofit/>
+          </a:bodyPr>
+          <a:lstStyle/>
+          <a:p>
+            <a:r>
+              <a:rPr lang="en-US" dirty="0"/>
+              <a:t>Topics and Learning Outcomes</a:t>
+            </a:r>
+          </a:p>
+        </p:txBody>
+      </p:sp>
+    </p:spTree>
+    <p:extLst>
+      <p:ext uri="{BB962C8B-B14F-4D97-AF65-F5344CB8AC3E}">
+        <p14:creationId xmlns:p14="http://schemas.microsoft.com/office/powerpoint/2010/main" val="2145969539"/>
+      </p:ext>
+    </p:extLst>
+  </p:cSld>
+  <p:clrMapOvr>
+    <a:masterClrMapping/>
+  </p:clrMapOvr>
+</p:sld>
+</file>
+
+<file path=ppt/slides/slide20.xml><?xml version="1.0" encoding="utf-8"?>
 <p:sld xmlns:a="http://schemas.openxmlformats.org/drawingml/2006/main" xmlns:r="http://schemas.openxmlformats.org/officeDocument/2006/relationships" xmlns:p="http://schemas.openxmlformats.org/presentationml/2006/main">
   <p:cSld>
     <p:spTree>
@@ -5925,7 +7184,7 @@
 </p:sld>
 </file>
 
-<file path=ppt/slides/slide2.xml><?xml version="1.0" encoding="utf-8"?>
+<file path=ppt/slides/slide21.xml><?xml version="1.0" encoding="utf-8"?>
 <p:sld xmlns:a="http://schemas.openxmlformats.org/drawingml/2006/main" xmlns:r="http://schemas.openxmlformats.org/officeDocument/2006/relationships" xmlns:p="http://schemas.openxmlformats.org/presentationml/2006/main">
   <p:cSld>
     <p:spTree>
@@ -5942,6 +7201,190 @@
           <a:chExt cx="0" cy="0"/>
         </a:xfrm>
       </p:grpSpPr>
+      <p:pic>
+        <p:nvPicPr>
+          <p:cNvPr id="7" name="Picture 6">
+            <a:extLst>
+              <a:ext uri="{FF2B5EF4-FFF2-40B4-BE49-F238E27FC236}">
+                <a16:creationId xmlns:a16="http://schemas.microsoft.com/office/drawing/2014/main" id="{A38D0E97-EAFB-C1A1-50A4-D148BD794323}"/>
+              </a:ext>
+            </a:extLst>
+          </p:cNvPr>
+          <p:cNvPicPr>
+            <a:picLocks noChangeAspect="1"/>
+          </p:cNvPicPr>
+          <p:nvPr/>
+        </p:nvPicPr>
+        <p:blipFill>
+          <a:blip r:embed="rId2"/>
+          <a:stretch>
+            <a:fillRect/>
+          </a:stretch>
+        </p:blipFill>
+        <p:spPr>
+          <a:xfrm>
+            <a:off x="6660776" y="1690688"/>
+            <a:ext cx="5167946" cy="3227979"/>
+          </a:xfrm>
+          <a:prstGeom prst="rect">
+            <a:avLst/>
+          </a:prstGeom>
+        </p:spPr>
+      </p:pic>
+      <p:sp>
+        <p:nvSpPr>
+          <p:cNvPr id="3" name="Content Placeholder 2">
+            <a:extLst>
+              <a:ext uri="{FF2B5EF4-FFF2-40B4-BE49-F238E27FC236}">
+                <a16:creationId xmlns:a16="http://schemas.microsoft.com/office/drawing/2014/main" id="{102BC694-8487-C007-C9E9-C4570B4B8FFD}"/>
+              </a:ext>
+            </a:extLst>
+          </p:cNvPr>
+          <p:cNvSpPr>
+            <a:spLocks noGrp="1"/>
+          </p:cNvSpPr>
+          <p:nvPr>
+            <p:ph idx="1"/>
+          </p:nvPr>
+        </p:nvSpPr>
+        <p:spPr>
+          <a:xfrm>
+            <a:off x="838200" y="1633490"/>
+            <a:ext cx="6215743" cy="4310110"/>
+          </a:xfrm>
+        </p:spPr>
+        <p:txBody>
+          <a:bodyPr>
+            <a:normAutofit fontScale="85000" lnSpcReduction="10000"/>
+          </a:bodyPr>
+          <a:lstStyle/>
+          <a:p>
+            <a:r>
+              <a:rPr lang="en-US" sz="2400" dirty="0"/>
+              <a:t>Linear regression is a type of supervised machine learning algorithm that computes the linear relationship between a dependent variable and one or more independent variables by fitting a linear equation that models the relationship between these variables.</a:t>
+            </a:r>
+          </a:p>
+          <a:p>
+            <a:r>
+              <a:rPr lang="en-US" sz="2400" dirty="0"/>
+              <a:t>In LR, we use a linear formula in the form of:</a:t>
+            </a:r>
+          </a:p>
+          <a:p>
+            <a:pPr marL="233363" indent="-233363">
+              <a:buNone/>
+            </a:pPr>
+            <a:br>
+              <a:rPr lang="en-US" sz="2400" dirty="0"/>
+            </a:br>
+            <a:r>
+              <a:rPr lang="en-US" sz="3100" i="1" dirty="0"/>
+              <a:t>Y = B</a:t>
+            </a:r>
+            <a:r>
+              <a:rPr lang="en-US" sz="1500" b="1" i="1" dirty="0"/>
+              <a:t>0</a:t>
+            </a:r>
+            <a:r>
+              <a:rPr lang="en-US" sz="3100" i="1" dirty="0"/>
+              <a:t> + B</a:t>
+            </a:r>
+            <a:r>
+              <a:rPr lang="en-US" sz="1500" b="1" i="1" dirty="0"/>
+              <a:t>1</a:t>
+            </a:r>
+            <a:r>
+              <a:rPr lang="en-US" sz="3100" i="1" dirty="0"/>
+              <a:t>X</a:t>
+            </a:r>
+          </a:p>
+          <a:p>
+            <a:pPr marL="233363" indent="0">
+              <a:buNone/>
+            </a:pPr>
+            <a:r>
+              <a:rPr lang="en-US" sz="2400" dirty="0"/>
+              <a:t>to represent the relationship between an independent variable (X) and a dependent variable (Y).</a:t>
+            </a:r>
+          </a:p>
+          <a:p>
+            <a:pPr marL="233363" indent="-231775"/>
+            <a:r>
+              <a:rPr lang="en-US" sz="2400" dirty="0"/>
+              <a:t>In LR, both X and Y are numerical values, for example, X could be the employee’s years of experience and Y could be his predicted salary, and we use LR to model that relation.</a:t>
+            </a:r>
+          </a:p>
+          <a:p>
+            <a:pPr marL="233363" indent="0">
+              <a:buNone/>
+            </a:pPr>
+            <a:endParaRPr lang="en-US" sz="2400" dirty="0"/>
+          </a:p>
+          <a:p>
+            <a:endParaRPr lang="en-US" sz="2400" dirty="0"/>
+          </a:p>
+        </p:txBody>
+      </p:sp>
+      <p:sp>
+        <p:nvSpPr>
+          <p:cNvPr id="2" name="Title 1">
+            <a:extLst>
+              <a:ext uri="{FF2B5EF4-FFF2-40B4-BE49-F238E27FC236}">
+                <a16:creationId xmlns:a16="http://schemas.microsoft.com/office/drawing/2014/main" id="{F842C2E3-446E-3595-CA99-8E95BA7F2C23}"/>
+              </a:ext>
+            </a:extLst>
+          </p:cNvPr>
+          <p:cNvSpPr>
+            <a:spLocks noGrp="1"/>
+          </p:cNvSpPr>
+          <p:nvPr>
+            <p:ph type="title"/>
+          </p:nvPr>
+        </p:nvSpPr>
+        <p:spPr/>
+        <p:txBody>
+          <a:bodyPr>
+            <a:normAutofit/>
+          </a:bodyPr>
+          <a:lstStyle/>
+          <a:p>
+            <a:r>
+              <a:rPr lang="en-US" dirty="0"/>
+              <a:t>What is Regressions Analysis?</a:t>
+            </a:r>
+          </a:p>
+        </p:txBody>
+      </p:sp>
+    </p:spTree>
+    <p:extLst>
+      <p:ext uri="{BB962C8B-B14F-4D97-AF65-F5344CB8AC3E}">
+        <p14:creationId xmlns:p14="http://schemas.microsoft.com/office/powerpoint/2010/main" val="3910887702"/>
+      </p:ext>
+    </p:extLst>
+  </p:cSld>
+  <p:clrMapOvr>
+    <a:masterClrMapping/>
+  </p:clrMapOvr>
+</p:sld>
+</file>
+
+<file path=ppt/slides/slide3.xml><?xml version="1.0" encoding="utf-8"?>
+<p:sld xmlns:a="http://schemas.openxmlformats.org/drawingml/2006/main" xmlns:r="http://schemas.openxmlformats.org/officeDocument/2006/relationships" xmlns:p="http://schemas.openxmlformats.org/presentationml/2006/main">
+  <p:cSld>
+    <p:spTree>
+      <p:nvGrpSpPr>
+        <p:cNvPr id="1" name=""/>
+        <p:cNvGrpSpPr/>
+        <p:nvPr/>
+      </p:nvGrpSpPr>
+      <p:grpSpPr>
+        <a:xfrm>
+          <a:off x="0" y="0"/>
+          <a:ext cx="0" cy="0"/>
+          <a:chOff x="0" y="0"/>
+          <a:chExt cx="0" cy="0"/>
+        </a:xfrm>
+      </p:grpSpPr>
       <p:sp>
         <p:nvSpPr>
           <p:cNvPr id="3" name="Content Placeholder 2">
@@ -6020,10 +7463,9 @@
           <a:lstStyle/>
           <a:p>
             <a:r>
-              <a:rPr lang="en-US" b="1" dirty="0"/>
+              <a:rPr lang="en-US" dirty="0"/>
               <a:t>Supervised Machine Learning</a:t>
             </a:r>
-            <a:endParaRPr lang="en-US" dirty="0"/>
           </a:p>
         </p:txBody>
       </p:sp>
@@ -6287,195 +7729,6 @@
 </p:sld>
 </file>
 
-<file path=ppt/slides/slide3.xml><?xml version="1.0" encoding="utf-8"?>
-<p:sld xmlns:a="http://schemas.openxmlformats.org/drawingml/2006/main" xmlns:r="http://schemas.openxmlformats.org/officeDocument/2006/relationships" xmlns:p="http://schemas.openxmlformats.org/presentationml/2006/main">
-  <p:cSld>
-    <p:spTree>
-      <p:nvGrpSpPr>
-        <p:cNvPr id="1" name=""/>
-        <p:cNvGrpSpPr/>
-        <p:nvPr/>
-      </p:nvGrpSpPr>
-      <p:grpSpPr>
-        <a:xfrm>
-          <a:off x="0" y="0"/>
-          <a:ext cx="0" cy="0"/>
-          <a:chOff x="0" y="0"/>
-          <a:chExt cx="0" cy="0"/>
-        </a:xfrm>
-      </p:grpSpPr>
-      <p:pic>
-        <p:nvPicPr>
-          <p:cNvPr id="7" name="Picture 6">
-            <a:extLst>
-              <a:ext uri="{FF2B5EF4-FFF2-40B4-BE49-F238E27FC236}">
-                <a16:creationId xmlns:a16="http://schemas.microsoft.com/office/drawing/2014/main" id="{A38D0E97-EAFB-C1A1-50A4-D148BD794323}"/>
-              </a:ext>
-            </a:extLst>
-          </p:cNvPr>
-          <p:cNvPicPr>
-            <a:picLocks noChangeAspect="1"/>
-          </p:cNvPicPr>
-          <p:nvPr/>
-        </p:nvPicPr>
-        <p:blipFill>
-          <a:blip r:embed="rId2"/>
-          <a:stretch>
-            <a:fillRect/>
-          </a:stretch>
-        </p:blipFill>
-        <p:spPr>
-          <a:xfrm>
-            <a:off x="6660776" y="1690688"/>
-            <a:ext cx="5167946" cy="3227979"/>
-          </a:xfrm>
-          <a:prstGeom prst="rect">
-            <a:avLst/>
-          </a:prstGeom>
-        </p:spPr>
-      </p:pic>
-      <p:sp>
-        <p:nvSpPr>
-          <p:cNvPr id="3" name="Content Placeholder 2">
-            <a:extLst>
-              <a:ext uri="{FF2B5EF4-FFF2-40B4-BE49-F238E27FC236}">
-                <a16:creationId xmlns:a16="http://schemas.microsoft.com/office/drawing/2014/main" id="{102BC694-8487-C007-C9E9-C4570B4B8FFD}"/>
-              </a:ext>
-            </a:extLst>
-          </p:cNvPr>
-          <p:cNvSpPr>
-            <a:spLocks noGrp="1"/>
-          </p:cNvSpPr>
-          <p:nvPr>
-            <p:ph idx="1"/>
-          </p:nvPr>
-        </p:nvSpPr>
-        <p:spPr>
-          <a:xfrm>
-            <a:off x="838200" y="1633490"/>
-            <a:ext cx="6215743" cy="4310110"/>
-          </a:xfrm>
-        </p:spPr>
-        <p:txBody>
-          <a:bodyPr>
-            <a:normAutofit fontScale="85000" lnSpcReduction="10000"/>
-          </a:bodyPr>
-          <a:lstStyle/>
-          <a:p>
-            <a:r>
-              <a:rPr lang="en-US" sz="2400" dirty="0"/>
-              <a:t>Linear regression is a type of supervised machine learning algorithm that computes the linear relationship between a dependent variable and one or more independent variables by fitting a linear equation that models the relationship between </a:t>
-            </a:r>
-            <a:r>
-              <a:rPr lang="en-US" sz="2400"/>
-              <a:t>these variables.</a:t>
-            </a:r>
-            <a:endParaRPr lang="en-US" sz="2400" dirty="0"/>
-          </a:p>
-          <a:p>
-            <a:r>
-              <a:rPr lang="en-US" sz="2400" dirty="0"/>
-              <a:t>In LR, we use a linear formula in the form of:</a:t>
-            </a:r>
-          </a:p>
-          <a:p>
-            <a:pPr marL="233363" indent="-233363">
-              <a:buNone/>
-            </a:pPr>
-            <a:br>
-              <a:rPr lang="en-US" sz="2400" dirty="0"/>
-            </a:br>
-            <a:r>
-              <a:rPr lang="en-US" sz="3100" i="1" dirty="0"/>
-              <a:t>Y = B</a:t>
-            </a:r>
-            <a:r>
-              <a:rPr lang="en-US" sz="1500" b="1" i="1" dirty="0"/>
-              <a:t>0</a:t>
-            </a:r>
-            <a:r>
-              <a:rPr lang="en-US" sz="3100" i="1" dirty="0"/>
-              <a:t> + B</a:t>
-            </a:r>
-            <a:r>
-              <a:rPr lang="en-US" sz="1500" b="1" i="1" dirty="0"/>
-              <a:t>1</a:t>
-            </a:r>
-            <a:r>
-              <a:rPr lang="en-US" sz="3100" i="1" dirty="0"/>
-              <a:t>X</a:t>
-            </a:r>
-          </a:p>
-          <a:p>
-            <a:pPr marL="233363" indent="0">
-              <a:buNone/>
-            </a:pPr>
-            <a:r>
-              <a:rPr lang="en-US" sz="2400" dirty="0"/>
-              <a:t>to represent the relationship between an independent variable (X) and a dependent variable (Y).</a:t>
-            </a:r>
-          </a:p>
-          <a:p>
-            <a:pPr marL="233363" indent="-231775"/>
-            <a:r>
-              <a:rPr lang="en-US" sz="2400" dirty="0"/>
-              <a:t>In LR, both X and Y are numerical values, for example, X could be the employee’s years of experience and Y could be his predicted salary, and we use LR to model that relation.</a:t>
-            </a:r>
-          </a:p>
-          <a:p>
-            <a:pPr marL="233363" indent="0">
-              <a:buNone/>
-            </a:pPr>
-            <a:endParaRPr lang="en-US" sz="2400" dirty="0"/>
-          </a:p>
-          <a:p>
-            <a:endParaRPr lang="en-US" sz="2400" dirty="0"/>
-          </a:p>
-        </p:txBody>
-      </p:sp>
-      <p:sp>
-        <p:nvSpPr>
-          <p:cNvPr id="2" name="Title 1">
-            <a:extLst>
-              <a:ext uri="{FF2B5EF4-FFF2-40B4-BE49-F238E27FC236}">
-                <a16:creationId xmlns:a16="http://schemas.microsoft.com/office/drawing/2014/main" id="{F842C2E3-446E-3595-CA99-8E95BA7F2C23}"/>
-              </a:ext>
-            </a:extLst>
-          </p:cNvPr>
-          <p:cNvSpPr>
-            <a:spLocks noGrp="1"/>
-          </p:cNvSpPr>
-          <p:nvPr>
-            <p:ph type="title"/>
-          </p:nvPr>
-        </p:nvSpPr>
-        <p:spPr/>
-        <p:txBody>
-          <a:bodyPr>
-            <a:normAutofit/>
-          </a:bodyPr>
-          <a:lstStyle/>
-          <a:p>
-            <a:r>
-              <a:rPr lang="en-US" dirty="0"/>
-              <a:t>What is Regressions Analysis?</a:t>
-            </a:r>
-          </a:p>
-        </p:txBody>
-      </p:sp>
-    </p:spTree>
-    <p:extLst>
-      <p:ext uri="{BB962C8B-B14F-4D97-AF65-F5344CB8AC3E}">
-        <p14:creationId xmlns:p14="http://schemas.microsoft.com/office/powerpoint/2010/main" val="3910887702"/>
-      </p:ext>
-    </p:extLst>
-  </p:cSld>
-  <p:clrMapOvr>
-    <a:masterClrMapping/>
-  </p:clrMapOvr>
-</p:sld>
-</file>
-
 <file path=ppt/slides/slide4.xml><?xml version="1.0" encoding="utf-8"?>
 <p:sld xmlns:a="http://schemas.openxmlformats.org/drawingml/2006/main" xmlns:r="http://schemas.openxmlformats.org/officeDocument/2006/relationships" xmlns:p="http://schemas.openxmlformats.org/presentationml/2006/main">
   <p:cSld>
@@ -6498,7 +7751,7 @@
           <p:cNvPr id="2" name="Content Placeholder 1">
             <a:extLst>
               <a:ext uri="{FF2B5EF4-FFF2-40B4-BE49-F238E27FC236}">
-                <a16:creationId xmlns:a16="http://schemas.microsoft.com/office/drawing/2014/main" id="{5A741632-F5AA-89F8-92B0-716C60C6B299}"/>
+                <a16:creationId xmlns:a16="http://schemas.microsoft.com/office/drawing/2014/main" id="{B23B8AB6-5D16-5C93-D306-CA79D6F7715A}"/>
               </a:ext>
             </a:extLst>
           </p:cNvPr>
@@ -6511,8 +7764,8 @@
         </p:nvSpPr>
         <p:spPr>
           <a:xfrm>
-            <a:off x="838200" y="1633491"/>
-            <a:ext cx="10515600" cy="2759215"/>
+            <a:off x="838199" y="1633491"/>
+            <a:ext cx="6488585" cy="5131294"/>
           </a:xfrm>
         </p:spPr>
         <p:txBody>
@@ -6525,17 +7778,223 @@
               <a:buNone/>
             </a:pPr>
             <a:r>
+              <a:rPr lang="en-US" sz="2400" b="1" dirty="0"/>
+              <a:t>Definition and Purpose</a:t>
+            </a:r>
+          </a:p>
+          <a:p>
+            <a:r>
+              <a:rPr lang="en-US" sz="2400" b="1" dirty="0"/>
+              <a:t>Linear Regression</a:t>
+            </a:r>
+            <a:r>
+              <a:rPr lang="en-US" sz="2400" dirty="0"/>
+              <a:t> is a supervised machine learning algorithm that models the linear relationship between:</a:t>
+            </a:r>
+          </a:p>
+          <a:p>
+            <a:pPr lvl="1"/>
+            <a:r>
+              <a:rPr lang="en-US" sz="2000" b="1" dirty="0"/>
+              <a:t>Dependent variable</a:t>
+            </a:r>
+            <a:r>
+              <a:rPr lang="en-US" sz="2000" dirty="0"/>
+              <a:t> (target): What we want to predict</a:t>
+            </a:r>
+          </a:p>
+          <a:p>
+            <a:pPr lvl="1"/>
+            <a:r>
+              <a:rPr lang="en-US" sz="2000" b="1" dirty="0"/>
+              <a:t>Independent variable(s)</a:t>
+            </a:r>
+            <a:r>
+              <a:rPr lang="en-US" sz="2000" dirty="0"/>
+              <a:t> (features): What we use to make predictions</a:t>
+            </a:r>
+          </a:p>
+          <a:p>
+            <a:r>
+              <a:rPr lang="en-US" sz="2400" b="1" dirty="0"/>
+              <a:t>Key Concept:</a:t>
+            </a:r>
+            <a:r>
+              <a:rPr lang="en-US" sz="2400" dirty="0"/>
+              <a:t> Fits a linear equation to observed data to make predictions on new, unseen data.</a:t>
+            </a:r>
+          </a:p>
+          <a:p>
+            <a:r>
+              <a:rPr lang="en-US" sz="2400" b="1" dirty="0"/>
+              <a:t>Real-World Applications:</a:t>
+            </a:r>
+          </a:p>
+          <a:p>
+            <a:pPr lvl="1"/>
+            <a:r>
+              <a:rPr lang="en-US" sz="2000" dirty="0"/>
+              <a:t>Predicting house prices based on size</a:t>
+            </a:r>
+          </a:p>
+          <a:p>
+            <a:pPr lvl="1"/>
+            <a:r>
+              <a:rPr lang="en-US" sz="2000" dirty="0"/>
+              <a:t>Estimating sales revenue from advertising spend</a:t>
+            </a:r>
+          </a:p>
+          <a:p>
+            <a:pPr lvl="1"/>
+            <a:r>
+              <a:rPr lang="en-US" sz="2000" dirty="0"/>
+              <a:t>Forecasting stock prices using economic indicators</a:t>
+            </a:r>
+          </a:p>
+          <a:p>
+            <a:endParaRPr lang="en-US" sz="2400" dirty="0"/>
+          </a:p>
+        </p:txBody>
+      </p:sp>
+      <p:sp>
+        <p:nvSpPr>
+          <p:cNvPr id="3" name="Title 2">
+            <a:extLst>
+              <a:ext uri="{FF2B5EF4-FFF2-40B4-BE49-F238E27FC236}">
+                <a16:creationId xmlns:a16="http://schemas.microsoft.com/office/drawing/2014/main" id="{A955792E-C166-AD40-E023-9C9473F341EE}"/>
+              </a:ext>
+            </a:extLst>
+          </p:cNvPr>
+          <p:cNvSpPr>
+            <a:spLocks noGrp="1"/>
+          </p:cNvSpPr>
+          <p:nvPr>
+            <p:ph type="title"/>
+          </p:nvPr>
+        </p:nvSpPr>
+        <p:spPr/>
+        <p:txBody>
+          <a:bodyPr/>
+          <a:lstStyle/>
+          <a:p>
+            <a:r>
               <a:rPr lang="en-US" dirty="0"/>
-              <a:t>There are two main types of linear regression:</a:t>
-            </a:r>
-          </a:p>
+              <a:t>What is Regression Analysis?</a:t>
+            </a:r>
+          </a:p>
+        </p:txBody>
+      </p:sp>
+      <p:pic>
+        <p:nvPicPr>
+          <p:cNvPr id="1030" name="Picture 6" descr="Linear Regression in Machine Learning: Python Examples">
+            <a:extLst>
+              <a:ext uri="{FF2B5EF4-FFF2-40B4-BE49-F238E27FC236}">
+                <a16:creationId xmlns:a16="http://schemas.microsoft.com/office/drawing/2014/main" id="{105D4075-60E9-9283-7A3C-A2F1DF21BE6F}"/>
+              </a:ext>
+            </a:extLst>
+          </p:cNvPr>
+          <p:cNvPicPr>
+            <a:picLocks noChangeAspect="1" noChangeArrowheads="1"/>
+          </p:cNvPicPr>
+          <p:nvPr/>
+        </p:nvPicPr>
+        <p:blipFill>
+          <a:blip r:embed="rId2">
+            <a:extLst>
+              <a:ext uri="{28A0092B-C50C-407E-A947-70E740481C1C}">
+                <a14:useLocalDpi xmlns:a14="http://schemas.microsoft.com/office/drawing/2010/main" val="0"/>
+              </a:ext>
+            </a:extLst>
+          </a:blip>
+          <a:srcRect/>
+          <a:stretch>
+            <a:fillRect/>
+          </a:stretch>
+        </p:blipFill>
+        <p:spPr bwMode="auto">
+          <a:xfrm>
+            <a:off x="7446149" y="1633491"/>
+            <a:ext cx="4501477" cy="2940194"/>
+          </a:xfrm>
+          <a:prstGeom prst="rect">
+            <a:avLst/>
+          </a:prstGeom>
+          <a:noFill/>
+          <a:extLst>
+            <a:ext uri="{909E8E84-426E-40DD-AFC4-6F175D3DCCD1}">
+              <a14:hiddenFill xmlns:a14="http://schemas.microsoft.com/office/drawing/2010/main">
+                <a:solidFill>
+                  <a:srgbClr val="FFFFFF"/>
+                </a:solidFill>
+              </a14:hiddenFill>
+            </a:ext>
+          </a:extLst>
+        </p:spPr>
+      </p:pic>
+    </p:spTree>
+    <p:extLst>
+      <p:ext uri="{BB962C8B-B14F-4D97-AF65-F5344CB8AC3E}">
+        <p14:creationId xmlns:p14="http://schemas.microsoft.com/office/powerpoint/2010/main" val="2300765676"/>
+      </p:ext>
+    </p:extLst>
+  </p:cSld>
+  <p:clrMapOvr>
+    <a:masterClrMapping/>
+  </p:clrMapOvr>
+</p:sld>
+</file>
+
+<file path=ppt/slides/slide5.xml><?xml version="1.0" encoding="utf-8"?>
+<p:sld xmlns:a="http://schemas.openxmlformats.org/drawingml/2006/main" xmlns:r="http://schemas.openxmlformats.org/officeDocument/2006/relationships" xmlns:p="http://schemas.openxmlformats.org/presentationml/2006/main">
+  <p:cSld>
+    <p:spTree>
+      <p:nvGrpSpPr>
+        <p:cNvPr id="1" name=""/>
+        <p:cNvGrpSpPr/>
+        <p:nvPr/>
+      </p:nvGrpSpPr>
+      <p:grpSpPr>
+        <a:xfrm>
+          <a:off x="0" y="0"/>
+          <a:ext cx="0" cy="0"/>
+          <a:chOff x="0" y="0"/>
+          <a:chExt cx="0" cy="0"/>
+        </a:xfrm>
+      </p:grpSpPr>
+      <p:sp>
+        <p:nvSpPr>
+          <p:cNvPr id="2" name="Content Placeholder 1">
+            <a:extLst>
+              <a:ext uri="{FF2B5EF4-FFF2-40B4-BE49-F238E27FC236}">
+                <a16:creationId xmlns:a16="http://schemas.microsoft.com/office/drawing/2014/main" id="{5A741632-F5AA-89F8-92B0-716C60C6B299}"/>
+              </a:ext>
+            </a:extLst>
+          </p:cNvPr>
+          <p:cNvSpPr>
+            <a:spLocks noGrp="1"/>
+          </p:cNvSpPr>
+          <p:nvPr>
+            <p:ph idx="1"/>
+          </p:nvPr>
+        </p:nvSpPr>
+        <p:spPr>
+          <a:xfrm>
+            <a:off x="838200" y="1633491"/>
+            <a:ext cx="6390503" cy="2759215"/>
+          </a:xfrm>
+        </p:spPr>
+        <p:txBody>
+          <a:bodyPr>
+            <a:normAutofit/>
+          </a:bodyPr>
+          <a:lstStyle/>
           <a:p>
             <a:pPr marL="0" indent="0">
               <a:buNone/>
             </a:pPr>
             <a:r>
-              <a:rPr lang="en-US" dirty="0"/>
-              <a:t>1- Simple Linear Regression</a:t>
+              <a:rPr lang="en-US" sz="2400" dirty="0"/>
+              <a:t>There are two main types of linear regression:</a:t>
             </a:r>
           </a:p>
           <a:p>
@@ -6543,8 +8002,26 @@
               <a:buNone/>
             </a:pPr>
             <a:r>
-              <a:rPr lang="en-US" dirty="0"/>
-              <a:t>This is the simplest form of linear regression, and it involves only one independent variable and one dependent variable. The equation for simple linear regression is:</a:t>
+              <a:rPr lang="en-US" sz="2400" b="1" dirty="0"/>
+              <a:t>1- Simple Linear Regression</a:t>
+            </a:r>
+          </a:p>
+          <a:p>
+            <a:pPr marL="0" indent="0">
+              <a:buNone/>
+            </a:pPr>
+            <a:r>
+              <a:rPr lang="en-US" sz="2400" dirty="0"/>
+              <a:t>This is the simplest form of linear regression, and it involves only one independent variable and one dependent variable. </a:t>
+            </a:r>
+          </a:p>
+          <a:p>
+            <a:pPr marL="0" indent="0">
+              <a:buNone/>
+            </a:pPr>
+            <a:r>
+              <a:rPr lang="en-US" sz="2400" dirty="0"/>
+              <a:t>The equation for simple linear regression is:</a:t>
             </a:r>
           </a:p>
         </p:txBody>
@@ -6601,12 +8078,59 @@
         </p:blipFill>
         <p:spPr>
           <a:xfrm>
-            <a:off x="4622477" y="4021494"/>
+            <a:off x="912341" y="4077099"/>
             <a:ext cx="4044544" cy="2684106"/>
           </a:xfrm>
           <a:prstGeom prst="rect">
             <a:avLst/>
           </a:prstGeom>
+        </p:spPr>
+      </p:pic>
+      <p:pic>
+        <p:nvPicPr>
+          <p:cNvPr id="4" name="Picture 6" descr="Linear Regression in Machine Learning: Python Examples">
+            <a:extLst>
+              <a:ext uri="{FF2B5EF4-FFF2-40B4-BE49-F238E27FC236}">
+                <a16:creationId xmlns:a16="http://schemas.microsoft.com/office/drawing/2014/main" id="{DE2B1E32-0CA3-128D-CB32-2F690773BA5C}"/>
+              </a:ext>
+            </a:extLst>
+          </p:cNvPr>
+          <p:cNvPicPr>
+            <a:picLocks noChangeAspect="1" noChangeArrowheads="1"/>
+          </p:cNvPicPr>
+          <p:nvPr/>
+        </p:nvPicPr>
+        <p:blipFill>
+          <a:blip r:embed="rId3">
+            <a:extLst>
+              <a:ext uri="{28A0092B-C50C-407E-A947-70E740481C1C}">
+                <a14:useLocalDpi xmlns:a14="http://schemas.microsoft.com/office/drawing/2010/main" val="0"/>
+              </a:ext>
+            </a:extLst>
+          </a:blip>
+          <a:srcRect/>
+          <a:stretch>
+            <a:fillRect/>
+          </a:stretch>
+        </p:blipFill>
+        <p:spPr bwMode="auto">
+          <a:xfrm>
+            <a:off x="7446149" y="1633491"/>
+            <a:ext cx="4501477" cy="2940194"/>
+          </a:xfrm>
+          <a:prstGeom prst="rect">
+            <a:avLst/>
+          </a:prstGeom>
+          <a:noFill/>
+          <a:extLst>
+            <a:ext uri="{909E8E84-426E-40DD-AFC4-6F175D3DCCD1}">
+              <a14:hiddenFill xmlns:a14="http://schemas.microsoft.com/office/drawing/2010/main">
+                <a:solidFill>
+                  <a:srgbClr val="FFFFFF"/>
+                </a:solidFill>
+              </a14:hiddenFill>
+            </a:ext>
+          </a:extLst>
         </p:spPr>
       </p:pic>
     </p:spTree>
@@ -6622,7 +8146,7 @@
 </p:sld>
 </file>
 
-<file path=ppt/slides/slide5.xml><?xml version="1.0" encoding="utf-8"?>
+<file path=ppt/slides/slide6.xml><?xml version="1.0" encoding="utf-8"?>
 <p:sld xmlns:a="http://schemas.openxmlformats.org/drawingml/2006/main" xmlns:r="http://schemas.openxmlformats.org/officeDocument/2006/relationships" xmlns:p="http://schemas.openxmlformats.org/presentationml/2006/main">
   <p:cSld>
     <p:spTree>
@@ -6664,7 +8188,7 @@
         <p:spPr>
           <a:xfrm>
             <a:off x="838200" y="1633490"/>
-            <a:ext cx="10515600" cy="1387615"/>
+            <a:ext cx="5519351" cy="2257334"/>
           </a:xfrm>
         </p:spPr>
         <p:txBody>
@@ -6677,7 +8201,7 @@
               <a:buNone/>
             </a:pPr>
             <a:r>
-              <a:rPr lang="en-US" dirty="0"/>
+              <a:rPr lang="en-US" sz="2400" b="1" dirty="0"/>
               <a:t>2- Multiple Linear Regression (Simplified)</a:t>
             </a:r>
           </a:p>
@@ -6686,12 +8210,21 @@
               <a:buNone/>
             </a:pPr>
             <a:r>
-              <a:rPr lang="en-US" dirty="0"/>
-              <a:t>In multiple linear regression, there is one dependent variable and more than one independent variable. The equation is:</a:t>
-            </a:r>
-          </a:p>
-          <a:p>
-            <a:endParaRPr lang="en-US" dirty="0"/>
+              <a:rPr lang="en-US" sz="2400" dirty="0"/>
+              <a:t>In multiple linear regression, there is one dependent variable and more than one independent variable. </a:t>
+            </a:r>
+          </a:p>
+          <a:p>
+            <a:pPr marL="0" indent="0">
+              <a:buNone/>
+            </a:pPr>
+            <a:r>
+              <a:rPr lang="en-US" sz="2400" dirty="0"/>
+              <a:t>The equation is:</a:t>
+            </a:r>
+          </a:p>
+          <a:p>
+            <a:endParaRPr lang="en-US" sz="2400" dirty="0"/>
           </a:p>
         </p:txBody>
       </p:sp>
@@ -6747,12 +8280,59 @@
         </p:blipFill>
         <p:spPr>
           <a:xfrm>
-            <a:off x="838200" y="3393105"/>
+            <a:off x="838200" y="3890824"/>
             <a:ext cx="10269383" cy="2667372"/>
           </a:xfrm>
           <a:prstGeom prst="rect">
             <a:avLst/>
           </a:prstGeom>
+        </p:spPr>
+      </p:pic>
+      <p:pic>
+        <p:nvPicPr>
+          <p:cNvPr id="3074" name="Picture 2" descr="What Is Linear Regression? - MATLAB &amp; Simulink">
+            <a:extLst>
+              <a:ext uri="{FF2B5EF4-FFF2-40B4-BE49-F238E27FC236}">
+                <a16:creationId xmlns:a16="http://schemas.microsoft.com/office/drawing/2014/main" id="{4DD72E80-9023-5209-B53A-ADEDF9507F30}"/>
+              </a:ext>
+            </a:extLst>
+          </p:cNvPr>
+          <p:cNvPicPr>
+            <a:picLocks noChangeAspect="1" noChangeArrowheads="1"/>
+          </p:cNvPicPr>
+          <p:nvPr/>
+        </p:nvPicPr>
+        <p:blipFill>
+          <a:blip r:embed="rId3">
+            <a:extLst>
+              <a:ext uri="{28A0092B-C50C-407E-A947-70E740481C1C}">
+                <a14:useLocalDpi xmlns:a14="http://schemas.microsoft.com/office/drawing/2010/main" val="0"/>
+              </a:ext>
+            </a:extLst>
+          </a:blip>
+          <a:srcRect/>
+          <a:stretch>
+            <a:fillRect/>
+          </a:stretch>
+        </p:blipFill>
+        <p:spPr bwMode="auto">
+          <a:xfrm>
+            <a:off x="6697362" y="1719135"/>
+            <a:ext cx="4537504" cy="3403128"/>
+          </a:xfrm>
+          <a:prstGeom prst="rect">
+            <a:avLst/>
+          </a:prstGeom>
+          <a:noFill/>
+          <a:extLst>
+            <a:ext uri="{909E8E84-426E-40DD-AFC4-6F175D3DCCD1}">
+              <a14:hiddenFill xmlns:a14="http://schemas.microsoft.com/office/drawing/2010/main">
+                <a:solidFill>
+                  <a:srgbClr val="FFFFFF"/>
+                </a:solidFill>
+              </a14:hiddenFill>
+            </a:ext>
+          </a:extLst>
         </p:spPr>
       </p:pic>
     </p:spTree>
@@ -6768,7 +8348,7 @@
 </p:sld>
 </file>
 
-<file path=ppt/slides/slide6.xml><?xml version="1.0" encoding="utf-8"?>
+<file path=ppt/slides/slide7.xml><?xml version="1.0" encoding="utf-8"?>
 <p:sld xmlns:a="http://schemas.openxmlformats.org/drawingml/2006/main" xmlns:r="http://schemas.openxmlformats.org/officeDocument/2006/relationships" xmlns:p="http://schemas.openxmlformats.org/presentationml/2006/main">
   <p:cSld>
     <p:spTree>
@@ -7117,18 +8697,12 @@
 </p:sld>
 </file>
 
-<file path=ppt/slides/slide7.xml><?xml version="1.0" encoding="utf-8"?>
+<file path=ppt/slides/slide8.xml><?xml version="1.0" encoding="utf-8"?>
 <p:sld xmlns:a="http://schemas.openxmlformats.org/drawingml/2006/main" xmlns:r="http://schemas.openxmlformats.org/officeDocument/2006/relationships" xmlns:p="http://schemas.openxmlformats.org/presentationml/2006/main">
   <p:cSld>
     <p:spTree>
       <p:nvGrpSpPr>
-        <p:cNvPr id="1" name="">
-          <a:extLst>
-            <a:ext uri="{FF2B5EF4-FFF2-40B4-BE49-F238E27FC236}">
-              <a16:creationId xmlns:a16="http://schemas.microsoft.com/office/drawing/2014/main" id="{68A18BF2-5F3F-8A87-C501-45CB4132B98A}"/>
-            </a:ext>
-          </a:extLst>
-        </p:cNvPr>
+        <p:cNvPr id="1" name=""/>
         <p:cNvGrpSpPr/>
         <p:nvPr/>
       </p:nvGrpSpPr>
@@ -7145,7 +8719,7 @@
           <p:cNvPr id="2" name="Content Placeholder 1">
             <a:extLst>
               <a:ext uri="{FF2B5EF4-FFF2-40B4-BE49-F238E27FC236}">
-                <a16:creationId xmlns:a16="http://schemas.microsoft.com/office/drawing/2014/main" id="{060D3937-6EEB-C58E-5079-6319AEE9388B}"/>
+                <a16:creationId xmlns:a16="http://schemas.microsoft.com/office/drawing/2014/main" id="{E56CB444-3023-BA2B-502A-E63C438605D8}"/>
               </a:ext>
             </a:extLst>
           </p:cNvPr>
@@ -7156,64 +8730,120 @@
             <p:ph idx="1"/>
           </p:nvPr>
         </p:nvSpPr>
-        <p:spPr>
-          <a:xfrm>
-            <a:off x="401216" y="1633491"/>
-            <a:ext cx="6186196" cy="4247356"/>
-          </a:xfrm>
-        </p:spPr>
+        <p:spPr/>
         <p:txBody>
           <a:bodyPr>
-            <a:normAutofit fontScale="85000" lnSpcReduction="20000"/>
+            <a:normAutofit fontScale="92500" lnSpcReduction="10000"/>
           </a:bodyPr>
           <a:lstStyle/>
           <a:p>
+            <a:pPr marL="0" indent="0">
+              <a:buNone/>
+            </a:pPr>
+            <a:r>
+              <a:rPr lang="en-US" b="1" dirty="0"/>
+              <a:t>Four Key Benefits:</a:t>
+            </a:r>
+          </a:p>
+          <a:p>
+            <a:r>
+              <a:rPr lang="en-US" b="1" dirty="0"/>
+              <a:t>Interpretability</a:t>
+            </a:r>
             <a:r>
               <a:rPr lang="en-US" dirty="0"/>
-              <a:t>Ordinary Least Squares (OLS) is one of the foundational methods in statistics and machine learning for estimating the parameters of a linear model.</a:t>
-            </a:r>
-          </a:p>
-          <a:p>
+              <a:t> </a:t>
+            </a:r>
+          </a:p>
+          <a:p>
+            <a:pPr lvl="1"/>
             <a:r>
               <a:rPr lang="en-US" dirty="0"/>
-              <a:t>In essence, OLS seeks to find the line (or hyperplane, in the case of multiple predictors) that best fits a set of data points by minimizing the sum of the squared differences between observed values and the predicted values from the model.</a:t>
-            </a:r>
-          </a:p>
-          <a:p>
-            <a:r>
-              <a:rPr lang="en-US" b="0" dirty="0">
-                <a:solidFill>
-                  <a:srgbClr val="000000"/>
-                </a:solidFill>
-                <a:effectLst/>
-              </a:rPr>
-              <a:t>The </a:t>
-            </a:r>
-            <a:r>
-              <a:rPr lang="en-US" b="1" dirty="0">
-                <a:solidFill>
-                  <a:srgbClr val="000080"/>
-                </a:solidFill>
-                <a:effectLst/>
-              </a:rPr>
-              <a:t>Mean Squared Error (MSE)</a:t>
-            </a:r>
-            <a:r>
-              <a:rPr lang="en-US" b="0" dirty="0">
-                <a:solidFill>
-                  <a:srgbClr val="000000"/>
-                </a:solidFill>
-                <a:effectLst/>
-              </a:rPr>
-              <a:t> is the cost function used to measure the error between the predicted value and the actual value, and it is the function that OLS tries to minimize.</a:t>
+              <a:t>Clear, understandable coefficients</a:t>
+            </a:r>
+          </a:p>
+          <a:p>
+            <a:pPr lvl="1"/>
+            <a:r>
+              <a:rPr lang="en-US" dirty="0"/>
+              <a:t>Easy to explain relationships between variables</a:t>
+            </a:r>
+          </a:p>
+          <a:p>
+            <a:r>
+              <a:rPr lang="en-US" b="1" dirty="0"/>
+              <a:t>Simplicity</a:t>
+            </a:r>
+            <a:r>
+              <a:rPr lang="en-US" dirty="0"/>
+              <a:t> </a:t>
+            </a:r>
+          </a:p>
+          <a:p>
+            <a:pPr lvl="1"/>
+            <a:r>
+              <a:rPr lang="en-US" dirty="0"/>
+              <a:t>Transparent and easy to implement</a:t>
+            </a:r>
+          </a:p>
+          <a:p>
+            <a:pPr lvl="1"/>
+            <a:r>
+              <a:rPr lang="en-US" dirty="0"/>
+              <a:t>Foundation for more complex algorithms</a:t>
+            </a:r>
+          </a:p>
+          <a:p>
+            <a:r>
+              <a:rPr lang="en-US" b="1" dirty="0"/>
+              <a:t>Basis for Advanced Models</a:t>
+            </a:r>
+            <a:r>
+              <a:rPr lang="en-US" dirty="0"/>
+              <a:t> </a:t>
+            </a:r>
+          </a:p>
+          <a:p>
+            <a:pPr lvl="1"/>
+            <a:r>
+              <a:rPr lang="en-US" dirty="0"/>
+              <a:t>Building block for regularization (Ridge, Lasso)</a:t>
+            </a:r>
+          </a:p>
+          <a:p>
+            <a:pPr lvl="1"/>
+            <a:r>
+              <a:rPr lang="en-US" dirty="0"/>
+              <a:t>Foundation for support vector machines</a:t>
+            </a:r>
+          </a:p>
+          <a:p>
+            <a:r>
+              <a:rPr lang="en-US" b="1" dirty="0"/>
+              <a:t>Assumption Testing</a:t>
+            </a:r>
+            <a:r>
+              <a:rPr lang="en-US" dirty="0"/>
+              <a:t> </a:t>
+            </a:r>
+          </a:p>
+          <a:p>
+            <a:pPr lvl="1"/>
+            <a:r>
+              <a:rPr lang="en-US" dirty="0"/>
+              <a:t>Validates key data assumptions</a:t>
+            </a:r>
+          </a:p>
+          <a:p>
+            <a:pPr lvl="1"/>
+            <a:r>
+              <a:rPr lang="en-US" dirty="0"/>
+              <a:t>Critical for statistical analysis</a:t>
             </a:r>
           </a:p>
           <a:p>
             <a:endParaRPr lang="en-US" dirty="0"/>
           </a:p>
-          <a:p>
-            <a:endParaRPr lang="en-US" dirty="0"/>
-          </a:p>
         </p:txBody>
       </p:sp>
       <p:sp>
@@ -7221,7 +8851,7 @@
           <p:cNvPr id="3" name="Title 2">
             <a:extLst>
               <a:ext uri="{FF2B5EF4-FFF2-40B4-BE49-F238E27FC236}">
-                <a16:creationId xmlns:a16="http://schemas.microsoft.com/office/drawing/2014/main" id="{8591A6E6-7423-A358-3B1F-7BE149F2FB41}"/>
+                <a16:creationId xmlns:a16="http://schemas.microsoft.com/office/drawing/2014/main" id="{55B8EC88-FA32-80C6-9212-225795D1FE9E}"/>
               </a:ext>
             </a:extLst>
           </p:cNvPr>
@@ -7241,105 +8871,15 @@
           <a:p>
             <a:r>
               <a:rPr lang="en-US" dirty="0"/>
-              <a:t>Finding the Best Fit Line Using The OLS Method:</a:t>
-            </a:r>
-          </a:p>
-        </p:txBody>
-      </p:sp>
-      <p:pic>
-        <p:nvPicPr>
-          <p:cNvPr id="11" name="Picture 10">
-            <a:extLst>
-              <a:ext uri="{FF2B5EF4-FFF2-40B4-BE49-F238E27FC236}">
-                <a16:creationId xmlns:a16="http://schemas.microsoft.com/office/drawing/2014/main" id="{F0209368-313D-4CAF-FC38-B592D2490446}"/>
-              </a:ext>
-            </a:extLst>
-          </p:cNvPr>
-          <p:cNvPicPr>
-            <a:picLocks noChangeAspect="1"/>
-          </p:cNvPicPr>
-          <p:nvPr/>
-        </p:nvPicPr>
-        <p:blipFill>
-          <a:blip r:embed="rId2"/>
-          <a:stretch>
-            <a:fillRect/>
-          </a:stretch>
-        </p:blipFill>
-        <p:spPr>
-          <a:xfrm>
-            <a:off x="2600624" y="5880847"/>
-            <a:ext cx="3181794" cy="943107"/>
-          </a:xfrm>
-          <a:prstGeom prst="rect">
-            <a:avLst/>
-          </a:prstGeom>
-        </p:spPr>
-      </p:pic>
-      <p:pic>
-        <p:nvPicPr>
-          <p:cNvPr id="12" name="Picture 11">
-            <a:extLst>
-              <a:ext uri="{FF2B5EF4-FFF2-40B4-BE49-F238E27FC236}">
-                <a16:creationId xmlns:a16="http://schemas.microsoft.com/office/drawing/2014/main" id="{ED72E220-66E3-C895-AA2B-7821BAB0B80F}"/>
-              </a:ext>
-            </a:extLst>
-          </p:cNvPr>
-          <p:cNvPicPr>
-            <a:picLocks noChangeAspect="1"/>
-          </p:cNvPicPr>
-          <p:nvPr/>
-        </p:nvPicPr>
-        <p:blipFill>
-          <a:blip r:embed="rId3"/>
-          <a:stretch>
-            <a:fillRect/>
-          </a:stretch>
-        </p:blipFill>
-        <p:spPr>
-          <a:xfrm>
-            <a:off x="6587412" y="1633491"/>
-            <a:ext cx="4972665" cy="3910622"/>
-          </a:xfrm>
-          <a:prstGeom prst="rect">
-            <a:avLst/>
-          </a:prstGeom>
-        </p:spPr>
-      </p:pic>
-      <p:pic>
-        <p:nvPicPr>
-          <p:cNvPr id="13" name="Picture 12">
-            <a:extLst>
-              <a:ext uri="{FF2B5EF4-FFF2-40B4-BE49-F238E27FC236}">
-                <a16:creationId xmlns:a16="http://schemas.microsoft.com/office/drawing/2014/main" id="{923AB4FC-8803-B130-E7FF-D6F9B65D8759}"/>
-              </a:ext>
-            </a:extLst>
-          </p:cNvPr>
-          <p:cNvPicPr>
-            <a:picLocks noChangeAspect="1"/>
-          </p:cNvPicPr>
-          <p:nvPr/>
-        </p:nvPicPr>
-        <p:blipFill>
-          <a:blip r:embed="rId4"/>
-          <a:stretch>
-            <a:fillRect/>
-          </a:stretch>
-        </p:blipFill>
-        <p:spPr>
-          <a:xfrm>
-            <a:off x="8282966" y="5489997"/>
-            <a:ext cx="2349975" cy="1333957"/>
-          </a:xfrm>
-          <a:prstGeom prst="rect">
-            <a:avLst/>
-          </a:prstGeom>
-        </p:spPr>
-      </p:pic>
+              <a:t>Why Linear Regression Matters</a:t>
+            </a:r>
+          </a:p>
+        </p:txBody>
+      </p:sp>
     </p:spTree>
     <p:extLst>
       <p:ext uri="{BB962C8B-B14F-4D97-AF65-F5344CB8AC3E}">
-        <p14:creationId xmlns:p14="http://schemas.microsoft.com/office/powerpoint/2010/main" val="945325653"/>
+        <p14:creationId xmlns:p14="http://schemas.microsoft.com/office/powerpoint/2010/main" val="1427132372"/>
       </p:ext>
     </p:extLst>
   </p:cSld>
@@ -7349,18 +8889,12 @@
 </p:sld>
 </file>
 
-<file path=ppt/slides/slide8.xml><?xml version="1.0" encoding="utf-8"?>
+<file path=ppt/slides/slide9.xml><?xml version="1.0" encoding="utf-8"?>
 <p:sld xmlns:a="http://schemas.openxmlformats.org/drawingml/2006/main" xmlns:r="http://schemas.openxmlformats.org/officeDocument/2006/relationships" xmlns:p="http://schemas.openxmlformats.org/presentationml/2006/main">
   <p:cSld>
     <p:spTree>
       <p:nvGrpSpPr>
-        <p:cNvPr id="1" name="">
-          <a:extLst>
-            <a:ext uri="{FF2B5EF4-FFF2-40B4-BE49-F238E27FC236}">
-              <a16:creationId xmlns:a16="http://schemas.microsoft.com/office/drawing/2014/main" id="{10984685-A82D-7DC6-6817-68AEC3E64A5D}"/>
-            </a:ext>
-          </a:extLst>
-        </p:cNvPr>
+        <p:cNvPr id="1" name=""/>
         <p:cNvGrpSpPr/>
         <p:nvPr/>
       </p:nvGrpSpPr>
@@ -7374,300 +8908,130 @@
       </p:grpSpPr>
       <p:sp>
         <p:nvSpPr>
-          <p:cNvPr id="3" name="Title 2">
-            <a:extLst>
-              <a:ext uri="{FF2B5EF4-FFF2-40B4-BE49-F238E27FC236}">
-                <a16:creationId xmlns:a16="http://schemas.microsoft.com/office/drawing/2014/main" id="{7962BA90-F130-E048-0E94-9108E2EC86CE}"/>
-              </a:ext>
-            </a:extLst>
-          </p:cNvPr>
-          <p:cNvSpPr>
-            <a:spLocks noGrp="1"/>
-          </p:cNvSpPr>
-          <p:nvPr>
-            <p:ph type="title"/>
-          </p:nvPr>
-        </p:nvSpPr>
-        <p:spPr/>
-        <p:txBody>
-          <a:bodyPr/>
-          <a:lstStyle/>
-          <a:p>
-            <a:r>
-              <a:rPr lang="en-US" dirty="0"/>
-              <a:t>Solving Linear Regression with the Closed-Form Solution</a:t>
-            </a:r>
-          </a:p>
-        </p:txBody>
-      </p:sp>
-      <p:pic>
-        <p:nvPicPr>
-          <p:cNvPr id="11" name="Content Placeholder 10">
-            <a:extLst>
-              <a:ext uri="{FF2B5EF4-FFF2-40B4-BE49-F238E27FC236}">
-                <a16:creationId xmlns:a16="http://schemas.microsoft.com/office/drawing/2014/main" id="{B6FB3ED4-D6F0-A4DD-2E87-333BC4BCB751}"/>
-              </a:ext>
-            </a:extLst>
-          </p:cNvPr>
-          <p:cNvPicPr>
-            <a:picLocks noGrp="1" noChangeAspect="1"/>
-          </p:cNvPicPr>
+          <p:cNvPr id="2" name="Content Placeholder 1">
+            <a:extLst>
+              <a:ext uri="{FF2B5EF4-FFF2-40B4-BE49-F238E27FC236}">
+                <a16:creationId xmlns:a16="http://schemas.microsoft.com/office/drawing/2014/main" id="{D7723A21-97D0-9266-6B42-28CBEDC236D9}"/>
+              </a:ext>
+            </a:extLst>
+          </p:cNvPr>
+          <p:cNvSpPr>
+            <a:spLocks noGrp="1"/>
+          </p:cNvSpPr>
           <p:nvPr>
             <p:ph idx="1"/>
           </p:nvPr>
-        </p:nvPicPr>
-        <p:blipFill>
-          <a:blip r:embed="rId2"/>
-          <a:stretch>
-            <a:fillRect/>
-          </a:stretch>
-        </p:blipFill>
+        </p:nvSpPr>
         <p:spPr>
           <a:xfrm>
-            <a:off x="6936549" y="1789357"/>
-            <a:ext cx="4417251" cy="4247356"/>
+            <a:off x="838200" y="1633491"/>
+            <a:ext cx="6470822" cy="5131294"/>
           </a:xfrm>
         </p:spPr>
-      </p:pic>
-      <p:sp>
-        <p:nvSpPr>
-          <p:cNvPr id="15" name="Content Placeholder 1">
-            <a:extLst>
-              <a:ext uri="{FF2B5EF4-FFF2-40B4-BE49-F238E27FC236}">
-                <a16:creationId xmlns:a16="http://schemas.microsoft.com/office/drawing/2014/main" id="{16489CD5-E694-96CA-6EE8-2DA9D775D58C}"/>
-              </a:ext>
-            </a:extLst>
-          </p:cNvPr>
-          <p:cNvSpPr txBox="1">
-            <a:spLocks/>
-          </p:cNvSpPr>
-          <p:nvPr/>
-        </p:nvSpPr>
-        <p:spPr>
-          <a:xfrm>
-            <a:off x="838200" y="1789357"/>
-            <a:ext cx="6020263" cy="4247356"/>
-          </a:xfrm>
-          <a:prstGeom prst="rect">
-            <a:avLst/>
-          </a:prstGeom>
-        </p:spPr>
-        <p:txBody>
-          <a:bodyPr vert="horz" lIns="91440" tIns="45720" rIns="91440" bIns="45720" rtlCol="0">
+        <p:txBody>
+          <a:bodyPr>
             <a:normAutofit/>
           </a:bodyPr>
-          <a:lstStyle>
-            <a:lvl1pPr marL="228600" indent="-228600" algn="l" defTabSz="914400" rtl="0" eaLnBrk="1" latinLnBrk="0" hangingPunct="1">
-              <a:lnSpc>
-                <a:spcPct val="90000"/>
-              </a:lnSpc>
-              <a:spcBef>
-                <a:spcPts val="1000"/>
-              </a:spcBef>
-              <a:buFont typeface="Arial" panose="020B0604020202020204" pitchFamily="34" charset="0"/>
-              <a:buChar char="•"/>
-              <a:defRPr sz="2800" kern="1200">
-                <a:solidFill>
-                  <a:schemeClr val="tx1"/>
-                </a:solidFill>
-                <a:latin typeface="+mn-lt"/>
-                <a:ea typeface="+mn-ea"/>
-                <a:cs typeface="+mn-cs"/>
-              </a:defRPr>
-            </a:lvl1pPr>
-            <a:lvl2pPr marL="685800" indent="-228600" algn="l" defTabSz="914400" rtl="0" eaLnBrk="1" latinLnBrk="0" hangingPunct="1">
-              <a:lnSpc>
-                <a:spcPct val="90000"/>
-              </a:lnSpc>
-              <a:spcBef>
-                <a:spcPts val="500"/>
-              </a:spcBef>
-              <a:buFont typeface="Arial" panose="020B0604020202020204" pitchFamily="34" charset="0"/>
-              <a:buChar char="•"/>
-              <a:defRPr sz="2400" kern="1200">
-                <a:solidFill>
-                  <a:schemeClr val="tx1"/>
-                </a:solidFill>
-                <a:latin typeface="+mn-lt"/>
-                <a:ea typeface="+mn-ea"/>
-                <a:cs typeface="+mn-cs"/>
-              </a:defRPr>
-            </a:lvl2pPr>
-            <a:lvl3pPr marL="1143000" indent="-228600" algn="l" defTabSz="914400" rtl="0" eaLnBrk="1" latinLnBrk="0" hangingPunct="1">
-              <a:lnSpc>
-                <a:spcPct val="90000"/>
-              </a:lnSpc>
-              <a:spcBef>
-                <a:spcPts val="500"/>
-              </a:spcBef>
-              <a:buFont typeface="Arial" panose="020B0604020202020204" pitchFamily="34" charset="0"/>
-              <a:buChar char="•"/>
-              <a:defRPr sz="2000" kern="1200">
-                <a:solidFill>
-                  <a:schemeClr val="tx1"/>
-                </a:solidFill>
-                <a:latin typeface="+mn-lt"/>
-                <a:ea typeface="+mn-ea"/>
-                <a:cs typeface="+mn-cs"/>
-              </a:defRPr>
-            </a:lvl3pPr>
-            <a:lvl4pPr marL="1600200" indent="-228600" algn="l" defTabSz="914400" rtl="0" eaLnBrk="1" latinLnBrk="0" hangingPunct="1">
-              <a:lnSpc>
-                <a:spcPct val="90000"/>
-              </a:lnSpc>
-              <a:spcBef>
-                <a:spcPts val="500"/>
-              </a:spcBef>
-              <a:buFont typeface="Arial" panose="020B0604020202020204" pitchFamily="34" charset="0"/>
-              <a:buChar char="•"/>
-              <a:defRPr sz="1800" kern="1200">
-                <a:solidFill>
-                  <a:schemeClr val="tx1"/>
-                </a:solidFill>
-                <a:latin typeface="+mn-lt"/>
-                <a:ea typeface="+mn-ea"/>
-                <a:cs typeface="+mn-cs"/>
-              </a:defRPr>
-            </a:lvl4pPr>
-            <a:lvl5pPr marL="2057400" indent="-228600" algn="l" defTabSz="914400" rtl="0" eaLnBrk="1" latinLnBrk="0" hangingPunct="1">
-              <a:lnSpc>
-                <a:spcPct val="90000"/>
-              </a:lnSpc>
-              <a:spcBef>
-                <a:spcPts val="500"/>
-              </a:spcBef>
-              <a:buFont typeface="Arial" panose="020B0604020202020204" pitchFamily="34" charset="0"/>
-              <a:buChar char="•"/>
-              <a:defRPr sz="1800" kern="1200">
-                <a:solidFill>
-                  <a:schemeClr val="tx1"/>
-                </a:solidFill>
-                <a:latin typeface="+mn-lt"/>
-                <a:ea typeface="+mn-ea"/>
-                <a:cs typeface="+mn-cs"/>
-              </a:defRPr>
-            </a:lvl5pPr>
-            <a:lvl6pPr marL="2514600" indent="-228600" algn="l" defTabSz="914400" rtl="0" eaLnBrk="1" latinLnBrk="0" hangingPunct="1">
-              <a:lnSpc>
-                <a:spcPct val="90000"/>
-              </a:lnSpc>
-              <a:spcBef>
-                <a:spcPts val="500"/>
-              </a:spcBef>
-              <a:buFont typeface="Arial" panose="020B0604020202020204" pitchFamily="34" charset="0"/>
-              <a:buChar char="•"/>
-              <a:defRPr sz="1800" kern="1200">
-                <a:solidFill>
-                  <a:schemeClr val="tx1"/>
-                </a:solidFill>
-                <a:latin typeface="+mn-lt"/>
-                <a:ea typeface="+mn-ea"/>
-                <a:cs typeface="+mn-cs"/>
-              </a:defRPr>
-            </a:lvl6pPr>
-            <a:lvl7pPr marL="2971800" indent="-228600" algn="l" defTabSz="914400" rtl="0" eaLnBrk="1" latinLnBrk="0" hangingPunct="1">
-              <a:lnSpc>
-                <a:spcPct val="90000"/>
-              </a:lnSpc>
-              <a:spcBef>
-                <a:spcPts val="500"/>
-              </a:spcBef>
-              <a:buFont typeface="Arial" panose="020B0604020202020204" pitchFamily="34" charset="0"/>
-              <a:buChar char="•"/>
-              <a:defRPr sz="1800" kern="1200">
-                <a:solidFill>
-                  <a:schemeClr val="tx1"/>
-                </a:solidFill>
-                <a:latin typeface="+mn-lt"/>
-                <a:ea typeface="+mn-ea"/>
-                <a:cs typeface="+mn-cs"/>
-              </a:defRPr>
-            </a:lvl7pPr>
-            <a:lvl8pPr marL="3429000" indent="-228600" algn="l" defTabSz="914400" rtl="0" eaLnBrk="1" latinLnBrk="0" hangingPunct="1">
-              <a:lnSpc>
-                <a:spcPct val="90000"/>
-              </a:lnSpc>
-              <a:spcBef>
-                <a:spcPts val="500"/>
-              </a:spcBef>
-              <a:buFont typeface="Arial" panose="020B0604020202020204" pitchFamily="34" charset="0"/>
-              <a:buChar char="•"/>
-              <a:defRPr sz="1800" kern="1200">
-                <a:solidFill>
-                  <a:schemeClr val="tx1"/>
-                </a:solidFill>
-                <a:latin typeface="+mn-lt"/>
-                <a:ea typeface="+mn-ea"/>
-                <a:cs typeface="+mn-cs"/>
-              </a:defRPr>
-            </a:lvl8pPr>
-            <a:lvl9pPr marL="3886200" indent="-228600" algn="l" defTabSz="914400" rtl="0" eaLnBrk="1" latinLnBrk="0" hangingPunct="1">
-              <a:lnSpc>
-                <a:spcPct val="90000"/>
-              </a:lnSpc>
-              <a:spcBef>
-                <a:spcPts val="500"/>
-              </a:spcBef>
-              <a:buFont typeface="Arial" panose="020B0604020202020204" pitchFamily="34" charset="0"/>
-              <a:buChar char="•"/>
-              <a:defRPr sz="1800" kern="1200">
-                <a:solidFill>
-                  <a:schemeClr val="tx1"/>
-                </a:solidFill>
-                <a:latin typeface="+mn-lt"/>
-                <a:ea typeface="+mn-ea"/>
-                <a:cs typeface="+mn-cs"/>
-              </a:defRPr>
-            </a:lvl9pPr>
-          </a:lstStyle>
+          <a:lstStyle/>
           <a:p>
             <a:pPr marL="0" indent="0">
               <a:buNone/>
             </a:pPr>
             <a:r>
-              <a:rPr lang="en-US" sz="2000" dirty="0"/>
-              <a:t>The closed-form solution is efficient for small to medium-sized datasets, but it becomes computationally expensive for large datasets because it requires calculating the inverse of a matrix. It works well when:</a:t>
-            </a:r>
-          </a:p>
-          <a:p>
-            <a:r>
-              <a:rPr lang="en-US" sz="2000" dirty="0"/>
-              <a:t>The dataset is not very large (typically up to thousands of rows).</a:t>
-            </a:r>
-          </a:p>
-          <a:p>
-            <a:r>
-              <a:rPr lang="en-US" sz="2000" dirty="0"/>
-              <a:t>The number of features (independent variables) is small.</a:t>
-            </a:r>
-          </a:p>
-          <a:p>
-            <a:r>
-              <a:rPr lang="en-US" sz="2000" dirty="0"/>
-              <a:t>There are no multicollinearity issues (i.e., features are not highly correlated).</a:t>
+              <a:rPr lang="en-US" sz="2400" b="1" dirty="0"/>
+              <a:t>What Makes a Line "Best-Fit"?</a:t>
             </a:r>
           </a:p>
           <a:p>
             <a:pPr marL="0" indent="0">
               <a:buNone/>
             </a:pPr>
-            <a:br>
-              <a:rPr lang="en-US" sz="2000" dirty="0"/>
-            </a:br>
-            <a:r>
-              <a:rPr lang="en-US" sz="2000" dirty="0"/>
-              <a:t>For larger datasets or more complex models, iterative methods like Gradient Descent are preferred.</a:t>
+            <a:r>
+              <a:rPr lang="en-US" sz="2400" dirty="0"/>
+              <a:t>The best-fit line minimizes the error between predicted and actual values.</a:t>
+            </a:r>
+          </a:p>
+          <a:p>
+            <a:pPr marL="0" indent="0">
+              <a:buNone/>
+            </a:pPr>
+            <a:r>
+              <a:rPr lang="en-US" sz="2400" b="1" dirty="0"/>
+              <a:t>Key Components:</a:t>
+            </a:r>
+          </a:p>
+          <a:p>
+            <a:r>
+              <a:rPr lang="en-US" sz="2400" dirty="0"/>
+              <a:t>Slope (β₁): How much Y changes for each unit change in X</a:t>
+            </a:r>
+          </a:p>
+          <a:p>
+            <a:r>
+              <a:rPr lang="en-US" sz="2400" dirty="0"/>
+              <a:t>Intercept (β₀): Value of Y when X = 0</a:t>
+            </a:r>
+          </a:p>
+          <a:p>
+            <a:r>
+              <a:rPr lang="en-US" sz="2400" dirty="0"/>
+              <a:t>Goal: Find the line that makes the most accurate predictions</a:t>
+            </a:r>
+          </a:p>
+          <a:p>
+            <a:r>
+              <a:rPr lang="en-US" sz="2400" dirty="0"/>
+              <a:t>Mathematical Representation:</a:t>
+            </a:r>
+          </a:p>
+          <a:p>
+            <a:r>
+              <a:rPr lang="en-US" sz="2400" dirty="0"/>
+              <a:t>Ŷ = β₀ + β₁X</a:t>
+            </a:r>
+          </a:p>
+          <a:p>
+            <a:r>
+              <a:rPr lang="en-US" sz="2400" dirty="0"/>
+              <a:t>Where Ŷ is the predicted value.</a:t>
+            </a:r>
+          </a:p>
+        </p:txBody>
+      </p:sp>
+      <p:sp>
+        <p:nvSpPr>
+          <p:cNvPr id="3" name="Title 2">
+            <a:extLst>
+              <a:ext uri="{FF2B5EF4-FFF2-40B4-BE49-F238E27FC236}">
+                <a16:creationId xmlns:a16="http://schemas.microsoft.com/office/drawing/2014/main" id="{E520913F-E7B6-47CD-911A-B7E553D5285A}"/>
+              </a:ext>
+            </a:extLst>
+          </p:cNvPr>
+          <p:cNvSpPr>
+            <a:spLocks noGrp="1"/>
+          </p:cNvSpPr>
+          <p:nvPr>
+            <p:ph type="title"/>
+          </p:nvPr>
+        </p:nvSpPr>
+        <p:spPr/>
+        <p:txBody>
+          <a:bodyPr/>
+          <a:lstStyle/>
+          <a:p>
+            <a:r>
+              <a:rPr lang="en-US" dirty="0"/>
+              <a:t>The Best-Fit Line Concept</a:t>
             </a:r>
           </a:p>
         </p:txBody>
       </p:sp>
       <p:pic>
         <p:nvPicPr>
-          <p:cNvPr id="1026" name="Picture 2" descr="Why Use Python? - Full Stack Python">
-            <a:hlinkClick r:id="rId3"/>
-            <a:extLst>
-              <a:ext uri="{FF2B5EF4-FFF2-40B4-BE49-F238E27FC236}">
-                <a16:creationId xmlns:a16="http://schemas.microsoft.com/office/drawing/2014/main" id="{86CE7E24-5203-202C-96DE-DAADDEBAC033}"/>
+          <p:cNvPr id="5123" name="Picture 3" descr="Fitting Lines to Data | CK-12 Foundation">
+            <a:extLst>
+              <a:ext uri="{FF2B5EF4-FFF2-40B4-BE49-F238E27FC236}">
+                <a16:creationId xmlns:a16="http://schemas.microsoft.com/office/drawing/2014/main" id="{7227A453-5C80-EF05-DBFF-BB24669D733C}"/>
               </a:ext>
             </a:extLst>
           </p:cNvPr>
@@ -7677,7 +9041,7 @@
           <p:nvPr/>
         </p:nvPicPr>
         <p:blipFill>
-          <a:blip r:embed="rId4">
+          <a:blip r:embed="rId2">
             <a:extLst>
               <a:ext uri="{28A0092B-C50C-407E-A947-70E740481C1C}">
                 <a14:useLocalDpi xmlns:a14="http://schemas.microsoft.com/office/drawing/2010/main" val="0"/>
@@ -7691,8 +9055,8 @@
         </p:blipFill>
         <p:spPr bwMode="auto">
           <a:xfrm>
-            <a:off x="838200" y="6280339"/>
-            <a:ext cx="1492624" cy="486147"/>
+            <a:off x="7309022" y="1545731"/>
+            <a:ext cx="4335878" cy="4324865"/>
           </a:xfrm>
           <a:prstGeom prst="rect">
             <a:avLst/>
@@ -7712,186 +9076,7 @@
     </p:spTree>
     <p:extLst>
       <p:ext uri="{BB962C8B-B14F-4D97-AF65-F5344CB8AC3E}">
-        <p14:creationId xmlns:p14="http://schemas.microsoft.com/office/powerpoint/2010/main" val="2248227231"/>
-      </p:ext>
-    </p:extLst>
-  </p:cSld>
-  <p:clrMapOvr>
-    <a:masterClrMapping/>
-  </p:clrMapOvr>
-</p:sld>
-</file>
-
-<file path=ppt/slides/slide9.xml><?xml version="1.0" encoding="utf-8"?>
-<p:sld xmlns:a="http://schemas.openxmlformats.org/drawingml/2006/main" xmlns:r="http://schemas.openxmlformats.org/officeDocument/2006/relationships" xmlns:p="http://schemas.openxmlformats.org/presentationml/2006/main">
-  <p:cSld>
-    <p:spTree>
-      <p:nvGrpSpPr>
-        <p:cNvPr id="1" name="">
-          <a:extLst>
-            <a:ext uri="{FF2B5EF4-FFF2-40B4-BE49-F238E27FC236}">
-              <a16:creationId xmlns:a16="http://schemas.microsoft.com/office/drawing/2014/main" id="{A13DFCA9-DB68-4926-D36D-44E2CB4365C6}"/>
-            </a:ext>
-          </a:extLst>
-        </p:cNvPr>
-        <p:cNvGrpSpPr/>
-        <p:nvPr/>
-      </p:nvGrpSpPr>
-      <p:grpSpPr>
-        <a:xfrm>
-          <a:off x="0" y="0"/>
-          <a:ext cx="0" cy="0"/>
-          <a:chOff x="0" y="0"/>
-          <a:chExt cx="0" cy="0"/>
-        </a:xfrm>
-      </p:grpSpPr>
-      <p:sp>
-        <p:nvSpPr>
-          <p:cNvPr id="2" name="Content Placeholder 1">
-            <a:extLst>
-              <a:ext uri="{FF2B5EF4-FFF2-40B4-BE49-F238E27FC236}">
-                <a16:creationId xmlns:a16="http://schemas.microsoft.com/office/drawing/2014/main" id="{5161A592-C95D-5F4C-D812-FDE1F8B67D98}"/>
-              </a:ext>
-            </a:extLst>
-          </p:cNvPr>
-          <p:cNvSpPr>
-            <a:spLocks noGrp="1"/>
-          </p:cNvSpPr>
-          <p:nvPr>
-            <p:ph idx="1"/>
-          </p:nvPr>
-        </p:nvSpPr>
-        <p:spPr>
-          <a:xfrm>
-            <a:off x="838199" y="1633491"/>
-            <a:ext cx="6123039" cy="5131294"/>
-          </a:xfrm>
-        </p:spPr>
-        <p:txBody>
-          <a:bodyPr>
-            <a:normAutofit fontScale="85000" lnSpcReduction="10000"/>
-          </a:bodyPr>
-          <a:lstStyle/>
-          <a:p>
-            <a:r>
-              <a:rPr lang="en-US" dirty="0"/>
-              <a:t>A linear regression model can be trained using Gradient Descent, which adjusts the model's parameters to minimize the mean squared error (MSE).</a:t>
-            </a:r>
-          </a:p>
-          <a:p>
-            <a:r>
-              <a:rPr lang="en-US" dirty="0"/>
-              <a:t>To update (</a:t>
-            </a:r>
-            <a:r>
-              <a:rPr lang="en-US" i="1" dirty="0"/>
-              <a:t>Beta 0) </a:t>
-            </a:r>
-            <a:r>
-              <a:rPr lang="en-US" dirty="0"/>
-              <a:t>and (</a:t>
-            </a:r>
-            <a:r>
-              <a:rPr lang="en-US" i="1" dirty="0"/>
-              <a:t>Beta 1)</a:t>
-            </a:r>
-            <a:r>
-              <a:rPr lang="en-US" dirty="0"/>
-              <a:t> and reduce the cost function (minimizing the RMSE), gradient descent starts with random values for (</a:t>
-            </a:r>
-            <a:r>
-              <a:rPr lang="en-US" i="1" dirty="0"/>
-              <a:t>Beta 0) </a:t>
-            </a:r>
-            <a:r>
-              <a:rPr lang="en-US" dirty="0"/>
-              <a:t>and (</a:t>
-            </a:r>
-            <a:r>
-              <a:rPr lang="en-US" i="1" dirty="0"/>
-              <a:t>Beta 1) </a:t>
-            </a:r>
-            <a:r>
-              <a:rPr lang="en-US" dirty="0"/>
-              <a:t>and iteratively improves them to find the best-fit line.</a:t>
-            </a:r>
-          </a:p>
-          <a:p>
-            <a:r>
-              <a:rPr lang="en-US" dirty="0"/>
-              <a:t>A gradient is simply the derivative, showing how small changes in inputs affect the output. </a:t>
-            </a:r>
-          </a:p>
-          <a:p>
-            <a:r>
-              <a:rPr lang="en-US" dirty="0"/>
-              <a:t>By moving in the direction of the Mean Squared Error negative gradient with respect to the coefficients, the coefficients can be changed.</a:t>
-            </a:r>
-          </a:p>
-        </p:txBody>
-      </p:sp>
-      <p:sp>
-        <p:nvSpPr>
-          <p:cNvPr id="3" name="Title 2">
-            <a:extLst>
-              <a:ext uri="{FF2B5EF4-FFF2-40B4-BE49-F238E27FC236}">
-                <a16:creationId xmlns:a16="http://schemas.microsoft.com/office/drawing/2014/main" id="{DF98230F-D09E-0053-052C-DBBDA534D6A9}"/>
-              </a:ext>
-            </a:extLst>
-          </p:cNvPr>
-          <p:cNvSpPr>
-            <a:spLocks noGrp="1"/>
-          </p:cNvSpPr>
-          <p:nvPr>
-            <p:ph type="title"/>
-          </p:nvPr>
-        </p:nvSpPr>
-        <p:spPr/>
-        <p:txBody>
-          <a:bodyPr/>
-          <a:lstStyle/>
-          <a:p>
-            <a:r>
-              <a:rPr lang="en-US" dirty="0"/>
-              <a:t>Solving Linear Regression Using The Gradient Descent Method</a:t>
-            </a:r>
-          </a:p>
-        </p:txBody>
-      </p:sp>
-      <p:pic>
-        <p:nvPicPr>
-          <p:cNvPr id="5" name="Picture 4">
-            <a:extLst>
-              <a:ext uri="{FF2B5EF4-FFF2-40B4-BE49-F238E27FC236}">
-                <a16:creationId xmlns:a16="http://schemas.microsoft.com/office/drawing/2014/main" id="{2C0B6C6C-BCCC-176F-E3E9-9C6155B90FC2}"/>
-              </a:ext>
-            </a:extLst>
-          </p:cNvPr>
-          <p:cNvPicPr>
-            <a:picLocks noChangeAspect="1"/>
-          </p:cNvPicPr>
-          <p:nvPr/>
-        </p:nvPicPr>
-        <p:blipFill>
-          <a:blip r:embed="rId2"/>
-          <a:stretch>
-            <a:fillRect/>
-          </a:stretch>
-        </p:blipFill>
-        <p:spPr>
-          <a:xfrm>
-            <a:off x="7231423" y="1746681"/>
-            <a:ext cx="4122377" cy="2996518"/>
-          </a:xfrm>
-          <a:prstGeom prst="rect">
-            <a:avLst/>
-          </a:prstGeom>
-        </p:spPr>
-      </p:pic>
-    </p:spTree>
-    <p:extLst>
-      <p:ext uri="{BB962C8B-B14F-4D97-AF65-F5344CB8AC3E}">
-        <p14:creationId xmlns:p14="http://schemas.microsoft.com/office/powerpoint/2010/main" val="1427723282"/>
+        <p14:creationId xmlns:p14="http://schemas.microsoft.com/office/powerpoint/2010/main" val="3075052158"/>
       </p:ext>
     </p:extLst>
   </p:cSld>
@@ -8197,6 +9382,15 @@
 </file>
 
 <file path=customXml/item1.xml><?xml version="1.0" encoding="utf-8"?>
+<?mso-contentType ?>
+<FormTemplates xmlns="http://schemas.microsoft.com/sharepoint/v3/contenttype/forms">
+  <Display>DocumentLibraryForm</Display>
+  <Edit>DocumentLibraryForm</Edit>
+  <New>DocumentLibraryForm</New>
+</FormTemplates>
+</file>
+
+<file path=customXml/item2.xml><?xml version="1.0" encoding="utf-8"?>
 <ct:contentTypeSchema xmlns:ct="http://schemas.microsoft.com/office/2006/metadata/contentType" xmlns:ma="http://schemas.microsoft.com/office/2006/metadata/properties/metaAttributes" ct:_="" ma:_="" ma:contentTypeName="Document" ma:contentTypeID="0x010100D30DB0B4DCD4994BA0B53B90F48248FB" ma:contentTypeVersion="17" ma:contentTypeDescription="Create a new document." ma:contentTypeScope="" ma:versionID="89b596077de0219f935a6ab711f2d0ee">
   <xsd:schema xmlns:xsd="http://www.w3.org/2001/XMLSchema" xmlns:xs="http://www.w3.org/2001/XMLSchema" xmlns:p="http://schemas.microsoft.com/office/2006/metadata/properties" xmlns:ns3="5d9e8ea6-d7cf-4c00-b931-0c0027af1451" xmlns:ns4="24b8453d-154c-4c63-97d1-80f7846f6991" targetNamespace="http://schemas.microsoft.com/office/2006/metadata/properties" ma:root="true" ma:fieldsID="cd616adf96839ca32a36dfb6e4534def" ns3:_="" ns4:_="">
     <xsd:import namespace="5d9e8ea6-d7cf-4c00-b931-0c0027af1451"/>
@@ -8443,15 +9637,6 @@
 </ct:contentTypeSchema>
 </file>
 
-<file path=customXml/item2.xml><?xml version="1.0" encoding="utf-8"?>
-<?mso-contentType ?>
-<FormTemplates xmlns="http://schemas.microsoft.com/sharepoint/v3/contenttype/forms">
-  <Display>DocumentLibraryForm</Display>
-  <Edit>DocumentLibraryForm</Edit>
-  <New>DocumentLibraryForm</New>
-</FormTemplates>
-</file>
-
 <file path=customXml/item3.xml><?xml version="1.0" encoding="utf-8"?>
 <p:properties xmlns:p="http://schemas.microsoft.com/office/2006/metadata/properties" xmlns:xsi="http://www.w3.org/2001/XMLSchema-instance" xmlns:pc="http://schemas.microsoft.com/office/infopath/2007/PartnerControls">
   <documentManagement>
@@ -8461,6 +9646,14 @@
 </file>
 
 <file path=customXml/itemProps1.xml><?xml version="1.0" encoding="utf-8"?>
+<ds:datastoreItem xmlns:ds="http://schemas.openxmlformats.org/officeDocument/2006/customXml" ds:itemID="{45A00539-F935-4DAE-994B-29A86868AB4E}">
+  <ds:schemaRefs>
+    <ds:schemaRef ds:uri="http://schemas.microsoft.com/sharepoint/v3/contenttype/forms"/>
+  </ds:schemaRefs>
+</ds:datastoreItem>
+</file>
+
+<file path=customXml/itemProps2.xml><?xml version="1.0" encoding="utf-8"?>
 <ds:datastoreItem xmlns:ds="http://schemas.openxmlformats.org/officeDocument/2006/customXml" ds:itemID="{E49744A2-A4E7-4F10-8EA8-A7278CF8AA73}">
   <ds:schemaRefs>
     <ds:schemaRef ds:uri="http://schemas.microsoft.com/office/2006/metadata/contentType"/>
@@ -8475,14 +9668,6 @@
     <ds:schemaRef ds:uri="http://purl.org/dc/elements/1.1/"/>
     <ds:schemaRef ds:uri="http://purl.org/dc/terms/"/>
     <ds:schemaRef ds:uri="http://schemas.microsoft.com/internal/obd"/>
-  </ds:schemaRefs>
-</ds:datastoreItem>
-</file>
-
-<file path=customXml/itemProps2.xml><?xml version="1.0" encoding="utf-8"?>
-<ds:datastoreItem xmlns:ds="http://schemas.openxmlformats.org/officeDocument/2006/customXml" ds:itemID="{45A00539-F935-4DAE-994B-29A86868AB4E}">
-  <ds:schemaRefs>
-    <ds:schemaRef ds:uri="http://schemas.microsoft.com/sharepoint/v3/contenttype/forms"/>
   </ds:schemaRefs>
 </ds:datastoreItem>
 </file>

--- a/20242/Part 1-Regression/1-1-simple linear regression.pptx
+++ b/20242/Part 1-Regression/1-1-simple linear regression.pptx
@@ -17,15 +17,17 @@
     <p:sldId id="484" r:id="rId14"/>
     <p:sldId id="481" r:id="rId15"/>
     <p:sldId id="461" r:id="rId16"/>
-    <p:sldId id="482" r:id="rId17"/>
-    <p:sldId id="483" r:id="rId18"/>
-    <p:sldId id="462" r:id="rId19"/>
-    <p:sldId id="463" r:id="rId20"/>
-    <p:sldId id="465" r:id="rId21"/>
-    <p:sldId id="464" r:id="rId22"/>
-    <p:sldId id="466" r:id="rId23"/>
-    <p:sldId id="476" r:id="rId24"/>
-    <p:sldId id="456" r:id="rId25"/>
+    <p:sldId id="462" r:id="rId17"/>
+    <p:sldId id="482" r:id="rId18"/>
+    <p:sldId id="490" r:id="rId19"/>
+    <p:sldId id="488" r:id="rId20"/>
+    <p:sldId id="665" r:id="rId21"/>
+    <p:sldId id="714" r:id="rId22"/>
+    <p:sldId id="710" r:id="rId23"/>
+    <p:sldId id="711" r:id="rId24"/>
+    <p:sldId id="713" r:id="rId25"/>
+    <p:sldId id="700" r:id="rId26"/>
+    <p:sldId id="712" r:id="rId27"/>
   </p:sldIdLst>
   <p:sldSz cx="12192000" cy="6858000"/>
   <p:notesSz cx="6858000" cy="9144000"/>
@@ -135,7 +137,7 @@
 <file path=ppt/revisionInfo.xml><?xml version="1.0" encoding="utf-8"?>
 <p1510:revInfo xmlns:a="http://schemas.openxmlformats.org/drawingml/2006/main" xmlns:r="http://schemas.openxmlformats.org/officeDocument/2006/relationships" xmlns:p1510="http://schemas.microsoft.com/office/powerpoint/2015/10/main">
   <p1510:revLst>
-    <p1510:client id="{161A7FAA-B398-4429-9FC2-656B0895AF0F}" v="51" dt="2025-07-16T08:30:59.062"/>
+    <p1510:client id="{161A7FAA-B398-4429-9FC2-656B0895AF0F}" v="104" dt="2025-07-16T11:34:01.300"/>
   </p1510:revLst>
 </p1510:revInfo>
 </file>
@@ -761,12 +763,12 @@
   <pc:docChgLst>
     <pc:chgData name="Mohammed Fasha" userId="cc64f42d-a1a6-4f08-b97b-0c37f877119f" providerId="ADAL" clId="{161A7FAA-B398-4429-9FC2-656B0895AF0F}"/>
     <pc:docChg chg="undo custSel addSld delSld modSld sldOrd">
-      <pc:chgData name="Mohammed Fasha" userId="cc64f42d-a1a6-4f08-b97b-0c37f877119f" providerId="ADAL" clId="{161A7FAA-B398-4429-9FC2-656B0895AF0F}" dt="2025-07-16T08:31:04.392" v="376" actId="5793"/>
+      <pc:chgData name="Mohammed Fasha" userId="cc64f42d-a1a6-4f08-b97b-0c37f877119f" providerId="ADAL" clId="{161A7FAA-B398-4429-9FC2-656B0895AF0F}" dt="2025-07-16T11:37:46.675" v="708" actId="6549"/>
       <pc:docMkLst>
         <pc:docMk/>
       </pc:docMkLst>
       <pc:sldChg chg="modSp mod ord">
-        <pc:chgData name="Mohammed Fasha" userId="cc64f42d-a1a6-4f08-b97b-0c37f877119f" providerId="ADAL" clId="{161A7FAA-B398-4429-9FC2-656B0895AF0F}" dt="2025-07-16T07:59:43.135" v="11" actId="113"/>
+        <pc:chgData name="Mohammed Fasha" userId="cc64f42d-a1a6-4f08-b97b-0c37f877119f" providerId="ADAL" clId="{161A7FAA-B398-4429-9FC2-656B0895AF0F}" dt="2025-07-16T11:36:08.642" v="696" actId="14100"/>
         <pc:sldMkLst>
           <pc:docMk/>
           <pc:sldMk cId="1162554463" sldId="257"/>
@@ -779,9 +781,33 @@
             <ac:spMk id="2" creationId="{8BE518FD-B81F-466C-AD85-5DDC967653B4}"/>
           </ac:spMkLst>
         </pc:spChg>
-      </pc:sldChg>
-      <pc:sldChg chg="ord">
-        <pc:chgData name="Mohammed Fasha" userId="cc64f42d-a1a6-4f08-b97b-0c37f877119f" providerId="ADAL" clId="{161A7FAA-B398-4429-9FC2-656B0895AF0F}" dt="2025-07-16T08:09:08.733" v="119"/>
+        <pc:spChg chg="mod">
+          <ac:chgData name="Mohammed Fasha" userId="cc64f42d-a1a6-4f08-b97b-0c37f877119f" providerId="ADAL" clId="{161A7FAA-B398-4429-9FC2-656B0895AF0F}" dt="2025-07-16T11:35:43.045" v="683" actId="113"/>
+          <ac:spMkLst>
+            <pc:docMk/>
+            <pc:sldMk cId="1162554463" sldId="257"/>
+            <ac:spMk id="3" creationId="{1A647627-019E-4599-BFE9-83A7DEA04B6D}"/>
+          </ac:spMkLst>
+        </pc:spChg>
+        <pc:spChg chg="mod">
+          <ac:chgData name="Mohammed Fasha" userId="cc64f42d-a1a6-4f08-b97b-0c37f877119f" providerId="ADAL" clId="{161A7FAA-B398-4429-9FC2-656B0895AF0F}" dt="2025-07-16T11:36:03.028" v="695" actId="6549"/>
+          <ac:spMkLst>
+            <pc:docMk/>
+            <pc:sldMk cId="1162554463" sldId="257"/>
+            <ac:spMk id="4" creationId="{929A5FA8-1320-61F3-BC79-488C9BA93D9F}"/>
+          </ac:spMkLst>
+        </pc:spChg>
+        <pc:picChg chg="mod">
+          <ac:chgData name="Mohammed Fasha" userId="cc64f42d-a1a6-4f08-b97b-0c37f877119f" providerId="ADAL" clId="{161A7FAA-B398-4429-9FC2-656B0895AF0F}" dt="2025-07-16T11:36:08.642" v="696" actId="14100"/>
+          <ac:picMkLst>
+            <pc:docMk/>
+            <pc:sldMk cId="1162554463" sldId="257"/>
+            <ac:picMk id="5" creationId="{47A753CC-D081-A128-3391-BC871C607F6E}"/>
+          </ac:picMkLst>
+        </pc:picChg>
+      </pc:sldChg>
+      <pc:sldChg chg="del ord">
+        <pc:chgData name="Mohammed Fasha" userId="cc64f42d-a1a6-4f08-b97b-0c37f877119f" providerId="ADAL" clId="{161A7FAA-B398-4429-9FC2-656B0895AF0F}" dt="2025-07-16T11:08:19.768" v="515" actId="47"/>
         <pc:sldMkLst>
           <pc:docMk/>
           <pc:sldMk cId="3910887702" sldId="456"/>
@@ -893,6 +919,96 @@
             <ac:spMk id="15" creationId="{16489CD5-E694-96CA-6EE8-2DA9D775D58C}"/>
           </ac:spMkLst>
         </pc:spChg>
+      </pc:sldChg>
+      <pc:sldChg chg="addSp modSp mod ord">
+        <pc:chgData name="Mohammed Fasha" userId="cc64f42d-a1a6-4f08-b97b-0c37f877119f" providerId="ADAL" clId="{161A7FAA-B398-4429-9FC2-656B0895AF0F}" dt="2025-07-16T10:49:51.326" v="389" actId="1076"/>
+        <pc:sldMkLst>
+          <pc:docMk/>
+          <pc:sldMk cId="1427723282" sldId="462"/>
+        </pc:sldMkLst>
+        <pc:spChg chg="mod">
+          <ac:chgData name="Mohammed Fasha" userId="cc64f42d-a1a6-4f08-b97b-0c37f877119f" providerId="ADAL" clId="{161A7FAA-B398-4429-9FC2-656B0895AF0F}" dt="2025-07-16T10:49:28.331" v="385" actId="179"/>
+          <ac:spMkLst>
+            <pc:docMk/>
+            <pc:sldMk cId="1427723282" sldId="462"/>
+            <ac:spMk id="2" creationId="{5161A592-C95D-5F4C-D812-FDE1F8B67D98}"/>
+          </ac:spMkLst>
+        </pc:spChg>
+        <pc:picChg chg="add mod">
+          <ac:chgData name="Mohammed Fasha" userId="cc64f42d-a1a6-4f08-b97b-0c37f877119f" providerId="ADAL" clId="{161A7FAA-B398-4429-9FC2-656B0895AF0F}" dt="2025-07-16T10:49:51.326" v="389" actId="1076"/>
+          <ac:picMkLst>
+            <pc:docMk/>
+            <pc:sldMk cId="1427723282" sldId="462"/>
+            <ac:picMk id="6" creationId="{79C0C2BA-6BEC-3370-0CDA-2423FD3D748B}"/>
+          </ac:picMkLst>
+        </pc:picChg>
+      </pc:sldChg>
+      <pc:sldChg chg="addSp delSp modSp del mod ord">
+        <pc:chgData name="Mohammed Fasha" userId="cc64f42d-a1a6-4f08-b97b-0c37f877119f" providerId="ADAL" clId="{161A7FAA-B398-4429-9FC2-656B0895AF0F}" dt="2025-07-16T10:58:06.640" v="492" actId="47"/>
+        <pc:sldMkLst>
+          <pc:docMk/>
+          <pc:sldMk cId="538252582" sldId="463"/>
+        </pc:sldMkLst>
+        <pc:spChg chg="add del mod">
+          <ac:chgData name="Mohammed Fasha" userId="cc64f42d-a1a6-4f08-b97b-0c37f877119f" providerId="ADAL" clId="{161A7FAA-B398-4429-9FC2-656B0895AF0F}" dt="2025-07-16T10:55:49.966" v="466" actId="478"/>
+          <ac:spMkLst>
+            <pc:docMk/>
+            <pc:sldMk cId="538252582" sldId="463"/>
+            <ac:spMk id="4" creationId="{EEF6E9EA-7681-6444-3DDE-EC4BF3C3BAC1}"/>
+          </ac:spMkLst>
+        </pc:spChg>
+        <pc:picChg chg="mod">
+          <ac:chgData name="Mohammed Fasha" userId="cc64f42d-a1a6-4f08-b97b-0c37f877119f" providerId="ADAL" clId="{161A7FAA-B398-4429-9FC2-656B0895AF0F}" dt="2025-07-16T10:56:02.523" v="470" actId="14100"/>
+          <ac:picMkLst>
+            <pc:docMk/>
+            <pc:sldMk cId="538252582" sldId="463"/>
+            <ac:picMk id="5" creationId="{B77B7C33-3931-334D-F5F0-51578F602770}"/>
+          </ac:picMkLst>
+        </pc:picChg>
+        <pc:picChg chg="mod ord">
+          <ac:chgData name="Mohammed Fasha" userId="cc64f42d-a1a6-4f08-b97b-0c37f877119f" providerId="ADAL" clId="{161A7FAA-B398-4429-9FC2-656B0895AF0F}" dt="2025-07-16T10:55:43.435" v="463" actId="1076"/>
+          <ac:picMkLst>
+            <pc:docMk/>
+            <pc:sldMk cId="538252582" sldId="463"/>
+            <ac:picMk id="7" creationId="{D41F736F-AF01-4029-F291-F1741828EA3C}"/>
+          </ac:picMkLst>
+        </pc:picChg>
+        <pc:picChg chg="del">
+          <ac:chgData name="Mohammed Fasha" userId="cc64f42d-a1a6-4f08-b97b-0c37f877119f" providerId="ADAL" clId="{161A7FAA-B398-4429-9FC2-656B0895AF0F}" dt="2025-07-16T10:56:49.027" v="486" actId="21"/>
+          <ac:picMkLst>
+            <pc:docMk/>
+            <pc:sldMk cId="538252582" sldId="463"/>
+            <ac:picMk id="8" creationId="{D4AE6193-CCD4-99C8-A300-F96A67CCB423}"/>
+          </ac:picMkLst>
+        </pc:picChg>
+      </pc:sldChg>
+      <pc:sldChg chg="del">
+        <pc:chgData name="Mohammed Fasha" userId="cc64f42d-a1a6-4f08-b97b-0c37f877119f" providerId="ADAL" clId="{161A7FAA-B398-4429-9FC2-656B0895AF0F}" dt="2025-07-16T11:08:15.227" v="512" actId="47"/>
+        <pc:sldMkLst>
+          <pc:docMk/>
+          <pc:sldMk cId="1559017199" sldId="464"/>
+        </pc:sldMkLst>
+      </pc:sldChg>
+      <pc:sldChg chg="del">
+        <pc:chgData name="Mohammed Fasha" userId="cc64f42d-a1a6-4f08-b97b-0c37f877119f" providerId="ADAL" clId="{161A7FAA-B398-4429-9FC2-656B0895AF0F}" dt="2025-07-16T11:08:14.161" v="511" actId="47"/>
+        <pc:sldMkLst>
+          <pc:docMk/>
+          <pc:sldMk cId="2067025602" sldId="465"/>
+        </pc:sldMkLst>
+      </pc:sldChg>
+      <pc:sldChg chg="del">
+        <pc:chgData name="Mohammed Fasha" userId="cc64f42d-a1a6-4f08-b97b-0c37f877119f" providerId="ADAL" clId="{161A7FAA-B398-4429-9FC2-656B0895AF0F}" dt="2025-07-16T11:08:16.310" v="513" actId="47"/>
+        <pc:sldMkLst>
+          <pc:docMk/>
+          <pc:sldMk cId="2575217795" sldId="466"/>
+        </pc:sldMkLst>
+      </pc:sldChg>
+      <pc:sldChg chg="del">
+        <pc:chgData name="Mohammed Fasha" userId="cc64f42d-a1a6-4f08-b97b-0c37f877119f" providerId="ADAL" clId="{161A7FAA-B398-4429-9FC2-656B0895AF0F}" dt="2025-07-16T11:08:17.068" v="514" actId="47"/>
+        <pc:sldMkLst>
+          <pc:docMk/>
+          <pc:sldMk cId="1558611893" sldId="476"/>
+        </pc:sldMkLst>
       </pc:sldChg>
       <pc:sldChg chg="addSp delSp modSp new mod">
         <pc:chgData name="Mohammed Fasha" userId="cc64f42d-a1a6-4f08-b97b-0c37f877119f" providerId="ADAL" clId="{161A7FAA-B398-4429-9FC2-656B0895AF0F}" dt="2025-07-16T08:08:48.133" v="117" actId="1076"/>
@@ -950,13 +1066,13 @@
         </pc:picChg>
       </pc:sldChg>
       <pc:sldChg chg="modSp new mod">
-        <pc:chgData name="Mohammed Fasha" userId="cc64f42d-a1a6-4f08-b97b-0c37f877119f" providerId="ADAL" clId="{161A7FAA-B398-4429-9FC2-656B0895AF0F}" dt="2025-07-16T08:00:24.341" v="74" actId="20577"/>
+        <pc:chgData name="Mohammed Fasha" userId="cc64f42d-a1a6-4f08-b97b-0c37f877119f" providerId="ADAL" clId="{161A7FAA-B398-4429-9FC2-656B0895AF0F}" dt="2025-07-16T11:37:46.675" v="708" actId="6549"/>
         <pc:sldMkLst>
           <pc:docMk/>
           <pc:sldMk cId="2145969539" sldId="478"/>
         </pc:sldMkLst>
         <pc:spChg chg="mod">
-          <ac:chgData name="Mohammed Fasha" userId="cc64f42d-a1a6-4f08-b97b-0c37f877119f" providerId="ADAL" clId="{161A7FAA-B398-4429-9FC2-656B0895AF0F}" dt="2025-07-16T08:00:24.341" v="74" actId="20577"/>
+          <ac:chgData name="Mohammed Fasha" userId="cc64f42d-a1a6-4f08-b97b-0c37f877119f" providerId="ADAL" clId="{161A7FAA-B398-4429-9FC2-656B0895AF0F}" dt="2025-07-16T11:37:46.675" v="708" actId="6549"/>
           <ac:spMkLst>
             <pc:docMk/>
             <pc:sldMk cId="2145969539" sldId="478"/>
@@ -1104,15 +1220,55 @@
           </ac:picMkLst>
         </pc:picChg>
       </pc:sldChg>
-      <pc:sldChg chg="new">
-        <pc:chgData name="Mohammed Fasha" userId="cc64f42d-a1a6-4f08-b97b-0c37f877119f" providerId="ADAL" clId="{161A7FAA-B398-4429-9FC2-656B0895AF0F}" dt="2025-07-16T08:15:43.528" v="211" actId="680"/>
+      <pc:sldChg chg="addSp delSp modSp new mod ord">
+        <pc:chgData name="Mohammed Fasha" userId="cc64f42d-a1a6-4f08-b97b-0c37f877119f" providerId="ADAL" clId="{161A7FAA-B398-4429-9FC2-656B0895AF0F}" dt="2025-07-16T10:57:46.716" v="490" actId="14100"/>
         <pc:sldMkLst>
           <pc:docMk/>
           <pc:sldMk cId="3941017664" sldId="482"/>
         </pc:sldMkLst>
-      </pc:sldChg>
-      <pc:sldChg chg="new">
-        <pc:chgData name="Mohammed Fasha" userId="cc64f42d-a1a6-4f08-b97b-0c37f877119f" providerId="ADAL" clId="{161A7FAA-B398-4429-9FC2-656B0895AF0F}" dt="2025-07-16T08:15:43.712" v="212" actId="680"/>
+        <pc:spChg chg="mod">
+          <ac:chgData name="Mohammed Fasha" userId="cc64f42d-a1a6-4f08-b97b-0c37f877119f" providerId="ADAL" clId="{161A7FAA-B398-4429-9FC2-656B0895AF0F}" dt="2025-07-16T10:56:26.036" v="482" actId="27636"/>
+          <ac:spMkLst>
+            <pc:docMk/>
+            <pc:sldMk cId="3941017664" sldId="482"/>
+            <ac:spMk id="2" creationId="{4AB508A7-8888-D77B-B430-86487FE1DB28}"/>
+          </ac:spMkLst>
+        </pc:spChg>
+        <pc:spChg chg="mod">
+          <ac:chgData name="Mohammed Fasha" userId="cc64f42d-a1a6-4f08-b97b-0c37f877119f" providerId="ADAL" clId="{161A7FAA-B398-4429-9FC2-656B0895AF0F}" dt="2025-07-16T10:50:23.154" v="392"/>
+          <ac:spMkLst>
+            <pc:docMk/>
+            <pc:sldMk cId="3941017664" sldId="482"/>
+            <ac:spMk id="3" creationId="{28A4CF1C-C04B-6B0E-66D9-A9DDA7F6AA70}"/>
+          </ac:spMkLst>
+        </pc:spChg>
+        <pc:picChg chg="add mod ord">
+          <ac:chgData name="Mohammed Fasha" userId="cc64f42d-a1a6-4f08-b97b-0c37f877119f" providerId="ADAL" clId="{161A7FAA-B398-4429-9FC2-656B0895AF0F}" dt="2025-07-16T10:57:46.716" v="490" actId="14100"/>
+          <ac:picMkLst>
+            <pc:docMk/>
+            <pc:sldMk cId="3941017664" sldId="482"/>
+            <ac:picMk id="5" creationId="{8F2330D7-9298-4367-D02D-C079ED44A0BE}"/>
+          </ac:picMkLst>
+        </pc:picChg>
+        <pc:picChg chg="add mod">
+          <ac:chgData name="Mohammed Fasha" userId="cc64f42d-a1a6-4f08-b97b-0c37f877119f" providerId="ADAL" clId="{161A7FAA-B398-4429-9FC2-656B0895AF0F}" dt="2025-07-16T10:56:21.823" v="480" actId="1076"/>
+          <ac:picMkLst>
+            <pc:docMk/>
+            <pc:sldMk cId="3941017664" sldId="482"/>
+            <ac:picMk id="6" creationId="{44FAA658-B7FF-3387-5E0B-7631B2303893}"/>
+          </ac:picMkLst>
+        </pc:picChg>
+        <pc:picChg chg="add del mod">
+          <ac:chgData name="Mohammed Fasha" userId="cc64f42d-a1a6-4f08-b97b-0c37f877119f" providerId="ADAL" clId="{161A7FAA-B398-4429-9FC2-656B0895AF0F}" dt="2025-07-16T10:56:54.155" v="489" actId="21"/>
+          <ac:picMkLst>
+            <pc:docMk/>
+            <pc:sldMk cId="3941017664" sldId="482"/>
+            <ac:picMk id="7" creationId="{389B9C61-7392-82F4-BF37-F2234D7428C6}"/>
+          </ac:picMkLst>
+        </pc:picChg>
+      </pc:sldChg>
+      <pc:sldChg chg="new del">
+        <pc:chgData name="Mohammed Fasha" userId="cc64f42d-a1a6-4f08-b97b-0c37f877119f" providerId="ADAL" clId="{161A7FAA-B398-4429-9FC2-656B0895AF0F}" dt="2025-07-16T11:00:40.370" v="496" actId="47"/>
         <pc:sldMkLst>
           <pc:docMk/>
           <pc:sldMk cId="1291192180" sldId="483"/>
@@ -1157,6 +1313,324 @@
           </ac:picMkLst>
         </pc:picChg>
       </pc:sldChg>
+      <pc:sldChg chg="add del">
+        <pc:chgData name="Mohammed Fasha" userId="cc64f42d-a1a6-4f08-b97b-0c37f877119f" providerId="ADAL" clId="{161A7FAA-B398-4429-9FC2-656B0895AF0F}" dt="2025-07-16T11:00:40.683" v="497" actId="47"/>
+        <pc:sldMkLst>
+          <pc:docMk/>
+          <pc:sldMk cId="1850388856" sldId="485"/>
+        </pc:sldMkLst>
+      </pc:sldChg>
+      <pc:sldChg chg="add del">
+        <pc:chgData name="Mohammed Fasha" userId="cc64f42d-a1a6-4f08-b97b-0c37f877119f" providerId="ADAL" clId="{161A7FAA-B398-4429-9FC2-656B0895AF0F}" dt="2025-07-16T11:00:42.714" v="498" actId="47"/>
+        <pc:sldMkLst>
+          <pc:docMk/>
+          <pc:sldMk cId="1736054340" sldId="486"/>
+        </pc:sldMkLst>
+      </pc:sldChg>
+      <pc:sldChg chg="add del">
+        <pc:chgData name="Mohammed Fasha" userId="cc64f42d-a1a6-4f08-b97b-0c37f877119f" providerId="ADAL" clId="{161A7FAA-B398-4429-9FC2-656B0895AF0F}" dt="2025-07-16T11:00:44.008" v="499" actId="47"/>
+        <pc:sldMkLst>
+          <pc:docMk/>
+          <pc:sldMk cId="2214684939" sldId="487"/>
+        </pc:sldMkLst>
+      </pc:sldChg>
+      <pc:sldChg chg="addSp delSp modSp add mod">
+        <pc:chgData name="Mohammed Fasha" userId="cc64f42d-a1a6-4f08-b97b-0c37f877119f" providerId="ADAL" clId="{161A7FAA-B398-4429-9FC2-656B0895AF0F}" dt="2025-07-16T11:04:05.804" v="510" actId="1076"/>
+        <pc:sldMkLst>
+          <pc:docMk/>
+          <pc:sldMk cId="294838801" sldId="488"/>
+        </pc:sldMkLst>
+        <pc:spChg chg="del">
+          <ac:chgData name="Mohammed Fasha" userId="cc64f42d-a1a6-4f08-b97b-0c37f877119f" providerId="ADAL" clId="{161A7FAA-B398-4429-9FC2-656B0895AF0F}" dt="2025-07-16T11:02:21.976" v="500" actId="22"/>
+          <ac:spMkLst>
+            <pc:docMk/>
+            <pc:sldMk cId="294838801" sldId="488"/>
+            <ac:spMk id="2" creationId="{2C879D6F-8CA9-0D0D-1CBF-621A5C4B7E52}"/>
+          </ac:spMkLst>
+        </pc:spChg>
+        <pc:spChg chg="mod">
+          <ac:chgData name="Mohammed Fasha" userId="cc64f42d-a1a6-4f08-b97b-0c37f877119f" providerId="ADAL" clId="{161A7FAA-B398-4429-9FC2-656B0895AF0F}" dt="2025-07-16T11:02:48.461" v="502"/>
+          <ac:spMkLst>
+            <pc:docMk/>
+            <pc:sldMk cId="294838801" sldId="488"/>
+            <ac:spMk id="3" creationId="{67DBC383-8B40-EB48-75A5-7ABA05DD62AB}"/>
+          </ac:spMkLst>
+        </pc:spChg>
+        <pc:spChg chg="add del mod">
+          <ac:chgData name="Mohammed Fasha" userId="cc64f42d-a1a6-4f08-b97b-0c37f877119f" providerId="ADAL" clId="{161A7FAA-B398-4429-9FC2-656B0895AF0F}" dt="2025-07-16T11:03:32.415" v="504"/>
+          <ac:spMkLst>
+            <pc:docMk/>
+            <pc:sldMk cId="294838801" sldId="488"/>
+            <ac:spMk id="7" creationId="{4EFF6565-6987-A6AB-C3E8-721B34DDE752}"/>
+          </ac:spMkLst>
+        </pc:spChg>
+        <pc:picChg chg="add del mod ord">
+          <ac:chgData name="Mohammed Fasha" userId="cc64f42d-a1a6-4f08-b97b-0c37f877119f" providerId="ADAL" clId="{161A7FAA-B398-4429-9FC2-656B0895AF0F}" dt="2025-07-16T11:03:29.478" v="503" actId="478"/>
+          <ac:picMkLst>
+            <pc:docMk/>
+            <pc:sldMk cId="294838801" sldId="488"/>
+            <ac:picMk id="5" creationId="{D5368688-62C4-C53F-8AB0-330B1831DDB7}"/>
+          </ac:picMkLst>
+        </pc:picChg>
+        <pc:picChg chg="add mod">
+          <ac:chgData name="Mohammed Fasha" userId="cc64f42d-a1a6-4f08-b97b-0c37f877119f" providerId="ADAL" clId="{161A7FAA-B398-4429-9FC2-656B0895AF0F}" dt="2025-07-16T11:03:36.132" v="505" actId="1076"/>
+          <ac:picMkLst>
+            <pc:docMk/>
+            <pc:sldMk cId="294838801" sldId="488"/>
+            <ac:picMk id="1026" creationId="{472203F4-3B29-5BC9-16A9-2A35FBB2DE1E}"/>
+          </ac:picMkLst>
+        </pc:picChg>
+        <pc:picChg chg="add mod">
+          <ac:chgData name="Mohammed Fasha" userId="cc64f42d-a1a6-4f08-b97b-0c37f877119f" providerId="ADAL" clId="{161A7FAA-B398-4429-9FC2-656B0895AF0F}" dt="2025-07-16T11:04:05.804" v="510" actId="1076"/>
+          <ac:picMkLst>
+            <pc:docMk/>
+            <pc:sldMk cId="294838801" sldId="488"/>
+            <ac:picMk id="1028" creationId="{6C0CAFAA-CC2C-9D22-F5AA-318CBE3BF319}"/>
+          </ac:picMkLst>
+        </pc:picChg>
+      </pc:sldChg>
+      <pc:sldChg chg="add del">
+        <pc:chgData name="Mohammed Fasha" userId="cc64f42d-a1a6-4f08-b97b-0c37f877119f" providerId="ADAL" clId="{161A7FAA-B398-4429-9FC2-656B0895AF0F}" dt="2025-07-16T11:08:20.917" v="516" actId="47"/>
+        <pc:sldMkLst>
+          <pc:docMk/>
+          <pc:sldMk cId="77640111" sldId="489"/>
+        </pc:sldMkLst>
+      </pc:sldChg>
+      <pc:sldChg chg="addSp delSp modSp add mod">
+        <pc:chgData name="Mohammed Fasha" userId="cc64f42d-a1a6-4f08-b97b-0c37f877119f" providerId="ADAL" clId="{161A7FAA-B398-4429-9FC2-656B0895AF0F}" dt="2025-07-16T11:00:21.255" v="495"/>
+        <pc:sldMkLst>
+          <pc:docMk/>
+          <pc:sldMk cId="993140073" sldId="490"/>
+        </pc:sldMkLst>
+        <pc:spChg chg="mod">
+          <ac:chgData name="Mohammed Fasha" userId="cc64f42d-a1a6-4f08-b97b-0c37f877119f" providerId="ADAL" clId="{161A7FAA-B398-4429-9FC2-656B0895AF0F}" dt="2025-07-16T10:56:37.881" v="485" actId="27636"/>
+          <ac:spMkLst>
+            <pc:docMk/>
+            <pc:sldMk cId="993140073" sldId="490"/>
+            <ac:spMk id="2" creationId="{34277D6C-6661-DE9D-2C7F-7EA55529ABF9}"/>
+          </ac:spMkLst>
+        </pc:spChg>
+        <pc:picChg chg="del">
+          <ac:chgData name="Mohammed Fasha" userId="cc64f42d-a1a6-4f08-b97b-0c37f877119f" providerId="ADAL" clId="{161A7FAA-B398-4429-9FC2-656B0895AF0F}" dt="2025-07-16T10:58:02.738" v="491" actId="478"/>
+          <ac:picMkLst>
+            <pc:docMk/>
+            <pc:sldMk cId="993140073" sldId="490"/>
+            <ac:picMk id="5" creationId="{CC61F4AB-0786-56F2-BC09-628C5761A555}"/>
+          </ac:picMkLst>
+        </pc:picChg>
+        <pc:picChg chg="add mod">
+          <ac:chgData name="Mohammed Fasha" userId="cc64f42d-a1a6-4f08-b97b-0c37f877119f" providerId="ADAL" clId="{161A7FAA-B398-4429-9FC2-656B0895AF0F}" dt="2025-07-16T11:00:21.255" v="495"/>
+          <ac:picMkLst>
+            <pc:docMk/>
+            <pc:sldMk cId="993140073" sldId="490"/>
+            <ac:picMk id="8" creationId="{D4AE6193-CCD4-99C8-A300-F96A67CCB423}"/>
+          </ac:picMkLst>
+        </pc:picChg>
+      </pc:sldChg>
+      <pc:sldChg chg="modSp new del mod">
+        <pc:chgData name="Mohammed Fasha" userId="cc64f42d-a1a6-4f08-b97b-0c37f877119f" providerId="ADAL" clId="{161A7FAA-B398-4429-9FC2-656B0895AF0F}" dt="2025-07-16T11:27:34.605" v="557" actId="47"/>
+        <pc:sldMkLst>
+          <pc:docMk/>
+          <pc:sldMk cId="1813551999" sldId="491"/>
+        </pc:sldMkLst>
+        <pc:spChg chg="mod">
+          <ac:chgData name="Mohammed Fasha" userId="cc64f42d-a1a6-4f08-b97b-0c37f877119f" providerId="ADAL" clId="{161A7FAA-B398-4429-9FC2-656B0895AF0F}" dt="2025-07-16T11:22:46.673" v="520" actId="21"/>
+          <ac:spMkLst>
+            <pc:docMk/>
+            <pc:sldMk cId="1813551999" sldId="491"/>
+            <ac:spMk id="2" creationId="{E1C08A7C-32D8-14C0-B425-1CD6ADC41E48}"/>
+          </ac:spMkLst>
+        </pc:spChg>
+        <pc:spChg chg="mod">
+          <ac:chgData name="Mohammed Fasha" userId="cc64f42d-a1a6-4f08-b97b-0c37f877119f" providerId="ADAL" clId="{161A7FAA-B398-4429-9FC2-656B0895AF0F}" dt="2025-07-16T11:22:48.677" v="524" actId="27636"/>
+          <ac:spMkLst>
+            <pc:docMk/>
+            <pc:sldMk cId="1813551999" sldId="491"/>
+            <ac:spMk id="3" creationId="{467AF6CE-7056-4763-6E75-53BEB0D595B5}"/>
+          </ac:spMkLst>
+        </pc:spChg>
+      </pc:sldChg>
+      <pc:sldChg chg="new del">
+        <pc:chgData name="Mohammed Fasha" userId="cc64f42d-a1a6-4f08-b97b-0c37f877119f" providerId="ADAL" clId="{161A7FAA-B398-4429-9FC2-656B0895AF0F}" dt="2025-07-16T11:25:57.535" v="545" actId="47"/>
+        <pc:sldMkLst>
+          <pc:docMk/>
+          <pc:sldMk cId="2220780393" sldId="492"/>
+        </pc:sldMkLst>
+      </pc:sldChg>
+      <pc:sldChg chg="add del">
+        <pc:chgData name="Mohammed Fasha" userId="cc64f42d-a1a6-4f08-b97b-0c37f877119f" providerId="ADAL" clId="{161A7FAA-B398-4429-9FC2-656B0895AF0F}" dt="2025-07-16T11:25:58.629" v="546" actId="47"/>
+        <pc:sldMkLst>
+          <pc:docMk/>
+          <pc:sldMk cId="3114885597" sldId="493"/>
+        </pc:sldMkLst>
+      </pc:sldChg>
+      <pc:sldChg chg="add del">
+        <pc:chgData name="Mohammed Fasha" userId="cc64f42d-a1a6-4f08-b97b-0c37f877119f" providerId="ADAL" clId="{161A7FAA-B398-4429-9FC2-656B0895AF0F}" dt="2025-07-16T11:25:59.623" v="547" actId="47"/>
+        <pc:sldMkLst>
+          <pc:docMk/>
+          <pc:sldMk cId="2691760872" sldId="494"/>
+        </pc:sldMkLst>
+      </pc:sldChg>
+      <pc:sldChg chg="modSp add del mod">
+        <pc:chgData name="Mohammed Fasha" userId="cc64f42d-a1a6-4f08-b97b-0c37f877119f" providerId="ADAL" clId="{161A7FAA-B398-4429-9FC2-656B0895AF0F}" dt="2025-07-16T11:25:55.222" v="544" actId="47"/>
+        <pc:sldMkLst>
+          <pc:docMk/>
+          <pc:sldMk cId="4217858640" sldId="495"/>
+        </pc:sldMkLst>
+        <pc:spChg chg="mod">
+          <ac:chgData name="Mohammed Fasha" userId="cc64f42d-a1a6-4f08-b97b-0c37f877119f" providerId="ADAL" clId="{161A7FAA-B398-4429-9FC2-656B0895AF0F}" dt="2025-07-16T11:23:45.451" v="540" actId="5793"/>
+          <ac:spMkLst>
+            <pc:docMk/>
+            <pc:sldMk cId="4217858640" sldId="495"/>
+            <ac:spMk id="2" creationId="{DF94E547-89FF-6739-D485-9F20BCFD62D9}"/>
+          </ac:spMkLst>
+        </pc:spChg>
+        <pc:spChg chg="mod">
+          <ac:chgData name="Mohammed Fasha" userId="cc64f42d-a1a6-4f08-b97b-0c37f877119f" providerId="ADAL" clId="{161A7FAA-B398-4429-9FC2-656B0895AF0F}" dt="2025-07-16T11:23:09.576" v="534" actId="27636"/>
+          <ac:spMkLst>
+            <pc:docMk/>
+            <pc:sldMk cId="4217858640" sldId="495"/>
+            <ac:spMk id="3" creationId="{BD16982C-130F-C391-980C-1795121F4D86}"/>
+          </ac:spMkLst>
+        </pc:spChg>
+      </pc:sldChg>
+      <pc:sldChg chg="modSp add mod">
+        <pc:chgData name="Mohammed Fasha" userId="cc64f42d-a1a6-4f08-b97b-0c37f877119f" providerId="ADAL" clId="{161A7FAA-B398-4429-9FC2-656B0895AF0F}" dt="2025-07-16T11:27:39.638" v="558" actId="113"/>
+        <pc:sldMkLst>
+          <pc:docMk/>
+          <pc:sldMk cId="148099094" sldId="665"/>
+        </pc:sldMkLst>
+        <pc:spChg chg="mod">
+          <ac:chgData name="Mohammed Fasha" userId="cc64f42d-a1a6-4f08-b97b-0c37f877119f" providerId="ADAL" clId="{161A7FAA-B398-4429-9FC2-656B0895AF0F}" dt="2025-07-16T11:27:39.638" v="558" actId="113"/>
+          <ac:spMkLst>
+            <pc:docMk/>
+            <pc:sldMk cId="148099094" sldId="665"/>
+            <ac:spMk id="3" creationId="{DDB8F6FE-FF12-0BA5-D224-71F068E4DF88}"/>
+          </ac:spMkLst>
+        </pc:spChg>
+      </pc:sldChg>
+      <pc:sldChg chg="modSp add mod">
+        <pc:chgData name="Mohammed Fasha" userId="cc64f42d-a1a6-4f08-b97b-0c37f877119f" providerId="ADAL" clId="{161A7FAA-B398-4429-9FC2-656B0895AF0F}" dt="2025-07-16T11:29:28.717" v="561" actId="113"/>
+        <pc:sldMkLst>
+          <pc:docMk/>
+          <pc:sldMk cId="4247717824" sldId="700"/>
+        </pc:sldMkLst>
+        <pc:spChg chg="mod">
+          <ac:chgData name="Mohammed Fasha" userId="cc64f42d-a1a6-4f08-b97b-0c37f877119f" providerId="ADAL" clId="{161A7FAA-B398-4429-9FC2-656B0895AF0F}" dt="2025-07-16T11:29:28.717" v="561" actId="113"/>
+          <ac:spMkLst>
+            <pc:docMk/>
+            <pc:sldMk cId="4247717824" sldId="700"/>
+            <ac:spMk id="3" creationId="{A65C5F38-2118-DD61-42D4-371CCEDADFFD}"/>
+          </ac:spMkLst>
+        </pc:spChg>
+      </pc:sldChg>
+      <pc:sldChg chg="modSp add mod">
+        <pc:chgData name="Mohammed Fasha" userId="cc64f42d-a1a6-4f08-b97b-0c37f877119f" providerId="ADAL" clId="{161A7FAA-B398-4429-9FC2-656B0895AF0F}" dt="2025-07-16T11:31:07.105" v="575" actId="27636"/>
+        <pc:sldMkLst>
+          <pc:docMk/>
+          <pc:sldMk cId="4114896152" sldId="710"/>
+        </pc:sldMkLst>
+        <pc:spChg chg="mod">
+          <ac:chgData name="Mohammed Fasha" userId="cc64f42d-a1a6-4f08-b97b-0c37f877119f" providerId="ADAL" clId="{161A7FAA-B398-4429-9FC2-656B0895AF0F}" dt="2025-07-16T11:31:07.105" v="575" actId="27636"/>
+          <ac:spMkLst>
+            <pc:docMk/>
+            <pc:sldMk cId="4114896152" sldId="710"/>
+            <ac:spMk id="3" creationId="{D33E66F3-8397-4994-28A4-1DCE141C618C}"/>
+          </ac:spMkLst>
+        </pc:spChg>
+      </pc:sldChg>
+      <pc:sldChg chg="modSp add mod">
+        <pc:chgData name="Mohammed Fasha" userId="cc64f42d-a1a6-4f08-b97b-0c37f877119f" providerId="ADAL" clId="{161A7FAA-B398-4429-9FC2-656B0895AF0F}" dt="2025-07-16T11:28:44.521" v="560" actId="113"/>
+        <pc:sldMkLst>
+          <pc:docMk/>
+          <pc:sldMk cId="3794385322" sldId="711"/>
+        </pc:sldMkLst>
+        <pc:spChg chg="mod">
+          <ac:chgData name="Mohammed Fasha" userId="cc64f42d-a1a6-4f08-b97b-0c37f877119f" providerId="ADAL" clId="{161A7FAA-B398-4429-9FC2-656B0895AF0F}" dt="2025-07-16T11:28:44.521" v="560" actId="113"/>
+          <ac:spMkLst>
+            <pc:docMk/>
+            <pc:sldMk cId="3794385322" sldId="711"/>
+            <ac:spMk id="3" creationId="{978883A7-D876-AEF2-76C8-90BFC8E97077}"/>
+          </ac:spMkLst>
+        </pc:spChg>
+      </pc:sldChg>
+      <pc:sldChg chg="modSp add mod">
+        <pc:chgData name="Mohammed Fasha" userId="cc64f42d-a1a6-4f08-b97b-0c37f877119f" providerId="ADAL" clId="{161A7FAA-B398-4429-9FC2-656B0895AF0F}" dt="2025-07-16T11:30:44.377" v="573" actId="20577"/>
+        <pc:sldMkLst>
+          <pc:docMk/>
+          <pc:sldMk cId="3701206727" sldId="712"/>
+        </pc:sldMkLst>
+        <pc:spChg chg="mod">
+          <ac:chgData name="Mohammed Fasha" userId="cc64f42d-a1a6-4f08-b97b-0c37f877119f" providerId="ADAL" clId="{161A7FAA-B398-4429-9FC2-656B0895AF0F}" dt="2025-07-16T11:30:44.377" v="573" actId="20577"/>
+          <ac:spMkLst>
+            <pc:docMk/>
+            <pc:sldMk cId="3701206727" sldId="712"/>
+            <ac:spMk id="3" creationId="{B5EBE5AB-A5B7-7A93-34E6-EA5080D2C2C8}"/>
+          </ac:spMkLst>
+        </pc:spChg>
+      </pc:sldChg>
+      <pc:sldChg chg="modSp add mod">
+        <pc:chgData name="Mohammed Fasha" userId="cc64f42d-a1a6-4f08-b97b-0c37f877119f" providerId="ADAL" clId="{161A7FAA-B398-4429-9FC2-656B0895AF0F}" dt="2025-07-16T11:25:41.246" v="543" actId="27636"/>
+        <pc:sldMkLst>
+          <pc:docMk/>
+          <pc:sldMk cId="1499972066" sldId="713"/>
+        </pc:sldMkLst>
+        <pc:spChg chg="mod">
+          <ac:chgData name="Mohammed Fasha" userId="cc64f42d-a1a6-4f08-b97b-0c37f877119f" providerId="ADAL" clId="{161A7FAA-B398-4429-9FC2-656B0895AF0F}" dt="2025-07-16T11:25:41.246" v="543" actId="27636"/>
+          <ac:spMkLst>
+            <pc:docMk/>
+            <pc:sldMk cId="1499972066" sldId="713"/>
+            <ac:spMk id="3" creationId="{6719E367-A4FE-AE2B-34B1-1DA0024C6A20}"/>
+          </ac:spMkLst>
+        </pc:spChg>
+      </pc:sldChg>
+      <pc:sldChg chg="addSp delSp modSp add mod">
+        <pc:chgData name="Mohammed Fasha" userId="cc64f42d-a1a6-4f08-b97b-0c37f877119f" providerId="ADAL" clId="{161A7FAA-B398-4429-9FC2-656B0895AF0F}" dt="2025-07-16T11:34:06.138" v="665" actId="1076"/>
+        <pc:sldMkLst>
+          <pc:docMk/>
+          <pc:sldMk cId="1270641495" sldId="714"/>
+        </pc:sldMkLst>
+        <pc:spChg chg="mod">
+          <ac:chgData name="Mohammed Fasha" userId="cc64f42d-a1a6-4f08-b97b-0c37f877119f" providerId="ADAL" clId="{161A7FAA-B398-4429-9FC2-656B0895AF0F}" dt="2025-07-16T11:33:55.055" v="648" actId="255"/>
+          <ac:spMkLst>
+            <pc:docMk/>
+            <pc:sldMk cId="1270641495" sldId="714"/>
+            <ac:spMk id="3" creationId="{83ED29CA-FE26-6777-1F1A-6F46BCEEB9BB}"/>
+          </ac:spMkLst>
+        </pc:spChg>
+        <pc:spChg chg="add del mod">
+          <ac:chgData name="Mohammed Fasha" userId="cc64f42d-a1a6-4f08-b97b-0c37f877119f" providerId="ADAL" clId="{161A7FAA-B398-4429-9FC2-656B0895AF0F}" dt="2025-07-16T11:33:24.555" v="633" actId="478"/>
+          <ac:spMkLst>
+            <pc:docMk/>
+            <pc:sldMk cId="1270641495" sldId="714"/>
+            <ac:spMk id="5" creationId="{A0D7B6C8-8B59-ACED-1508-3D5D184F5EFE}"/>
+          </ac:spMkLst>
+        </pc:spChg>
+        <pc:spChg chg="mod">
+          <ac:chgData name="Mohammed Fasha" userId="cc64f42d-a1a6-4f08-b97b-0c37f877119f" providerId="ADAL" clId="{161A7FAA-B398-4429-9FC2-656B0895AF0F}" dt="2025-07-16T11:34:06.138" v="665" actId="1076"/>
+          <ac:spMkLst>
+            <pc:docMk/>
+            <pc:sldMk cId="1270641495" sldId="714"/>
+            <ac:spMk id="7" creationId="{0550F4B6-EF46-BA8E-B021-A9DD446047EA}"/>
+          </ac:spMkLst>
+        </pc:spChg>
+        <pc:picChg chg="mod">
+          <ac:chgData name="Mohammed Fasha" userId="cc64f42d-a1a6-4f08-b97b-0c37f877119f" providerId="ADAL" clId="{161A7FAA-B398-4429-9FC2-656B0895AF0F}" dt="2025-07-16T11:34:01.300" v="664" actId="1035"/>
+          <ac:picMkLst>
+            <pc:docMk/>
+            <pc:sldMk cId="1270641495" sldId="714"/>
+            <ac:picMk id="7170" creationId="{AF89B1EB-4AD3-6E64-5A9B-9A00BD5EF2DB}"/>
+          </ac:picMkLst>
+        </pc:picChg>
+        <pc:picChg chg="mod">
+          <ac:chgData name="Mohammed Fasha" userId="cc64f42d-a1a6-4f08-b97b-0c37f877119f" providerId="ADAL" clId="{161A7FAA-B398-4429-9FC2-656B0895AF0F}" dt="2025-07-16T11:34:01.300" v="664" actId="1035"/>
+          <ac:picMkLst>
+            <pc:docMk/>
+            <pc:sldMk cId="1270641495" sldId="714"/>
+            <ac:picMk id="7172" creationId="{B620BAD4-C68B-A239-E964-52B8908CD0E4}"/>
+          </ac:picMkLst>
+        </pc:picChg>
+      </pc:sldChg>
     </pc:docChg>
   </pc:docChgLst>
   <pc:docChgLst>
@@ -1483,6 +1957,1039 @@
     </pc:docChg>
   </pc:docChgLst>
 </pc:chgInfo>
+</file>
+
+<file path=ppt/charts/chart1.xml><?xml version="1.0" encoding="utf-8"?>
+<c:chartSpace xmlns:c="http://schemas.openxmlformats.org/drawingml/2006/chart" xmlns:a="http://schemas.openxmlformats.org/drawingml/2006/main" xmlns:r="http://schemas.openxmlformats.org/officeDocument/2006/relationships" xmlns:c16r2="http://schemas.microsoft.com/office/drawing/2015/06/chart">
+  <c:date1904 val="0"/>
+  <c:lang val="en-US"/>
+  <c:roundedCorners val="0"/>
+  <mc:AlternateContent xmlns:mc="http://schemas.openxmlformats.org/markup-compatibility/2006">
+    <mc:Choice xmlns:c14="http://schemas.microsoft.com/office/drawing/2007/8/2/chart" Requires="c14">
+      <c14:style val="102"/>
+    </mc:Choice>
+    <mc:Fallback>
+      <c:style val="2"/>
+    </mc:Fallback>
+  </mc:AlternateContent>
+  <c:chart>
+    <c:title>
+      <c:tx>
+        <c:rich>
+          <a:bodyPr rot="0" spcFirstLastPara="1" vertOverflow="ellipsis" vert="horz" wrap="square" anchor="ctr" anchorCtr="1"/>
+          <a:lstStyle/>
+          <a:p>
+            <a:pPr>
+              <a:defRPr sz="1400" b="1" i="0" u="none" strike="noStrike" kern="1200" spc="0" baseline="0">
+                <a:solidFill>
+                  <a:schemeClr val="tx1">
+                    <a:lumMod val="65000"/>
+                    <a:lumOff val="35000"/>
+                  </a:schemeClr>
+                </a:solidFill>
+                <a:latin typeface="+mn-lt"/>
+                <a:ea typeface="+mn-ea"/>
+                <a:cs typeface="+mn-cs"/>
+              </a:defRPr>
+            </a:pPr>
+            <a:r>
+              <a:rPr lang="en-US" b="1" dirty="0"/>
+              <a:t>QQ Plot for</a:t>
+            </a:r>
+            <a:r>
+              <a:rPr lang="en-US" b="1" baseline="0" dirty="0"/>
+              <a:t> the Residuals of the Apartments Price Prediction</a:t>
+            </a:r>
+            <a:endParaRPr lang="en-US" b="1" dirty="0"/>
+          </a:p>
+        </c:rich>
+      </c:tx>
+      <c:overlay val="0"/>
+      <c:spPr>
+        <a:noFill/>
+        <a:ln>
+          <a:noFill/>
+        </a:ln>
+        <a:effectLst/>
+      </c:spPr>
+      <c:txPr>
+        <a:bodyPr rot="0" spcFirstLastPara="1" vertOverflow="ellipsis" vert="horz" wrap="square" anchor="ctr" anchorCtr="1"/>
+        <a:lstStyle/>
+        <a:p>
+          <a:pPr>
+            <a:defRPr sz="1400" b="1" i="0" u="none" strike="noStrike" kern="1200" spc="0" baseline="0">
+              <a:solidFill>
+                <a:schemeClr val="tx1">
+                  <a:lumMod val="65000"/>
+                  <a:lumOff val="35000"/>
+                </a:schemeClr>
+              </a:solidFill>
+              <a:latin typeface="+mn-lt"/>
+              <a:ea typeface="+mn-ea"/>
+              <a:cs typeface="+mn-cs"/>
+            </a:defRPr>
+          </a:pPr>
+          <a:endParaRPr lang="en-US"/>
+        </a:p>
+      </c:txPr>
+    </c:title>
+    <c:autoTitleDeleted val="0"/>
+    <c:plotArea>
+      <c:layout/>
+      <c:scatterChart>
+        <c:scatterStyle val="lineMarker"/>
+        <c:varyColors val="0"/>
+        <c:ser>
+          <c:idx val="0"/>
+          <c:order val="0"/>
+          <c:spPr>
+            <a:ln w="25400" cap="rnd">
+              <a:noFill/>
+              <a:round/>
+            </a:ln>
+            <a:effectLst/>
+          </c:spPr>
+          <c:marker>
+            <c:symbol val="circle"/>
+            <c:size val="5"/>
+            <c:spPr>
+              <a:solidFill>
+                <a:schemeClr val="accent1"/>
+              </a:solidFill>
+              <a:ln w="9525">
+                <a:solidFill>
+                  <a:schemeClr val="accent1"/>
+                </a:solidFill>
+              </a:ln>
+              <a:effectLst/>
+            </c:spPr>
+          </c:marker>
+          <c:trendline>
+            <c:spPr>
+              <a:ln w="19050" cap="rnd">
+                <a:solidFill>
+                  <a:schemeClr val="accent1"/>
+                </a:solidFill>
+                <a:prstDash val="sysDot"/>
+              </a:ln>
+              <a:effectLst/>
+            </c:spPr>
+            <c:trendlineType val="linear"/>
+            <c:dispRSqr val="0"/>
+            <c:dispEq val="0"/>
+          </c:trendline>
+          <c:xVal>
+            <c:numRef>
+              <c:f>Sheet2!$E$2:$E$11</c:f>
+              <c:numCache>
+                <c:formatCode>General</c:formatCode>
+                <c:ptCount val="10"/>
+                <c:pt idx="0">
+                  <c:v>-1.6448536269514726</c:v>
+                </c:pt>
+                <c:pt idx="1">
+                  <c:v>-1.0364333894937898</c:v>
+                </c:pt>
+                <c:pt idx="2">
+                  <c:v>-0.67448975019608193</c:v>
+                </c:pt>
+                <c:pt idx="3">
+                  <c:v>-0.38532046640756784</c:v>
+                </c:pt>
+                <c:pt idx="4">
+                  <c:v>-0.12566134685507402</c:v>
+                </c:pt>
+                <c:pt idx="5">
+                  <c:v>0.12566134685507416</c:v>
+                </c:pt>
+                <c:pt idx="6">
+                  <c:v>0.38532046640756784</c:v>
+                </c:pt>
+                <c:pt idx="7">
+                  <c:v>0.67448975019608193</c:v>
+                </c:pt>
+                <c:pt idx="8">
+                  <c:v>1.0364333894937898</c:v>
+                </c:pt>
+                <c:pt idx="9">
+                  <c:v>1.6448536269514715</c:v>
+                </c:pt>
+              </c:numCache>
+            </c:numRef>
+          </c:xVal>
+          <c:yVal>
+            <c:numRef>
+              <c:f>Sheet2!$B$2:$B$11</c:f>
+              <c:numCache>
+                <c:formatCode>General</c:formatCode>
+                <c:ptCount val="10"/>
+                <c:pt idx="0">
+                  <c:v>-1.4256568313298963</c:v>
+                </c:pt>
+                <c:pt idx="1">
+                  <c:v>-1.3342251580617082</c:v>
+                </c:pt>
+                <c:pt idx="2">
+                  <c:v>-0.58922633883943321</c:v>
+                </c:pt>
+                <c:pt idx="3">
+                  <c:v>-0.28106773634294674</c:v>
+                </c:pt>
+                <c:pt idx="4">
+                  <c:v>-0.15915883865203145</c:v>
+                </c:pt>
+                <c:pt idx="5">
+                  <c:v>-3.7249940961113746E-2</c:v>
+                </c:pt>
+                <c:pt idx="6">
+                  <c:v>0.3352494686500237</c:v>
+                </c:pt>
+                <c:pt idx="7">
+                  <c:v>0.64679442941570231</c:v>
+                </c:pt>
+                <c:pt idx="8">
+                  <c:v>1.1412027367177575</c:v>
+                </c:pt>
+                <c:pt idx="9">
+                  <c:v>1.7033382094036584</c:v>
+                </c:pt>
+              </c:numCache>
+            </c:numRef>
+          </c:yVal>
+          <c:smooth val="0"/>
+          <c:extLst>
+            <c:ext xmlns:c16="http://schemas.microsoft.com/office/drawing/2014/chart" uri="{C3380CC4-5D6E-409C-BE32-E72D297353CC}">
+              <c16:uniqueId val="{00000001-AFDC-4F67-98BB-756FD4045FAD}"/>
+            </c:ext>
+          </c:extLst>
+        </c:ser>
+        <c:dLbls>
+          <c:showLegendKey val="0"/>
+          <c:showVal val="0"/>
+          <c:showCatName val="0"/>
+          <c:showSerName val="0"/>
+          <c:showPercent val="0"/>
+          <c:showBubbleSize val="0"/>
+        </c:dLbls>
+        <c:axId val="1382621808"/>
+        <c:axId val="1382622768"/>
+      </c:scatterChart>
+      <c:valAx>
+        <c:axId val="1382621808"/>
+        <c:scaling>
+          <c:orientation val="minMax"/>
+        </c:scaling>
+        <c:delete val="0"/>
+        <c:axPos val="b"/>
+        <c:title>
+          <c:tx>
+            <c:rich>
+              <a:bodyPr rot="0" spcFirstLastPara="1" vertOverflow="ellipsis" vert="horz" wrap="square" anchor="ctr" anchorCtr="1"/>
+              <a:lstStyle/>
+              <a:p>
+                <a:pPr>
+                  <a:defRPr sz="1000" b="1" i="0" u="none" strike="noStrike" kern="1200" baseline="0">
+                    <a:solidFill>
+                      <a:schemeClr val="tx1">
+                        <a:lumMod val="65000"/>
+                        <a:lumOff val="35000"/>
+                      </a:schemeClr>
+                    </a:solidFill>
+                    <a:latin typeface="+mn-lt"/>
+                    <a:ea typeface="+mn-ea"/>
+                    <a:cs typeface="+mn-cs"/>
+                  </a:defRPr>
+                </a:pPr>
+                <a:r>
+                  <a:rPr lang="en-US" b="1"/>
+                  <a:t>Theoritical Residuals</a:t>
+                </a:r>
+              </a:p>
+            </c:rich>
+          </c:tx>
+          <c:overlay val="0"/>
+          <c:spPr>
+            <a:noFill/>
+            <a:ln>
+              <a:noFill/>
+            </a:ln>
+            <a:effectLst/>
+          </c:spPr>
+          <c:txPr>
+            <a:bodyPr rot="0" spcFirstLastPara="1" vertOverflow="ellipsis" vert="horz" wrap="square" anchor="ctr" anchorCtr="1"/>
+            <a:lstStyle/>
+            <a:p>
+              <a:pPr>
+                <a:defRPr sz="1000" b="1" i="0" u="none" strike="noStrike" kern="1200" baseline="0">
+                  <a:solidFill>
+                    <a:schemeClr val="tx1">
+                      <a:lumMod val="65000"/>
+                      <a:lumOff val="35000"/>
+                    </a:schemeClr>
+                  </a:solidFill>
+                  <a:latin typeface="+mn-lt"/>
+                  <a:ea typeface="+mn-ea"/>
+                  <a:cs typeface="+mn-cs"/>
+                </a:defRPr>
+              </a:pPr>
+              <a:endParaRPr lang="en-US"/>
+            </a:p>
+          </c:txPr>
+        </c:title>
+        <c:numFmt formatCode="General" sourceLinked="1"/>
+        <c:majorTickMark val="none"/>
+        <c:minorTickMark val="none"/>
+        <c:tickLblPos val="nextTo"/>
+        <c:spPr>
+          <a:noFill/>
+          <a:ln w="9525" cap="flat" cmpd="sng" algn="ctr">
+            <a:solidFill>
+              <a:schemeClr val="tx1">
+                <a:lumMod val="25000"/>
+                <a:lumOff val="75000"/>
+              </a:schemeClr>
+            </a:solidFill>
+            <a:round/>
+          </a:ln>
+          <a:effectLst/>
+        </c:spPr>
+        <c:txPr>
+          <a:bodyPr rot="-60000000" spcFirstLastPara="1" vertOverflow="ellipsis" vert="horz" wrap="square" anchor="ctr" anchorCtr="1"/>
+          <a:lstStyle/>
+          <a:p>
+            <a:pPr>
+              <a:defRPr sz="900" b="0" i="0" u="none" strike="noStrike" kern="1200" baseline="0">
+                <a:solidFill>
+                  <a:schemeClr val="tx1">
+                    <a:lumMod val="65000"/>
+                    <a:lumOff val="35000"/>
+                  </a:schemeClr>
+                </a:solidFill>
+                <a:latin typeface="+mn-lt"/>
+                <a:ea typeface="+mn-ea"/>
+                <a:cs typeface="+mn-cs"/>
+              </a:defRPr>
+            </a:pPr>
+            <a:endParaRPr lang="en-US"/>
+          </a:p>
+        </c:txPr>
+        <c:crossAx val="1382622768"/>
+        <c:crossesAt val="-2"/>
+        <c:crossBetween val="midCat"/>
+      </c:valAx>
+      <c:valAx>
+        <c:axId val="1382622768"/>
+        <c:scaling>
+          <c:orientation val="minMax"/>
+        </c:scaling>
+        <c:delete val="0"/>
+        <c:axPos val="l"/>
+        <c:majorGridlines>
+          <c:spPr>
+            <a:ln w="9525" cap="flat" cmpd="sng" algn="ctr">
+              <a:solidFill>
+                <a:schemeClr val="tx1">
+                  <a:lumMod val="15000"/>
+                  <a:lumOff val="85000"/>
+                </a:schemeClr>
+              </a:solidFill>
+              <a:round/>
+            </a:ln>
+            <a:effectLst/>
+          </c:spPr>
+        </c:majorGridlines>
+        <c:title>
+          <c:tx>
+            <c:rich>
+              <a:bodyPr rot="-5400000" spcFirstLastPara="1" vertOverflow="ellipsis" vert="horz" wrap="square" anchor="ctr" anchorCtr="1"/>
+              <a:lstStyle/>
+              <a:p>
+                <a:pPr>
+                  <a:defRPr sz="1000" b="1" i="0" u="none" strike="noStrike" kern="1200" baseline="0">
+                    <a:solidFill>
+                      <a:schemeClr val="tx1">
+                        <a:lumMod val="65000"/>
+                        <a:lumOff val="35000"/>
+                      </a:schemeClr>
+                    </a:solidFill>
+                    <a:latin typeface="+mn-lt"/>
+                    <a:ea typeface="+mn-ea"/>
+                    <a:cs typeface="+mn-cs"/>
+                  </a:defRPr>
+                </a:pPr>
+                <a:r>
+                  <a:rPr lang="en-US" b="1"/>
+                  <a:t>Actual Residuals</a:t>
+                </a:r>
+              </a:p>
+            </c:rich>
+          </c:tx>
+          <c:overlay val="0"/>
+          <c:spPr>
+            <a:noFill/>
+            <a:ln>
+              <a:noFill/>
+            </a:ln>
+            <a:effectLst/>
+          </c:spPr>
+          <c:txPr>
+            <a:bodyPr rot="-5400000" spcFirstLastPara="1" vertOverflow="ellipsis" vert="horz" wrap="square" anchor="ctr" anchorCtr="1"/>
+            <a:lstStyle/>
+            <a:p>
+              <a:pPr>
+                <a:defRPr sz="1000" b="1" i="0" u="none" strike="noStrike" kern="1200" baseline="0">
+                  <a:solidFill>
+                    <a:schemeClr val="tx1">
+                      <a:lumMod val="65000"/>
+                      <a:lumOff val="35000"/>
+                    </a:schemeClr>
+                  </a:solidFill>
+                  <a:latin typeface="+mn-lt"/>
+                  <a:ea typeface="+mn-ea"/>
+                  <a:cs typeface="+mn-cs"/>
+                </a:defRPr>
+              </a:pPr>
+              <a:endParaRPr lang="en-US"/>
+            </a:p>
+          </c:txPr>
+        </c:title>
+        <c:numFmt formatCode="General" sourceLinked="1"/>
+        <c:majorTickMark val="none"/>
+        <c:minorTickMark val="none"/>
+        <c:tickLblPos val="nextTo"/>
+        <c:spPr>
+          <a:noFill/>
+          <a:ln w="9525" cap="flat" cmpd="sng" algn="ctr">
+            <a:solidFill>
+              <a:schemeClr val="tx1">
+                <a:lumMod val="25000"/>
+                <a:lumOff val="75000"/>
+              </a:schemeClr>
+            </a:solidFill>
+            <a:round/>
+          </a:ln>
+          <a:effectLst/>
+        </c:spPr>
+        <c:txPr>
+          <a:bodyPr rot="-60000000" spcFirstLastPara="1" vertOverflow="ellipsis" vert="horz" wrap="square" anchor="ctr" anchorCtr="1"/>
+          <a:lstStyle/>
+          <a:p>
+            <a:pPr>
+              <a:defRPr sz="900" b="0" i="0" u="none" strike="noStrike" kern="1200" baseline="0">
+                <a:solidFill>
+                  <a:schemeClr val="tx1">
+                    <a:lumMod val="65000"/>
+                    <a:lumOff val="35000"/>
+                  </a:schemeClr>
+                </a:solidFill>
+                <a:latin typeface="+mn-lt"/>
+                <a:ea typeface="+mn-ea"/>
+                <a:cs typeface="+mn-cs"/>
+              </a:defRPr>
+            </a:pPr>
+            <a:endParaRPr lang="en-US"/>
+          </a:p>
+        </c:txPr>
+        <c:crossAx val="1382621808"/>
+        <c:crossesAt val="-2"/>
+        <c:crossBetween val="midCat"/>
+      </c:valAx>
+      <c:spPr>
+        <a:noFill/>
+        <a:ln>
+          <a:noFill/>
+        </a:ln>
+        <a:effectLst/>
+      </c:spPr>
+    </c:plotArea>
+    <c:plotVisOnly val="1"/>
+    <c:dispBlanksAs val="gap"/>
+    <c:extLst>
+      <c:ext xmlns:c16r3="http://schemas.microsoft.com/office/drawing/2017/03/chart" uri="{56B9EC1D-385E-4148-901F-78D8002777C0}">
+        <c16r3:dataDisplayOptions16>
+          <c16r3:dispNaAsBlank val="1"/>
+        </c16r3:dataDisplayOptions16>
+      </c:ext>
+    </c:extLst>
+    <c:showDLblsOverMax val="0"/>
+  </c:chart>
+  <c:spPr>
+    <a:noFill/>
+    <a:ln>
+      <a:noFill/>
+    </a:ln>
+    <a:effectLst/>
+  </c:spPr>
+  <c:txPr>
+    <a:bodyPr/>
+    <a:lstStyle/>
+    <a:p>
+      <a:pPr>
+        <a:defRPr/>
+      </a:pPr>
+      <a:endParaRPr lang="en-US"/>
+    </a:p>
+  </c:txPr>
+  <c:externalData r:id="rId3">
+    <c:autoUpdate val="0"/>
+  </c:externalData>
+</c:chartSpace>
+</file>
+
+<file path=ppt/charts/colors1.xml><?xml version="1.0" encoding="utf-8"?>
+<cs:colorStyle xmlns:cs="http://schemas.microsoft.com/office/drawing/2012/chartStyle" xmlns:a="http://schemas.openxmlformats.org/drawingml/2006/main" meth="cycle" id="10">
+  <a:schemeClr val="accent1"/>
+  <a:schemeClr val="accent2"/>
+  <a:schemeClr val="accent3"/>
+  <a:schemeClr val="accent4"/>
+  <a:schemeClr val="accent5"/>
+  <a:schemeClr val="accent6"/>
+  <cs:variation/>
+  <cs:variation>
+    <a:lumMod val="60000"/>
+  </cs:variation>
+  <cs:variation>
+    <a:lumMod val="80000"/>
+    <a:lumOff val="20000"/>
+  </cs:variation>
+  <cs:variation>
+    <a:lumMod val="80000"/>
+  </cs:variation>
+  <cs:variation>
+    <a:lumMod val="60000"/>
+    <a:lumOff val="40000"/>
+  </cs:variation>
+  <cs:variation>
+    <a:lumMod val="50000"/>
+  </cs:variation>
+  <cs:variation>
+    <a:lumMod val="70000"/>
+    <a:lumOff val="30000"/>
+  </cs:variation>
+  <cs:variation>
+    <a:lumMod val="70000"/>
+  </cs:variation>
+  <cs:variation>
+    <a:lumMod val="50000"/>
+    <a:lumOff val="50000"/>
+  </cs:variation>
+</cs:colorStyle>
+</file>
+
+<file path=ppt/charts/style1.xml><?xml version="1.0" encoding="utf-8"?>
+<cs:chartStyle xmlns:cs="http://schemas.microsoft.com/office/drawing/2012/chartStyle" xmlns:a="http://schemas.openxmlformats.org/drawingml/2006/main" id="240">
+  <cs:axisTitle>
+    <cs:lnRef idx="0"/>
+    <cs:fillRef idx="0"/>
+    <cs:effectRef idx="0"/>
+    <cs:fontRef idx="minor">
+      <a:schemeClr val="tx1">
+        <a:lumMod val="65000"/>
+        <a:lumOff val="35000"/>
+      </a:schemeClr>
+    </cs:fontRef>
+    <cs:defRPr sz="1000" kern="1200"/>
+  </cs:axisTitle>
+  <cs:categoryAxis>
+    <cs:lnRef idx="0"/>
+    <cs:fillRef idx="0"/>
+    <cs:effectRef idx="0"/>
+    <cs:fontRef idx="minor">
+      <a:schemeClr val="tx1">
+        <a:lumMod val="65000"/>
+        <a:lumOff val="35000"/>
+      </a:schemeClr>
+    </cs:fontRef>
+    <cs:spPr>
+      <a:ln w="9525" cap="flat" cmpd="sng" algn="ctr">
+        <a:solidFill>
+          <a:schemeClr val="tx1">
+            <a:lumMod val="25000"/>
+            <a:lumOff val="75000"/>
+          </a:schemeClr>
+        </a:solidFill>
+        <a:round/>
+      </a:ln>
+    </cs:spPr>
+    <cs:defRPr sz="900" kern="1200"/>
+  </cs:categoryAxis>
+  <cs:chartArea mods="allowNoFillOverride allowNoLineOverride">
+    <cs:lnRef idx="0"/>
+    <cs:fillRef idx="0"/>
+    <cs:effectRef idx="0"/>
+    <cs:fontRef idx="minor">
+      <a:schemeClr val="tx1"/>
+    </cs:fontRef>
+    <cs:spPr>
+      <a:solidFill>
+        <a:schemeClr val="bg1"/>
+      </a:solidFill>
+      <a:ln w="9525" cap="flat" cmpd="sng" algn="ctr">
+        <a:solidFill>
+          <a:schemeClr val="tx1">
+            <a:lumMod val="15000"/>
+            <a:lumOff val="85000"/>
+          </a:schemeClr>
+        </a:solidFill>
+        <a:round/>
+      </a:ln>
+    </cs:spPr>
+    <cs:defRPr sz="1000" kern="1200"/>
+  </cs:chartArea>
+  <cs:dataLabel>
+    <cs:lnRef idx="0"/>
+    <cs:fillRef idx="0"/>
+    <cs:effectRef idx="0"/>
+    <cs:fontRef idx="minor">
+      <a:schemeClr val="tx1">
+        <a:lumMod val="75000"/>
+        <a:lumOff val="25000"/>
+      </a:schemeClr>
+    </cs:fontRef>
+    <cs:defRPr sz="900" kern="1200"/>
+  </cs:dataLabel>
+  <cs:dataLabelCallout>
+    <cs:lnRef idx="0"/>
+    <cs:fillRef idx="0"/>
+    <cs:effectRef idx="0"/>
+    <cs:fontRef idx="minor">
+      <a:schemeClr val="dk1">
+        <a:lumMod val="65000"/>
+        <a:lumOff val="35000"/>
+      </a:schemeClr>
+    </cs:fontRef>
+    <cs:spPr>
+      <a:solidFill>
+        <a:schemeClr val="lt1"/>
+      </a:solidFill>
+      <a:ln>
+        <a:solidFill>
+          <a:schemeClr val="dk1">
+            <a:lumMod val="25000"/>
+            <a:lumOff val="75000"/>
+          </a:schemeClr>
+        </a:solidFill>
+      </a:ln>
+    </cs:spPr>
+    <cs:defRPr sz="900" kern="1200"/>
+    <cs:bodyPr rot="0" spcFirstLastPara="1" vertOverflow="clip" horzOverflow="clip" vert="horz" wrap="square" lIns="36576" tIns="18288" rIns="36576" bIns="18288" anchor="ctr" anchorCtr="1">
+      <a:spAutoFit/>
+    </cs:bodyPr>
+  </cs:dataLabelCallout>
+  <cs:dataPoint>
+    <cs:lnRef idx="0"/>
+    <cs:fillRef idx="1">
+      <cs:styleClr val="auto"/>
+    </cs:fillRef>
+    <cs:effectRef idx="0"/>
+    <cs:fontRef idx="minor">
+      <a:schemeClr val="tx1"/>
+    </cs:fontRef>
+  </cs:dataPoint>
+  <cs:dataPoint3D>
+    <cs:lnRef idx="0"/>
+    <cs:fillRef idx="1">
+      <cs:styleClr val="auto"/>
+    </cs:fillRef>
+    <cs:effectRef idx="0"/>
+    <cs:fontRef idx="minor">
+      <a:schemeClr val="tx1"/>
+    </cs:fontRef>
+  </cs:dataPoint3D>
+  <cs:dataPointLine>
+    <cs:lnRef idx="0">
+      <cs:styleClr val="auto"/>
+    </cs:lnRef>
+    <cs:fillRef idx="1"/>
+    <cs:effectRef idx="0"/>
+    <cs:fontRef idx="minor">
+      <a:schemeClr val="tx1"/>
+    </cs:fontRef>
+    <cs:spPr>
+      <a:ln w="19050" cap="rnd">
+        <a:solidFill>
+          <a:schemeClr val="phClr"/>
+        </a:solidFill>
+        <a:round/>
+      </a:ln>
+    </cs:spPr>
+  </cs:dataPointLine>
+  <cs:dataPointMarker>
+    <cs:lnRef idx="0">
+      <cs:styleClr val="auto"/>
+    </cs:lnRef>
+    <cs:fillRef idx="1">
+      <cs:styleClr val="auto"/>
+    </cs:fillRef>
+    <cs:effectRef idx="0"/>
+    <cs:fontRef idx="minor">
+      <a:schemeClr val="tx1"/>
+    </cs:fontRef>
+    <cs:spPr>
+      <a:ln w="9525">
+        <a:solidFill>
+          <a:schemeClr val="phClr"/>
+        </a:solidFill>
+      </a:ln>
+    </cs:spPr>
+  </cs:dataPointMarker>
+  <cs:dataPointMarkerLayout symbol="circle" size="5"/>
+  <cs:dataPointWireframe>
+    <cs:lnRef idx="0">
+      <cs:styleClr val="auto"/>
+    </cs:lnRef>
+    <cs:fillRef idx="0"/>
+    <cs:effectRef idx="0"/>
+    <cs:fontRef idx="minor">
+      <a:schemeClr val="dk1"/>
+    </cs:fontRef>
+    <cs:spPr>
+      <a:ln w="9525" cap="rnd">
+        <a:solidFill>
+          <a:schemeClr val="phClr"/>
+        </a:solidFill>
+        <a:round/>
+      </a:ln>
+    </cs:spPr>
+  </cs:dataPointWireframe>
+  <cs:dataTable>
+    <cs:lnRef idx="0"/>
+    <cs:fillRef idx="0"/>
+    <cs:effectRef idx="0"/>
+    <cs:fontRef idx="minor">
+      <a:schemeClr val="tx1">
+        <a:lumMod val="65000"/>
+        <a:lumOff val="35000"/>
+      </a:schemeClr>
+    </cs:fontRef>
+    <cs:spPr>
+      <a:noFill/>
+      <a:ln w="9525" cap="flat" cmpd="sng" algn="ctr">
+        <a:solidFill>
+          <a:schemeClr val="tx1">
+            <a:lumMod val="15000"/>
+            <a:lumOff val="85000"/>
+          </a:schemeClr>
+        </a:solidFill>
+        <a:round/>
+      </a:ln>
+    </cs:spPr>
+    <cs:defRPr sz="900" kern="1200"/>
+  </cs:dataTable>
+  <cs:downBar>
+    <cs:lnRef idx="0"/>
+    <cs:fillRef idx="0"/>
+    <cs:effectRef idx="0"/>
+    <cs:fontRef idx="minor">
+      <a:schemeClr val="tx1"/>
+    </cs:fontRef>
+    <cs:spPr>
+      <a:solidFill>
+        <a:schemeClr val="dk1">
+          <a:lumMod val="75000"/>
+          <a:lumOff val="25000"/>
+        </a:schemeClr>
+      </a:solidFill>
+      <a:ln w="9525" cap="flat" cmpd="sng" algn="ctr">
+        <a:solidFill>
+          <a:schemeClr val="tx1">
+            <a:lumMod val="65000"/>
+            <a:lumOff val="35000"/>
+          </a:schemeClr>
+        </a:solidFill>
+        <a:round/>
+      </a:ln>
+    </cs:spPr>
+  </cs:downBar>
+  <cs:dropLine>
+    <cs:lnRef idx="0"/>
+    <cs:fillRef idx="0"/>
+    <cs:effectRef idx="0"/>
+    <cs:fontRef idx="minor">
+      <a:schemeClr val="tx1"/>
+    </cs:fontRef>
+    <cs:spPr>
+      <a:ln w="9525" cap="flat" cmpd="sng" algn="ctr">
+        <a:solidFill>
+          <a:schemeClr val="tx1">
+            <a:lumMod val="35000"/>
+            <a:lumOff val="65000"/>
+          </a:schemeClr>
+        </a:solidFill>
+        <a:round/>
+      </a:ln>
+    </cs:spPr>
+  </cs:dropLine>
+  <cs:errorBar>
+    <cs:lnRef idx="0"/>
+    <cs:fillRef idx="0"/>
+    <cs:effectRef idx="0"/>
+    <cs:fontRef idx="minor">
+      <a:schemeClr val="tx1"/>
+    </cs:fontRef>
+    <cs:spPr>
+      <a:ln w="9525" cap="flat" cmpd="sng" algn="ctr">
+        <a:solidFill>
+          <a:schemeClr val="tx1">
+            <a:lumMod val="65000"/>
+            <a:lumOff val="35000"/>
+          </a:schemeClr>
+        </a:solidFill>
+        <a:round/>
+      </a:ln>
+    </cs:spPr>
+  </cs:errorBar>
+  <cs:floor>
+    <cs:lnRef idx="0"/>
+    <cs:fillRef idx="0"/>
+    <cs:effectRef idx="0"/>
+    <cs:fontRef idx="minor">
+      <a:schemeClr val="tx1"/>
+    </cs:fontRef>
+    <cs:spPr>
+      <a:noFill/>
+      <a:ln>
+        <a:noFill/>
+      </a:ln>
+    </cs:spPr>
+  </cs:floor>
+  <cs:gridlineMajor>
+    <cs:lnRef idx="0"/>
+    <cs:fillRef idx="0"/>
+    <cs:effectRef idx="0"/>
+    <cs:fontRef idx="minor">
+      <a:schemeClr val="tx1"/>
+    </cs:fontRef>
+    <cs:spPr>
+      <a:ln w="9525" cap="flat" cmpd="sng" algn="ctr">
+        <a:solidFill>
+          <a:schemeClr val="tx1">
+            <a:lumMod val="15000"/>
+            <a:lumOff val="85000"/>
+          </a:schemeClr>
+        </a:solidFill>
+        <a:round/>
+      </a:ln>
+    </cs:spPr>
+  </cs:gridlineMajor>
+  <cs:gridlineMinor>
+    <cs:lnRef idx="0"/>
+    <cs:fillRef idx="0"/>
+    <cs:effectRef idx="0"/>
+    <cs:fontRef idx="minor">
+      <a:schemeClr val="tx1"/>
+    </cs:fontRef>
+    <cs:spPr>
+      <a:ln w="9525" cap="flat" cmpd="sng" algn="ctr">
+        <a:solidFill>
+          <a:schemeClr val="tx1">
+            <a:lumMod val="5000"/>
+            <a:lumOff val="95000"/>
+          </a:schemeClr>
+        </a:solidFill>
+        <a:round/>
+      </a:ln>
+    </cs:spPr>
+  </cs:gridlineMinor>
+  <cs:hiLoLine>
+    <cs:lnRef idx="0"/>
+    <cs:fillRef idx="0"/>
+    <cs:effectRef idx="0"/>
+    <cs:fontRef idx="minor">
+      <a:schemeClr val="tx1"/>
+    </cs:fontRef>
+    <cs:spPr>
+      <a:ln w="9525" cap="flat" cmpd="sng" algn="ctr">
+        <a:solidFill>
+          <a:schemeClr val="tx1">
+            <a:lumMod val="50000"/>
+            <a:lumOff val="50000"/>
+          </a:schemeClr>
+        </a:solidFill>
+        <a:round/>
+      </a:ln>
+    </cs:spPr>
+  </cs:hiLoLine>
+  <cs:leaderLine>
+    <cs:lnRef idx="0"/>
+    <cs:fillRef idx="0"/>
+    <cs:effectRef idx="0"/>
+    <cs:fontRef idx="minor">
+      <a:schemeClr val="tx1"/>
+    </cs:fontRef>
+    <cs:spPr>
+      <a:ln w="9525" cap="flat" cmpd="sng" algn="ctr">
+        <a:solidFill>
+          <a:schemeClr val="tx1">
+            <a:lumMod val="35000"/>
+            <a:lumOff val="65000"/>
+          </a:schemeClr>
+        </a:solidFill>
+        <a:round/>
+      </a:ln>
+    </cs:spPr>
+  </cs:leaderLine>
+  <cs:legend>
+    <cs:lnRef idx="0"/>
+    <cs:fillRef idx="0"/>
+    <cs:effectRef idx="0"/>
+    <cs:fontRef idx="minor">
+      <a:schemeClr val="tx1">
+        <a:lumMod val="65000"/>
+        <a:lumOff val="35000"/>
+      </a:schemeClr>
+    </cs:fontRef>
+    <cs:defRPr sz="900" kern="1200"/>
+  </cs:legend>
+  <cs:plotArea mods="allowNoFillOverride allowNoLineOverride">
+    <cs:lnRef idx="0"/>
+    <cs:fillRef idx="0"/>
+    <cs:effectRef idx="0"/>
+    <cs:fontRef idx="minor">
+      <a:schemeClr val="tx1"/>
+    </cs:fontRef>
+  </cs:plotArea>
+  <cs:plotArea3D mods="allowNoFillOverride allowNoLineOverride">
+    <cs:lnRef idx="0"/>
+    <cs:fillRef idx="0"/>
+    <cs:effectRef idx="0"/>
+    <cs:fontRef idx="minor">
+      <a:schemeClr val="tx1"/>
+    </cs:fontRef>
+  </cs:plotArea3D>
+  <cs:seriesAxis>
+    <cs:lnRef idx="0"/>
+    <cs:fillRef idx="0"/>
+    <cs:effectRef idx="0"/>
+    <cs:fontRef idx="minor">
+      <a:schemeClr val="tx1">
+        <a:lumMod val="65000"/>
+        <a:lumOff val="35000"/>
+      </a:schemeClr>
+    </cs:fontRef>
+    <cs:defRPr sz="900" kern="1200"/>
+  </cs:seriesAxis>
+  <cs:seriesLine>
+    <cs:lnRef idx="0"/>
+    <cs:fillRef idx="0"/>
+    <cs:effectRef idx="0"/>
+    <cs:fontRef idx="minor">
+      <a:schemeClr val="tx1"/>
+    </cs:fontRef>
+    <cs:spPr>
+      <a:ln w="9525" cap="flat" cmpd="sng" algn="ctr">
+        <a:solidFill>
+          <a:schemeClr val="tx1">
+            <a:lumMod val="35000"/>
+            <a:lumOff val="65000"/>
+          </a:schemeClr>
+        </a:solidFill>
+        <a:round/>
+      </a:ln>
+    </cs:spPr>
+  </cs:seriesLine>
+  <cs:title>
+    <cs:lnRef idx="0"/>
+    <cs:fillRef idx="0"/>
+    <cs:effectRef idx="0"/>
+    <cs:fontRef idx="minor">
+      <a:schemeClr val="tx1">
+        <a:lumMod val="65000"/>
+        <a:lumOff val="35000"/>
+      </a:schemeClr>
+    </cs:fontRef>
+    <cs:defRPr sz="1400" b="0" kern="1200" spc="0" baseline="0"/>
+  </cs:title>
+  <cs:trendline>
+    <cs:lnRef idx="0">
+      <cs:styleClr val="auto"/>
+    </cs:lnRef>
+    <cs:fillRef idx="0"/>
+    <cs:effectRef idx="0"/>
+    <cs:fontRef idx="minor">
+      <a:schemeClr val="tx1"/>
+    </cs:fontRef>
+    <cs:spPr>
+      <a:ln w="19050" cap="rnd">
+        <a:solidFill>
+          <a:schemeClr val="phClr"/>
+        </a:solidFill>
+        <a:prstDash val="sysDot"/>
+      </a:ln>
+    </cs:spPr>
+  </cs:trendline>
+  <cs:trendlineLabel>
+    <cs:lnRef idx="0"/>
+    <cs:fillRef idx="0"/>
+    <cs:effectRef idx="0"/>
+    <cs:fontRef idx="minor">
+      <a:schemeClr val="tx1">
+        <a:lumMod val="65000"/>
+        <a:lumOff val="35000"/>
+      </a:schemeClr>
+    </cs:fontRef>
+    <cs:defRPr sz="900" kern="1200"/>
+  </cs:trendlineLabel>
+  <cs:upBar>
+    <cs:lnRef idx="0"/>
+    <cs:fillRef idx="0"/>
+    <cs:effectRef idx="0"/>
+    <cs:fontRef idx="minor">
+      <a:schemeClr val="tx1"/>
+    </cs:fontRef>
+    <cs:spPr>
+      <a:solidFill>
+        <a:schemeClr val="lt1"/>
+      </a:solidFill>
+      <a:ln w="9525" cap="flat" cmpd="sng" algn="ctr">
+        <a:solidFill>
+          <a:schemeClr val="tx1">
+            <a:lumMod val="65000"/>
+            <a:lumOff val="35000"/>
+          </a:schemeClr>
+        </a:solidFill>
+        <a:round/>
+      </a:ln>
+    </cs:spPr>
+  </cs:upBar>
+  <cs:valueAxis>
+    <cs:lnRef idx="0"/>
+    <cs:fillRef idx="0"/>
+    <cs:effectRef idx="0"/>
+    <cs:fontRef idx="minor">
+      <a:schemeClr val="tx1">
+        <a:lumMod val="65000"/>
+        <a:lumOff val="35000"/>
+      </a:schemeClr>
+    </cs:fontRef>
+    <cs:spPr>
+      <a:ln w="9525" cap="flat" cmpd="sng" algn="ctr">
+        <a:solidFill>
+          <a:schemeClr val="tx1">
+            <a:lumMod val="25000"/>
+            <a:lumOff val="75000"/>
+          </a:schemeClr>
+        </a:solidFill>
+        <a:round/>
+      </a:ln>
+    </cs:spPr>
+    <cs:defRPr sz="900" kern="1200"/>
+  </cs:valueAxis>
+  <cs:wall>
+    <cs:lnRef idx="0"/>
+    <cs:fillRef idx="0"/>
+    <cs:effectRef idx="0"/>
+    <cs:fontRef idx="minor">
+      <a:schemeClr val="tx1"/>
+    </cs:fontRef>
+    <cs:spPr>
+      <a:noFill/>
+      <a:ln>
+        <a:noFill/>
+      </a:ln>
+    </cs:spPr>
+  </cs:wall>
+</cs:chartStyle>
 </file>
 
 <file path=ppt/slideLayouts/slideLayout1.xml><?xml version="1.0" encoding="utf-8"?>
@@ -5920,7 +7427,13 @@
   <p:cSld>
     <p:spTree>
       <p:nvGrpSpPr>
-        <p:cNvPr id="1" name=""/>
+        <p:cNvPr id="1" name="">
+          <a:extLst>
+            <a:ext uri="{FF2B5EF4-FFF2-40B4-BE49-F238E27FC236}">
+              <a16:creationId xmlns:a16="http://schemas.microsoft.com/office/drawing/2014/main" id="{A13DFCA9-DB68-4926-D36D-44E2CB4365C6}"/>
+            </a:ext>
+          </a:extLst>
+        </p:cNvPr>
         <p:cNvGrpSpPr/>
         <p:nvPr/>
       </p:nvGrpSpPr>
@@ -5937,7 +7450,7 @@
           <p:cNvPr id="2" name="Content Placeholder 1">
             <a:extLst>
               <a:ext uri="{FF2B5EF4-FFF2-40B4-BE49-F238E27FC236}">
-                <a16:creationId xmlns:a16="http://schemas.microsoft.com/office/drawing/2014/main" id="{4AB508A7-8888-D77B-B430-86487FE1DB28}"/>
+                <a16:creationId xmlns:a16="http://schemas.microsoft.com/office/drawing/2014/main" id="{5161A592-C95D-5F4C-D812-FDE1F8B67D98}"/>
               </a:ext>
             </a:extLst>
           </p:cNvPr>
@@ -5948,12 +7461,111 @@
             <p:ph idx="1"/>
           </p:nvPr>
         </p:nvSpPr>
-        <p:spPr/>
+        <p:spPr>
+          <a:xfrm>
+            <a:off x="838199" y="1633491"/>
+            <a:ext cx="6123039" cy="5131294"/>
+          </a:xfrm>
+        </p:spPr>
         <p:txBody>
-          <a:bodyPr/>
+          <a:bodyPr>
+            <a:normAutofit/>
+          </a:bodyPr>
           <a:lstStyle/>
           <a:p>
-            <a:endParaRPr lang="en-US"/>
+            <a:pPr marL="0" indent="0">
+              <a:buNone/>
+            </a:pPr>
+            <a:r>
+              <a:rPr lang="en-US" b="1" dirty="0"/>
+              <a:t>Iterative Optimization Approach</a:t>
+            </a:r>
+          </a:p>
+          <a:p>
+            <a:r>
+              <a:rPr lang="en-US" b="1" dirty="0"/>
+              <a:t>Core Concept:</a:t>
+            </a:r>
+            <a:r>
+              <a:rPr lang="en-US" dirty="0"/>
+              <a:t> Gradually adjust coefficients to minimize cost function</a:t>
+            </a:r>
+          </a:p>
+          <a:p>
+            <a:pPr marL="0" indent="0">
+              <a:buNone/>
+            </a:pPr>
+            <a:r>
+              <a:rPr lang="en-US" b="1" dirty="0"/>
+              <a:t>Algorithm Steps:</a:t>
+            </a:r>
+            <a:endParaRPr lang="en-US" dirty="0"/>
+          </a:p>
+          <a:p>
+            <a:pPr marL="346075" indent="-346075">
+              <a:buFont typeface="+mj-lt"/>
+              <a:buAutoNum type="arabicPeriod"/>
+            </a:pPr>
+            <a:r>
+              <a:rPr lang="en-US" dirty="0"/>
+              <a:t>Start with random </a:t>
+            </a:r>
+            <a:r>
+              <a:rPr lang="el-GR" dirty="0"/>
+              <a:t>β₀ </a:t>
+            </a:r>
+            <a:r>
+              <a:rPr lang="en-US" dirty="0"/>
+              <a:t>and </a:t>
+            </a:r>
+            <a:r>
+              <a:rPr lang="el-GR" dirty="0"/>
+              <a:t>β₁ </a:t>
+            </a:r>
+            <a:r>
+              <a:rPr lang="en-US" dirty="0"/>
+              <a:t>values</a:t>
+            </a:r>
+          </a:p>
+          <a:p>
+            <a:pPr marL="346075" indent="-346075">
+              <a:buFont typeface="+mj-lt"/>
+              <a:buAutoNum type="arabicPeriod"/>
+            </a:pPr>
+            <a:r>
+              <a:rPr lang="en-US" dirty="0"/>
+              <a:t>Calculate cost (MSE)</a:t>
+            </a:r>
+          </a:p>
+          <a:p>
+            <a:pPr marL="346075" indent="-346075">
+              <a:buFont typeface="+mj-lt"/>
+              <a:buAutoNum type="arabicPeriod"/>
+            </a:pPr>
+            <a:r>
+              <a:rPr lang="en-US" dirty="0"/>
+              <a:t>Compute gradients (derivatives)</a:t>
+            </a:r>
+          </a:p>
+          <a:p>
+            <a:pPr marL="346075" indent="-346075">
+              <a:buFont typeface="+mj-lt"/>
+              <a:buAutoNum type="arabicPeriod"/>
+            </a:pPr>
+            <a:r>
+              <a:rPr lang="en-US" dirty="0"/>
+              <a:t>Update coefficients in direction of steepest descent</a:t>
+            </a:r>
+          </a:p>
+          <a:p>
+            <a:pPr marL="346075" indent="-346075">
+              <a:buFont typeface="+mj-lt"/>
+              <a:buAutoNum type="arabicPeriod"/>
+            </a:pPr>
+            <a:r>
+              <a:rPr lang="en-US" dirty="0"/>
+              <a:t>Repeat until convergence</a:t>
+            </a:r>
           </a:p>
         </p:txBody>
       </p:sp>
@@ -5962,7 +7574,7 @@
           <p:cNvPr id="3" name="Title 2">
             <a:extLst>
               <a:ext uri="{FF2B5EF4-FFF2-40B4-BE49-F238E27FC236}">
-                <a16:creationId xmlns:a16="http://schemas.microsoft.com/office/drawing/2014/main" id="{28A4CF1C-C04B-6B0E-66D9-A9DDA7F6AA70}"/>
+                <a16:creationId xmlns:a16="http://schemas.microsoft.com/office/drawing/2014/main" id="{DF98230F-D09E-0053-052C-DBBDA534D6A9}"/>
               </a:ext>
             </a:extLst>
           </p:cNvPr>
@@ -5978,14 +7590,77 @@
           <a:bodyPr/>
           <a:lstStyle/>
           <a:p>
-            <a:endParaRPr lang="en-US"/>
+            <a:r>
+              <a:rPr lang="en-US" dirty="0"/>
+              <a:t>Solving Linear Regression Using The Gradient Descent Method</a:t>
+            </a:r>
           </a:p>
         </p:txBody>
       </p:sp>
+      <p:pic>
+        <p:nvPicPr>
+          <p:cNvPr id="5" name="Picture 4">
+            <a:extLst>
+              <a:ext uri="{FF2B5EF4-FFF2-40B4-BE49-F238E27FC236}">
+                <a16:creationId xmlns:a16="http://schemas.microsoft.com/office/drawing/2014/main" id="{2C0B6C6C-BCCC-176F-E3E9-9C6155B90FC2}"/>
+              </a:ext>
+            </a:extLst>
+          </p:cNvPr>
+          <p:cNvPicPr>
+            <a:picLocks noChangeAspect="1"/>
+          </p:cNvPicPr>
+          <p:nvPr/>
+        </p:nvPicPr>
+        <p:blipFill>
+          <a:blip r:embed="rId2"/>
+          <a:stretch>
+            <a:fillRect/>
+          </a:stretch>
+        </p:blipFill>
+        <p:spPr>
+          <a:xfrm>
+            <a:off x="7231423" y="1746681"/>
+            <a:ext cx="4122377" cy="2996518"/>
+          </a:xfrm>
+          <a:prstGeom prst="rect">
+            <a:avLst/>
+          </a:prstGeom>
+        </p:spPr>
+      </p:pic>
+      <p:pic>
+        <p:nvPicPr>
+          <p:cNvPr id="6" name="Picture 5">
+            <a:extLst>
+              <a:ext uri="{FF2B5EF4-FFF2-40B4-BE49-F238E27FC236}">
+                <a16:creationId xmlns:a16="http://schemas.microsoft.com/office/drawing/2014/main" id="{79C0C2BA-6BEC-3370-0CDA-2423FD3D748B}"/>
+              </a:ext>
+            </a:extLst>
+          </p:cNvPr>
+          <p:cNvPicPr>
+            <a:picLocks noChangeAspect="1"/>
+          </p:cNvPicPr>
+          <p:nvPr/>
+        </p:nvPicPr>
+        <p:blipFill>
+          <a:blip r:embed="rId3"/>
+          <a:stretch>
+            <a:fillRect/>
+          </a:stretch>
+        </p:blipFill>
+        <p:spPr>
+          <a:xfrm>
+            <a:off x="7807388" y="4944149"/>
+            <a:ext cx="2834355" cy="1548282"/>
+          </a:xfrm>
+          <a:prstGeom prst="rect">
+            <a:avLst/>
+          </a:prstGeom>
+        </p:spPr>
+      </p:pic>
     </p:spTree>
     <p:extLst>
       <p:ext uri="{BB962C8B-B14F-4D97-AF65-F5344CB8AC3E}">
-        <p14:creationId xmlns:p14="http://schemas.microsoft.com/office/powerpoint/2010/main" val="3941017664"/>
+        <p14:creationId xmlns:p14="http://schemas.microsoft.com/office/powerpoint/2010/main" val="1427723282"/>
       </p:ext>
     </p:extLst>
   </p:cSld>
@@ -6012,12 +7687,48 @@
           <a:chExt cx="0" cy="0"/>
         </a:xfrm>
       </p:grpSpPr>
+      <p:pic>
+        <p:nvPicPr>
+          <p:cNvPr id="5" name="Picture 4" descr="A graph of a function&#10;&#10;AI-generated content may be incorrect.">
+            <a:extLst>
+              <a:ext uri="{FF2B5EF4-FFF2-40B4-BE49-F238E27FC236}">
+                <a16:creationId xmlns:a16="http://schemas.microsoft.com/office/drawing/2014/main" id="{8F2330D7-9298-4367-D02D-C079ED44A0BE}"/>
+              </a:ext>
+            </a:extLst>
+          </p:cNvPr>
+          <p:cNvPicPr>
+            <a:picLocks noChangeAspect="1"/>
+          </p:cNvPicPr>
+          <p:nvPr/>
+        </p:nvPicPr>
+        <p:blipFill>
+          <a:blip r:embed="rId2">
+            <a:extLst>
+              <a:ext uri="{28A0092B-C50C-407E-A947-70E740481C1C}">
+                <a14:useLocalDpi xmlns:a14="http://schemas.microsoft.com/office/drawing/2010/main" val="0"/>
+              </a:ext>
+            </a:extLst>
+          </a:blip>
+          <a:stretch>
+            <a:fillRect/>
+          </a:stretch>
+        </p:blipFill>
+        <p:spPr>
+          <a:xfrm>
+            <a:off x="5919159" y="1483297"/>
+            <a:ext cx="6795944" cy="5436756"/>
+          </a:xfrm>
+          <a:prstGeom prst="rect">
+            <a:avLst/>
+          </a:prstGeom>
+        </p:spPr>
+      </p:pic>
       <p:sp>
         <p:nvSpPr>
           <p:cNvPr id="2" name="Content Placeholder 1">
             <a:extLst>
               <a:ext uri="{FF2B5EF4-FFF2-40B4-BE49-F238E27FC236}">
-                <a16:creationId xmlns:a16="http://schemas.microsoft.com/office/drawing/2014/main" id="{269DA4D1-C52F-51DE-82E4-4CE2A0A5B4F9}"/>
+                <a16:creationId xmlns:a16="http://schemas.microsoft.com/office/drawing/2014/main" id="{4AB508A7-8888-D77B-B430-86487FE1DB28}"/>
               </a:ext>
             </a:extLst>
           </p:cNvPr>
@@ -6028,12 +7739,68 @@
             <p:ph idx="1"/>
           </p:nvPr>
         </p:nvSpPr>
-        <p:spPr/>
+        <p:spPr>
+          <a:xfrm>
+            <a:off x="838200" y="1633490"/>
+            <a:ext cx="6439930" cy="2184747"/>
+          </a:xfrm>
+        </p:spPr>
         <p:txBody>
-          <a:bodyPr/>
+          <a:bodyPr>
+            <a:normAutofit fontScale="85000" lnSpcReduction="10000"/>
+          </a:bodyPr>
           <a:lstStyle/>
           <a:p>
-            <a:endParaRPr lang="en-US"/>
+            <a:pPr marL="0" indent="0">
+              <a:buNone/>
+            </a:pPr>
+            <a:r>
+              <a:rPr lang="en-US" b="1" dirty="0"/>
+              <a:t>Understanding the Optimization Process</a:t>
+            </a:r>
+          </a:p>
+          <a:p>
+            <a:r>
+              <a:rPr lang="en-US" b="1" dirty="0"/>
+              <a:t>Key Components:</a:t>
+            </a:r>
+            <a:endParaRPr lang="en-US" dirty="0"/>
+          </a:p>
+          <a:p>
+            <a:r>
+              <a:rPr lang="en-US" b="1" dirty="0"/>
+              <a:t>Learning Rate (α):</a:t>
+            </a:r>
+            <a:r>
+              <a:rPr lang="en-US" dirty="0"/>
+              <a:t> Step size for each iteration</a:t>
+            </a:r>
+          </a:p>
+          <a:p>
+            <a:r>
+              <a:rPr lang="en-US" b="1" dirty="0"/>
+              <a:t>Gradient:</a:t>
+            </a:r>
+            <a:r>
+              <a:rPr lang="en-US" dirty="0"/>
+              <a:t> Direction of steepest increase</a:t>
+            </a:r>
+          </a:p>
+          <a:p>
+            <a:r>
+              <a:rPr lang="en-US" b="1" dirty="0"/>
+              <a:t>Convergence:</a:t>
+            </a:r>
+            <a:r>
+              <a:rPr lang="en-US" dirty="0"/>
+              <a:t> Reaching the minimum cost</a:t>
+            </a:r>
+          </a:p>
+          <a:p>
+            <a:endParaRPr lang="en-US" dirty="0"/>
+          </a:p>
+          <a:p>
+            <a:endParaRPr lang="en-US" dirty="0"/>
           </a:p>
         </p:txBody>
       </p:sp>
@@ -6042,7 +7809,7 @@
           <p:cNvPr id="3" name="Title 2">
             <a:extLst>
               <a:ext uri="{FF2B5EF4-FFF2-40B4-BE49-F238E27FC236}">
-                <a16:creationId xmlns:a16="http://schemas.microsoft.com/office/drawing/2014/main" id="{313D3DFB-4B7B-5020-971F-AF2B7A0A35FA}"/>
+                <a16:creationId xmlns:a16="http://schemas.microsoft.com/office/drawing/2014/main" id="{28A4CF1C-C04B-6B0E-66D9-A9DDA7F6AA70}"/>
               </a:ext>
             </a:extLst>
           </p:cNvPr>
@@ -6058,14 +7825,47 @@
           <a:bodyPr/>
           <a:lstStyle/>
           <a:p>
-            <a:endParaRPr lang="en-US"/>
+            <a:r>
+              <a:rPr lang="en-US" dirty="0"/>
+              <a:t>Gradient Descent Visualization</a:t>
+            </a:r>
           </a:p>
         </p:txBody>
       </p:sp>
+      <p:pic>
+        <p:nvPicPr>
+          <p:cNvPr id="6" name="Content Placeholder 4">
+            <a:extLst>
+              <a:ext uri="{FF2B5EF4-FFF2-40B4-BE49-F238E27FC236}">
+                <a16:creationId xmlns:a16="http://schemas.microsoft.com/office/drawing/2014/main" id="{44FAA658-B7FF-3387-5E0B-7631B2303893}"/>
+              </a:ext>
+            </a:extLst>
+          </p:cNvPr>
+          <p:cNvPicPr>
+            <a:picLocks noChangeAspect="1"/>
+          </p:cNvPicPr>
+          <p:nvPr/>
+        </p:nvPicPr>
+        <p:blipFill>
+          <a:blip r:embed="rId3"/>
+          <a:stretch>
+            <a:fillRect/>
+          </a:stretch>
+        </p:blipFill>
+        <p:spPr>
+          <a:xfrm>
+            <a:off x="838200" y="3818237"/>
+            <a:ext cx="2831757" cy="3101815"/>
+          </a:xfrm>
+          <a:prstGeom prst="rect">
+            <a:avLst/>
+          </a:prstGeom>
+        </p:spPr>
+      </p:pic>
     </p:spTree>
     <p:extLst>
       <p:ext uri="{BB962C8B-B14F-4D97-AF65-F5344CB8AC3E}">
-        <p14:creationId xmlns:p14="http://schemas.microsoft.com/office/powerpoint/2010/main" val="1291192180"/>
+        <p14:creationId xmlns:p14="http://schemas.microsoft.com/office/powerpoint/2010/main" val="3941017664"/>
       </p:ext>
     </p:extLst>
   </p:cSld>
@@ -6083,7 +7883,7 @@
         <p:cNvPr id="1" name="">
           <a:extLst>
             <a:ext uri="{FF2B5EF4-FFF2-40B4-BE49-F238E27FC236}">
-              <a16:creationId xmlns:a16="http://schemas.microsoft.com/office/drawing/2014/main" id="{A13DFCA9-DB68-4926-D36D-44E2CB4365C6}"/>
+              <a16:creationId xmlns:a16="http://schemas.microsoft.com/office/drawing/2014/main" id="{AA7D146C-15FF-96F8-CF9A-832F49E6CEC4}"/>
             </a:ext>
           </a:extLst>
         </p:cNvPr>
@@ -6103,7 +7903,7 @@
           <p:cNvPr id="2" name="Content Placeholder 1">
             <a:extLst>
               <a:ext uri="{FF2B5EF4-FFF2-40B4-BE49-F238E27FC236}">
-                <a16:creationId xmlns:a16="http://schemas.microsoft.com/office/drawing/2014/main" id="{5161A592-C95D-5F4C-D812-FDE1F8B67D98}"/>
+                <a16:creationId xmlns:a16="http://schemas.microsoft.com/office/drawing/2014/main" id="{34277D6C-6661-DE9D-2C7F-7EA55529ABF9}"/>
               </a:ext>
             </a:extLst>
           </p:cNvPr>
@@ -6116,70 +7916,76 @@
         </p:nvSpPr>
         <p:spPr>
           <a:xfrm>
-            <a:off x="838199" y="1633491"/>
-            <a:ext cx="6123039" cy="5131294"/>
+            <a:off x="838200" y="1633491"/>
+            <a:ext cx="6600568" cy="5131294"/>
           </a:xfrm>
         </p:spPr>
         <p:txBody>
           <a:bodyPr>
-            <a:normAutofit fontScale="85000" lnSpcReduction="10000"/>
+            <a:normAutofit/>
           </a:bodyPr>
           <a:lstStyle/>
           <a:p>
+            <a:pPr marL="0" indent="0">
+              <a:buNone/>
+            </a:pPr>
+            <a:r>
+              <a:rPr lang="en-US" b="1" dirty="0"/>
+              <a:t>Advantages:</a:t>
+            </a:r>
+            <a:endParaRPr lang="en-US" dirty="0"/>
+          </a:p>
+          <a:p>
             <a:r>
               <a:rPr lang="en-US" dirty="0"/>
-              <a:t>A linear regression model can be trained using Gradient Descent, which adjusts the model's parameters to minimize the mean squared error (MSE).</a:t>
+              <a:t>Scales well to large datasets</a:t>
             </a:r>
           </a:p>
           <a:p>
             <a:r>
               <a:rPr lang="en-US" dirty="0"/>
-              <a:t>To update (</a:t>
-            </a:r>
-            <a:r>
-              <a:rPr lang="en-US" i="1" dirty="0"/>
-              <a:t>Beta 0) </a:t>
-            </a:r>
+              <a:t>Works with multiple features</a:t>
+            </a:r>
+          </a:p>
+          <a:p>
             <a:r>
               <a:rPr lang="en-US" dirty="0"/>
-              <a:t>and (</a:t>
-            </a:r>
-            <a:r>
-              <a:rPr lang="en-US" i="1" dirty="0"/>
-              <a:t>Beta 1)</a:t>
-            </a:r>
+              <a:t>Foundation for deep learning</a:t>
+            </a:r>
+          </a:p>
+          <a:p>
+            <a:pPr marL="0" indent="0">
+              <a:buNone/>
+            </a:pPr>
+            <a:r>
+              <a:rPr lang="en-US" b="1" dirty="0"/>
+              <a:t>Considerations:</a:t>
+            </a:r>
+            <a:endParaRPr lang="en-US" dirty="0"/>
+          </a:p>
+          <a:p>
             <a:r>
               <a:rPr lang="en-US" dirty="0"/>
-              <a:t> and reduce the cost function (minimizing the RMSE), gradient descent starts with random values for (</a:t>
-            </a:r>
-            <a:r>
-              <a:rPr lang="en-US" i="1" dirty="0"/>
-              <a:t>Beta 0) </a:t>
-            </a:r>
+              <a:t>Requires tuning learning rate</a:t>
+            </a:r>
+          </a:p>
+          <a:p>
             <a:r>
               <a:rPr lang="en-US" dirty="0"/>
-              <a:t>and (</a:t>
-            </a:r>
-            <a:r>
-              <a:rPr lang="en-US" i="1" dirty="0"/>
-              <a:t>Beta 1) </a:t>
-            </a:r>
+              <a:t>May need many iterations</a:t>
+            </a:r>
+          </a:p>
+          <a:p>
             <a:r>
               <a:rPr lang="en-US" dirty="0"/>
-              <a:t>and iteratively improves them to find the best-fit line.</a:t>
-            </a:r>
-          </a:p>
-          <a:p>
-            <a:r>
-              <a:rPr lang="en-US" dirty="0"/>
-              <a:t>A gradient is simply the derivative, showing how small changes in inputs affect the output. </a:t>
-            </a:r>
-          </a:p>
-          <a:p>
-            <a:r>
-              <a:rPr lang="en-US" dirty="0"/>
-              <a:t>By moving in the direction of the Mean Squared Error negative gradient with respect to the coefficients, the coefficients can be changed.</a:t>
-            </a:r>
+              <a:t>Can get stuck in local minima</a:t>
+            </a:r>
+          </a:p>
+          <a:p>
+            <a:endParaRPr lang="en-US" dirty="0"/>
+          </a:p>
+          <a:p>
+            <a:endParaRPr lang="en-US" dirty="0"/>
           </a:p>
         </p:txBody>
       </p:sp>
@@ -6188,7 +7994,7 @@
           <p:cNvPr id="3" name="Title 2">
             <a:extLst>
               <a:ext uri="{FF2B5EF4-FFF2-40B4-BE49-F238E27FC236}">
-                <a16:creationId xmlns:a16="http://schemas.microsoft.com/office/drawing/2014/main" id="{DF98230F-D09E-0053-052C-DBBDA534D6A9}"/>
+                <a16:creationId xmlns:a16="http://schemas.microsoft.com/office/drawing/2014/main" id="{5C3C63C9-F4FE-4D35-113E-CFF7EF724963}"/>
               </a:ext>
             </a:extLst>
           </p:cNvPr>
@@ -6206,174 +8012,15 @@
           <a:p>
             <a:r>
               <a:rPr lang="en-US" dirty="0"/>
-              <a:t>Solving Linear Regression Using The Gradient Descent Method</a:t>
+              <a:t>Gradient Descent Visualization</a:t>
             </a:r>
           </a:p>
         </p:txBody>
       </p:sp>
       <p:pic>
         <p:nvPicPr>
-          <p:cNvPr id="5" name="Picture 4">
-            <a:extLst>
-              <a:ext uri="{FF2B5EF4-FFF2-40B4-BE49-F238E27FC236}">
-                <a16:creationId xmlns:a16="http://schemas.microsoft.com/office/drawing/2014/main" id="{2C0B6C6C-BCCC-176F-E3E9-9C6155B90FC2}"/>
-              </a:ext>
-            </a:extLst>
-          </p:cNvPr>
-          <p:cNvPicPr>
-            <a:picLocks noChangeAspect="1"/>
-          </p:cNvPicPr>
-          <p:nvPr/>
-        </p:nvPicPr>
-        <p:blipFill>
-          <a:blip r:embed="rId2"/>
-          <a:stretch>
-            <a:fillRect/>
-          </a:stretch>
-        </p:blipFill>
-        <p:spPr>
-          <a:xfrm>
-            <a:off x="7231423" y="1746681"/>
-            <a:ext cx="4122377" cy="2996518"/>
-          </a:xfrm>
-          <a:prstGeom prst="rect">
-            <a:avLst/>
-          </a:prstGeom>
-        </p:spPr>
-      </p:pic>
-    </p:spTree>
-    <p:extLst>
-      <p:ext uri="{BB962C8B-B14F-4D97-AF65-F5344CB8AC3E}">
-        <p14:creationId xmlns:p14="http://schemas.microsoft.com/office/powerpoint/2010/main" val="1427723282"/>
-      </p:ext>
-    </p:extLst>
-  </p:cSld>
-  <p:clrMapOvr>
-    <a:masterClrMapping/>
-  </p:clrMapOvr>
-</p:sld>
-</file>
-
-<file path=ppt/slides/slide16.xml><?xml version="1.0" encoding="utf-8"?>
-<p:sld xmlns:a="http://schemas.openxmlformats.org/drawingml/2006/main" xmlns:r="http://schemas.openxmlformats.org/officeDocument/2006/relationships" xmlns:p="http://schemas.openxmlformats.org/presentationml/2006/main">
-  <p:cSld>
-    <p:spTree>
-      <p:nvGrpSpPr>
-        <p:cNvPr id="1" name="">
-          <a:extLst>
-            <a:ext uri="{FF2B5EF4-FFF2-40B4-BE49-F238E27FC236}">
-              <a16:creationId xmlns:a16="http://schemas.microsoft.com/office/drawing/2014/main" id="{BD1A65E2-C284-83F6-6074-CCFEF74CE87A}"/>
-            </a:ext>
-          </a:extLst>
-        </p:cNvPr>
-        <p:cNvGrpSpPr/>
-        <p:nvPr/>
-      </p:nvGrpSpPr>
-      <p:grpSpPr>
-        <a:xfrm>
-          <a:off x="0" y="0"/>
-          <a:ext cx="0" cy="0"/>
-          <a:chOff x="0" y="0"/>
-          <a:chExt cx="0" cy="0"/>
-        </a:xfrm>
-      </p:grpSpPr>
-      <p:pic>
-        <p:nvPicPr>
-          <p:cNvPr id="5" name="Content Placeholder 4">
-            <a:extLst>
-              <a:ext uri="{FF2B5EF4-FFF2-40B4-BE49-F238E27FC236}">
-                <a16:creationId xmlns:a16="http://schemas.microsoft.com/office/drawing/2014/main" id="{B77B7C33-3931-334D-F5F0-51578F602770}"/>
-              </a:ext>
-            </a:extLst>
-          </p:cNvPr>
-          <p:cNvPicPr>
-            <a:picLocks noGrp="1" noChangeAspect="1"/>
-          </p:cNvPicPr>
-          <p:nvPr>
-            <p:ph idx="1"/>
-          </p:nvPr>
-        </p:nvPicPr>
-        <p:blipFill>
-          <a:blip r:embed="rId2"/>
-          <a:stretch>
-            <a:fillRect/>
-          </a:stretch>
-        </p:blipFill>
-        <p:spPr>
-          <a:xfrm>
-            <a:off x="1317812" y="1782123"/>
-            <a:ext cx="3872753" cy="4242088"/>
-          </a:xfrm>
-        </p:spPr>
-      </p:pic>
-      <p:sp>
-        <p:nvSpPr>
-          <p:cNvPr id="3" name="Title 2">
-            <a:extLst>
-              <a:ext uri="{FF2B5EF4-FFF2-40B4-BE49-F238E27FC236}">
-                <a16:creationId xmlns:a16="http://schemas.microsoft.com/office/drawing/2014/main" id="{6A4F7E4E-1303-88AC-B630-42D669AF1547}"/>
-              </a:ext>
-            </a:extLst>
-          </p:cNvPr>
-          <p:cNvSpPr>
-            <a:spLocks noGrp="1"/>
-          </p:cNvSpPr>
-          <p:nvPr>
-            <p:ph type="title"/>
-          </p:nvPr>
-        </p:nvSpPr>
-        <p:spPr/>
-        <p:txBody>
-          <a:bodyPr/>
-          <a:lstStyle/>
-          <a:p>
-            <a:r>
-              <a:rPr lang="en-US" dirty="0"/>
-              <a:t>Solving Linear Regression Using The Gradient Descent Method</a:t>
-            </a:r>
-          </a:p>
-        </p:txBody>
-      </p:sp>
-      <p:pic>
-        <p:nvPicPr>
-          <p:cNvPr id="7" name="Picture 6" descr="A graph of a function&#10;&#10;AI-generated content may be incorrect.">
-            <a:extLst>
-              <a:ext uri="{FF2B5EF4-FFF2-40B4-BE49-F238E27FC236}">
-                <a16:creationId xmlns:a16="http://schemas.microsoft.com/office/drawing/2014/main" id="{D41F736F-AF01-4029-F291-F1741828EA3C}"/>
-              </a:ext>
-            </a:extLst>
-          </p:cNvPr>
-          <p:cNvPicPr>
-            <a:picLocks noChangeAspect="1"/>
-          </p:cNvPicPr>
-          <p:nvPr/>
-        </p:nvPicPr>
-        <p:blipFill>
-          <a:blip r:embed="rId3">
-            <a:extLst>
-              <a:ext uri="{28A0092B-C50C-407E-A947-70E740481C1C}">
-                <a14:useLocalDpi xmlns:a14="http://schemas.microsoft.com/office/drawing/2010/main" val="0"/>
-              </a:ext>
-            </a:extLst>
-          </a:blip>
-          <a:stretch>
-            <a:fillRect/>
-          </a:stretch>
-        </p:blipFill>
-        <p:spPr>
-          <a:xfrm>
-            <a:off x="5346290" y="1717698"/>
-            <a:ext cx="6110568" cy="4888454"/>
-          </a:xfrm>
-          <a:prstGeom prst="rect">
-            <a:avLst/>
-          </a:prstGeom>
-        </p:spPr>
-      </p:pic>
-      <p:pic>
-        <p:nvPicPr>
           <p:cNvPr id="8" name="Picture 2" descr="Why Use Python? - Full Stack Python">
-            <a:hlinkClick r:id="rId4"/>
+            <a:hlinkClick r:id="rId2"/>
             <a:extLst>
               <a:ext uri="{FF2B5EF4-FFF2-40B4-BE49-F238E27FC236}">
                 <a16:creationId xmlns:a16="http://schemas.microsoft.com/office/drawing/2014/main" id="{D4AE6193-CCD4-99C8-A300-F96A67CCB423}"/>
@@ -6386,7 +8033,7 @@
           <p:nvPr/>
         </p:nvPicPr>
         <p:blipFill>
-          <a:blip r:embed="rId5">
+          <a:blip r:embed="rId3">
             <a:extLst>
               <a:ext uri="{28A0092B-C50C-407E-A947-70E740481C1C}">
                 <a14:useLocalDpi xmlns:a14="http://schemas.microsoft.com/office/drawing/2010/main" val="0"/>
@@ -6421,7 +8068,7 @@
     </p:spTree>
     <p:extLst>
       <p:ext uri="{BB962C8B-B14F-4D97-AF65-F5344CB8AC3E}">
-        <p14:creationId xmlns:p14="http://schemas.microsoft.com/office/powerpoint/2010/main" val="538252582"/>
+        <p14:creationId xmlns:p14="http://schemas.microsoft.com/office/powerpoint/2010/main" val="993140073"/>
       </p:ext>
     </p:extLst>
   </p:cSld>
@@ -6431,7 +8078,7 @@
 </p:sld>
 </file>
 
-<file path=ppt/slides/slide17.xml><?xml version="1.0" encoding="utf-8"?>
+<file path=ppt/slides/slide16.xml><?xml version="1.0" encoding="utf-8"?>
 <p:sld xmlns:a="http://schemas.openxmlformats.org/drawingml/2006/main" xmlns:r="http://schemas.openxmlformats.org/officeDocument/2006/relationships" xmlns:p="http://schemas.openxmlformats.org/presentationml/2006/main">
   <p:cSld>
     <p:spTree>
@@ -6439,7 +8086,7 @@
         <p:cNvPr id="1" name="">
           <a:extLst>
             <a:ext uri="{FF2B5EF4-FFF2-40B4-BE49-F238E27FC236}">
-              <a16:creationId xmlns:a16="http://schemas.microsoft.com/office/drawing/2014/main" id="{D27CBF25-F52F-532E-A535-7A7D707482E4}"/>
+              <a16:creationId xmlns:a16="http://schemas.microsoft.com/office/drawing/2014/main" id="{416E036A-7A6F-BB7C-66CD-BA1133D861A6}"/>
             </a:ext>
           </a:extLst>
         </p:cNvPr>
@@ -6456,10 +8103,10 @@
       </p:grpSpPr>
       <p:sp>
         <p:nvSpPr>
-          <p:cNvPr id="2" name="Content Placeholder 1">
-            <a:extLst>
-              <a:ext uri="{FF2B5EF4-FFF2-40B4-BE49-F238E27FC236}">
-                <a16:creationId xmlns:a16="http://schemas.microsoft.com/office/drawing/2014/main" id="{D6A166C5-B6FB-3038-2293-415E4C7D22E6}"/>
+          <p:cNvPr id="3" name="Title 2">
+            <a:extLst>
+              <a:ext uri="{FF2B5EF4-FFF2-40B4-BE49-F238E27FC236}">
+                <a16:creationId xmlns:a16="http://schemas.microsoft.com/office/drawing/2014/main" id="{67DBC383-8B40-EB48-75A5-7ABA05DD62AB}"/>
               </a:ext>
             </a:extLst>
           </p:cNvPr>
@@ -6467,46 +8114,153 @@
             <a:spLocks noGrp="1"/>
           </p:cNvSpPr>
           <p:nvPr>
+            <p:ph type="title"/>
+          </p:nvPr>
+        </p:nvSpPr>
+        <p:spPr/>
+        <p:txBody>
+          <a:bodyPr/>
+          <a:lstStyle/>
+          <a:p>
+            <a:r>
+              <a:rPr lang="en-US" dirty="0"/>
+              <a:t>Evaluation Metrics</a:t>
+            </a:r>
+          </a:p>
+        </p:txBody>
+      </p:sp>
+      <p:pic>
+        <p:nvPicPr>
+          <p:cNvPr id="1026" name="Picture 2" descr="Regression Model Evaluation Metrics In Depth | by Fraidoon Omarzai | Medium">
+            <a:extLst>
+              <a:ext uri="{FF2B5EF4-FFF2-40B4-BE49-F238E27FC236}">
+                <a16:creationId xmlns:a16="http://schemas.microsoft.com/office/drawing/2014/main" id="{472203F4-3B29-5BC9-16A9-2A35FBB2DE1E}"/>
+              </a:ext>
+            </a:extLst>
+          </p:cNvPr>
+          <p:cNvPicPr>
+            <a:picLocks noGrp="1" noChangeAspect="1" noChangeArrowheads="1"/>
+          </p:cNvPicPr>
+          <p:nvPr>
             <p:ph idx="1"/>
           </p:nvPr>
-        </p:nvSpPr>
-        <p:spPr>
+        </p:nvPicPr>
+        <p:blipFill>
+          <a:blip r:embed="rId2">
+            <a:extLst>
+              <a:ext uri="{28A0092B-C50C-407E-A947-70E740481C1C}">
+                <a14:useLocalDpi xmlns:a14="http://schemas.microsoft.com/office/drawing/2010/main" val="0"/>
+              </a:ext>
+            </a:extLst>
+          </a:blip>
+          <a:srcRect/>
+          <a:stretch>
+            <a:fillRect/>
+          </a:stretch>
+        </p:blipFill>
+        <p:spPr bwMode="auto">
           <a:xfrm>
-            <a:off x="838200" y="1633491"/>
-            <a:ext cx="5887065" cy="4498368"/>
+            <a:off x="838200" y="1727200"/>
+            <a:ext cx="6239170" cy="5130800"/>
           </a:xfrm>
+          <a:prstGeom prst="rect">
+            <a:avLst/>
+          </a:prstGeom>
+          <a:noFill/>
+          <a:extLst>
+            <a:ext uri="{909E8E84-426E-40DD-AFC4-6F175D3DCCD1}">
+              <a14:hiddenFill xmlns:a14="http://schemas.microsoft.com/office/drawing/2010/main">
+                <a:solidFill>
+                  <a:srgbClr val="FFFFFF"/>
+                </a:solidFill>
+              </a14:hiddenFill>
+            </a:ext>
+          </a:extLst>
         </p:spPr>
-        <p:txBody>
-          <a:bodyPr>
-            <a:normAutofit fontScale="92500" lnSpcReduction="20000"/>
-          </a:bodyPr>
-          <a:lstStyle/>
-          <a:p>
-            <a:pPr marL="0" indent="0">
-              <a:buNone/>
-            </a:pPr>
-            <a:r>
-              <a:rPr lang="en-US" dirty="0"/>
-              <a:t>Linear regression is a powerful tool for understanding and predicting the behavior of a variable, however, it needs to meet a few conditions in order to be accurate and dependable solutions. </a:t>
-            </a:r>
-          </a:p>
-          <a:p>
-            <a:pPr marL="0" indent="0">
-              <a:buNone/>
-            </a:pPr>
-            <a:r>
-              <a:rPr lang="en-US" dirty="0"/>
-              <a:t>1. Linearity: The independent and dependent variables have a linear relationship with one another. This implies that changes in the dependent variable follow those in the independent variable(s) in a linear fashion. This means that there should be a straight line that can be drawn through the data points. If the relationship is not linear, then linear regression will not be an accurate model.</a:t>
-            </a:r>
-          </a:p>
-        </p:txBody>
-      </p:sp>
+      </p:pic>
+      <p:pic>
+        <p:nvPicPr>
+          <p:cNvPr id="1028" name="Picture 4" descr="Common Evaluation Metrics for Regression Analysis | by Scott Duda | Medium">
+            <a:extLst>
+              <a:ext uri="{FF2B5EF4-FFF2-40B4-BE49-F238E27FC236}">
+                <a16:creationId xmlns:a16="http://schemas.microsoft.com/office/drawing/2014/main" id="{6C0CAFAA-CC2C-9D22-F5AA-318CBE3BF319}"/>
+              </a:ext>
+            </a:extLst>
+          </p:cNvPr>
+          <p:cNvPicPr>
+            <a:picLocks noChangeAspect="1" noChangeArrowheads="1"/>
+          </p:cNvPicPr>
+          <p:nvPr/>
+        </p:nvPicPr>
+        <p:blipFill>
+          <a:blip r:embed="rId3">
+            <a:extLst>
+              <a:ext uri="{28A0092B-C50C-407E-A947-70E740481C1C}">
+                <a14:useLocalDpi xmlns:a14="http://schemas.microsoft.com/office/drawing/2010/main" val="0"/>
+              </a:ext>
+            </a:extLst>
+          </a:blip>
+          <a:srcRect/>
+          <a:stretch>
+            <a:fillRect/>
+          </a:stretch>
+        </p:blipFill>
+        <p:spPr bwMode="auto">
+          <a:xfrm>
+            <a:off x="7886904" y="2780042"/>
+            <a:ext cx="3466896" cy="2378554"/>
+          </a:xfrm>
+          <a:prstGeom prst="rect">
+            <a:avLst/>
+          </a:prstGeom>
+          <a:noFill/>
+          <a:extLst>
+            <a:ext uri="{909E8E84-426E-40DD-AFC4-6F175D3DCCD1}">
+              <a14:hiddenFill xmlns:a14="http://schemas.microsoft.com/office/drawing/2010/main">
+                <a:solidFill>
+                  <a:srgbClr val="FFFFFF"/>
+                </a:solidFill>
+              </a14:hiddenFill>
+            </a:ext>
+          </a:extLst>
+        </p:spPr>
+      </p:pic>
+    </p:spTree>
+    <p:extLst>
+      <p:ext uri="{BB962C8B-B14F-4D97-AF65-F5344CB8AC3E}">
+        <p14:creationId xmlns:p14="http://schemas.microsoft.com/office/powerpoint/2010/main" val="294838801"/>
+      </p:ext>
+    </p:extLst>
+  </p:cSld>
+  <p:clrMapOvr>
+    <a:masterClrMapping/>
+  </p:clrMapOvr>
+</p:sld>
+</file>
+
+<file path=ppt/slides/slide17.xml><?xml version="1.0" encoding="utf-8"?>
+<p:sld xmlns:a="http://schemas.openxmlformats.org/drawingml/2006/main" xmlns:r="http://schemas.openxmlformats.org/officeDocument/2006/relationships" xmlns:p="http://schemas.openxmlformats.org/presentationml/2006/main">
+  <p:cSld>
+    <p:spTree>
+      <p:nvGrpSpPr>
+        <p:cNvPr id="1" name=""/>
+        <p:cNvGrpSpPr/>
+        <p:nvPr/>
+      </p:nvGrpSpPr>
+      <p:grpSpPr>
+        <a:xfrm>
+          <a:off x="0" y="0"/>
+          <a:ext cx="0" cy="0"/>
+          <a:chOff x="0" y="0"/>
+          <a:chExt cx="0" cy="0"/>
+        </a:xfrm>
+      </p:grpSpPr>
       <p:sp>
         <p:nvSpPr>
-          <p:cNvPr id="3" name="Title 2">
-            <a:extLst>
-              <a:ext uri="{FF2B5EF4-FFF2-40B4-BE49-F238E27FC236}">
-                <a16:creationId xmlns:a16="http://schemas.microsoft.com/office/drawing/2014/main" id="{4699A8A2-3830-72B5-1A7A-82D011352862}"/>
+          <p:cNvPr id="2" name="Title 1">
+            <a:extLst>
+              <a:ext uri="{FF2B5EF4-FFF2-40B4-BE49-F238E27FC236}">
+                <a16:creationId xmlns:a16="http://schemas.microsoft.com/office/drawing/2014/main" id="{FF1B4821-12CC-C73F-FEEF-457E351A61EF}"/>
               </a:ext>
             </a:extLst>
           </p:cNvPr>
@@ -6526,45 +8280,74 @@
           <a:p>
             <a:r>
               <a:rPr lang="en-US" dirty="0"/>
-              <a:t>Assumptions of Simple Linear Regression</a:t>
-            </a:r>
+              <a:t>Assumptions of Linear Regression</a:t>
+            </a:r>
+            <a:endParaRPr lang="en-US" sz="2800" dirty="0"/>
           </a:p>
         </p:txBody>
       </p:sp>
-      <p:pic>
-        <p:nvPicPr>
-          <p:cNvPr id="6" name="Picture 5">
-            <a:extLst>
-              <a:ext uri="{FF2B5EF4-FFF2-40B4-BE49-F238E27FC236}">
-                <a16:creationId xmlns:a16="http://schemas.microsoft.com/office/drawing/2014/main" id="{1200D47E-397F-9E31-C30B-EE0822713306}"/>
-              </a:ext>
-            </a:extLst>
-          </p:cNvPr>
-          <p:cNvPicPr>
-            <a:picLocks noChangeAspect="1"/>
-          </p:cNvPicPr>
-          <p:nvPr/>
-        </p:nvPicPr>
-        <p:blipFill>
-          <a:blip r:embed="rId2"/>
-          <a:stretch>
-            <a:fillRect/>
-          </a:stretch>
-        </p:blipFill>
-        <p:spPr>
-          <a:xfrm>
-            <a:off x="6893165" y="2775317"/>
-            <a:ext cx="4460635" cy="3499977"/>
-          </a:xfrm>
-          <a:prstGeom prst="rect">
-            <a:avLst/>
-          </a:prstGeom>
-        </p:spPr>
-      </p:pic>
+      <p:sp>
+        <p:nvSpPr>
+          <p:cNvPr id="3" name="Content Placeholder 2">
+            <a:extLst>
+              <a:ext uri="{FF2B5EF4-FFF2-40B4-BE49-F238E27FC236}">
+                <a16:creationId xmlns:a16="http://schemas.microsoft.com/office/drawing/2014/main" id="{DDB8F6FE-FF12-0BA5-D224-71F068E4DF88}"/>
+              </a:ext>
+            </a:extLst>
+          </p:cNvPr>
+          <p:cNvSpPr>
+            <a:spLocks noGrp="1"/>
+          </p:cNvSpPr>
+          <p:nvPr>
+            <p:ph idx="1"/>
+          </p:nvPr>
+        </p:nvSpPr>
+        <p:spPr/>
+        <p:txBody>
+          <a:bodyPr>
+            <a:normAutofit/>
+          </a:bodyPr>
+          <a:lstStyle/>
+          <a:p>
+            <a:pPr marL="0" indent="0">
+              <a:buNone/>
+            </a:pPr>
+            <a:r>
+              <a:rPr lang="en-US" b="1" dirty="0"/>
+              <a:t>1. Linearity</a:t>
+            </a:r>
+          </a:p>
+          <a:p>
+            <a:r>
+              <a:rPr lang="en-US" dirty="0"/>
+              <a:t>The relationship between the independent variables (predictors) and the dependent variable (response) should be linear. </a:t>
+            </a:r>
+          </a:p>
+          <a:p>
+            <a:r>
+              <a:rPr lang="en-US" dirty="0"/>
+              <a:t>This means that the change in the dependent variable is proportional to the change in the independent variable.</a:t>
+            </a:r>
+          </a:p>
+          <a:p>
+            <a:pPr marL="0" indent="0">
+              <a:buNone/>
+            </a:pPr>
+            <a:r>
+              <a:rPr lang="en-US" b="1" dirty="0"/>
+              <a:t>Example</a:t>
+            </a:r>
+            <a:r>
+              <a:rPr lang="en-US" dirty="0"/>
+              <a:t>: If you are predicting house prices (dependent variable) based on the size of the house (independent variable), a linear relationship implies that each additional square foot of the house size increases the price by a constant amount.</a:t>
+            </a:r>
+          </a:p>
+        </p:txBody>
+      </p:sp>
     </p:spTree>
     <p:extLst>
       <p:ext uri="{BB962C8B-B14F-4D97-AF65-F5344CB8AC3E}">
-        <p14:creationId xmlns:p14="http://schemas.microsoft.com/office/powerpoint/2010/main" val="2067025602"/>
+        <p14:creationId xmlns:p14="http://schemas.microsoft.com/office/powerpoint/2010/main" val="148099094"/>
       </p:ext>
     </p:extLst>
   </p:cSld>
@@ -6582,7 +8365,7 @@
         <p:cNvPr id="1" name="">
           <a:extLst>
             <a:ext uri="{FF2B5EF4-FFF2-40B4-BE49-F238E27FC236}">
-              <a16:creationId xmlns:a16="http://schemas.microsoft.com/office/drawing/2014/main" id="{55E7488D-378D-04DB-274E-8070AF77B2F8}"/>
+              <a16:creationId xmlns:a16="http://schemas.microsoft.com/office/drawing/2014/main" id="{DEB83714-6F7E-3A96-C0A8-B864075CE649}"/>
             </a:ext>
           </a:extLst>
         </p:cNvPr>
@@ -6599,10 +8382,41 @@
       </p:grpSpPr>
       <p:sp>
         <p:nvSpPr>
-          <p:cNvPr id="2" name="Content Placeholder 1">
-            <a:extLst>
-              <a:ext uri="{FF2B5EF4-FFF2-40B4-BE49-F238E27FC236}">
-                <a16:creationId xmlns:a16="http://schemas.microsoft.com/office/drawing/2014/main" id="{E4639E90-EC50-1142-F307-1730254FA4B7}"/>
+          <p:cNvPr id="2" name="Title 1">
+            <a:extLst>
+              <a:ext uri="{FF2B5EF4-FFF2-40B4-BE49-F238E27FC236}">
+                <a16:creationId xmlns:a16="http://schemas.microsoft.com/office/drawing/2014/main" id="{F30319EF-655A-876D-A20D-955157C7420B}"/>
+              </a:ext>
+            </a:extLst>
+          </p:cNvPr>
+          <p:cNvSpPr>
+            <a:spLocks noGrp="1"/>
+          </p:cNvSpPr>
+          <p:nvPr>
+            <p:ph type="title"/>
+          </p:nvPr>
+        </p:nvSpPr>
+        <p:spPr/>
+        <p:txBody>
+          <a:bodyPr>
+            <a:normAutofit/>
+          </a:bodyPr>
+          <a:lstStyle/>
+          <a:p>
+            <a:r>
+              <a:rPr lang="en-US" dirty="0"/>
+              <a:t>Assumptions of Linear Regression</a:t>
+            </a:r>
+            <a:endParaRPr lang="en-US" sz="2800" dirty="0"/>
+          </a:p>
+        </p:txBody>
+      </p:sp>
+      <p:sp>
+        <p:nvSpPr>
+          <p:cNvPr id="3" name="Content Placeholder 2">
+            <a:extLst>
+              <a:ext uri="{FF2B5EF4-FFF2-40B4-BE49-F238E27FC236}">
+                <a16:creationId xmlns:a16="http://schemas.microsoft.com/office/drawing/2014/main" id="{83ED29CA-FE26-6777-1F1A-6F46BCEEB9BB}"/>
               </a:ext>
             </a:extLst>
           </p:cNvPr>
@@ -6616,12 +8430,12 @@
         <p:spPr>
           <a:xfrm>
             <a:off x="838200" y="1633491"/>
-            <a:ext cx="10515600" cy="2777144"/>
+            <a:ext cx="10752438" cy="5131294"/>
           </a:xfrm>
         </p:spPr>
         <p:txBody>
           <a:bodyPr>
-            <a:normAutofit fontScale="92500" lnSpcReduction="20000"/>
+            <a:normAutofit/>
           </a:bodyPr>
           <a:lstStyle/>
           <a:p>
@@ -6629,116 +8443,149 @@
               <a:buNone/>
             </a:pPr>
             <a:r>
-              <a:rPr lang="en-US" dirty="0"/>
-              <a:t>2. Independence: The observations in the dataset must be independent, meaning the value of the dependent variable for one observation should not be influenced by the value of another. If this condition is violated, linear regression may produce inaccurate results.</a:t>
-            </a:r>
-          </a:p>
-          <a:p>
-            <a:pPr marL="0" indent="0">
-              <a:buNone/>
-            </a:pPr>
-            <a:r>
-              <a:rPr lang="en-US" dirty="0"/>
-              <a:t>3. Homoscedasticity: The variance of the errors should be constant across all levels of the independent variable(s). This means that changes in the independent variable(s) should not affect the spread of the errors. If the error variance is not constant (heteroscedasticity), the linear regression model may not be reliable.</a:t>
-            </a:r>
-          </a:p>
-          <a:p>
-            <a:endParaRPr lang="en-US" dirty="0"/>
-          </a:p>
-        </p:txBody>
-      </p:sp>
-      <p:sp>
-        <p:nvSpPr>
-          <p:cNvPr id="3" name="Title 2">
-            <a:extLst>
-              <a:ext uri="{FF2B5EF4-FFF2-40B4-BE49-F238E27FC236}">
-                <a16:creationId xmlns:a16="http://schemas.microsoft.com/office/drawing/2014/main" id="{9CE14663-F603-8E9B-380B-9F29A5C89810}"/>
-              </a:ext>
-            </a:extLst>
-          </p:cNvPr>
-          <p:cNvSpPr>
-            <a:spLocks noGrp="1"/>
-          </p:cNvSpPr>
-          <p:nvPr>
-            <p:ph type="title"/>
-          </p:nvPr>
-        </p:nvSpPr>
-        <p:spPr/>
-        <p:txBody>
-          <a:bodyPr/>
-          <a:lstStyle/>
-          <a:p>
-            <a:r>
-              <a:rPr lang="en-US" dirty="0"/>
-              <a:t>Assumptions of Simple Linear Regression</a:t>
+              <a:rPr lang="en-US" sz="2400" b="1" dirty="0"/>
+              <a:t>How to Test Linearity</a:t>
+            </a:r>
+            <a:r>
+              <a:rPr lang="en-US" sz="2400" dirty="0"/>
+              <a:t>: Plot the residuals vs. predicted using a scatter plot, look for a random distribution (no patterns).</a:t>
             </a:r>
           </a:p>
         </p:txBody>
       </p:sp>
       <p:pic>
         <p:nvPicPr>
-          <p:cNvPr id="5" name="Picture 4">
-            <a:extLst>
-              <a:ext uri="{FF2B5EF4-FFF2-40B4-BE49-F238E27FC236}">
-                <a16:creationId xmlns:a16="http://schemas.microsoft.com/office/drawing/2014/main" id="{A8CF5184-C11D-A684-D4E9-FA1F42D7D64D}"/>
+          <p:cNvPr id="7170" name="Picture 2" descr="A Basic Guide to Testing the Assumptions of Linear Regression in R">
+            <a:extLst>
+              <a:ext uri="{FF2B5EF4-FFF2-40B4-BE49-F238E27FC236}">
+                <a16:creationId xmlns:a16="http://schemas.microsoft.com/office/drawing/2014/main" id="{AF89B1EB-4AD3-6E64-5A9B-9A00BD5EF2DB}"/>
               </a:ext>
             </a:extLst>
           </p:cNvPr>
           <p:cNvPicPr>
-            <a:picLocks noChangeAspect="1"/>
+            <a:picLocks noChangeAspect="1" noChangeArrowheads="1"/>
           </p:cNvPicPr>
           <p:nvPr/>
         </p:nvPicPr>
         <p:blipFill>
-          <a:blip r:embed="rId2"/>
+          <a:blip r:embed="rId2">
+            <a:extLst>
+              <a:ext uri="{28A0092B-C50C-407E-A947-70E740481C1C}">
+                <a14:useLocalDpi xmlns:a14="http://schemas.microsoft.com/office/drawing/2010/main" val="0"/>
+              </a:ext>
+            </a:extLst>
+          </a:blip>
+          <a:srcRect/>
           <a:stretch>
             <a:fillRect/>
           </a:stretch>
         </p:blipFill>
-        <p:spPr>
+        <p:spPr bwMode="auto">
           <a:xfrm>
-            <a:off x="2616247" y="4467962"/>
-            <a:ext cx="3479753" cy="2180382"/>
+            <a:off x="6023882" y="2207220"/>
+            <a:ext cx="4633295" cy="3049649"/>
           </a:xfrm>
           <a:prstGeom prst="rect">
             <a:avLst/>
           </a:prstGeom>
+          <a:noFill/>
+          <a:extLst>
+            <a:ext uri="{909E8E84-426E-40DD-AFC4-6F175D3DCCD1}">
+              <a14:hiddenFill xmlns:a14="http://schemas.microsoft.com/office/drawing/2010/main">
+                <a:solidFill>
+                  <a:srgbClr val="FFFFFF"/>
+                </a:solidFill>
+              </a14:hiddenFill>
+            </a:ext>
+          </a:extLst>
         </p:spPr>
       </p:pic>
       <p:pic>
         <p:nvPicPr>
-          <p:cNvPr id="7" name="Picture 6">
-            <a:extLst>
-              <a:ext uri="{FF2B5EF4-FFF2-40B4-BE49-F238E27FC236}">
-                <a16:creationId xmlns:a16="http://schemas.microsoft.com/office/drawing/2014/main" id="{11CD6987-E88A-6289-EAA7-4A698B7CE9FF}"/>
+          <p:cNvPr id="7172" name="Picture 4" descr="A Basic Guide to Testing the Assumptions of Linear Regression in R">
+            <a:extLst>
+              <a:ext uri="{FF2B5EF4-FFF2-40B4-BE49-F238E27FC236}">
+                <a16:creationId xmlns:a16="http://schemas.microsoft.com/office/drawing/2014/main" id="{B620BAD4-C68B-A239-E964-52B8908CD0E4}"/>
               </a:ext>
             </a:extLst>
           </p:cNvPr>
           <p:cNvPicPr>
-            <a:picLocks noChangeAspect="1"/>
+            <a:picLocks noChangeAspect="1" noChangeArrowheads="1"/>
           </p:cNvPicPr>
           <p:nvPr/>
         </p:nvPicPr>
         <p:blipFill>
-          <a:blip r:embed="rId3"/>
+          <a:blip r:embed="rId3">
+            <a:extLst>
+              <a:ext uri="{28A0092B-C50C-407E-A947-70E740481C1C}">
+                <a14:useLocalDpi xmlns:a14="http://schemas.microsoft.com/office/drawing/2010/main" val="0"/>
+              </a:ext>
+            </a:extLst>
+          </a:blip>
+          <a:srcRect/>
           <a:stretch>
             <a:fillRect/>
           </a:stretch>
         </p:blipFill>
-        <p:spPr>
+        <p:spPr bwMode="auto">
           <a:xfrm>
-            <a:off x="6336600" y="4260088"/>
-            <a:ext cx="3633052" cy="2550765"/>
+            <a:off x="693964" y="2364714"/>
+            <a:ext cx="4876800" cy="2771775"/>
           </a:xfrm>
           <a:prstGeom prst="rect">
             <a:avLst/>
           </a:prstGeom>
+          <a:noFill/>
+          <a:extLst>
+            <a:ext uri="{909E8E84-426E-40DD-AFC4-6F175D3DCCD1}">
+              <a14:hiddenFill xmlns:a14="http://schemas.microsoft.com/office/drawing/2010/main">
+                <a:solidFill>
+                  <a:srgbClr val="FFFFFF"/>
+                </a:solidFill>
+              </a14:hiddenFill>
+            </a:ext>
+          </a:extLst>
         </p:spPr>
       </p:pic>
+      <p:sp>
+        <p:nvSpPr>
+          <p:cNvPr id="7" name="TextBox 6">
+            <a:extLst>
+              <a:ext uri="{FF2B5EF4-FFF2-40B4-BE49-F238E27FC236}">
+                <a16:creationId xmlns:a16="http://schemas.microsoft.com/office/drawing/2014/main" id="{0550F4B6-EF46-BA8E-B021-A9DD446047EA}"/>
+              </a:ext>
+            </a:extLst>
+          </p:cNvPr>
+          <p:cNvSpPr txBox="1"/>
+          <p:nvPr/>
+        </p:nvSpPr>
+        <p:spPr>
+          <a:xfrm>
+            <a:off x="488092" y="5256869"/>
+            <a:ext cx="11452654" cy="1569660"/>
+          </a:xfrm>
+          <a:prstGeom prst="rect">
+            <a:avLst/>
+          </a:prstGeom>
+          <a:noFill/>
+        </p:spPr>
+        <p:txBody>
+          <a:bodyPr wrap="square">
+            <a:spAutoFit/>
+          </a:bodyPr>
+          <a:lstStyle/>
+          <a:p>
+            <a:r>
+              <a:rPr lang="en-US" sz="2400" dirty="0"/>
+              <a:t>To check if the relationship between the independent variable (Size) and the dependent variable (Price) is linear, we plot the residuals against the fitted values and look for patterns in the residuals, a random scatter indicates a linear relationship while curves or trends suggest a non-linear relationship.</a:t>
+            </a:r>
+          </a:p>
+        </p:txBody>
+      </p:sp>
     </p:spTree>
     <p:extLst>
       <p:ext uri="{BB962C8B-B14F-4D97-AF65-F5344CB8AC3E}">
-        <p14:creationId xmlns:p14="http://schemas.microsoft.com/office/powerpoint/2010/main" val="1559017199"/>
+        <p14:creationId xmlns:p14="http://schemas.microsoft.com/office/powerpoint/2010/main" val="1270641495"/>
       </p:ext>
     </p:extLst>
   </p:cSld>
@@ -6756,7 +8603,7 @@
         <p:cNvPr id="1" name="">
           <a:extLst>
             <a:ext uri="{FF2B5EF4-FFF2-40B4-BE49-F238E27FC236}">
-              <a16:creationId xmlns:a16="http://schemas.microsoft.com/office/drawing/2014/main" id="{5900C09F-F48B-B9D4-D4BA-03E1293B4B46}"/>
+              <a16:creationId xmlns:a16="http://schemas.microsoft.com/office/drawing/2014/main" id="{4C046215-163A-44DA-3525-DE4C24E5986B}"/>
             </a:ext>
           </a:extLst>
         </p:cNvPr>
@@ -6773,48 +8620,10 @@
       </p:grpSpPr>
       <p:sp>
         <p:nvSpPr>
-          <p:cNvPr id="2" name="Content Placeholder 1">
-            <a:extLst>
-              <a:ext uri="{FF2B5EF4-FFF2-40B4-BE49-F238E27FC236}">
-                <a16:creationId xmlns:a16="http://schemas.microsoft.com/office/drawing/2014/main" id="{AAD33A44-4738-B463-10DB-B09ADF5D976F}"/>
-              </a:ext>
-            </a:extLst>
-          </p:cNvPr>
-          <p:cNvSpPr>
-            <a:spLocks noGrp="1"/>
-          </p:cNvSpPr>
-          <p:nvPr>
-            <p:ph idx="1"/>
-          </p:nvPr>
-        </p:nvSpPr>
-        <p:spPr>
-          <a:xfrm>
-            <a:off x="838201" y="1633491"/>
-            <a:ext cx="10515600" cy="1548980"/>
-          </a:xfrm>
-        </p:spPr>
-        <p:txBody>
-          <a:bodyPr>
-            <a:normAutofit lnSpcReduction="10000"/>
-          </a:bodyPr>
-          <a:lstStyle/>
-          <a:p>
-            <a:pPr marL="0" indent="0">
-              <a:buNone/>
-            </a:pPr>
-            <a:r>
-              <a:rPr lang="en-US" dirty="0"/>
-              <a:t>4. Normality: The residuals should be normally distributed. This means that the residuals should follow a bell-shaped curve. If the residuals are not normally distributed, then linear regression will not be an accurate model.</a:t>
-            </a:r>
-          </a:p>
-        </p:txBody>
-      </p:sp>
-      <p:sp>
-        <p:nvSpPr>
-          <p:cNvPr id="3" name="Title 2">
-            <a:extLst>
-              <a:ext uri="{FF2B5EF4-FFF2-40B4-BE49-F238E27FC236}">
-                <a16:creationId xmlns:a16="http://schemas.microsoft.com/office/drawing/2014/main" id="{975AB37D-8C19-77E5-43AF-90557368B563}"/>
+          <p:cNvPr id="2" name="Title 1">
+            <a:extLst>
+              <a:ext uri="{FF2B5EF4-FFF2-40B4-BE49-F238E27FC236}">
+                <a16:creationId xmlns:a16="http://schemas.microsoft.com/office/drawing/2014/main" id="{BDA07860-FC48-0655-7561-C5DEB28A03C8}"/>
               </a:ext>
             </a:extLst>
           </p:cNvPr>
@@ -6827,80 +8636,109 @@
         </p:nvSpPr>
         <p:spPr/>
         <p:txBody>
-          <a:bodyPr/>
+          <a:bodyPr>
+            <a:normAutofit/>
+          </a:bodyPr>
           <a:lstStyle/>
           <a:p>
             <a:r>
               <a:rPr lang="en-US" dirty="0"/>
-              <a:t>Assumptions of Simple Linear Regression</a:t>
-            </a:r>
+              <a:t>Assumptions of Linear Regression</a:t>
+            </a:r>
+            <a:endParaRPr lang="en-US" sz="2800" dirty="0"/>
           </a:p>
         </p:txBody>
       </p:sp>
-      <p:pic>
-        <p:nvPicPr>
-          <p:cNvPr id="7" name="Picture 6">
-            <a:extLst>
-              <a:ext uri="{FF2B5EF4-FFF2-40B4-BE49-F238E27FC236}">
-                <a16:creationId xmlns:a16="http://schemas.microsoft.com/office/drawing/2014/main" id="{673162F8-4616-4609-2A8E-E1582A467BE4}"/>
-              </a:ext>
-            </a:extLst>
-          </p:cNvPr>
-          <p:cNvPicPr>
-            <a:picLocks noChangeAspect="1"/>
-          </p:cNvPicPr>
-          <p:nvPr/>
-        </p:nvPicPr>
-        <p:blipFill>
-          <a:blip r:embed="rId2"/>
-          <a:stretch>
-            <a:fillRect/>
-          </a:stretch>
-        </p:blipFill>
-        <p:spPr>
-          <a:xfrm>
-            <a:off x="1627094" y="3021106"/>
-            <a:ext cx="4806485" cy="3760694"/>
-          </a:xfrm>
-          <a:prstGeom prst="rect">
-            <a:avLst/>
-          </a:prstGeom>
-        </p:spPr>
-      </p:pic>
-      <p:pic>
-        <p:nvPicPr>
-          <p:cNvPr id="9" name="Picture 8">
-            <a:extLst>
-              <a:ext uri="{FF2B5EF4-FFF2-40B4-BE49-F238E27FC236}">
-                <a16:creationId xmlns:a16="http://schemas.microsoft.com/office/drawing/2014/main" id="{B7380879-9916-D124-76D4-6D34DE2471F7}"/>
-              </a:ext>
-            </a:extLst>
-          </p:cNvPr>
-          <p:cNvPicPr>
-            <a:picLocks noChangeAspect="1"/>
-          </p:cNvPicPr>
-          <p:nvPr/>
-        </p:nvPicPr>
-        <p:blipFill>
-          <a:blip r:embed="rId3"/>
-          <a:stretch>
-            <a:fillRect/>
-          </a:stretch>
-        </p:blipFill>
-        <p:spPr>
-          <a:xfrm>
-            <a:off x="6659395" y="3182471"/>
-            <a:ext cx="4468589" cy="3292326"/>
-          </a:xfrm>
-          <a:prstGeom prst="rect">
-            <a:avLst/>
-          </a:prstGeom>
-        </p:spPr>
-      </p:pic>
+      <p:sp>
+        <p:nvSpPr>
+          <p:cNvPr id="3" name="Content Placeholder 2">
+            <a:extLst>
+              <a:ext uri="{FF2B5EF4-FFF2-40B4-BE49-F238E27FC236}">
+                <a16:creationId xmlns:a16="http://schemas.microsoft.com/office/drawing/2014/main" id="{D33E66F3-8397-4994-28A4-1DCE141C618C}"/>
+              </a:ext>
+            </a:extLst>
+          </p:cNvPr>
+          <p:cNvSpPr>
+            <a:spLocks noGrp="1"/>
+          </p:cNvSpPr>
+          <p:nvPr>
+            <p:ph idx="1"/>
+          </p:nvPr>
+        </p:nvSpPr>
+        <p:spPr/>
+        <p:txBody>
+          <a:bodyPr>
+            <a:normAutofit fontScale="92500" lnSpcReduction="10000"/>
+          </a:bodyPr>
+          <a:lstStyle/>
+          <a:p>
+            <a:pPr marL="0" indent="0">
+              <a:buNone/>
+            </a:pPr>
+            <a:r>
+              <a:rPr lang="en-US" b="1" dirty="0"/>
+              <a:t>2. Independence</a:t>
+            </a:r>
+          </a:p>
+          <a:p>
+            <a:r>
+              <a:rPr lang="en-US" dirty="0"/>
+              <a:t>Observations should be independent of each other. </a:t>
+            </a:r>
+          </a:p>
+          <a:p>
+            <a:r>
+              <a:rPr lang="en-US" dirty="0"/>
+              <a:t>This means that the residuals (errors) should not be correlated across observations. </a:t>
+            </a:r>
+          </a:p>
+          <a:p>
+            <a:r>
+              <a:rPr lang="en-US" dirty="0"/>
+              <a:t>This assumption is important for the validity of standard statistical tests.</a:t>
+            </a:r>
+          </a:p>
+          <a:p>
+            <a:pPr marL="0" indent="0">
+              <a:buNone/>
+            </a:pPr>
+            <a:r>
+              <a:rPr lang="en-US" b="1" dirty="0"/>
+              <a:t>Example: </a:t>
+            </a:r>
+            <a:r>
+              <a:rPr lang="en-US" dirty="0"/>
+              <a:t>In a study measuring the effect of a new drug on blood pressure, each patient's measurement should be independent. If measurements from the same patient at different times are used, they are not independent.</a:t>
+            </a:r>
+          </a:p>
+          <a:p>
+            <a:pPr marL="0" indent="0">
+              <a:buNone/>
+            </a:pPr>
+            <a:r>
+              <a:rPr lang="en-US" b="1" dirty="0"/>
+              <a:t>How to Test</a:t>
+            </a:r>
+            <a:r>
+              <a:rPr lang="en-US" dirty="0"/>
+              <a:t>: Use the Durbin-Watson test to check for autocorrelation in residuals, particularly for time-series data. </a:t>
+            </a:r>
+          </a:p>
+          <a:p>
+            <a:pPr marL="0" indent="0">
+              <a:buNone/>
+            </a:pPr>
+            <a:r>
+              <a:rPr lang="en-US" dirty="0"/>
+              <a:t>This test calculates a test statistic (range 0-4). A value around 2 indicates no autocorrelation, values &lt;2 suggest positive autocorrelation, and &gt;2 indicate negative autocorrelation.</a:t>
+            </a:r>
+          </a:p>
+        </p:txBody>
+      </p:sp>
     </p:spTree>
     <p:extLst>
       <p:ext uri="{BB962C8B-B14F-4D97-AF65-F5344CB8AC3E}">
-        <p14:creationId xmlns:p14="http://schemas.microsoft.com/office/powerpoint/2010/main" val="2575217795"/>
+        <p14:creationId xmlns:p14="http://schemas.microsoft.com/office/powerpoint/2010/main" val="4114896152"/>
       </p:ext>
     </p:extLst>
   </p:cSld>
@@ -6952,14 +8790,14 @@
               <a:buNone/>
             </a:pPr>
             <a:r>
+              <a:rPr lang="en-US" b="1" dirty="0"/>
+              <a:t>What You'll Learn:</a:t>
+            </a:r>
+          </a:p>
+          <a:p>
+            <a:r>
               <a:rPr lang="en-US" dirty="0"/>
-              <a:t>What You'll Learn:</a:t>
-            </a:r>
-          </a:p>
-          <a:p>
-            <a:r>
-              <a:rPr lang="en-US" dirty="0"/>
-              <a:t>Introduce the concept of supervised learning</a:t>
+              <a:t>The concept of supervised learning</a:t>
             </a:r>
           </a:p>
           <a:p>
@@ -6976,8 +8814,12 @@
           </a:p>
           <a:p>
             <a:r>
+              <a:rPr lang="en-US"/>
+              <a:t>Best-fit line </a:t>
+            </a:r>
+            <a:r>
               <a:rPr lang="en-US" dirty="0"/>
-              <a:t>Best-fit line, hypothesis function, and OLS method</a:t>
+              <a:t>and OLS method</a:t>
             </a:r>
           </a:p>
           <a:p>
@@ -7066,7 +8908,7 @@
         <p:cNvPr id="1" name="">
           <a:extLst>
             <a:ext uri="{FF2B5EF4-FFF2-40B4-BE49-F238E27FC236}">
-              <a16:creationId xmlns:a16="http://schemas.microsoft.com/office/drawing/2014/main" id="{5FF87552-A00A-A567-4B58-79A70A4BA61B}"/>
+              <a16:creationId xmlns:a16="http://schemas.microsoft.com/office/drawing/2014/main" id="{F7B26F4E-5B57-8CFB-F8DC-DF550140A6C5}"/>
             </a:ext>
           </a:extLst>
         </p:cNvPr>
@@ -7083,72 +8925,10 @@
       </p:grpSpPr>
       <p:sp>
         <p:nvSpPr>
-          <p:cNvPr id="2" name="Content Placeholder 1">
-            <a:extLst>
-              <a:ext uri="{FF2B5EF4-FFF2-40B4-BE49-F238E27FC236}">
-                <a16:creationId xmlns:a16="http://schemas.microsoft.com/office/drawing/2014/main" id="{4E795974-C30C-A8F4-FC12-5BE5FE355A52}"/>
-              </a:ext>
-            </a:extLst>
-          </p:cNvPr>
-          <p:cNvSpPr>
-            <a:spLocks noGrp="1"/>
-          </p:cNvSpPr>
-          <p:nvPr>
-            <p:ph idx="1"/>
-          </p:nvPr>
-        </p:nvSpPr>
-        <p:spPr>
-          <a:xfrm>
-            <a:off x="838200" y="1633491"/>
-            <a:ext cx="10515600" cy="5131294"/>
-          </a:xfrm>
-        </p:spPr>
-        <p:txBody>
-          <a:bodyPr>
-            <a:normAutofit/>
-          </a:bodyPr>
-          <a:lstStyle/>
-          <a:p>
-            <a:pPr marL="0" indent="0">
-              <a:buNone/>
-            </a:pPr>
-            <a:r>
-              <a:rPr lang="en-US" dirty="0"/>
-              <a:t>5. No Multicollinearity </a:t>
-            </a:r>
-          </a:p>
-          <a:p>
-            <a:r>
-              <a:rPr lang="en-US" dirty="0"/>
-              <a:t>The independent variables should not be highly correlated with each other. </a:t>
-            </a:r>
-          </a:p>
-          <a:p>
-            <a:r>
-              <a:rPr lang="en-US" dirty="0"/>
-              <a:t>Multicollinearity occurs when two or more independent variables are strongly related, making it difficult to isolate the effect of each variable on the dependent variable.</a:t>
-            </a:r>
-          </a:p>
-          <a:p>
-            <a:r>
-              <a:rPr lang="en-US" dirty="0"/>
-              <a:t>If multicollinearity exists, it can lead to inaccurate results in multiple linear regression.</a:t>
-            </a:r>
-          </a:p>
-          <a:p>
-            <a:r>
-              <a:rPr lang="en-US" dirty="0"/>
-              <a:t>For multiple linear regression, multicollinearity among independent variables can be assessed using the Variance Inflation Factor (VIF). A VIF value greater than 10 indicates high multicollinearity.</a:t>
-            </a:r>
-          </a:p>
-        </p:txBody>
-      </p:sp>
-      <p:sp>
-        <p:nvSpPr>
-          <p:cNvPr id="3" name="Title 2">
-            <a:extLst>
-              <a:ext uri="{FF2B5EF4-FFF2-40B4-BE49-F238E27FC236}">
-                <a16:creationId xmlns:a16="http://schemas.microsoft.com/office/drawing/2014/main" id="{927ED564-A8B2-AAC7-C34A-1B841519BD48}"/>
+          <p:cNvPr id="2" name="Title 1">
+            <a:extLst>
+              <a:ext uri="{FF2B5EF4-FFF2-40B4-BE49-F238E27FC236}">
+                <a16:creationId xmlns:a16="http://schemas.microsoft.com/office/drawing/2014/main" id="{63D01319-53D6-1634-C53E-BE011F4A8684}"/>
               </a:ext>
             </a:extLst>
           </p:cNvPr>
@@ -7161,12 +8941,73 @@
         </p:nvSpPr>
         <p:spPr/>
         <p:txBody>
-          <a:bodyPr/>
+          <a:bodyPr>
+            <a:normAutofit/>
+          </a:bodyPr>
           <a:lstStyle/>
           <a:p>
             <a:r>
               <a:rPr lang="en-US" dirty="0"/>
-              <a:t>Assumptions of Simple Linear Regression</a:t>
+              <a:t>Assumptions of Linear Regression</a:t>
+            </a:r>
+            <a:endParaRPr lang="en-US" sz="2800" dirty="0"/>
+          </a:p>
+        </p:txBody>
+      </p:sp>
+      <p:sp>
+        <p:nvSpPr>
+          <p:cNvPr id="3" name="Content Placeholder 2">
+            <a:extLst>
+              <a:ext uri="{FF2B5EF4-FFF2-40B4-BE49-F238E27FC236}">
+                <a16:creationId xmlns:a16="http://schemas.microsoft.com/office/drawing/2014/main" id="{978883A7-D876-AEF2-76C8-90BFC8E97077}"/>
+              </a:ext>
+            </a:extLst>
+          </p:cNvPr>
+          <p:cNvSpPr>
+            <a:spLocks noGrp="1"/>
+          </p:cNvSpPr>
+          <p:nvPr>
+            <p:ph idx="1"/>
+          </p:nvPr>
+        </p:nvSpPr>
+        <p:spPr/>
+        <p:txBody>
+          <a:bodyPr>
+            <a:normAutofit/>
+          </a:bodyPr>
+          <a:lstStyle/>
+          <a:p>
+            <a:pPr marL="0" indent="0">
+              <a:buNone/>
+            </a:pPr>
+            <a:r>
+              <a:rPr lang="en-US" b="1" dirty="0"/>
+              <a:t>3. Homoscedasticity</a:t>
+            </a:r>
+          </a:p>
+          <a:p>
+            <a:r>
+              <a:rPr lang="en-US" dirty="0"/>
+              <a:t>The variance of the error terms (residuals) should be constant across all levels of the independent variables. </a:t>
+            </a:r>
+          </a:p>
+          <a:p>
+            <a:r>
+              <a:rPr lang="en-US" dirty="0"/>
+              <a:t>If this assumption is violated, it indicates heteroscedasticity, meaning the spread of residuals varies at different levels of the independent variables.</a:t>
+            </a:r>
+          </a:p>
+          <a:p>
+            <a:pPr marL="0" indent="0">
+              <a:buNone/>
+            </a:pPr>
+            <a:r>
+              <a:rPr lang="en-US" b="1" dirty="0"/>
+              <a:t>Example: </a:t>
+            </a:r>
+            <a:r>
+              <a:rPr lang="en-US" dirty="0"/>
+              <a:t>When plotting residuals against fitted values in a regression analysis of apartment prices against apartment size, the spread of residuals should be roughly constant. If residuals spread out more as apartment size increases, this indicates heteroscedasticity.</a:t>
             </a:r>
           </a:p>
         </p:txBody>
@@ -7174,7 +9015,7 @@
     </p:spTree>
     <p:extLst>
       <p:ext uri="{BB962C8B-B14F-4D97-AF65-F5344CB8AC3E}">
-        <p14:creationId xmlns:p14="http://schemas.microsoft.com/office/powerpoint/2010/main" val="1558611893"/>
+        <p14:creationId xmlns:p14="http://schemas.microsoft.com/office/powerpoint/2010/main" val="3794385322"/>
       </p:ext>
     </p:extLst>
   </p:cSld>
@@ -7185,6 +9026,577 @@
 </file>
 
 <file path=ppt/slides/slide21.xml><?xml version="1.0" encoding="utf-8"?>
+<p:sld xmlns:a="http://schemas.openxmlformats.org/drawingml/2006/main" xmlns:r="http://schemas.openxmlformats.org/officeDocument/2006/relationships" xmlns:p="http://schemas.openxmlformats.org/presentationml/2006/main">
+  <p:cSld>
+    <p:spTree>
+      <p:nvGrpSpPr>
+        <p:cNvPr id="1" name="">
+          <a:extLst>
+            <a:ext uri="{FF2B5EF4-FFF2-40B4-BE49-F238E27FC236}">
+              <a16:creationId xmlns:a16="http://schemas.microsoft.com/office/drawing/2014/main" id="{4F77C746-5913-7DD4-D696-080925D202BD}"/>
+            </a:ext>
+          </a:extLst>
+        </p:cNvPr>
+        <p:cNvGrpSpPr/>
+        <p:nvPr/>
+      </p:nvGrpSpPr>
+      <p:grpSpPr>
+        <a:xfrm>
+          <a:off x="0" y="0"/>
+          <a:ext cx="0" cy="0"/>
+          <a:chOff x="0" y="0"/>
+          <a:chExt cx="0" cy="0"/>
+        </a:xfrm>
+      </p:grpSpPr>
+      <p:sp>
+        <p:nvSpPr>
+          <p:cNvPr id="2" name="Title 1">
+            <a:extLst>
+              <a:ext uri="{FF2B5EF4-FFF2-40B4-BE49-F238E27FC236}">
+                <a16:creationId xmlns:a16="http://schemas.microsoft.com/office/drawing/2014/main" id="{8BE8D303-3EA8-439E-E0D9-A46A751E01C3}"/>
+              </a:ext>
+            </a:extLst>
+          </p:cNvPr>
+          <p:cNvSpPr>
+            <a:spLocks noGrp="1"/>
+          </p:cNvSpPr>
+          <p:nvPr>
+            <p:ph type="title"/>
+          </p:nvPr>
+        </p:nvSpPr>
+        <p:spPr/>
+        <p:txBody>
+          <a:bodyPr>
+            <a:normAutofit/>
+          </a:bodyPr>
+          <a:lstStyle/>
+          <a:p>
+            <a:r>
+              <a:rPr lang="en-US" dirty="0"/>
+              <a:t>Assumptions of Linear Regression</a:t>
+            </a:r>
+            <a:endParaRPr lang="en-US" sz="2800" dirty="0"/>
+          </a:p>
+        </p:txBody>
+      </p:sp>
+      <p:sp>
+        <p:nvSpPr>
+          <p:cNvPr id="3" name="Content Placeholder 2">
+            <a:extLst>
+              <a:ext uri="{FF2B5EF4-FFF2-40B4-BE49-F238E27FC236}">
+                <a16:creationId xmlns:a16="http://schemas.microsoft.com/office/drawing/2014/main" id="{6719E367-A4FE-AE2B-34B1-1DA0024C6A20}"/>
+              </a:ext>
+            </a:extLst>
+          </p:cNvPr>
+          <p:cNvSpPr>
+            <a:spLocks noGrp="1"/>
+          </p:cNvSpPr>
+          <p:nvPr>
+            <p:ph idx="1"/>
+          </p:nvPr>
+        </p:nvSpPr>
+        <p:spPr>
+          <a:xfrm>
+            <a:off x="838200" y="1706007"/>
+            <a:ext cx="10515600" cy="988207"/>
+          </a:xfrm>
+        </p:spPr>
+        <p:txBody>
+          <a:bodyPr>
+            <a:normAutofit fontScale="92500" lnSpcReduction="20000"/>
+          </a:bodyPr>
+          <a:lstStyle/>
+          <a:p>
+            <a:r>
+              <a:rPr lang="en-US" b="1" dirty="0"/>
+              <a:t>How to Test Homoscedasticity</a:t>
+            </a:r>
+            <a:r>
+              <a:rPr lang="en-US" dirty="0"/>
+              <a:t> : Plot residuals vs. predicted values. The spread of residuals variance should be consistent (no funnel-shaped patterns).</a:t>
+            </a:r>
+          </a:p>
+        </p:txBody>
+      </p:sp>
+      <p:pic>
+        <p:nvPicPr>
+          <p:cNvPr id="6146" name="Picture 2">
+            <a:extLst>
+              <a:ext uri="{FF2B5EF4-FFF2-40B4-BE49-F238E27FC236}">
+                <a16:creationId xmlns:a16="http://schemas.microsoft.com/office/drawing/2014/main" id="{F4194E29-81D9-5FD3-B646-EAFBE7BE7254}"/>
+              </a:ext>
+            </a:extLst>
+          </p:cNvPr>
+          <p:cNvPicPr>
+            <a:picLocks noChangeAspect="1" noChangeArrowheads="1"/>
+          </p:cNvPicPr>
+          <p:nvPr/>
+        </p:nvPicPr>
+        <p:blipFill>
+          <a:blip r:embed="rId2">
+            <a:extLst>
+              <a:ext uri="{28A0092B-C50C-407E-A947-70E740481C1C}">
+                <a14:useLocalDpi xmlns:a14="http://schemas.microsoft.com/office/drawing/2010/main" val="0"/>
+              </a:ext>
+            </a:extLst>
+          </a:blip>
+          <a:srcRect/>
+          <a:stretch>
+            <a:fillRect/>
+          </a:stretch>
+        </p:blipFill>
+        <p:spPr bwMode="auto">
+          <a:xfrm>
+            <a:off x="2762250" y="2694214"/>
+            <a:ext cx="6667500" cy="3686175"/>
+          </a:xfrm>
+          <a:prstGeom prst="rect">
+            <a:avLst/>
+          </a:prstGeom>
+          <a:noFill/>
+          <a:extLst>
+            <a:ext uri="{909E8E84-426E-40DD-AFC4-6F175D3DCCD1}">
+              <a14:hiddenFill xmlns:a14="http://schemas.microsoft.com/office/drawing/2010/main">
+                <a:solidFill>
+                  <a:srgbClr val="FFFFFF"/>
+                </a:solidFill>
+              </a14:hiddenFill>
+            </a:ext>
+          </a:extLst>
+        </p:spPr>
+      </p:pic>
+      <p:sp>
+        <p:nvSpPr>
+          <p:cNvPr id="4" name="TextBox 3">
+            <a:extLst>
+              <a:ext uri="{FF2B5EF4-FFF2-40B4-BE49-F238E27FC236}">
+                <a16:creationId xmlns:a16="http://schemas.microsoft.com/office/drawing/2014/main" id="{EF515063-BD6D-C410-EFAB-3F7B9F68EE08}"/>
+              </a:ext>
+            </a:extLst>
+          </p:cNvPr>
+          <p:cNvSpPr txBox="1"/>
+          <p:nvPr/>
+        </p:nvSpPr>
+        <p:spPr>
+          <a:xfrm>
+            <a:off x="3348681" y="3159201"/>
+            <a:ext cx="2747319" cy="523220"/>
+          </a:xfrm>
+          <a:prstGeom prst="rect">
+            <a:avLst/>
+          </a:prstGeom>
+          <a:noFill/>
+        </p:spPr>
+        <p:txBody>
+          <a:bodyPr wrap="square" rtlCol="0">
+            <a:spAutoFit/>
+          </a:bodyPr>
+          <a:lstStyle/>
+          <a:p>
+            <a:pPr algn="ctr"/>
+            <a:r>
+              <a:rPr lang="en-US" sz="1400" b="1" dirty="0">
+                <a:solidFill>
+                  <a:srgbClr val="00B050"/>
+                </a:solidFill>
+              </a:rPr>
+              <a:t>Good Residual Spead</a:t>
+            </a:r>
+          </a:p>
+          <a:p>
+            <a:pPr algn="ctr"/>
+            <a:r>
+              <a:rPr lang="en-US" sz="1400" b="1" dirty="0">
+                <a:solidFill>
+                  <a:srgbClr val="00B050"/>
+                </a:solidFill>
+              </a:rPr>
+              <a:t>Good Linear Relation</a:t>
+            </a:r>
+          </a:p>
+        </p:txBody>
+      </p:sp>
+      <p:sp>
+        <p:nvSpPr>
+          <p:cNvPr id="5" name="TextBox 4">
+            <a:extLst>
+              <a:ext uri="{FF2B5EF4-FFF2-40B4-BE49-F238E27FC236}">
+                <a16:creationId xmlns:a16="http://schemas.microsoft.com/office/drawing/2014/main" id="{A5557003-D8AA-7EB9-C0DD-429D4F375697}"/>
+              </a:ext>
+            </a:extLst>
+          </p:cNvPr>
+          <p:cNvSpPr txBox="1"/>
+          <p:nvPr/>
+        </p:nvSpPr>
+        <p:spPr>
+          <a:xfrm>
+            <a:off x="6806513" y="3159201"/>
+            <a:ext cx="2747319" cy="523220"/>
+          </a:xfrm>
+          <a:prstGeom prst="rect">
+            <a:avLst/>
+          </a:prstGeom>
+          <a:noFill/>
+        </p:spPr>
+        <p:txBody>
+          <a:bodyPr wrap="square" rtlCol="0">
+            <a:spAutoFit/>
+          </a:bodyPr>
+          <a:lstStyle/>
+          <a:p>
+            <a:pPr algn="ctr"/>
+            <a:r>
+              <a:rPr lang="en-US" sz="1400" b="1" dirty="0">
+                <a:solidFill>
+                  <a:srgbClr val="FF0000"/>
+                </a:solidFill>
+              </a:rPr>
+              <a:t>Not a Good Residual Spead</a:t>
+            </a:r>
+          </a:p>
+          <a:p>
+            <a:pPr algn="ctr"/>
+            <a:r>
+              <a:rPr lang="en-US" sz="1400" b="1" dirty="0">
+                <a:solidFill>
+                  <a:srgbClr val="FF0000"/>
+                </a:solidFill>
+              </a:rPr>
+              <a:t>Not a Good Linear Relation</a:t>
+            </a:r>
+          </a:p>
+        </p:txBody>
+      </p:sp>
+      <p:sp>
+        <p:nvSpPr>
+          <p:cNvPr id="6" name="TextBox 5">
+            <a:extLst>
+              <a:ext uri="{FF2B5EF4-FFF2-40B4-BE49-F238E27FC236}">
+                <a16:creationId xmlns:a16="http://schemas.microsoft.com/office/drawing/2014/main" id="{559CF57F-C62E-C886-D48D-6CDC63067485}"/>
+              </a:ext>
+            </a:extLst>
+          </p:cNvPr>
+          <p:cNvSpPr txBox="1"/>
+          <p:nvPr/>
+        </p:nvSpPr>
+        <p:spPr>
+          <a:xfrm>
+            <a:off x="6806513" y="6334780"/>
+            <a:ext cx="2747319" cy="430887"/>
+          </a:xfrm>
+          <a:prstGeom prst="rect">
+            <a:avLst/>
+          </a:prstGeom>
+          <a:noFill/>
+        </p:spPr>
+        <p:txBody>
+          <a:bodyPr wrap="square" rtlCol="0">
+            <a:spAutoFit/>
+          </a:bodyPr>
+          <a:lstStyle/>
+          <a:p>
+            <a:pPr algn="ctr"/>
+            <a:r>
+              <a:rPr lang="en-US" sz="1100" b="1" dirty="0">
+                <a:solidFill>
+                  <a:srgbClr val="FF0000"/>
+                </a:solidFill>
+              </a:rPr>
+              <a:t>Funnel shape note good</a:t>
+            </a:r>
+          </a:p>
+          <a:p>
+            <a:pPr algn="ctr"/>
+            <a:r>
+              <a:rPr lang="ar-JO" sz="1100" b="1" dirty="0">
+                <a:solidFill>
+                  <a:srgbClr val="FF0000"/>
+                </a:solidFill>
+              </a:rPr>
+              <a:t>الشكل مثل القمع يبين بأن العلاقة الخطية غير مناسبة</a:t>
+            </a:r>
+            <a:endParaRPr lang="en-US" sz="1100" b="1" dirty="0">
+              <a:solidFill>
+                <a:srgbClr val="FF0000"/>
+              </a:solidFill>
+            </a:endParaRPr>
+          </a:p>
+        </p:txBody>
+      </p:sp>
+      <p:cxnSp>
+        <p:nvCxnSpPr>
+          <p:cNvPr id="8" name="Straight Connector 7">
+            <a:extLst>
+              <a:ext uri="{FF2B5EF4-FFF2-40B4-BE49-F238E27FC236}">
+                <a16:creationId xmlns:a16="http://schemas.microsoft.com/office/drawing/2014/main" id="{4A97370D-31EF-394B-F767-9A08522EB1E5}"/>
+              </a:ext>
+            </a:extLst>
+          </p:cNvPr>
+          <p:cNvCxnSpPr/>
+          <p:nvPr/>
+        </p:nvCxnSpPr>
+        <p:spPr>
+          <a:xfrm flipV="1">
+            <a:off x="7123670" y="3682421"/>
+            <a:ext cx="1995616" cy="500449"/>
+          </a:xfrm>
+          <a:prstGeom prst="line">
+            <a:avLst/>
+          </a:prstGeom>
+          <a:ln w="38100">
+            <a:solidFill>
+              <a:srgbClr val="FF0000"/>
+            </a:solidFill>
+          </a:ln>
+        </p:spPr>
+        <p:style>
+          <a:lnRef idx="3">
+            <a:schemeClr val="dk1"/>
+          </a:lnRef>
+          <a:fillRef idx="0">
+            <a:schemeClr val="dk1"/>
+          </a:fillRef>
+          <a:effectRef idx="2">
+            <a:schemeClr val="dk1"/>
+          </a:effectRef>
+          <a:fontRef idx="minor">
+            <a:schemeClr val="tx1"/>
+          </a:fontRef>
+        </p:style>
+      </p:cxnSp>
+      <p:cxnSp>
+        <p:nvCxnSpPr>
+          <p:cNvPr id="9" name="Straight Connector 8">
+            <a:extLst>
+              <a:ext uri="{FF2B5EF4-FFF2-40B4-BE49-F238E27FC236}">
+                <a16:creationId xmlns:a16="http://schemas.microsoft.com/office/drawing/2014/main" id="{BD16B3F3-9374-59F3-6537-195E5AEF9516}"/>
+              </a:ext>
+            </a:extLst>
+          </p:cNvPr>
+          <p:cNvCxnSpPr>
+            <a:cxnSpLocks/>
+          </p:cNvCxnSpPr>
+          <p:nvPr/>
+        </p:nvCxnSpPr>
+        <p:spPr>
+          <a:xfrm>
+            <a:off x="7123670" y="4537301"/>
+            <a:ext cx="2193325" cy="698716"/>
+          </a:xfrm>
+          <a:prstGeom prst="line">
+            <a:avLst/>
+          </a:prstGeom>
+          <a:ln w="38100">
+            <a:solidFill>
+              <a:srgbClr val="FF0000"/>
+            </a:solidFill>
+          </a:ln>
+        </p:spPr>
+        <p:style>
+          <a:lnRef idx="3">
+            <a:schemeClr val="dk1"/>
+          </a:lnRef>
+          <a:fillRef idx="0">
+            <a:schemeClr val="dk1"/>
+          </a:fillRef>
+          <a:effectRef idx="2">
+            <a:schemeClr val="dk1"/>
+          </a:effectRef>
+          <a:fontRef idx="minor">
+            <a:schemeClr val="tx1"/>
+          </a:fontRef>
+        </p:style>
+      </p:cxnSp>
+      <p:cxnSp>
+        <p:nvCxnSpPr>
+          <p:cNvPr id="11" name="Straight Connector 10">
+            <a:extLst>
+              <a:ext uri="{FF2B5EF4-FFF2-40B4-BE49-F238E27FC236}">
+                <a16:creationId xmlns:a16="http://schemas.microsoft.com/office/drawing/2014/main" id="{BA2262DA-30DB-98A8-87D2-601E9D6AEC41}"/>
+              </a:ext>
+            </a:extLst>
+          </p:cNvPr>
+          <p:cNvCxnSpPr>
+            <a:cxnSpLocks/>
+          </p:cNvCxnSpPr>
+          <p:nvPr/>
+        </p:nvCxnSpPr>
+        <p:spPr>
+          <a:xfrm>
+            <a:off x="3600964" y="3817408"/>
+            <a:ext cx="2242752" cy="0"/>
+          </a:xfrm>
+          <a:prstGeom prst="line">
+            <a:avLst/>
+          </a:prstGeom>
+          <a:ln w="38100">
+            <a:solidFill>
+              <a:srgbClr val="FF0000"/>
+            </a:solidFill>
+          </a:ln>
+        </p:spPr>
+        <p:style>
+          <a:lnRef idx="3">
+            <a:schemeClr val="dk1"/>
+          </a:lnRef>
+          <a:fillRef idx="0">
+            <a:schemeClr val="dk1"/>
+          </a:fillRef>
+          <a:effectRef idx="2">
+            <a:schemeClr val="dk1"/>
+          </a:effectRef>
+          <a:fontRef idx="minor">
+            <a:schemeClr val="tx1"/>
+          </a:fontRef>
+        </p:style>
+      </p:cxnSp>
+      <p:cxnSp>
+        <p:nvCxnSpPr>
+          <p:cNvPr id="13" name="Straight Connector 12">
+            <a:extLst>
+              <a:ext uri="{FF2B5EF4-FFF2-40B4-BE49-F238E27FC236}">
+                <a16:creationId xmlns:a16="http://schemas.microsoft.com/office/drawing/2014/main" id="{FB2137F5-7735-BC74-E5E9-A63E873517C6}"/>
+              </a:ext>
+            </a:extLst>
+          </p:cNvPr>
+          <p:cNvCxnSpPr>
+            <a:cxnSpLocks/>
+          </p:cNvCxnSpPr>
+          <p:nvPr/>
+        </p:nvCxnSpPr>
+        <p:spPr>
+          <a:xfrm>
+            <a:off x="3600964" y="4859056"/>
+            <a:ext cx="2242752" cy="0"/>
+          </a:xfrm>
+          <a:prstGeom prst="line">
+            <a:avLst/>
+          </a:prstGeom>
+          <a:ln w="38100">
+            <a:solidFill>
+              <a:srgbClr val="FF0000"/>
+            </a:solidFill>
+          </a:ln>
+        </p:spPr>
+        <p:style>
+          <a:lnRef idx="3">
+            <a:schemeClr val="dk1"/>
+          </a:lnRef>
+          <a:fillRef idx="0">
+            <a:schemeClr val="dk1"/>
+          </a:fillRef>
+          <a:effectRef idx="2">
+            <a:schemeClr val="dk1"/>
+          </a:effectRef>
+          <a:fontRef idx="minor">
+            <a:schemeClr val="tx1"/>
+          </a:fontRef>
+        </p:style>
+      </p:cxnSp>
+      <p:sp>
+        <p:nvSpPr>
+          <p:cNvPr id="14" name="TextBox 13">
+            <a:extLst>
+              <a:ext uri="{FF2B5EF4-FFF2-40B4-BE49-F238E27FC236}">
+                <a16:creationId xmlns:a16="http://schemas.microsoft.com/office/drawing/2014/main" id="{DAFD7A4F-1FAB-46FF-F89A-D08B38B34A73}"/>
+              </a:ext>
+            </a:extLst>
+          </p:cNvPr>
+          <p:cNvSpPr txBox="1"/>
+          <p:nvPr/>
+        </p:nvSpPr>
+        <p:spPr>
+          <a:xfrm>
+            <a:off x="3508803" y="6357585"/>
+            <a:ext cx="2747319" cy="430887"/>
+          </a:xfrm>
+          <a:prstGeom prst="rect">
+            <a:avLst/>
+          </a:prstGeom>
+          <a:noFill/>
+        </p:spPr>
+        <p:txBody>
+          <a:bodyPr wrap="square" rtlCol="0">
+            <a:spAutoFit/>
+          </a:bodyPr>
+          <a:lstStyle/>
+          <a:p>
+            <a:pPr algn="ctr"/>
+            <a:r>
+              <a:rPr lang="ar-JO" sz="1100" b="1" dirty="0">
+                <a:solidFill>
+                  <a:srgbClr val="00B050"/>
+                </a:solidFill>
+              </a:rPr>
+              <a:t>التوزيع العشوائي للنقاط حول الصفر على طول المدى هو التوزيع الأفضل الذي يبين أن الموديل الخطي مناسب</a:t>
+            </a:r>
+            <a:endParaRPr lang="en-US" sz="1100" b="1" dirty="0">
+              <a:solidFill>
+                <a:srgbClr val="00B050"/>
+              </a:solidFill>
+            </a:endParaRPr>
+          </a:p>
+        </p:txBody>
+      </p:sp>
+      <p:cxnSp>
+        <p:nvCxnSpPr>
+          <p:cNvPr id="15" name="Straight Connector 14">
+            <a:extLst>
+              <a:ext uri="{FF2B5EF4-FFF2-40B4-BE49-F238E27FC236}">
+                <a16:creationId xmlns:a16="http://schemas.microsoft.com/office/drawing/2014/main" id="{B822D6D1-99EB-AC5A-D135-A9A5E2C4BB32}"/>
+              </a:ext>
+            </a:extLst>
+          </p:cNvPr>
+          <p:cNvCxnSpPr>
+            <a:cxnSpLocks/>
+          </p:cNvCxnSpPr>
+          <p:nvPr/>
+        </p:nvCxnSpPr>
+        <p:spPr>
+          <a:xfrm>
+            <a:off x="3613320" y="4359046"/>
+            <a:ext cx="2242752" cy="0"/>
+          </a:xfrm>
+          <a:prstGeom prst="line">
+            <a:avLst/>
+          </a:prstGeom>
+          <a:ln w="38100">
+            <a:solidFill>
+              <a:schemeClr val="bg1">
+                <a:lumMod val="75000"/>
+              </a:schemeClr>
+            </a:solidFill>
+          </a:ln>
+        </p:spPr>
+        <p:style>
+          <a:lnRef idx="3">
+            <a:schemeClr val="dk1"/>
+          </a:lnRef>
+          <a:fillRef idx="0">
+            <a:schemeClr val="dk1"/>
+          </a:fillRef>
+          <a:effectRef idx="2">
+            <a:schemeClr val="dk1"/>
+          </a:effectRef>
+          <a:fontRef idx="minor">
+            <a:schemeClr val="tx1"/>
+          </a:fontRef>
+        </p:style>
+      </p:cxnSp>
+    </p:spTree>
+    <p:extLst>
+      <p:ext uri="{BB962C8B-B14F-4D97-AF65-F5344CB8AC3E}">
+        <p14:creationId xmlns:p14="http://schemas.microsoft.com/office/powerpoint/2010/main" val="1499972066"/>
+      </p:ext>
+    </p:extLst>
+  </p:cSld>
+  <p:clrMapOvr>
+    <a:masterClrMapping/>
+  </p:clrMapOvr>
+</p:sld>
+</file>
+
+<file path=ppt/slides/slide22.xml><?xml version="1.0" encoding="utf-8"?>
 <p:sld xmlns:a="http://schemas.openxmlformats.org/drawingml/2006/main" xmlns:r="http://schemas.openxmlformats.org/officeDocument/2006/relationships" xmlns:p="http://schemas.openxmlformats.org/presentationml/2006/main">
   <p:cSld>
     <p:spTree>
@@ -7201,136 +9613,12 @@
           <a:chExt cx="0" cy="0"/>
         </a:xfrm>
       </p:grpSpPr>
-      <p:pic>
-        <p:nvPicPr>
-          <p:cNvPr id="7" name="Picture 6">
-            <a:extLst>
-              <a:ext uri="{FF2B5EF4-FFF2-40B4-BE49-F238E27FC236}">
-                <a16:creationId xmlns:a16="http://schemas.microsoft.com/office/drawing/2014/main" id="{A38D0E97-EAFB-C1A1-50A4-D148BD794323}"/>
-              </a:ext>
-            </a:extLst>
-          </p:cNvPr>
-          <p:cNvPicPr>
-            <a:picLocks noChangeAspect="1"/>
-          </p:cNvPicPr>
-          <p:nvPr/>
-        </p:nvPicPr>
-        <p:blipFill>
-          <a:blip r:embed="rId2"/>
-          <a:stretch>
-            <a:fillRect/>
-          </a:stretch>
-        </p:blipFill>
-        <p:spPr>
-          <a:xfrm>
-            <a:off x="6660776" y="1690688"/>
-            <a:ext cx="5167946" cy="3227979"/>
-          </a:xfrm>
-          <a:prstGeom prst="rect">
-            <a:avLst/>
-          </a:prstGeom>
-        </p:spPr>
-      </p:pic>
-      <p:sp>
-        <p:nvSpPr>
-          <p:cNvPr id="3" name="Content Placeholder 2">
-            <a:extLst>
-              <a:ext uri="{FF2B5EF4-FFF2-40B4-BE49-F238E27FC236}">
-                <a16:creationId xmlns:a16="http://schemas.microsoft.com/office/drawing/2014/main" id="{102BC694-8487-C007-C9E9-C4570B4B8FFD}"/>
-              </a:ext>
-            </a:extLst>
-          </p:cNvPr>
-          <p:cNvSpPr>
-            <a:spLocks noGrp="1"/>
-          </p:cNvSpPr>
-          <p:nvPr>
-            <p:ph idx="1"/>
-          </p:nvPr>
-        </p:nvSpPr>
-        <p:spPr>
-          <a:xfrm>
-            <a:off x="838200" y="1633490"/>
-            <a:ext cx="6215743" cy="4310110"/>
-          </a:xfrm>
-        </p:spPr>
-        <p:txBody>
-          <a:bodyPr>
-            <a:normAutofit fontScale="85000" lnSpcReduction="10000"/>
-          </a:bodyPr>
-          <a:lstStyle/>
-          <a:p>
-            <a:r>
-              <a:rPr lang="en-US" sz="2400" dirty="0"/>
-              <a:t>Linear regression is a type of supervised machine learning algorithm that computes the linear relationship between a dependent variable and one or more independent variables by fitting a linear equation that models the relationship between these variables.</a:t>
-            </a:r>
-          </a:p>
-          <a:p>
-            <a:r>
-              <a:rPr lang="en-US" sz="2400" dirty="0"/>
-              <a:t>In LR, we use a linear formula in the form of:</a:t>
-            </a:r>
-          </a:p>
-          <a:p>
-            <a:pPr marL="233363" indent="-233363">
-              <a:buNone/>
-            </a:pPr>
-            <a:br>
-              <a:rPr lang="en-US" sz="2400" dirty="0"/>
-            </a:br>
-            <a:r>
-              <a:rPr lang="en-US" sz="3100" i="1" dirty="0"/>
-              <a:t>Y = B</a:t>
-            </a:r>
-            <a:r>
-              <a:rPr lang="en-US" sz="1500" b="1" i="1" dirty="0"/>
-              <a:t>0</a:t>
-            </a:r>
-            <a:r>
-              <a:rPr lang="en-US" sz="3100" i="1" dirty="0"/>
-              <a:t> + B</a:t>
-            </a:r>
-            <a:r>
-              <a:rPr lang="en-US" sz="1500" b="1" i="1" dirty="0"/>
-              <a:t>1</a:t>
-            </a:r>
-            <a:r>
-              <a:rPr lang="en-US" sz="3100" i="1" dirty="0"/>
-              <a:t>X</a:t>
-            </a:r>
-          </a:p>
-          <a:p>
-            <a:pPr marL="233363" indent="0">
-              <a:buNone/>
-            </a:pPr>
-            <a:r>
-              <a:rPr lang="en-US" sz="2400" dirty="0"/>
-              <a:t>to represent the relationship between an independent variable (X) and a dependent variable (Y).</a:t>
-            </a:r>
-          </a:p>
-          <a:p>
-            <a:pPr marL="233363" indent="-231775"/>
-            <a:r>
-              <a:rPr lang="en-US" sz="2400" dirty="0"/>
-              <a:t>In LR, both X and Y are numerical values, for example, X could be the employee’s years of experience and Y could be his predicted salary, and we use LR to model that relation.</a:t>
-            </a:r>
-          </a:p>
-          <a:p>
-            <a:pPr marL="233363" indent="0">
-              <a:buNone/>
-            </a:pPr>
-            <a:endParaRPr lang="en-US" sz="2400" dirty="0"/>
-          </a:p>
-          <a:p>
-            <a:endParaRPr lang="en-US" sz="2400" dirty="0"/>
-          </a:p>
-        </p:txBody>
-      </p:sp>
       <p:sp>
         <p:nvSpPr>
           <p:cNvPr id="2" name="Title 1">
             <a:extLst>
               <a:ext uri="{FF2B5EF4-FFF2-40B4-BE49-F238E27FC236}">
-                <a16:creationId xmlns:a16="http://schemas.microsoft.com/office/drawing/2014/main" id="{F842C2E3-446E-3595-CA99-8E95BA7F2C23}"/>
+                <a16:creationId xmlns:a16="http://schemas.microsoft.com/office/drawing/2014/main" id="{1F389152-7E14-E2FC-7B36-B8A019759F6D}"/>
               </a:ext>
             </a:extLst>
           </p:cNvPr>
@@ -7343,22 +9631,1658 @@
         </p:nvSpPr>
         <p:spPr/>
         <p:txBody>
+          <a:bodyPr/>
+          <a:lstStyle/>
+          <a:p>
+            <a:r>
+              <a:rPr lang="en-US" dirty="0"/>
+              <a:t>Assumptions of Linear Regression</a:t>
+            </a:r>
+          </a:p>
+        </p:txBody>
+      </p:sp>
+      <p:sp>
+        <p:nvSpPr>
+          <p:cNvPr id="3" name="Content Placeholder 2">
+            <a:extLst>
+              <a:ext uri="{FF2B5EF4-FFF2-40B4-BE49-F238E27FC236}">
+                <a16:creationId xmlns:a16="http://schemas.microsoft.com/office/drawing/2014/main" id="{A65C5F38-2118-DD61-42D4-371CCEDADFFD}"/>
+              </a:ext>
+            </a:extLst>
+          </p:cNvPr>
+          <p:cNvSpPr>
+            <a:spLocks noGrp="1"/>
+          </p:cNvSpPr>
+          <p:nvPr>
+            <p:ph idx="1"/>
+          </p:nvPr>
+        </p:nvSpPr>
+        <p:spPr/>
+        <p:txBody>
           <a:bodyPr>
             <a:normAutofit/>
           </a:bodyPr>
           <a:lstStyle/>
           <a:p>
+            <a:pPr marL="0" indent="0">
+              <a:buNone/>
+            </a:pPr>
+            <a:r>
+              <a:rPr lang="en-US" sz="2000" b="1" dirty="0"/>
+              <a:t>4. Normal Distribution of Errors</a:t>
+            </a:r>
+          </a:p>
+          <a:p>
+            <a:r>
+              <a:rPr lang="en-US" sz="2000" dirty="0"/>
+              <a:t>The error terms should be normally distributed. This assumption is especially important for small sample sizes because it affects the validity of confidence intervals and hypothesis tests.</a:t>
+            </a:r>
+          </a:p>
+          <a:p>
+            <a:r>
+              <a:rPr lang="en-US" sz="2000" dirty="0"/>
+              <a:t>Example: After fitting a regression model predicting apartment price based on apartment size, plotting a histogram or a Q-Q plot of the residuals should show that they follow a normal distribution.</a:t>
+            </a:r>
+          </a:p>
+          <a:p>
+            <a:pPr marL="0" indent="0">
+              <a:buNone/>
+            </a:pPr>
+            <a:endParaRPr lang="en-US" sz="2000" dirty="0"/>
+          </a:p>
+        </p:txBody>
+      </p:sp>
+      <p:graphicFrame>
+        <p:nvGraphicFramePr>
+          <p:cNvPr id="8" name="Table 7">
+            <a:extLst>
+              <a:ext uri="{FF2B5EF4-FFF2-40B4-BE49-F238E27FC236}">
+                <a16:creationId xmlns:a16="http://schemas.microsoft.com/office/drawing/2014/main" id="{CC8499AA-D51B-F138-9281-A3831B8EEE55}"/>
+              </a:ext>
+            </a:extLst>
+          </p:cNvPr>
+          <p:cNvGraphicFramePr>
+            <a:graphicFrameLocks noGrp="1"/>
+          </p:cNvGraphicFramePr>
+          <p:nvPr/>
+        </p:nvGraphicFramePr>
+        <p:xfrm>
+          <a:off x="990598" y="3955452"/>
+          <a:ext cx="5246915" cy="2624961"/>
+        </p:xfrm>
+        <a:graphic>
+          <a:graphicData uri="http://schemas.openxmlformats.org/drawingml/2006/table">
+            <a:tbl>
+              <a:tblPr>
+                <a:tableStyleId>{5C22544A-7EE6-4342-B048-85BDC9FD1C3A}</a:tableStyleId>
+              </a:tblPr>
+              <a:tblGrid>
+                <a:gridCol w="1088926">
+                  <a:extLst>
+                    <a:ext uri="{9D8B030D-6E8A-4147-A177-3AD203B41FA5}">
+                      <a16:colId xmlns:a16="http://schemas.microsoft.com/office/drawing/2014/main" val="1908248969"/>
+                    </a:ext>
+                  </a:extLst>
+                </a:gridCol>
+                <a:gridCol w="1440098">
+                  <a:extLst>
+                    <a:ext uri="{9D8B030D-6E8A-4147-A177-3AD203B41FA5}">
+                      <a16:colId xmlns:a16="http://schemas.microsoft.com/office/drawing/2014/main" val="866234852"/>
+                    </a:ext>
+                  </a:extLst>
+                </a:gridCol>
+                <a:gridCol w="672833">
+                  <a:extLst>
+                    <a:ext uri="{9D8B030D-6E8A-4147-A177-3AD203B41FA5}">
+                      <a16:colId xmlns:a16="http://schemas.microsoft.com/office/drawing/2014/main" val="49144738"/>
+                    </a:ext>
+                  </a:extLst>
+                </a:gridCol>
+                <a:gridCol w="814481">
+                  <a:extLst>
+                    <a:ext uri="{9D8B030D-6E8A-4147-A177-3AD203B41FA5}">
+                      <a16:colId xmlns:a16="http://schemas.microsoft.com/office/drawing/2014/main" val="637350482"/>
+                    </a:ext>
+                  </a:extLst>
+                </a:gridCol>
+                <a:gridCol w="1230577">
+                  <a:extLst>
+                    <a:ext uri="{9D8B030D-6E8A-4147-A177-3AD203B41FA5}">
+                      <a16:colId xmlns:a16="http://schemas.microsoft.com/office/drawing/2014/main" val="719140480"/>
+                    </a:ext>
+                  </a:extLst>
+                </a:gridCol>
+              </a:tblGrid>
+              <a:tr h="237553">
+                <a:tc>
+                  <a:txBody>
+                    <a:bodyPr/>
+                    <a:lstStyle/>
+                    <a:p>
+                      <a:pPr algn="ctr" fontAlgn="b"/>
+                      <a:r>
+                        <a:rPr lang="en-US" sz="1100" u="none" strike="noStrike">
+                          <a:effectLst/>
+                        </a:rPr>
+                        <a:t>Residuals</a:t>
+                      </a:r>
+                      <a:endParaRPr lang="en-US" sz="1100" b="1" i="1" u="none" strike="noStrike">
+                        <a:solidFill>
+                          <a:srgbClr val="FFFFFF"/>
+                        </a:solidFill>
+                        <a:effectLst/>
+                        <a:latin typeface="Calibri" panose="020F0502020204030204" pitchFamily="34" charset="0"/>
+                      </a:endParaRPr>
+                    </a:p>
+                  </a:txBody>
+                  <a:tcPr marL="9525" marR="9525" marT="9525" marB="0" anchor="b"/>
+                </a:tc>
+                <a:tc>
+                  <a:txBody>
+                    <a:bodyPr/>
+                    <a:lstStyle/>
+                    <a:p>
+                      <a:pPr algn="ctr" fontAlgn="b"/>
+                      <a:r>
+                        <a:rPr lang="en-US" sz="1100" u="none" strike="noStrike">
+                          <a:effectLst/>
+                        </a:rPr>
+                        <a:t>Standard Residuals</a:t>
+                      </a:r>
+                      <a:endParaRPr lang="en-US" sz="1100" b="1" i="1" u="none" strike="noStrike">
+                        <a:solidFill>
+                          <a:srgbClr val="FFFFFF"/>
+                        </a:solidFill>
+                        <a:effectLst/>
+                        <a:latin typeface="Calibri" panose="020F0502020204030204" pitchFamily="34" charset="0"/>
+                      </a:endParaRPr>
+                    </a:p>
+                  </a:txBody>
+                  <a:tcPr marL="9525" marR="9525" marT="9525" marB="0" anchor="b"/>
+                </a:tc>
+                <a:tc>
+                  <a:txBody>
+                    <a:bodyPr/>
+                    <a:lstStyle/>
+                    <a:p>
+                      <a:pPr algn="l" fontAlgn="b"/>
+                      <a:r>
+                        <a:rPr lang="en-US" sz="1100" u="none" strike="noStrike">
+                          <a:effectLst/>
+                        </a:rPr>
+                        <a:t>Rank</a:t>
+                      </a:r>
+                      <a:endParaRPr lang="en-US" sz="1100" b="1" i="0" u="none" strike="noStrike">
+                        <a:solidFill>
+                          <a:srgbClr val="FFFFFF"/>
+                        </a:solidFill>
+                        <a:effectLst/>
+                        <a:latin typeface="Calibri" panose="020F0502020204030204" pitchFamily="34" charset="0"/>
+                      </a:endParaRPr>
+                    </a:p>
+                  </a:txBody>
+                  <a:tcPr marL="9525" marR="9525" marT="9525" marB="0" anchor="b"/>
+                </a:tc>
+                <a:tc>
+                  <a:txBody>
+                    <a:bodyPr/>
+                    <a:lstStyle/>
+                    <a:p>
+                      <a:pPr algn="l" fontAlgn="b"/>
+                      <a:r>
+                        <a:rPr lang="en-US" sz="1100" u="none" strike="noStrike">
+                          <a:effectLst/>
+                        </a:rPr>
+                        <a:t>Percentiles</a:t>
+                      </a:r>
+                      <a:endParaRPr lang="en-US" sz="1100" b="1" i="0" u="none" strike="noStrike">
+                        <a:solidFill>
+                          <a:srgbClr val="FFFFFF"/>
+                        </a:solidFill>
+                        <a:effectLst/>
+                        <a:latin typeface="Calibri" panose="020F0502020204030204" pitchFamily="34" charset="0"/>
+                      </a:endParaRPr>
+                    </a:p>
+                  </a:txBody>
+                  <a:tcPr marL="9525" marR="9525" marT="9525" marB="0" anchor="b"/>
+                </a:tc>
+                <a:tc>
+                  <a:txBody>
+                    <a:bodyPr/>
+                    <a:lstStyle/>
+                    <a:p>
+                      <a:pPr algn="l" fontAlgn="b"/>
+                      <a:r>
+                        <a:rPr lang="en-US" sz="1100" u="none" strike="noStrike">
+                          <a:effectLst/>
+                        </a:rPr>
+                        <a:t>Theoritical Residuals</a:t>
+                      </a:r>
+                      <a:endParaRPr lang="en-US" sz="1100" b="1" i="0" u="none" strike="noStrike">
+                        <a:solidFill>
+                          <a:srgbClr val="FFFFFF"/>
+                        </a:solidFill>
+                        <a:effectLst/>
+                        <a:latin typeface="Calibri" panose="020F0502020204030204" pitchFamily="34" charset="0"/>
+                      </a:endParaRPr>
+                    </a:p>
+                  </a:txBody>
+                  <a:tcPr marL="9525" marR="9525" marT="9525" marB="0" anchor="b"/>
+                </a:tc>
+                <a:extLst>
+                  <a:ext uri="{0D108BD9-81ED-4DB2-BD59-A6C34878D82A}">
+                    <a16:rowId xmlns:a16="http://schemas.microsoft.com/office/drawing/2014/main" val="4116477142"/>
+                  </a:ext>
+                </a:extLst>
+              </a:tr>
+              <a:tr h="237553">
+                <a:tc>
+                  <a:txBody>
+                    <a:bodyPr/>
+                    <a:lstStyle/>
+                    <a:p>
+                      <a:pPr algn="r" fontAlgn="b"/>
+                      <a:r>
+                        <a:rPr lang="en-US" sz="1100" u="none" strike="noStrike">
+                          <a:effectLst/>
+                        </a:rPr>
+                        <a:t>-32.890625</a:t>
+                      </a:r>
+                      <a:endParaRPr lang="en-US" sz="1100" b="0" i="0" u="none" strike="noStrike">
+                        <a:solidFill>
+                          <a:srgbClr val="000000"/>
+                        </a:solidFill>
+                        <a:effectLst/>
+                        <a:latin typeface="Calibri" panose="020F0502020204030204" pitchFamily="34" charset="0"/>
+                      </a:endParaRPr>
+                    </a:p>
+                  </a:txBody>
+                  <a:tcPr marL="9525" marR="9525" marT="9525" marB="0" anchor="b"/>
+                </a:tc>
+                <a:tc>
+                  <a:txBody>
+                    <a:bodyPr/>
+                    <a:lstStyle/>
+                    <a:p>
+                      <a:pPr algn="r" fontAlgn="b"/>
+                      <a:r>
+                        <a:rPr lang="en-US" sz="1100" u="none" strike="noStrike">
+                          <a:effectLst/>
+                        </a:rPr>
+                        <a:t>-1.425656831</a:t>
+                      </a:r>
+                      <a:endParaRPr lang="en-US" sz="1100" b="0" i="0" u="none" strike="noStrike">
+                        <a:solidFill>
+                          <a:srgbClr val="000000"/>
+                        </a:solidFill>
+                        <a:effectLst/>
+                        <a:latin typeface="Calibri" panose="020F0502020204030204" pitchFamily="34" charset="0"/>
+                      </a:endParaRPr>
+                    </a:p>
+                  </a:txBody>
+                  <a:tcPr marL="9525" marR="9525" marT="9525" marB="0" anchor="b"/>
+                </a:tc>
+                <a:tc>
+                  <a:txBody>
+                    <a:bodyPr/>
+                    <a:lstStyle/>
+                    <a:p>
+                      <a:pPr algn="r" fontAlgn="b"/>
+                      <a:r>
+                        <a:rPr lang="en-US" sz="1100" u="none" strike="noStrike">
+                          <a:effectLst/>
+                        </a:rPr>
+                        <a:t>1</a:t>
+                      </a:r>
+                      <a:endParaRPr lang="en-US" sz="1100" b="0" i="0" u="none" strike="noStrike">
+                        <a:solidFill>
+                          <a:srgbClr val="000000"/>
+                        </a:solidFill>
+                        <a:effectLst/>
+                        <a:latin typeface="Calibri" panose="020F0502020204030204" pitchFamily="34" charset="0"/>
+                      </a:endParaRPr>
+                    </a:p>
+                  </a:txBody>
+                  <a:tcPr marL="9525" marR="9525" marT="9525" marB="0" anchor="b"/>
+                </a:tc>
+                <a:tc>
+                  <a:txBody>
+                    <a:bodyPr/>
+                    <a:lstStyle/>
+                    <a:p>
+                      <a:pPr algn="r" fontAlgn="b"/>
+                      <a:r>
+                        <a:rPr lang="en-US" sz="1100" u="none" strike="noStrike">
+                          <a:effectLst/>
+                        </a:rPr>
+                        <a:t>0.05</a:t>
+                      </a:r>
+                      <a:endParaRPr lang="en-US" sz="1100" b="0" i="0" u="none" strike="noStrike">
+                        <a:solidFill>
+                          <a:srgbClr val="000000"/>
+                        </a:solidFill>
+                        <a:effectLst/>
+                        <a:latin typeface="Calibri" panose="020F0502020204030204" pitchFamily="34" charset="0"/>
+                      </a:endParaRPr>
+                    </a:p>
+                  </a:txBody>
+                  <a:tcPr marL="9525" marR="9525" marT="9525" marB="0" anchor="b"/>
+                </a:tc>
+                <a:tc>
+                  <a:txBody>
+                    <a:bodyPr/>
+                    <a:lstStyle/>
+                    <a:p>
+                      <a:pPr algn="r" fontAlgn="b"/>
+                      <a:r>
+                        <a:rPr lang="en-US" sz="1100" u="none" strike="noStrike">
+                          <a:effectLst/>
+                        </a:rPr>
+                        <a:t>-1.644853627</a:t>
+                      </a:r>
+                      <a:endParaRPr lang="en-US" sz="1100" b="0" i="0" u="none" strike="noStrike">
+                        <a:solidFill>
+                          <a:srgbClr val="000000"/>
+                        </a:solidFill>
+                        <a:effectLst/>
+                        <a:latin typeface="Calibri" panose="020F0502020204030204" pitchFamily="34" charset="0"/>
+                      </a:endParaRPr>
+                    </a:p>
+                  </a:txBody>
+                  <a:tcPr marL="9525" marR="9525" marT="9525" marB="0" anchor="b"/>
+                </a:tc>
+                <a:extLst>
+                  <a:ext uri="{0D108BD9-81ED-4DB2-BD59-A6C34878D82A}">
+                    <a16:rowId xmlns:a16="http://schemas.microsoft.com/office/drawing/2014/main" val="2767946646"/>
+                  </a:ext>
+                </a:extLst>
+              </a:tr>
+              <a:tr h="237553">
+                <a:tc>
+                  <a:txBody>
+                    <a:bodyPr/>
+                    <a:lstStyle/>
+                    <a:p>
+                      <a:pPr algn="r" fontAlgn="b"/>
+                      <a:r>
+                        <a:rPr lang="en-US" sz="1100" u="none" strike="noStrike">
+                          <a:effectLst/>
+                        </a:rPr>
+                        <a:t>-30.78125</a:t>
+                      </a:r>
+                      <a:endParaRPr lang="en-US" sz="1100" b="0" i="0" u="none" strike="noStrike">
+                        <a:solidFill>
+                          <a:srgbClr val="000000"/>
+                        </a:solidFill>
+                        <a:effectLst/>
+                        <a:latin typeface="Calibri" panose="020F0502020204030204" pitchFamily="34" charset="0"/>
+                      </a:endParaRPr>
+                    </a:p>
+                  </a:txBody>
+                  <a:tcPr marL="9525" marR="9525" marT="9525" marB="0" anchor="b"/>
+                </a:tc>
+                <a:tc>
+                  <a:txBody>
+                    <a:bodyPr/>
+                    <a:lstStyle/>
+                    <a:p>
+                      <a:pPr algn="r" fontAlgn="b"/>
+                      <a:r>
+                        <a:rPr lang="en-US" sz="1100" u="none" strike="noStrike">
+                          <a:effectLst/>
+                        </a:rPr>
+                        <a:t>-1.334225158</a:t>
+                      </a:r>
+                      <a:endParaRPr lang="en-US" sz="1100" b="0" i="0" u="none" strike="noStrike">
+                        <a:solidFill>
+                          <a:srgbClr val="000000"/>
+                        </a:solidFill>
+                        <a:effectLst/>
+                        <a:latin typeface="Calibri" panose="020F0502020204030204" pitchFamily="34" charset="0"/>
+                      </a:endParaRPr>
+                    </a:p>
+                  </a:txBody>
+                  <a:tcPr marL="9525" marR="9525" marT="9525" marB="0" anchor="b"/>
+                </a:tc>
+                <a:tc>
+                  <a:txBody>
+                    <a:bodyPr/>
+                    <a:lstStyle/>
+                    <a:p>
+                      <a:pPr algn="r" fontAlgn="b"/>
+                      <a:r>
+                        <a:rPr lang="en-US" sz="1100" u="none" strike="noStrike">
+                          <a:effectLst/>
+                        </a:rPr>
+                        <a:t>2</a:t>
+                      </a:r>
+                      <a:endParaRPr lang="en-US" sz="1100" b="0" i="0" u="none" strike="noStrike">
+                        <a:solidFill>
+                          <a:srgbClr val="000000"/>
+                        </a:solidFill>
+                        <a:effectLst/>
+                        <a:latin typeface="Calibri" panose="020F0502020204030204" pitchFamily="34" charset="0"/>
+                      </a:endParaRPr>
+                    </a:p>
+                  </a:txBody>
+                  <a:tcPr marL="9525" marR="9525" marT="9525" marB="0" anchor="b"/>
+                </a:tc>
+                <a:tc>
+                  <a:txBody>
+                    <a:bodyPr/>
+                    <a:lstStyle/>
+                    <a:p>
+                      <a:pPr algn="r" fontAlgn="b"/>
+                      <a:r>
+                        <a:rPr lang="en-US" sz="1100" u="none" strike="noStrike">
+                          <a:effectLst/>
+                        </a:rPr>
+                        <a:t>0.15</a:t>
+                      </a:r>
+                      <a:endParaRPr lang="en-US" sz="1100" b="0" i="0" u="none" strike="noStrike">
+                        <a:solidFill>
+                          <a:srgbClr val="000000"/>
+                        </a:solidFill>
+                        <a:effectLst/>
+                        <a:latin typeface="Calibri" panose="020F0502020204030204" pitchFamily="34" charset="0"/>
+                      </a:endParaRPr>
+                    </a:p>
+                  </a:txBody>
+                  <a:tcPr marL="9525" marR="9525" marT="9525" marB="0" anchor="b"/>
+                </a:tc>
+                <a:tc>
+                  <a:txBody>
+                    <a:bodyPr/>
+                    <a:lstStyle/>
+                    <a:p>
+                      <a:pPr algn="r" fontAlgn="b"/>
+                      <a:r>
+                        <a:rPr lang="en-US" sz="1100" u="none" strike="noStrike">
+                          <a:effectLst/>
+                        </a:rPr>
+                        <a:t>-1.036433389</a:t>
+                      </a:r>
+                      <a:endParaRPr lang="en-US" sz="1100" b="0" i="0" u="none" strike="noStrike">
+                        <a:solidFill>
+                          <a:srgbClr val="000000"/>
+                        </a:solidFill>
+                        <a:effectLst/>
+                        <a:latin typeface="Calibri" panose="020F0502020204030204" pitchFamily="34" charset="0"/>
+                      </a:endParaRPr>
+                    </a:p>
+                  </a:txBody>
+                  <a:tcPr marL="9525" marR="9525" marT="9525" marB="0" anchor="b"/>
+                </a:tc>
+                <a:extLst>
+                  <a:ext uri="{0D108BD9-81ED-4DB2-BD59-A6C34878D82A}">
+                    <a16:rowId xmlns:a16="http://schemas.microsoft.com/office/drawing/2014/main" val="1241464077"/>
+                  </a:ext>
+                </a:extLst>
+              </a:tr>
+              <a:tr h="237553">
+                <a:tc>
+                  <a:txBody>
+                    <a:bodyPr/>
+                    <a:lstStyle/>
+                    <a:p>
+                      <a:pPr algn="r" fontAlgn="b"/>
+                      <a:r>
+                        <a:rPr lang="en-US" sz="1100" u="none" strike="noStrike">
+                          <a:effectLst/>
+                        </a:rPr>
+                        <a:t>-13.59375</a:t>
+                      </a:r>
+                      <a:endParaRPr lang="en-US" sz="1100" b="0" i="0" u="none" strike="noStrike">
+                        <a:solidFill>
+                          <a:srgbClr val="000000"/>
+                        </a:solidFill>
+                        <a:effectLst/>
+                        <a:latin typeface="Calibri" panose="020F0502020204030204" pitchFamily="34" charset="0"/>
+                      </a:endParaRPr>
+                    </a:p>
+                  </a:txBody>
+                  <a:tcPr marL="9525" marR="9525" marT="9525" marB="0" anchor="b"/>
+                </a:tc>
+                <a:tc>
+                  <a:txBody>
+                    <a:bodyPr/>
+                    <a:lstStyle/>
+                    <a:p>
+                      <a:pPr algn="r" fontAlgn="b"/>
+                      <a:r>
+                        <a:rPr lang="en-US" sz="1100" u="none" strike="noStrike">
+                          <a:effectLst/>
+                        </a:rPr>
+                        <a:t>-0.589226339</a:t>
+                      </a:r>
+                      <a:endParaRPr lang="en-US" sz="1100" b="0" i="0" u="none" strike="noStrike">
+                        <a:solidFill>
+                          <a:srgbClr val="000000"/>
+                        </a:solidFill>
+                        <a:effectLst/>
+                        <a:latin typeface="Calibri" panose="020F0502020204030204" pitchFamily="34" charset="0"/>
+                      </a:endParaRPr>
+                    </a:p>
+                  </a:txBody>
+                  <a:tcPr marL="9525" marR="9525" marT="9525" marB="0" anchor="b"/>
+                </a:tc>
+                <a:tc>
+                  <a:txBody>
+                    <a:bodyPr/>
+                    <a:lstStyle/>
+                    <a:p>
+                      <a:pPr algn="r" fontAlgn="b"/>
+                      <a:r>
+                        <a:rPr lang="en-US" sz="1100" u="none" strike="noStrike">
+                          <a:effectLst/>
+                        </a:rPr>
+                        <a:t>3</a:t>
+                      </a:r>
+                      <a:endParaRPr lang="en-US" sz="1100" b="0" i="0" u="none" strike="noStrike">
+                        <a:solidFill>
+                          <a:srgbClr val="000000"/>
+                        </a:solidFill>
+                        <a:effectLst/>
+                        <a:latin typeface="Calibri" panose="020F0502020204030204" pitchFamily="34" charset="0"/>
+                      </a:endParaRPr>
+                    </a:p>
+                  </a:txBody>
+                  <a:tcPr marL="9525" marR="9525" marT="9525" marB="0" anchor="b"/>
+                </a:tc>
+                <a:tc>
+                  <a:txBody>
+                    <a:bodyPr/>
+                    <a:lstStyle/>
+                    <a:p>
+                      <a:pPr algn="r" fontAlgn="b"/>
+                      <a:r>
+                        <a:rPr lang="en-US" sz="1100" u="none" strike="noStrike">
+                          <a:effectLst/>
+                        </a:rPr>
+                        <a:t>0.25</a:t>
+                      </a:r>
+                      <a:endParaRPr lang="en-US" sz="1100" b="0" i="0" u="none" strike="noStrike">
+                        <a:solidFill>
+                          <a:srgbClr val="000000"/>
+                        </a:solidFill>
+                        <a:effectLst/>
+                        <a:latin typeface="Calibri" panose="020F0502020204030204" pitchFamily="34" charset="0"/>
+                      </a:endParaRPr>
+                    </a:p>
+                  </a:txBody>
+                  <a:tcPr marL="9525" marR="9525" marT="9525" marB="0" anchor="b"/>
+                </a:tc>
+                <a:tc>
+                  <a:txBody>
+                    <a:bodyPr/>
+                    <a:lstStyle/>
+                    <a:p>
+                      <a:pPr algn="r" fontAlgn="b"/>
+                      <a:r>
+                        <a:rPr lang="en-US" sz="1100" u="none" strike="noStrike">
+                          <a:effectLst/>
+                        </a:rPr>
+                        <a:t>-0.67448975</a:t>
+                      </a:r>
+                      <a:endParaRPr lang="en-US" sz="1100" b="0" i="0" u="none" strike="noStrike">
+                        <a:solidFill>
+                          <a:srgbClr val="000000"/>
+                        </a:solidFill>
+                        <a:effectLst/>
+                        <a:latin typeface="Calibri" panose="020F0502020204030204" pitchFamily="34" charset="0"/>
+                      </a:endParaRPr>
+                    </a:p>
+                  </a:txBody>
+                  <a:tcPr marL="9525" marR="9525" marT="9525" marB="0" anchor="b"/>
+                </a:tc>
+                <a:extLst>
+                  <a:ext uri="{0D108BD9-81ED-4DB2-BD59-A6C34878D82A}">
+                    <a16:rowId xmlns:a16="http://schemas.microsoft.com/office/drawing/2014/main" val="2812898134"/>
+                  </a:ext>
+                </a:extLst>
+              </a:tr>
+              <a:tr h="237553">
+                <a:tc>
+                  <a:txBody>
+                    <a:bodyPr/>
+                    <a:lstStyle/>
+                    <a:p>
+                      <a:pPr algn="r" fontAlgn="b"/>
+                      <a:r>
+                        <a:rPr lang="en-US" sz="1100" u="none" strike="noStrike">
+                          <a:effectLst/>
+                        </a:rPr>
+                        <a:t>-6.484375</a:t>
+                      </a:r>
+                      <a:endParaRPr lang="en-US" sz="1100" b="0" i="0" u="none" strike="noStrike">
+                        <a:solidFill>
+                          <a:srgbClr val="000000"/>
+                        </a:solidFill>
+                        <a:effectLst/>
+                        <a:latin typeface="Calibri" panose="020F0502020204030204" pitchFamily="34" charset="0"/>
+                      </a:endParaRPr>
+                    </a:p>
+                  </a:txBody>
+                  <a:tcPr marL="9525" marR="9525" marT="9525" marB="0" anchor="b"/>
+                </a:tc>
+                <a:tc>
+                  <a:txBody>
+                    <a:bodyPr/>
+                    <a:lstStyle/>
+                    <a:p>
+                      <a:pPr algn="r" fontAlgn="b"/>
+                      <a:r>
+                        <a:rPr lang="en-US" sz="1100" u="none" strike="noStrike">
+                          <a:effectLst/>
+                        </a:rPr>
+                        <a:t>-0.281067736</a:t>
+                      </a:r>
+                      <a:endParaRPr lang="en-US" sz="1100" b="0" i="0" u="none" strike="noStrike">
+                        <a:solidFill>
+                          <a:srgbClr val="000000"/>
+                        </a:solidFill>
+                        <a:effectLst/>
+                        <a:latin typeface="Calibri" panose="020F0502020204030204" pitchFamily="34" charset="0"/>
+                      </a:endParaRPr>
+                    </a:p>
+                  </a:txBody>
+                  <a:tcPr marL="9525" marR="9525" marT="9525" marB="0" anchor="b"/>
+                </a:tc>
+                <a:tc>
+                  <a:txBody>
+                    <a:bodyPr/>
+                    <a:lstStyle/>
+                    <a:p>
+                      <a:pPr algn="r" fontAlgn="b"/>
+                      <a:r>
+                        <a:rPr lang="en-US" sz="1100" u="none" strike="noStrike">
+                          <a:effectLst/>
+                        </a:rPr>
+                        <a:t>4</a:t>
+                      </a:r>
+                      <a:endParaRPr lang="en-US" sz="1100" b="0" i="0" u="none" strike="noStrike">
+                        <a:solidFill>
+                          <a:srgbClr val="000000"/>
+                        </a:solidFill>
+                        <a:effectLst/>
+                        <a:latin typeface="Calibri" panose="020F0502020204030204" pitchFamily="34" charset="0"/>
+                      </a:endParaRPr>
+                    </a:p>
+                  </a:txBody>
+                  <a:tcPr marL="9525" marR="9525" marT="9525" marB="0" anchor="b"/>
+                </a:tc>
+                <a:tc>
+                  <a:txBody>
+                    <a:bodyPr/>
+                    <a:lstStyle/>
+                    <a:p>
+                      <a:pPr algn="r" fontAlgn="b"/>
+                      <a:r>
+                        <a:rPr lang="en-US" sz="1100" u="none" strike="noStrike">
+                          <a:effectLst/>
+                        </a:rPr>
+                        <a:t>0.35</a:t>
+                      </a:r>
+                      <a:endParaRPr lang="en-US" sz="1100" b="0" i="0" u="none" strike="noStrike">
+                        <a:solidFill>
+                          <a:srgbClr val="000000"/>
+                        </a:solidFill>
+                        <a:effectLst/>
+                        <a:latin typeface="Calibri" panose="020F0502020204030204" pitchFamily="34" charset="0"/>
+                      </a:endParaRPr>
+                    </a:p>
+                  </a:txBody>
+                  <a:tcPr marL="9525" marR="9525" marT="9525" marB="0" anchor="b"/>
+                </a:tc>
+                <a:tc>
+                  <a:txBody>
+                    <a:bodyPr/>
+                    <a:lstStyle/>
+                    <a:p>
+                      <a:pPr algn="r" fontAlgn="b"/>
+                      <a:r>
+                        <a:rPr lang="en-US" sz="1100" u="none" strike="noStrike">
+                          <a:effectLst/>
+                        </a:rPr>
+                        <a:t>-0.385320466</a:t>
+                      </a:r>
+                      <a:endParaRPr lang="en-US" sz="1100" b="0" i="0" u="none" strike="noStrike">
+                        <a:solidFill>
+                          <a:srgbClr val="000000"/>
+                        </a:solidFill>
+                        <a:effectLst/>
+                        <a:latin typeface="Calibri" panose="020F0502020204030204" pitchFamily="34" charset="0"/>
+                      </a:endParaRPr>
+                    </a:p>
+                  </a:txBody>
+                  <a:tcPr marL="9525" marR="9525" marT="9525" marB="0" anchor="b"/>
+                </a:tc>
+                <a:extLst>
+                  <a:ext uri="{0D108BD9-81ED-4DB2-BD59-A6C34878D82A}">
+                    <a16:rowId xmlns:a16="http://schemas.microsoft.com/office/drawing/2014/main" val="1186057859"/>
+                  </a:ext>
+                </a:extLst>
+              </a:tr>
+              <a:tr h="237553">
+                <a:tc>
+                  <a:txBody>
+                    <a:bodyPr/>
+                    <a:lstStyle/>
+                    <a:p>
+                      <a:pPr algn="r" fontAlgn="b"/>
+                      <a:r>
+                        <a:rPr lang="en-US" sz="1100" u="none" strike="noStrike">
+                          <a:effectLst/>
+                        </a:rPr>
+                        <a:t>-3.671875</a:t>
+                      </a:r>
+                      <a:endParaRPr lang="en-US" sz="1100" b="0" i="0" u="none" strike="noStrike">
+                        <a:solidFill>
+                          <a:srgbClr val="000000"/>
+                        </a:solidFill>
+                        <a:effectLst/>
+                        <a:latin typeface="Calibri" panose="020F0502020204030204" pitchFamily="34" charset="0"/>
+                      </a:endParaRPr>
+                    </a:p>
+                  </a:txBody>
+                  <a:tcPr marL="9525" marR="9525" marT="9525" marB="0" anchor="b"/>
+                </a:tc>
+                <a:tc>
+                  <a:txBody>
+                    <a:bodyPr/>
+                    <a:lstStyle/>
+                    <a:p>
+                      <a:pPr algn="r" fontAlgn="b"/>
+                      <a:r>
+                        <a:rPr lang="en-US" sz="1100" u="none" strike="noStrike">
+                          <a:effectLst/>
+                        </a:rPr>
+                        <a:t>-0.159158839</a:t>
+                      </a:r>
+                      <a:endParaRPr lang="en-US" sz="1100" b="0" i="0" u="none" strike="noStrike">
+                        <a:solidFill>
+                          <a:srgbClr val="000000"/>
+                        </a:solidFill>
+                        <a:effectLst/>
+                        <a:latin typeface="Calibri" panose="020F0502020204030204" pitchFamily="34" charset="0"/>
+                      </a:endParaRPr>
+                    </a:p>
+                  </a:txBody>
+                  <a:tcPr marL="9525" marR="9525" marT="9525" marB="0" anchor="b"/>
+                </a:tc>
+                <a:tc>
+                  <a:txBody>
+                    <a:bodyPr/>
+                    <a:lstStyle/>
+                    <a:p>
+                      <a:pPr algn="r" fontAlgn="b"/>
+                      <a:r>
+                        <a:rPr lang="en-US" sz="1100" u="none" strike="noStrike">
+                          <a:effectLst/>
+                        </a:rPr>
+                        <a:t>5</a:t>
+                      </a:r>
+                      <a:endParaRPr lang="en-US" sz="1100" b="0" i="0" u="none" strike="noStrike">
+                        <a:solidFill>
+                          <a:srgbClr val="000000"/>
+                        </a:solidFill>
+                        <a:effectLst/>
+                        <a:latin typeface="Calibri" panose="020F0502020204030204" pitchFamily="34" charset="0"/>
+                      </a:endParaRPr>
+                    </a:p>
+                  </a:txBody>
+                  <a:tcPr marL="9525" marR="9525" marT="9525" marB="0" anchor="b"/>
+                </a:tc>
+                <a:tc>
+                  <a:txBody>
+                    <a:bodyPr/>
+                    <a:lstStyle/>
+                    <a:p>
+                      <a:pPr algn="r" fontAlgn="b"/>
+                      <a:r>
+                        <a:rPr lang="en-US" sz="1100" u="none" strike="noStrike">
+                          <a:effectLst/>
+                        </a:rPr>
+                        <a:t>0.45</a:t>
+                      </a:r>
+                      <a:endParaRPr lang="en-US" sz="1100" b="0" i="0" u="none" strike="noStrike">
+                        <a:solidFill>
+                          <a:srgbClr val="000000"/>
+                        </a:solidFill>
+                        <a:effectLst/>
+                        <a:latin typeface="Calibri" panose="020F0502020204030204" pitchFamily="34" charset="0"/>
+                      </a:endParaRPr>
+                    </a:p>
+                  </a:txBody>
+                  <a:tcPr marL="9525" marR="9525" marT="9525" marB="0" anchor="b"/>
+                </a:tc>
+                <a:tc>
+                  <a:txBody>
+                    <a:bodyPr/>
+                    <a:lstStyle/>
+                    <a:p>
+                      <a:pPr algn="r" fontAlgn="b"/>
+                      <a:r>
+                        <a:rPr lang="en-US" sz="1100" u="none" strike="noStrike" dirty="0">
+                          <a:effectLst/>
+                        </a:rPr>
+                        <a:t>-0.125661347</a:t>
+                      </a:r>
+                      <a:endParaRPr lang="en-US" sz="1100" b="0" i="0" u="none" strike="noStrike" dirty="0">
+                        <a:solidFill>
+                          <a:srgbClr val="000000"/>
+                        </a:solidFill>
+                        <a:effectLst/>
+                        <a:latin typeface="Calibri" panose="020F0502020204030204" pitchFamily="34" charset="0"/>
+                      </a:endParaRPr>
+                    </a:p>
+                  </a:txBody>
+                  <a:tcPr marL="9525" marR="9525" marT="9525" marB="0" anchor="b"/>
+                </a:tc>
+                <a:extLst>
+                  <a:ext uri="{0D108BD9-81ED-4DB2-BD59-A6C34878D82A}">
+                    <a16:rowId xmlns:a16="http://schemas.microsoft.com/office/drawing/2014/main" val="1603539574"/>
+                  </a:ext>
+                </a:extLst>
+              </a:tr>
+              <a:tr h="237553">
+                <a:tc>
+                  <a:txBody>
+                    <a:bodyPr/>
+                    <a:lstStyle/>
+                    <a:p>
+                      <a:pPr algn="r" fontAlgn="b"/>
+                      <a:r>
+                        <a:rPr lang="en-US" sz="1100" u="none" strike="noStrike">
+                          <a:effectLst/>
+                        </a:rPr>
+                        <a:t>-0.859375</a:t>
+                      </a:r>
+                      <a:endParaRPr lang="en-US" sz="1100" b="0" i="0" u="none" strike="noStrike">
+                        <a:solidFill>
+                          <a:srgbClr val="000000"/>
+                        </a:solidFill>
+                        <a:effectLst/>
+                        <a:latin typeface="Calibri" panose="020F0502020204030204" pitchFamily="34" charset="0"/>
+                      </a:endParaRPr>
+                    </a:p>
+                  </a:txBody>
+                  <a:tcPr marL="9525" marR="9525" marT="9525" marB="0" anchor="b"/>
+                </a:tc>
+                <a:tc>
+                  <a:txBody>
+                    <a:bodyPr/>
+                    <a:lstStyle/>
+                    <a:p>
+                      <a:pPr algn="r" fontAlgn="b"/>
+                      <a:r>
+                        <a:rPr lang="en-US" sz="1100" u="none" strike="noStrike">
+                          <a:effectLst/>
+                        </a:rPr>
+                        <a:t>-0.037249941</a:t>
+                      </a:r>
+                      <a:endParaRPr lang="en-US" sz="1100" b="0" i="0" u="none" strike="noStrike">
+                        <a:solidFill>
+                          <a:srgbClr val="000000"/>
+                        </a:solidFill>
+                        <a:effectLst/>
+                        <a:latin typeface="Calibri" panose="020F0502020204030204" pitchFamily="34" charset="0"/>
+                      </a:endParaRPr>
+                    </a:p>
+                  </a:txBody>
+                  <a:tcPr marL="9525" marR="9525" marT="9525" marB="0" anchor="b"/>
+                </a:tc>
+                <a:tc>
+                  <a:txBody>
+                    <a:bodyPr/>
+                    <a:lstStyle/>
+                    <a:p>
+                      <a:pPr algn="r" fontAlgn="b"/>
+                      <a:r>
+                        <a:rPr lang="en-US" sz="1100" u="none" strike="noStrike">
+                          <a:effectLst/>
+                        </a:rPr>
+                        <a:t>6</a:t>
+                      </a:r>
+                      <a:endParaRPr lang="en-US" sz="1100" b="0" i="0" u="none" strike="noStrike">
+                        <a:solidFill>
+                          <a:srgbClr val="000000"/>
+                        </a:solidFill>
+                        <a:effectLst/>
+                        <a:latin typeface="Calibri" panose="020F0502020204030204" pitchFamily="34" charset="0"/>
+                      </a:endParaRPr>
+                    </a:p>
+                  </a:txBody>
+                  <a:tcPr marL="9525" marR="9525" marT="9525" marB="0" anchor="b"/>
+                </a:tc>
+                <a:tc>
+                  <a:txBody>
+                    <a:bodyPr/>
+                    <a:lstStyle/>
+                    <a:p>
+                      <a:pPr algn="r" fontAlgn="b"/>
+                      <a:r>
+                        <a:rPr lang="en-US" sz="1100" u="none" strike="noStrike">
+                          <a:effectLst/>
+                        </a:rPr>
+                        <a:t>0.55</a:t>
+                      </a:r>
+                      <a:endParaRPr lang="en-US" sz="1100" b="0" i="0" u="none" strike="noStrike">
+                        <a:solidFill>
+                          <a:srgbClr val="000000"/>
+                        </a:solidFill>
+                        <a:effectLst/>
+                        <a:latin typeface="Calibri" panose="020F0502020204030204" pitchFamily="34" charset="0"/>
+                      </a:endParaRPr>
+                    </a:p>
+                  </a:txBody>
+                  <a:tcPr marL="9525" marR="9525" marT="9525" marB="0" anchor="b"/>
+                </a:tc>
+                <a:tc>
+                  <a:txBody>
+                    <a:bodyPr/>
+                    <a:lstStyle/>
+                    <a:p>
+                      <a:pPr algn="r" fontAlgn="b"/>
+                      <a:r>
+                        <a:rPr lang="en-US" sz="1100" u="none" strike="noStrike">
+                          <a:effectLst/>
+                        </a:rPr>
+                        <a:t>0.125661347</a:t>
+                      </a:r>
+                      <a:endParaRPr lang="en-US" sz="1100" b="0" i="0" u="none" strike="noStrike">
+                        <a:solidFill>
+                          <a:srgbClr val="000000"/>
+                        </a:solidFill>
+                        <a:effectLst/>
+                        <a:latin typeface="Calibri" panose="020F0502020204030204" pitchFamily="34" charset="0"/>
+                      </a:endParaRPr>
+                    </a:p>
+                  </a:txBody>
+                  <a:tcPr marL="9525" marR="9525" marT="9525" marB="0" anchor="b"/>
+                </a:tc>
+                <a:extLst>
+                  <a:ext uri="{0D108BD9-81ED-4DB2-BD59-A6C34878D82A}">
+                    <a16:rowId xmlns:a16="http://schemas.microsoft.com/office/drawing/2014/main" val="991340816"/>
+                  </a:ext>
+                </a:extLst>
+              </a:tr>
+              <a:tr h="237553">
+                <a:tc>
+                  <a:txBody>
+                    <a:bodyPr/>
+                    <a:lstStyle/>
+                    <a:p>
+                      <a:pPr algn="r" fontAlgn="b"/>
+                      <a:r>
+                        <a:rPr lang="en-US" sz="1100" u="none" strike="noStrike">
+                          <a:effectLst/>
+                        </a:rPr>
+                        <a:t>7.734375</a:t>
+                      </a:r>
+                      <a:endParaRPr lang="en-US" sz="1100" b="0" i="0" u="none" strike="noStrike">
+                        <a:solidFill>
+                          <a:srgbClr val="000000"/>
+                        </a:solidFill>
+                        <a:effectLst/>
+                        <a:latin typeface="Calibri" panose="020F0502020204030204" pitchFamily="34" charset="0"/>
+                      </a:endParaRPr>
+                    </a:p>
+                  </a:txBody>
+                  <a:tcPr marL="9525" marR="9525" marT="9525" marB="0" anchor="b"/>
+                </a:tc>
+                <a:tc>
+                  <a:txBody>
+                    <a:bodyPr/>
+                    <a:lstStyle/>
+                    <a:p>
+                      <a:pPr algn="r" fontAlgn="b"/>
+                      <a:r>
+                        <a:rPr lang="en-US" sz="1100" u="none" strike="noStrike">
+                          <a:effectLst/>
+                        </a:rPr>
+                        <a:t>0.335249469</a:t>
+                      </a:r>
+                      <a:endParaRPr lang="en-US" sz="1100" b="0" i="0" u="none" strike="noStrike">
+                        <a:solidFill>
+                          <a:srgbClr val="000000"/>
+                        </a:solidFill>
+                        <a:effectLst/>
+                        <a:latin typeface="Calibri" panose="020F0502020204030204" pitchFamily="34" charset="0"/>
+                      </a:endParaRPr>
+                    </a:p>
+                  </a:txBody>
+                  <a:tcPr marL="9525" marR="9525" marT="9525" marB="0" anchor="b"/>
+                </a:tc>
+                <a:tc>
+                  <a:txBody>
+                    <a:bodyPr/>
+                    <a:lstStyle/>
+                    <a:p>
+                      <a:pPr algn="r" fontAlgn="b"/>
+                      <a:r>
+                        <a:rPr lang="en-US" sz="1100" u="none" strike="noStrike">
+                          <a:effectLst/>
+                        </a:rPr>
+                        <a:t>7</a:t>
+                      </a:r>
+                      <a:endParaRPr lang="en-US" sz="1100" b="0" i="0" u="none" strike="noStrike">
+                        <a:solidFill>
+                          <a:srgbClr val="000000"/>
+                        </a:solidFill>
+                        <a:effectLst/>
+                        <a:latin typeface="Calibri" panose="020F0502020204030204" pitchFamily="34" charset="0"/>
+                      </a:endParaRPr>
+                    </a:p>
+                  </a:txBody>
+                  <a:tcPr marL="9525" marR="9525" marT="9525" marB="0" anchor="b"/>
+                </a:tc>
+                <a:tc>
+                  <a:txBody>
+                    <a:bodyPr/>
+                    <a:lstStyle/>
+                    <a:p>
+                      <a:pPr algn="r" fontAlgn="b"/>
+                      <a:r>
+                        <a:rPr lang="en-US" sz="1100" u="none" strike="noStrike">
+                          <a:effectLst/>
+                        </a:rPr>
+                        <a:t>0.65</a:t>
+                      </a:r>
+                      <a:endParaRPr lang="en-US" sz="1100" b="0" i="0" u="none" strike="noStrike">
+                        <a:solidFill>
+                          <a:srgbClr val="000000"/>
+                        </a:solidFill>
+                        <a:effectLst/>
+                        <a:latin typeface="Calibri" panose="020F0502020204030204" pitchFamily="34" charset="0"/>
+                      </a:endParaRPr>
+                    </a:p>
+                  </a:txBody>
+                  <a:tcPr marL="9525" marR="9525" marT="9525" marB="0" anchor="b"/>
+                </a:tc>
+                <a:tc>
+                  <a:txBody>
+                    <a:bodyPr/>
+                    <a:lstStyle/>
+                    <a:p>
+                      <a:pPr algn="r" fontAlgn="b"/>
+                      <a:r>
+                        <a:rPr lang="en-US" sz="1100" u="none" strike="noStrike">
+                          <a:effectLst/>
+                        </a:rPr>
+                        <a:t>0.385320466</a:t>
+                      </a:r>
+                      <a:endParaRPr lang="en-US" sz="1100" b="0" i="0" u="none" strike="noStrike">
+                        <a:solidFill>
+                          <a:srgbClr val="000000"/>
+                        </a:solidFill>
+                        <a:effectLst/>
+                        <a:latin typeface="Calibri" panose="020F0502020204030204" pitchFamily="34" charset="0"/>
+                      </a:endParaRPr>
+                    </a:p>
+                  </a:txBody>
+                  <a:tcPr marL="9525" marR="9525" marT="9525" marB="0" anchor="b"/>
+                </a:tc>
+                <a:extLst>
+                  <a:ext uri="{0D108BD9-81ED-4DB2-BD59-A6C34878D82A}">
+                    <a16:rowId xmlns:a16="http://schemas.microsoft.com/office/drawing/2014/main" val="2235198046"/>
+                  </a:ext>
+                </a:extLst>
+              </a:tr>
+              <a:tr h="237553">
+                <a:tc>
+                  <a:txBody>
+                    <a:bodyPr/>
+                    <a:lstStyle/>
+                    <a:p>
+                      <a:pPr algn="r" fontAlgn="b"/>
+                      <a:r>
+                        <a:rPr lang="en-US" sz="1100" u="none" strike="noStrike">
+                          <a:effectLst/>
+                        </a:rPr>
+                        <a:t>14.921875</a:t>
+                      </a:r>
+                      <a:endParaRPr lang="en-US" sz="1100" b="0" i="0" u="none" strike="noStrike">
+                        <a:solidFill>
+                          <a:srgbClr val="000000"/>
+                        </a:solidFill>
+                        <a:effectLst/>
+                        <a:latin typeface="Calibri" panose="020F0502020204030204" pitchFamily="34" charset="0"/>
+                      </a:endParaRPr>
+                    </a:p>
+                  </a:txBody>
+                  <a:tcPr marL="9525" marR="9525" marT="9525" marB="0" anchor="b"/>
+                </a:tc>
+                <a:tc>
+                  <a:txBody>
+                    <a:bodyPr/>
+                    <a:lstStyle/>
+                    <a:p>
+                      <a:pPr algn="r" fontAlgn="b"/>
+                      <a:r>
+                        <a:rPr lang="en-US" sz="1100" u="none" strike="noStrike">
+                          <a:effectLst/>
+                        </a:rPr>
+                        <a:t>0.646794429</a:t>
+                      </a:r>
+                      <a:endParaRPr lang="en-US" sz="1100" b="0" i="0" u="none" strike="noStrike">
+                        <a:solidFill>
+                          <a:srgbClr val="000000"/>
+                        </a:solidFill>
+                        <a:effectLst/>
+                        <a:latin typeface="Calibri" panose="020F0502020204030204" pitchFamily="34" charset="0"/>
+                      </a:endParaRPr>
+                    </a:p>
+                  </a:txBody>
+                  <a:tcPr marL="9525" marR="9525" marT="9525" marB="0" anchor="b"/>
+                </a:tc>
+                <a:tc>
+                  <a:txBody>
+                    <a:bodyPr/>
+                    <a:lstStyle/>
+                    <a:p>
+                      <a:pPr algn="r" fontAlgn="b"/>
+                      <a:r>
+                        <a:rPr lang="en-US" sz="1100" u="none" strike="noStrike">
+                          <a:effectLst/>
+                        </a:rPr>
+                        <a:t>8</a:t>
+                      </a:r>
+                      <a:endParaRPr lang="en-US" sz="1100" b="0" i="0" u="none" strike="noStrike">
+                        <a:solidFill>
+                          <a:srgbClr val="000000"/>
+                        </a:solidFill>
+                        <a:effectLst/>
+                        <a:latin typeface="Calibri" panose="020F0502020204030204" pitchFamily="34" charset="0"/>
+                      </a:endParaRPr>
+                    </a:p>
+                  </a:txBody>
+                  <a:tcPr marL="9525" marR="9525" marT="9525" marB="0" anchor="b"/>
+                </a:tc>
+                <a:tc>
+                  <a:txBody>
+                    <a:bodyPr/>
+                    <a:lstStyle/>
+                    <a:p>
+                      <a:pPr algn="r" fontAlgn="b"/>
+                      <a:r>
+                        <a:rPr lang="en-US" sz="1100" u="none" strike="noStrike">
+                          <a:effectLst/>
+                        </a:rPr>
+                        <a:t>0.75</a:t>
+                      </a:r>
+                      <a:endParaRPr lang="en-US" sz="1100" b="0" i="0" u="none" strike="noStrike">
+                        <a:solidFill>
+                          <a:srgbClr val="000000"/>
+                        </a:solidFill>
+                        <a:effectLst/>
+                        <a:latin typeface="Calibri" panose="020F0502020204030204" pitchFamily="34" charset="0"/>
+                      </a:endParaRPr>
+                    </a:p>
+                  </a:txBody>
+                  <a:tcPr marL="9525" marR="9525" marT="9525" marB="0" anchor="b"/>
+                </a:tc>
+                <a:tc>
+                  <a:txBody>
+                    <a:bodyPr/>
+                    <a:lstStyle/>
+                    <a:p>
+                      <a:pPr algn="r" fontAlgn="b"/>
+                      <a:r>
+                        <a:rPr lang="en-US" sz="1100" u="none" strike="noStrike">
+                          <a:effectLst/>
+                        </a:rPr>
+                        <a:t>0.67448975</a:t>
+                      </a:r>
+                      <a:endParaRPr lang="en-US" sz="1100" b="0" i="0" u="none" strike="noStrike">
+                        <a:solidFill>
+                          <a:srgbClr val="000000"/>
+                        </a:solidFill>
+                        <a:effectLst/>
+                        <a:latin typeface="Calibri" panose="020F0502020204030204" pitchFamily="34" charset="0"/>
+                      </a:endParaRPr>
+                    </a:p>
+                  </a:txBody>
+                  <a:tcPr marL="9525" marR="9525" marT="9525" marB="0" anchor="b"/>
+                </a:tc>
+                <a:extLst>
+                  <a:ext uri="{0D108BD9-81ED-4DB2-BD59-A6C34878D82A}">
+                    <a16:rowId xmlns:a16="http://schemas.microsoft.com/office/drawing/2014/main" val="2915224401"/>
+                  </a:ext>
+                </a:extLst>
+              </a:tr>
+              <a:tr h="237553">
+                <a:tc>
+                  <a:txBody>
+                    <a:bodyPr/>
+                    <a:lstStyle/>
+                    <a:p>
+                      <a:pPr algn="r" fontAlgn="b"/>
+                      <a:r>
+                        <a:rPr lang="en-US" sz="1100" u="none" strike="noStrike">
+                          <a:effectLst/>
+                        </a:rPr>
+                        <a:t>26.328125</a:t>
+                      </a:r>
+                      <a:endParaRPr lang="en-US" sz="1100" b="0" i="0" u="none" strike="noStrike">
+                        <a:solidFill>
+                          <a:srgbClr val="000000"/>
+                        </a:solidFill>
+                        <a:effectLst/>
+                        <a:latin typeface="Calibri" panose="020F0502020204030204" pitchFamily="34" charset="0"/>
+                      </a:endParaRPr>
+                    </a:p>
+                  </a:txBody>
+                  <a:tcPr marL="9525" marR="9525" marT="9525" marB="0" anchor="b"/>
+                </a:tc>
+                <a:tc>
+                  <a:txBody>
+                    <a:bodyPr/>
+                    <a:lstStyle/>
+                    <a:p>
+                      <a:pPr algn="r" fontAlgn="b"/>
+                      <a:r>
+                        <a:rPr lang="en-US" sz="1100" u="none" strike="noStrike">
+                          <a:effectLst/>
+                        </a:rPr>
+                        <a:t>1.141202737</a:t>
+                      </a:r>
+                      <a:endParaRPr lang="en-US" sz="1100" b="0" i="0" u="none" strike="noStrike">
+                        <a:solidFill>
+                          <a:srgbClr val="000000"/>
+                        </a:solidFill>
+                        <a:effectLst/>
+                        <a:latin typeface="Calibri" panose="020F0502020204030204" pitchFamily="34" charset="0"/>
+                      </a:endParaRPr>
+                    </a:p>
+                  </a:txBody>
+                  <a:tcPr marL="9525" marR="9525" marT="9525" marB="0" anchor="b"/>
+                </a:tc>
+                <a:tc>
+                  <a:txBody>
+                    <a:bodyPr/>
+                    <a:lstStyle/>
+                    <a:p>
+                      <a:pPr algn="r" fontAlgn="b"/>
+                      <a:r>
+                        <a:rPr lang="en-US" sz="1100" u="none" strike="noStrike">
+                          <a:effectLst/>
+                        </a:rPr>
+                        <a:t>9</a:t>
+                      </a:r>
+                      <a:endParaRPr lang="en-US" sz="1100" b="0" i="0" u="none" strike="noStrike">
+                        <a:solidFill>
+                          <a:srgbClr val="000000"/>
+                        </a:solidFill>
+                        <a:effectLst/>
+                        <a:latin typeface="Calibri" panose="020F0502020204030204" pitchFamily="34" charset="0"/>
+                      </a:endParaRPr>
+                    </a:p>
+                  </a:txBody>
+                  <a:tcPr marL="9525" marR="9525" marT="9525" marB="0" anchor="b"/>
+                </a:tc>
+                <a:tc>
+                  <a:txBody>
+                    <a:bodyPr/>
+                    <a:lstStyle/>
+                    <a:p>
+                      <a:pPr algn="r" fontAlgn="b"/>
+                      <a:r>
+                        <a:rPr lang="en-US" sz="1100" u="none" strike="noStrike">
+                          <a:effectLst/>
+                        </a:rPr>
+                        <a:t>0.85</a:t>
+                      </a:r>
+                      <a:endParaRPr lang="en-US" sz="1100" b="0" i="0" u="none" strike="noStrike">
+                        <a:solidFill>
+                          <a:srgbClr val="000000"/>
+                        </a:solidFill>
+                        <a:effectLst/>
+                        <a:latin typeface="Calibri" panose="020F0502020204030204" pitchFamily="34" charset="0"/>
+                      </a:endParaRPr>
+                    </a:p>
+                  </a:txBody>
+                  <a:tcPr marL="9525" marR="9525" marT="9525" marB="0" anchor="b"/>
+                </a:tc>
+                <a:tc>
+                  <a:txBody>
+                    <a:bodyPr/>
+                    <a:lstStyle/>
+                    <a:p>
+                      <a:pPr algn="r" fontAlgn="b"/>
+                      <a:r>
+                        <a:rPr lang="en-US" sz="1100" u="none" strike="noStrike">
+                          <a:effectLst/>
+                        </a:rPr>
+                        <a:t>1.036433389</a:t>
+                      </a:r>
+                      <a:endParaRPr lang="en-US" sz="1100" b="0" i="0" u="none" strike="noStrike">
+                        <a:solidFill>
+                          <a:srgbClr val="000000"/>
+                        </a:solidFill>
+                        <a:effectLst/>
+                        <a:latin typeface="Calibri" panose="020F0502020204030204" pitchFamily="34" charset="0"/>
+                      </a:endParaRPr>
+                    </a:p>
+                  </a:txBody>
+                  <a:tcPr marL="9525" marR="9525" marT="9525" marB="0" anchor="b"/>
+                </a:tc>
+                <a:extLst>
+                  <a:ext uri="{0D108BD9-81ED-4DB2-BD59-A6C34878D82A}">
+                    <a16:rowId xmlns:a16="http://schemas.microsoft.com/office/drawing/2014/main" val="779231172"/>
+                  </a:ext>
+                </a:extLst>
+              </a:tr>
+              <a:tr h="249431">
+                <a:tc>
+                  <a:txBody>
+                    <a:bodyPr/>
+                    <a:lstStyle/>
+                    <a:p>
+                      <a:pPr algn="r" fontAlgn="b"/>
+                      <a:r>
+                        <a:rPr lang="en-US" sz="1100" u="none" strike="noStrike">
+                          <a:effectLst/>
+                        </a:rPr>
+                        <a:t>39.296875</a:t>
+                      </a:r>
+                      <a:endParaRPr lang="en-US" sz="1100" b="0" i="0" u="none" strike="noStrike">
+                        <a:solidFill>
+                          <a:srgbClr val="000000"/>
+                        </a:solidFill>
+                        <a:effectLst/>
+                        <a:latin typeface="Calibri" panose="020F0502020204030204" pitchFamily="34" charset="0"/>
+                      </a:endParaRPr>
+                    </a:p>
+                  </a:txBody>
+                  <a:tcPr marL="9525" marR="9525" marT="9525" marB="0" anchor="b"/>
+                </a:tc>
+                <a:tc>
+                  <a:txBody>
+                    <a:bodyPr/>
+                    <a:lstStyle/>
+                    <a:p>
+                      <a:pPr algn="r" fontAlgn="b"/>
+                      <a:r>
+                        <a:rPr lang="en-US" sz="1100" u="none" strike="noStrike">
+                          <a:effectLst/>
+                        </a:rPr>
+                        <a:t>1.703338209</a:t>
+                      </a:r>
+                      <a:endParaRPr lang="en-US" sz="1100" b="0" i="0" u="none" strike="noStrike">
+                        <a:solidFill>
+                          <a:srgbClr val="000000"/>
+                        </a:solidFill>
+                        <a:effectLst/>
+                        <a:latin typeface="Calibri" panose="020F0502020204030204" pitchFamily="34" charset="0"/>
+                      </a:endParaRPr>
+                    </a:p>
+                  </a:txBody>
+                  <a:tcPr marL="9525" marR="9525" marT="9525" marB="0" anchor="b"/>
+                </a:tc>
+                <a:tc>
+                  <a:txBody>
+                    <a:bodyPr/>
+                    <a:lstStyle/>
+                    <a:p>
+                      <a:pPr algn="r" fontAlgn="b"/>
+                      <a:r>
+                        <a:rPr lang="en-US" sz="1100" u="none" strike="noStrike">
+                          <a:effectLst/>
+                        </a:rPr>
+                        <a:t>10</a:t>
+                      </a:r>
+                      <a:endParaRPr lang="en-US" sz="1100" b="0" i="0" u="none" strike="noStrike">
+                        <a:solidFill>
+                          <a:srgbClr val="000000"/>
+                        </a:solidFill>
+                        <a:effectLst/>
+                        <a:latin typeface="Calibri" panose="020F0502020204030204" pitchFamily="34" charset="0"/>
+                      </a:endParaRPr>
+                    </a:p>
+                  </a:txBody>
+                  <a:tcPr marL="9525" marR="9525" marT="9525" marB="0" anchor="b"/>
+                </a:tc>
+                <a:tc>
+                  <a:txBody>
+                    <a:bodyPr/>
+                    <a:lstStyle/>
+                    <a:p>
+                      <a:pPr algn="r" fontAlgn="b"/>
+                      <a:r>
+                        <a:rPr lang="en-US" sz="1100" u="none" strike="noStrike">
+                          <a:effectLst/>
+                        </a:rPr>
+                        <a:t>0.95</a:t>
+                      </a:r>
+                      <a:endParaRPr lang="en-US" sz="1100" b="0" i="0" u="none" strike="noStrike">
+                        <a:solidFill>
+                          <a:srgbClr val="000000"/>
+                        </a:solidFill>
+                        <a:effectLst/>
+                        <a:latin typeface="Calibri" panose="020F0502020204030204" pitchFamily="34" charset="0"/>
+                      </a:endParaRPr>
+                    </a:p>
+                  </a:txBody>
+                  <a:tcPr marL="9525" marR="9525" marT="9525" marB="0" anchor="b"/>
+                </a:tc>
+                <a:tc>
+                  <a:txBody>
+                    <a:bodyPr/>
+                    <a:lstStyle/>
+                    <a:p>
+                      <a:pPr algn="r" fontAlgn="b"/>
+                      <a:r>
+                        <a:rPr lang="en-US" sz="1100" u="none" strike="noStrike" dirty="0">
+                          <a:effectLst/>
+                        </a:rPr>
+                        <a:t>1.644853627</a:t>
+                      </a:r>
+                      <a:endParaRPr lang="en-US" sz="1100" b="0" i="0" u="none" strike="noStrike" dirty="0">
+                        <a:solidFill>
+                          <a:srgbClr val="000000"/>
+                        </a:solidFill>
+                        <a:effectLst/>
+                        <a:latin typeface="Calibri" panose="020F0502020204030204" pitchFamily="34" charset="0"/>
+                      </a:endParaRPr>
+                    </a:p>
+                  </a:txBody>
+                  <a:tcPr marL="9525" marR="9525" marT="9525" marB="0" anchor="b"/>
+                </a:tc>
+                <a:extLst>
+                  <a:ext uri="{0D108BD9-81ED-4DB2-BD59-A6C34878D82A}">
+                    <a16:rowId xmlns:a16="http://schemas.microsoft.com/office/drawing/2014/main" val="2319668783"/>
+                  </a:ext>
+                </a:extLst>
+              </a:tr>
+            </a:tbl>
+          </a:graphicData>
+        </a:graphic>
+      </p:graphicFrame>
+      <p:graphicFrame>
+        <p:nvGraphicFramePr>
+          <p:cNvPr id="9" name="Chart 8">
+            <a:extLst>
+              <a:ext uri="{FF2B5EF4-FFF2-40B4-BE49-F238E27FC236}">
+                <a16:creationId xmlns:a16="http://schemas.microsoft.com/office/drawing/2014/main" id="{93428C5A-F7AD-A5A5-36DD-A42B79A28E6B}"/>
+              </a:ext>
+            </a:extLst>
+          </p:cNvPr>
+          <p:cNvGraphicFramePr>
+            <a:graphicFrameLocks/>
+          </p:cNvGraphicFramePr>
+          <p:nvPr/>
+        </p:nvGraphicFramePr>
+        <p:xfrm>
+          <a:off x="6509656" y="3900194"/>
+          <a:ext cx="4572000" cy="2743200"/>
+        </p:xfrm>
+        <a:graphic>
+          <a:graphicData uri="http://schemas.openxmlformats.org/drawingml/2006/chart">
+            <c:chart xmlns:c="http://schemas.openxmlformats.org/drawingml/2006/chart" xmlns:r="http://schemas.openxmlformats.org/officeDocument/2006/relationships" r:id="rId2"/>
+          </a:graphicData>
+        </a:graphic>
+      </p:graphicFrame>
+    </p:spTree>
+    <p:extLst>
+      <p:ext uri="{BB962C8B-B14F-4D97-AF65-F5344CB8AC3E}">
+        <p14:creationId xmlns:p14="http://schemas.microsoft.com/office/powerpoint/2010/main" val="4247717824"/>
+      </p:ext>
+    </p:extLst>
+  </p:cSld>
+  <p:clrMapOvr>
+    <a:masterClrMapping/>
+  </p:clrMapOvr>
+</p:sld>
+</file>
+
+<file path=ppt/slides/slide23.xml><?xml version="1.0" encoding="utf-8"?>
+<p:sld xmlns:a="http://schemas.openxmlformats.org/drawingml/2006/main" xmlns:r="http://schemas.openxmlformats.org/officeDocument/2006/relationships" xmlns:p="http://schemas.openxmlformats.org/presentationml/2006/main">
+  <p:cSld>
+    <p:spTree>
+      <p:nvGrpSpPr>
+        <p:cNvPr id="1" name="">
+          <a:extLst>
+            <a:ext uri="{FF2B5EF4-FFF2-40B4-BE49-F238E27FC236}">
+              <a16:creationId xmlns:a16="http://schemas.microsoft.com/office/drawing/2014/main" id="{0519B8C1-9D3F-8368-B0BC-D66ED2DD6B6C}"/>
+            </a:ext>
+          </a:extLst>
+        </p:cNvPr>
+        <p:cNvGrpSpPr/>
+        <p:nvPr/>
+      </p:nvGrpSpPr>
+      <p:grpSpPr>
+        <a:xfrm>
+          <a:off x="0" y="0"/>
+          <a:ext cx="0" cy="0"/>
+          <a:chOff x="0" y="0"/>
+          <a:chExt cx="0" cy="0"/>
+        </a:xfrm>
+      </p:grpSpPr>
+      <p:sp>
+        <p:nvSpPr>
+          <p:cNvPr id="2" name="Title 1">
+            <a:extLst>
+              <a:ext uri="{FF2B5EF4-FFF2-40B4-BE49-F238E27FC236}">
+                <a16:creationId xmlns:a16="http://schemas.microsoft.com/office/drawing/2014/main" id="{DF071550-D786-7416-0371-8FF7950E8549}"/>
+              </a:ext>
+            </a:extLst>
+          </p:cNvPr>
+          <p:cNvSpPr>
+            <a:spLocks noGrp="1"/>
+          </p:cNvSpPr>
+          <p:nvPr>
+            <p:ph type="title"/>
+          </p:nvPr>
+        </p:nvSpPr>
+        <p:spPr/>
+        <p:txBody>
+          <a:bodyPr/>
+          <a:lstStyle/>
+          <a:p>
             <a:r>
               <a:rPr lang="en-US" dirty="0"/>
-              <a:t>What is Regressions Analysis?</a:t>
-            </a:r>
+              <a:t>Assumptions of Linear Regression</a:t>
+            </a:r>
+          </a:p>
+        </p:txBody>
+      </p:sp>
+      <p:sp>
+        <p:nvSpPr>
+          <p:cNvPr id="3" name="Content Placeholder 2">
+            <a:extLst>
+              <a:ext uri="{FF2B5EF4-FFF2-40B4-BE49-F238E27FC236}">
+                <a16:creationId xmlns:a16="http://schemas.microsoft.com/office/drawing/2014/main" id="{B5EBE5AB-A5B7-7A93-34E6-EA5080D2C2C8}"/>
+              </a:ext>
+            </a:extLst>
+          </p:cNvPr>
+          <p:cNvSpPr>
+            <a:spLocks noGrp="1"/>
+          </p:cNvSpPr>
+          <p:nvPr>
+            <p:ph idx="1"/>
+          </p:nvPr>
+        </p:nvSpPr>
+        <p:spPr/>
+        <p:txBody>
+          <a:bodyPr>
+            <a:normAutofit/>
+          </a:bodyPr>
+          <a:lstStyle/>
+          <a:p>
+            <a:pPr marL="0" indent="0">
+              <a:buNone/>
+            </a:pPr>
+            <a:r>
+              <a:rPr lang="en-US" sz="2400" b="1" dirty="0"/>
+              <a:t>5. No Multicollinearity</a:t>
+            </a:r>
+          </a:p>
+          <a:p>
+            <a:r>
+              <a:rPr lang="en-US" sz="2400" dirty="0"/>
+              <a:t>Independent variables should not be too highly correlated with each other. </a:t>
+            </a:r>
+          </a:p>
+          <a:p>
+            <a:r>
+              <a:rPr lang="en-US" sz="2400" dirty="0"/>
+              <a:t>High correlation between predictors (multicollinearity) can inflate the variances of the coefficient estimates and make the model unstable.</a:t>
+            </a:r>
+          </a:p>
+          <a:p>
+            <a:pPr marL="0" indent="0">
+              <a:buNone/>
+            </a:pPr>
+            <a:r>
+              <a:rPr lang="en-US" sz="2400" b="1" dirty="0"/>
+              <a:t>Example: </a:t>
+            </a:r>
+            <a:r>
+              <a:rPr lang="en-US" sz="2400" dirty="0"/>
+              <a:t>In a regression model predicting salary based on education level and years of experience, if education level and years of experience are highly correlated, it could cause multicollinearity issues.</a:t>
+            </a:r>
+          </a:p>
+          <a:p>
+            <a:pPr marL="0" indent="0">
+              <a:buNone/>
+            </a:pPr>
+            <a:r>
+              <a:rPr lang="en-US" sz="2400" b="1" dirty="0"/>
+              <a:t>How to Test</a:t>
+            </a:r>
+            <a:r>
+              <a:rPr lang="en-US" sz="2400" dirty="0"/>
+              <a:t>: Calculate Variance Inflation Factor (VIF).</a:t>
+            </a:r>
+          </a:p>
+          <a:p>
+            <a:pPr marL="0" indent="0">
+              <a:buNone/>
+            </a:pPr>
+            <a:r>
+              <a:rPr lang="en-US" sz="2400" dirty="0"/>
+              <a:t>VIF values above 10 (or sometimes 5) indicate high multicollinearity. </a:t>
+            </a:r>
+          </a:p>
+          <a:p>
+            <a:pPr marL="0" indent="0">
+              <a:buNone/>
+            </a:pPr>
+            <a:r>
+              <a:rPr lang="en-US" sz="2400" dirty="0"/>
+              <a:t>A VIF &gt;10 (or sometimes &gt;5) indicates problematic multicollinearity.</a:t>
+            </a:r>
+          </a:p>
+          <a:p>
+            <a:endParaRPr lang="en-US" sz="2400" dirty="0"/>
           </a:p>
         </p:txBody>
       </p:sp>
     </p:spTree>
     <p:extLst>
       <p:ext uri="{BB962C8B-B14F-4D97-AF65-F5344CB8AC3E}">
-        <p14:creationId xmlns:p14="http://schemas.microsoft.com/office/powerpoint/2010/main" val="3910887702"/>
+        <p14:creationId xmlns:p14="http://schemas.microsoft.com/office/powerpoint/2010/main" val="3701206727"/>
       </p:ext>
     </p:extLst>
   </p:cSld>
@@ -7418,25 +11342,46 @@
             </a:pPr>
             <a:r>
               <a:rPr lang="en-US" dirty="0"/>
-              <a:t>Supervised machine learning is a type of learning where a model learns from labeled data. The process follows these key steps:</a:t>
-            </a:r>
-          </a:p>
-          <a:p>
+              <a:t>Supervised machine learning is a type of learning where a model learns from labeled data. </a:t>
+            </a:r>
+          </a:p>
+          <a:p>
+            <a:pPr marL="0" indent="0">
+              <a:buNone/>
+            </a:pPr>
             <a:r>
               <a:rPr lang="en-US" dirty="0"/>
-              <a:t>Input Features (X): The model takes input data (features) which represents the information used to make predictions.</a:t>
-            </a:r>
-          </a:p>
-          <a:p>
+              <a:t>The process follows these key steps:</a:t>
+            </a:r>
+          </a:p>
+          <a:p>
+            <a:r>
+              <a:rPr lang="en-US" b="1" dirty="0"/>
+              <a:t>Input Features (X): </a:t>
+            </a:r>
             <a:r>
               <a:rPr lang="en-US" dirty="0"/>
-              <a:t>Prediction Function: The model, with some parameters (θ), processes the input data to generate predictions (Ŷ).</a:t>
-            </a:r>
-          </a:p>
-          <a:p>
+              <a:t>The model takes input data (features) which represents the information used to make predictions.</a:t>
+            </a:r>
+          </a:p>
+          <a:p>
+            <a:r>
+              <a:rPr lang="en-US" b="1" dirty="0"/>
+              <a:t>Prediction Function: </a:t>
+            </a:r>
             <a:r>
               <a:rPr lang="en-US" dirty="0"/>
-              <a:t>Output (Ŷ): This is the model’s prediction based on the input features.</a:t>
+              <a:t>The model, with some parameters (θ), processes the input data to generate predictions (Ŷ).</a:t>
+            </a:r>
+          </a:p>
+          <a:p>
+            <a:r>
+              <a:rPr lang="en-US" b="1" dirty="0"/>
+              <a:t>Output (Ŷ): </a:t>
+            </a:r>
+            <a:r>
+              <a:rPr lang="en-US" dirty="0"/>
+              <a:t>This is the model’s prediction based on the input features.</a:t>
             </a:r>
           </a:p>
         </p:txBody>
@@ -7491,8 +11436,8 @@
         </p:blipFill>
         <p:spPr>
           <a:xfrm>
-            <a:off x="5676108" y="1603091"/>
-            <a:ext cx="5677692" cy="2600688"/>
+            <a:off x="5676107" y="1603090"/>
+            <a:ext cx="6265761" cy="2870055"/>
           </a:xfrm>
           <a:prstGeom prst="rect">
             <a:avLst/>
@@ -7515,7 +11460,7 @@
         </p:nvSpPr>
         <p:spPr>
           <a:xfrm>
-            <a:off x="838199" y="4693298"/>
+            <a:off x="838200" y="4935895"/>
             <a:ext cx="10515600" cy="2034073"/>
           </a:xfrm>
           <a:prstGeom prst="rect">
@@ -7692,14 +11637,22 @@
           </a:lstStyle>
           <a:p>
             <a:r>
+              <a:rPr lang="en-US" b="1" dirty="0"/>
+              <a:t>Cost Function: </a:t>
+            </a:r>
+            <a:r>
               <a:rPr lang="en-US" dirty="0"/>
-              <a:t>Cost Function: The predicted output (Ŷ) is compared to the actual labels (Y) to calculate an error or "cost."</a:t>
-            </a:r>
-          </a:p>
-          <a:p>
+              <a:t>The predicted output (Ŷ) is compared to the actual labels (Y) to calculate an error or "cost."</a:t>
+            </a:r>
+          </a:p>
+          <a:p>
+            <a:r>
+              <a:rPr lang="en-US" b="1" dirty="0"/>
+              <a:t>Optimization: </a:t>
+            </a:r>
             <a:r>
               <a:rPr lang="en-US" dirty="0"/>
-              <a:t>Optimization: The model adjusts its parameters (θ) of the cost function to minimize the error, improving its predictions over time.</a:t>
+              <a:t>The model adjusts its parameters (θ) of the cost function to minimize the error, improving its predictions over time.</a:t>
             </a:r>
           </a:p>
           <a:p>
@@ -9382,15 +13335,6 @@
 </file>
 
 <file path=customXml/item1.xml><?xml version="1.0" encoding="utf-8"?>
-<?mso-contentType ?>
-<FormTemplates xmlns="http://schemas.microsoft.com/sharepoint/v3/contenttype/forms">
-  <Display>DocumentLibraryForm</Display>
-  <Edit>DocumentLibraryForm</Edit>
-  <New>DocumentLibraryForm</New>
-</FormTemplates>
-</file>
-
-<file path=customXml/item2.xml><?xml version="1.0" encoding="utf-8"?>
 <ct:contentTypeSchema xmlns:ct="http://schemas.microsoft.com/office/2006/metadata/contentType" xmlns:ma="http://schemas.microsoft.com/office/2006/metadata/properties/metaAttributes" ct:_="" ma:_="" ma:contentTypeName="Document" ma:contentTypeID="0x010100D30DB0B4DCD4994BA0B53B90F48248FB" ma:contentTypeVersion="17" ma:contentTypeDescription="Create a new document." ma:contentTypeScope="" ma:versionID="89b596077de0219f935a6ab711f2d0ee">
   <xsd:schema xmlns:xsd="http://www.w3.org/2001/XMLSchema" xmlns:xs="http://www.w3.org/2001/XMLSchema" xmlns:p="http://schemas.microsoft.com/office/2006/metadata/properties" xmlns:ns3="5d9e8ea6-d7cf-4c00-b931-0c0027af1451" xmlns:ns4="24b8453d-154c-4c63-97d1-80f7846f6991" targetNamespace="http://schemas.microsoft.com/office/2006/metadata/properties" ma:root="true" ma:fieldsID="cd616adf96839ca32a36dfb6e4534def" ns3:_="" ns4:_="">
     <xsd:import namespace="5d9e8ea6-d7cf-4c00-b931-0c0027af1451"/>
@@ -9637,6 +13581,15 @@
 </ct:contentTypeSchema>
 </file>
 
+<file path=customXml/item2.xml><?xml version="1.0" encoding="utf-8"?>
+<?mso-contentType ?>
+<FormTemplates xmlns="http://schemas.microsoft.com/sharepoint/v3/contenttype/forms">
+  <Display>DocumentLibraryForm</Display>
+  <Edit>DocumentLibraryForm</Edit>
+  <New>DocumentLibraryForm</New>
+</FormTemplates>
+</file>
+
 <file path=customXml/item3.xml><?xml version="1.0" encoding="utf-8"?>
 <p:properties xmlns:p="http://schemas.microsoft.com/office/2006/metadata/properties" xmlns:xsi="http://www.w3.org/2001/XMLSchema-instance" xmlns:pc="http://schemas.microsoft.com/office/infopath/2007/PartnerControls">
   <documentManagement>
@@ -9646,14 +13599,6 @@
 </file>
 
 <file path=customXml/itemProps1.xml><?xml version="1.0" encoding="utf-8"?>
-<ds:datastoreItem xmlns:ds="http://schemas.openxmlformats.org/officeDocument/2006/customXml" ds:itemID="{45A00539-F935-4DAE-994B-29A86868AB4E}">
-  <ds:schemaRefs>
-    <ds:schemaRef ds:uri="http://schemas.microsoft.com/sharepoint/v3/contenttype/forms"/>
-  </ds:schemaRefs>
-</ds:datastoreItem>
-</file>
-
-<file path=customXml/itemProps2.xml><?xml version="1.0" encoding="utf-8"?>
 <ds:datastoreItem xmlns:ds="http://schemas.openxmlformats.org/officeDocument/2006/customXml" ds:itemID="{E49744A2-A4E7-4F10-8EA8-A7278CF8AA73}">
   <ds:schemaRefs>
     <ds:schemaRef ds:uri="http://schemas.microsoft.com/office/2006/metadata/contentType"/>
@@ -9668,6 +13613,14 @@
     <ds:schemaRef ds:uri="http://purl.org/dc/elements/1.1/"/>
     <ds:schemaRef ds:uri="http://purl.org/dc/terms/"/>
     <ds:schemaRef ds:uri="http://schemas.microsoft.com/internal/obd"/>
+  </ds:schemaRefs>
+</ds:datastoreItem>
+</file>
+
+<file path=customXml/itemProps2.xml><?xml version="1.0" encoding="utf-8"?>
+<ds:datastoreItem xmlns:ds="http://schemas.openxmlformats.org/officeDocument/2006/customXml" ds:itemID="{45A00539-F935-4DAE-994B-29A86868AB4E}">
+  <ds:schemaRefs>
+    <ds:schemaRef ds:uri="http://schemas.microsoft.com/sharepoint/v3/contenttype/forms"/>
   </ds:schemaRefs>
 </ds:datastoreItem>
 </file>
